--- a/docs/presentacion/Presentacion_Dizeo_Progreso1_Final.pptx
+++ b/docs/presentacion/Presentacion_Dizeo_Progreso1_Final.pptx
@@ -2,22 +2,22 @@
 <file path=ppt/presentation.xml><?xml version="1.0" encoding="utf-8"?>
 <p:presentation xmlns:p="http://schemas.openxmlformats.org/presentationml/2006/main">
   <p:sldMasterIdLst>
-    <p:sldMasterId xmlns:r="http://schemas.openxmlformats.org/officeDocument/2006/relationships" id="2147483648" r:id="R9ff6617e957f48b6"/>
+    <p:sldMasterId xmlns:r="http://schemas.openxmlformats.org/officeDocument/2006/relationships" id="2147483648" r:id="R251edbabe6af4251"/>
   </p:sldMasterIdLst>
   <p:notesMasterIdLst>
-    <p:notesMasterId xmlns:r="http://schemas.openxmlformats.org/officeDocument/2006/relationships" r:id="R85f5b8780f2e4365"/>
+    <p:notesMasterId xmlns:r="http://schemas.openxmlformats.org/officeDocument/2006/relationships" r:id="Rf7a45326c3b94e34"/>
   </p:notesMasterIdLst>
   <p:sldIdLst>
-    <p:sldId xmlns:r="http://schemas.openxmlformats.org/officeDocument/2006/relationships" id="256" r:id="Rd417eda8f6f74157"/>
-    <p:sldId xmlns:r="http://schemas.openxmlformats.org/officeDocument/2006/relationships" id="257" r:id="R8994d091980d4934"/>
-    <p:sldId xmlns:r="http://schemas.openxmlformats.org/officeDocument/2006/relationships" id="258" r:id="Rc868bad36db04d71"/>
-    <p:sldId xmlns:r="http://schemas.openxmlformats.org/officeDocument/2006/relationships" id="259" r:id="R0e875989dc214ad3"/>
-    <p:sldId xmlns:r="http://schemas.openxmlformats.org/officeDocument/2006/relationships" id="260" r:id="Re28c83825dc04104"/>
-    <p:sldId xmlns:r="http://schemas.openxmlformats.org/officeDocument/2006/relationships" id="261" r:id="Rcb138dff96214630"/>
-    <p:sldId xmlns:r="http://schemas.openxmlformats.org/officeDocument/2006/relationships" id="262" r:id="Rb53154415c114609"/>
-    <p:sldId xmlns:r="http://schemas.openxmlformats.org/officeDocument/2006/relationships" id="263" r:id="Rcd0f9443a668430e"/>
-    <p:sldId xmlns:r="http://schemas.openxmlformats.org/officeDocument/2006/relationships" id="264" r:id="R341ba6cb6c3f4ea7"/>
-    <p:sldId xmlns:r="http://schemas.openxmlformats.org/officeDocument/2006/relationships" id="265" r:id="R4b279ba40bfd4a1a"/>
+    <p:sldId xmlns:r="http://schemas.openxmlformats.org/officeDocument/2006/relationships" id="256" r:id="R58c24a3852434be8"/>
+    <p:sldId xmlns:r="http://schemas.openxmlformats.org/officeDocument/2006/relationships" id="257" r:id="Rf436e5262e3c4ef0"/>
+    <p:sldId xmlns:r="http://schemas.openxmlformats.org/officeDocument/2006/relationships" id="258" r:id="Rabbdc7c570ab4d51"/>
+    <p:sldId xmlns:r="http://schemas.openxmlformats.org/officeDocument/2006/relationships" id="259" r:id="Rd859e27b51cb469c"/>
+    <p:sldId xmlns:r="http://schemas.openxmlformats.org/officeDocument/2006/relationships" id="260" r:id="Rf668be5417bd472e"/>
+    <p:sldId xmlns:r="http://schemas.openxmlformats.org/officeDocument/2006/relationships" id="261" r:id="Rbc16bc05c6d34872"/>
+    <p:sldId xmlns:r="http://schemas.openxmlformats.org/officeDocument/2006/relationships" id="262" r:id="Rc33e3c8fa6454e70"/>
+    <p:sldId xmlns:r="http://schemas.openxmlformats.org/officeDocument/2006/relationships" id="263" r:id="R90d5b7d4a7f84d01"/>
+    <p:sldId xmlns:r="http://schemas.openxmlformats.org/officeDocument/2006/relationships" id="264" r:id="R28bb0e3503474d3b"/>
+    <p:sldId xmlns:r="http://schemas.openxmlformats.org/officeDocument/2006/relationships" id="265" r:id="Rf76e99bb817a415a"/>
   </p:sldIdLst>
   <p:sldSz cx="12192000" cy="6858000"/>
   <p:notesSz cx="6858000" cy="9144000"/>
@@ -451,7 +451,7 @@
           <a:lstStyle xmlns:a="http://schemas.openxmlformats.org/drawingml/2006/main"/>
           <a:p xmlns:a="http://schemas.openxmlformats.org/drawingml/2006/main">
             <a:r>
-              <a:t>Expositor propuesto: Daniel. Tiempo: 25 segundos.</a:t>
+              <a:t>Expositor propuesto: Daniel. Tiempo: 35 segundos.</a:t>
             </a:r>
           </a:p>
           <a:p xmlns:a="http://schemas.openxmlformats.org/drawingml/2006/main">
@@ -461,7 +461,7 @@
           </a:p>
           <a:p xmlns:a="http://schemas.openxmlformats.org/drawingml/2006/main">
             <a:r>
-              <a:t>Presentamos el análisis y diseño de Dizeo. El proyecto organiza la asignación de trabajadores y actividades entre obras. En Progreso 1 delimitamos el problema, definimos módulos y clases y comparamos dos alternativas. La implementación corresponde al siguiente progreso. Falta incorporar al cuarto integrante exigido por la consigna.</a:t>
+              <a:t>Presentamos el análisis y diseño de Dizeo. El proyecto organiza la asignación de trabajadores y actividades entre obras. En Progreso 1 delimitamos el problema, definimos módulos y clases y comparamos dos alternativas. La implementación corresponde al siguiente progreso. El equipo está integrado por Daniel, Esteban y Julián.</a:t>
             </a:r>
           </a:p>
           <a:p xmlns:a="http://schemas.openxmlformats.org/drawingml/2006/main">
@@ -546,7 +546,7 @@
           <a:lstStyle xmlns:a="http://schemas.openxmlformats.org/drawingml/2006/main"/>
           <a:p xmlns:a="http://schemas.openxmlformats.org/drawingml/2006/main">
             <a:r>
-              <a:t>Expositor propuesto: Daniel. Tiempo: 1 minuto y 10 segundos.</a:t>
+              <a:t>Expositor propuesto: Daniel y Esteban. Tiempo: 1 minuto y 10 segundos (Daniel: 40 s; Esteban: 30 s).</a:t>
             </a:r>
           </a:p>
           <a:p xmlns:a="http://schemas.openxmlformats.org/drawingml/2006/main">
@@ -556,7 +556,7 @@
           </a:p>
           <a:p xmlns:a="http://schemas.openxmlformats.org/drawingml/2006/main">
             <a:r>
-              <a:t>El siguiente progreso comenzará con la revisión de clases y responsabilidades. Después implementaremos estructuras y compararemos resultados en datos pequeños antes de integrar interfaz y PostgreSQL. Entre los riesgos están las dobles reservas concurrentes, los índices desactualizados, los ciclos y los traslados omitidos. Los mitigaremos con transacciones, actualización de índices después del commit y validaciones de precedencias y vecinos de agenda. El repositorio inicial de esta entrega contiene README, informe, presentación y UML editable. Las observaciones del docente se conservarán como mejoras obligatorias. Declaramos el apoyo de ChatGPT en análisis, documentos y diseño. El equipo debe revisar, adaptar y comprender el contenido, completar el cuarto integrante y revisar el UML. Duración total propuesta: nueve minutos y treinta segundos.</a:t>
+              <a:t>Daniel explicará el reparto de módulos durante 40 segundos. Esteban explicará los hitos y riesgos durante 30 segundos. El siguiente progreso comenzará con la revisión de clases y responsabilidades. Después implementaremos estructuras y compararemos resultados en datos pequeños antes de integrar interfaz y PostgreSQL. Entre los riesgos están las dobles reservas concurrentes, los índices desactualizados, los ciclos y los traslados omitidos. Los mitigaremos con transacciones, actualización de índices después del commit y validaciones de precedencias y vecinos de agenda. El repositorio inicial de esta entrega contiene README, informe, presentación y UML editable. Las observaciones del docente se conservarán como mejoras obligatorias. Declaramos el apoyo de ChatGPT en análisis, redacción y diseño preliminar. El equipo debe revisar, adaptar y comprender el contenido, revisar el UML entre los tres integrantes. Duración total propuesta: nueve minutos y treinta segundos.</a:t>
             </a:r>
           </a:p>
           <a:p xmlns:a="http://schemas.openxmlformats.org/drawingml/2006/main">
@@ -881,7 +881,7 @@
           </a:p>
           <a:p xmlns:a="http://schemas.openxmlformats.org/drawingml/2006/main">
             <a:r>
-              <a:t>Los cinco módulos se conectan alrededor de la actividad de obra. Obras aporta los compromisos y ubicación. Trabajadores aporta especialidad y jornadas. Actividades define duración, cantidad requerida y precedencias. Planificación reúne estos datos antes de confirmar un equipo. Seguimiento distingue avance informado de avance validado. Las altas, modificaciones y bajas se acompañan de operaciones algorítmicas; no se limita el sistema a CRUD. El reparto es preliminar y requiere completar el cuarto integrante.</a:t>
+              <a:t>Los cinco módulos se conectan alrededor de la actividad de obra. Obras aporta los compromisos y ubicación. Trabajadores aporta especialidad y jornadas. Actividades define duración, cantidad requerida y precedencias. Planificación reúne estos datos antes de confirmar un equipo. Seguimiento distingue avance informado de avance validado. Las altas, modificaciones y bajas se acompañan de operaciones algorítmicas; no se limita el sistema a CRUD. Daniel asume Obras y Seguimiento; Esteban, Trabajadores y Planificación; Julián, Actividades y el análisis de estructuras.</a:t>
             </a:r>
           </a:p>
           <a:p xmlns:a="http://schemas.openxmlformats.org/drawingml/2006/main">
@@ -1061,7 +1061,7 @@
           <a:lstStyle xmlns:a="http://schemas.openxmlformats.org/drawingml/2006/main"/>
           <a:p xmlns:a="http://schemas.openxmlformats.org/drawingml/2006/main">
             <a:r>
-              <a:t>Expositor propuesto: Julián. Tiempo: 1 minuto y 5 segundos.</a:t>
+              <a:t>Expositor propuesto: Julián. Tiempo: 50 segundos.</a:t>
             </a:r>
           </a:p>
           <a:p xmlns:a="http://schemas.openxmlformats.org/drawingml/2006/main">
@@ -1176,7 +1176,7 @@
           <a:lstStyle xmlns:a="http://schemas.openxmlformats.org/drawingml/2006/main"/>
           <a:p xmlns:a="http://schemas.openxmlformats.org/drawingml/2006/main">
             <a:r>
-              <a:t>Expositor propuesto: Cuarto integrante. Tiempo: 1 minuto.</a:t>
+              <a:t>Expositor propuesto: Julián. Tiempo: 1 minuto y 10 segundos.</a:t>
             </a:r>
           </a:p>
           <a:p xmlns:a="http://schemas.openxmlformats.org/drawingml/2006/main">
@@ -1281,7 +1281,7 @@
           <a:lstStyle xmlns:a="http://schemas.openxmlformats.org/drawingml/2006/main"/>
           <a:p xmlns:a="http://schemas.openxmlformats.org/drawingml/2006/main">
             <a:r>
-              <a:t>Expositor propuesto: Cuarto integrante. Tiempo: 1 minuto.</a:t>
+              <a:t>Expositor propuesto: Daniel. Tiempo: 55 segundos.</a:t>
             </a:r>
           </a:p>
           <a:p xmlns:a="http://schemas.openxmlformats.org/drawingml/2006/main">
@@ -3874,12 +3874,12 @@
   </p:cSld>
   <p:clrMap bg1="lt1" tx1="dk1" bg2="lt2" tx2="dk2" accent1="accent1" accent2="accent2" accent3="accent3" accent4="accent4" accent5="accent5" accent6="accent6" hlink="hlink" folHlink="folHlink"/>
   <p:sldLayoutIdLst>
-    <p:sldLayoutId xmlns:r="http://schemas.openxmlformats.org/officeDocument/2006/relationships" id="2147483649" r:id="R7dac46b3faa74b1c"/>
-    <p:sldLayoutId xmlns:r="http://schemas.openxmlformats.org/officeDocument/2006/relationships" id="2147483650" r:id="Rfdf578d74a5e48ac"/>
-    <p:sldLayoutId xmlns:r="http://schemas.openxmlformats.org/officeDocument/2006/relationships" id="2147483651" r:id="R7f48d2e8df48471c"/>
-    <p:sldLayoutId xmlns:r="http://schemas.openxmlformats.org/officeDocument/2006/relationships" id="2147483652" r:id="R00c60c27eb0b43c2"/>
-    <p:sldLayoutId xmlns:r="http://schemas.openxmlformats.org/officeDocument/2006/relationships" id="2147483653" r:id="R367a911570c343b8"/>
-    <p:sldLayoutId xmlns:r="http://schemas.openxmlformats.org/officeDocument/2006/relationships" id="2147483654" r:id="Re588ecb557ef4378"/>
+    <p:sldLayoutId xmlns:r="http://schemas.openxmlformats.org/officeDocument/2006/relationships" id="2147483649" r:id="R36e0ee0cad5c4e89"/>
+    <p:sldLayoutId xmlns:r="http://schemas.openxmlformats.org/officeDocument/2006/relationships" id="2147483650" r:id="R85ce5705cc9145f2"/>
+    <p:sldLayoutId xmlns:r="http://schemas.openxmlformats.org/officeDocument/2006/relationships" id="2147483651" r:id="Rfb7d9b40f4914313"/>
+    <p:sldLayoutId xmlns:r="http://schemas.openxmlformats.org/officeDocument/2006/relationships" id="2147483652" r:id="Rf3c8f243ab234176"/>
+    <p:sldLayoutId xmlns:r="http://schemas.openxmlformats.org/officeDocument/2006/relationships" id="2147483653" r:id="Rd4b034640e0a41cb"/>
+    <p:sldLayoutId xmlns:r="http://schemas.openxmlformats.org/officeDocument/2006/relationships" id="2147483654" r:id="R1d83fce353194659"/>
   </p:sldLayoutIdLst>
   <p:txStyles>
     <p:titleStyle>
@@ -4469,6 +4469,7 @@
               </a:defRPr>
             </a:defPPr>
             <a:lvl1pPr>
+              <a:buNone/>
               <a:defRPr sz="5700" b="1">
                 <a:solidFill>
                   <a:srgbClr val="163447"/>
@@ -4479,6 +4480,7 @@
               </a:defRPr>
             </a:lvl1pPr>
             <a:lvl2pPr>
+              <a:buNone/>
               <a:defRPr sz="5700" b="1">
                 <a:solidFill>
                   <a:srgbClr val="163447"/>
@@ -4489,6 +4491,7 @@
               </a:defRPr>
             </a:lvl2pPr>
             <a:lvl3pPr>
+              <a:buNone/>
               <a:defRPr sz="5700" b="1">
                 <a:solidFill>
                   <a:srgbClr val="163447"/>
@@ -4499,6 +4502,7 @@
               </a:defRPr>
             </a:lvl3pPr>
             <a:lvl4pPr>
+              <a:buNone/>
               <a:defRPr sz="5700" b="1">
                 <a:solidFill>
                   <a:srgbClr val="163447"/>
@@ -4509,6 +4513,7 @@
               </a:defRPr>
             </a:lvl4pPr>
             <a:lvl5pPr>
+              <a:buNone/>
               <a:defRPr sz="5700" b="1">
                 <a:solidFill>
                   <a:srgbClr val="163447"/>
@@ -4519,6 +4524,7 @@
               </a:defRPr>
             </a:lvl5pPr>
             <a:lvl6pPr>
+              <a:buNone/>
               <a:defRPr sz="5700" b="1">
                 <a:solidFill>
                   <a:srgbClr val="163447"/>
@@ -4529,6 +4535,7 @@
               </a:defRPr>
             </a:lvl6pPr>
             <a:lvl7pPr>
+              <a:buNone/>
               <a:defRPr sz="5700" b="1">
                 <a:solidFill>
                   <a:srgbClr val="163447"/>
@@ -4539,6 +4546,7 @@
               </a:defRPr>
             </a:lvl7pPr>
             <a:lvl8pPr>
+              <a:buNone/>
               <a:defRPr sz="5700" b="1">
                 <a:solidFill>
                   <a:srgbClr val="163447"/>
@@ -4549,6 +4557,7 @@
               </a:defRPr>
             </a:lvl8pPr>
             <a:lvl9pPr>
+              <a:buNone/>
               <a:defRPr sz="5700" b="1">
                 <a:solidFill>
                   <a:srgbClr val="163447"/>
@@ -4561,6 +4570,7 @@
           </a:lstStyle>
           <a:p xmlns:a="http://schemas.openxmlformats.org/drawingml/2006/main">
             <a:pPr>
+              <a:buNone/>
               <a:defRPr sz="5700" b="1">
                 <a:solidFill>
                   <a:srgbClr val="163447"/>
@@ -4628,6 +4638,7 @@
               </a:defRPr>
             </a:defPPr>
             <a:lvl1pPr>
+              <a:buNone/>
               <a:defRPr sz="3600" b="1">
                 <a:solidFill>
                   <a:srgbClr val="163447"/>
@@ -4638,6 +4649,7 @@
               </a:defRPr>
             </a:lvl1pPr>
             <a:lvl2pPr>
+              <a:buNone/>
               <a:defRPr sz="3600" b="1">
                 <a:solidFill>
                   <a:srgbClr val="163447"/>
@@ -4648,6 +4660,7 @@
               </a:defRPr>
             </a:lvl2pPr>
             <a:lvl3pPr>
+              <a:buNone/>
               <a:defRPr sz="3600" b="1">
                 <a:solidFill>
                   <a:srgbClr val="163447"/>
@@ -4658,6 +4671,7 @@
               </a:defRPr>
             </a:lvl3pPr>
             <a:lvl4pPr>
+              <a:buNone/>
               <a:defRPr sz="3600" b="1">
                 <a:solidFill>
                   <a:srgbClr val="163447"/>
@@ -4668,6 +4682,7 @@
               </a:defRPr>
             </a:lvl4pPr>
             <a:lvl5pPr>
+              <a:buNone/>
               <a:defRPr sz="3600" b="1">
                 <a:solidFill>
                   <a:srgbClr val="163447"/>
@@ -4678,6 +4693,7 @@
               </a:defRPr>
             </a:lvl5pPr>
             <a:lvl6pPr>
+              <a:buNone/>
               <a:defRPr sz="3600" b="1">
                 <a:solidFill>
                   <a:srgbClr val="163447"/>
@@ -4688,6 +4704,7 @@
               </a:defRPr>
             </a:lvl6pPr>
             <a:lvl7pPr>
+              <a:buNone/>
               <a:defRPr sz="3600" b="1">
                 <a:solidFill>
                   <a:srgbClr val="163447"/>
@@ -4698,6 +4715,7 @@
               </a:defRPr>
             </a:lvl7pPr>
             <a:lvl8pPr>
+              <a:buNone/>
               <a:defRPr sz="3600" b="1">
                 <a:solidFill>
                   <a:srgbClr val="163447"/>
@@ -4708,6 +4726,7 @@
               </a:defRPr>
             </a:lvl8pPr>
             <a:lvl9pPr>
+              <a:buNone/>
               <a:defRPr sz="3600" b="1">
                 <a:solidFill>
                   <a:srgbClr val="163447"/>
@@ -4720,6 +4739,7 @@
           </a:lstStyle>
           <a:p xmlns:a="http://schemas.openxmlformats.org/drawingml/2006/main">
             <a:pPr>
+              <a:buNone/>
               <a:defRPr sz="3600" b="1">
                 <a:solidFill>
                   <a:srgbClr val="163447"/>
@@ -4743,6 +4763,7 @@
           </a:p>
           <a:p xmlns:a="http://schemas.openxmlformats.org/drawingml/2006/main">
             <a:pPr>
+              <a:buNone/>
               <a:defRPr sz="3600" b="1">
                 <a:solidFill>
                   <a:srgbClr val="163447"/>
@@ -4810,6 +4831,7 @@
               </a:defRPr>
             </a:defPPr>
             <a:lvl1pPr>
+              <a:buNone/>
               <a:defRPr sz="2100" b="0">
                 <a:solidFill>
                   <a:srgbClr val="007D87"/>
@@ -4820,6 +4842,7 @@
               </a:defRPr>
             </a:lvl1pPr>
             <a:lvl2pPr>
+              <a:buNone/>
               <a:defRPr sz="2100" b="0">
                 <a:solidFill>
                   <a:srgbClr val="007D87"/>
@@ -4830,6 +4853,7 @@
               </a:defRPr>
             </a:lvl2pPr>
             <a:lvl3pPr>
+              <a:buNone/>
               <a:defRPr sz="2100" b="0">
                 <a:solidFill>
                   <a:srgbClr val="007D87"/>
@@ -4840,6 +4864,7 @@
               </a:defRPr>
             </a:lvl3pPr>
             <a:lvl4pPr>
+              <a:buNone/>
               <a:defRPr sz="2100" b="0">
                 <a:solidFill>
                   <a:srgbClr val="007D87"/>
@@ -4850,6 +4875,7 @@
               </a:defRPr>
             </a:lvl4pPr>
             <a:lvl5pPr>
+              <a:buNone/>
               <a:defRPr sz="2100" b="0">
                 <a:solidFill>
                   <a:srgbClr val="007D87"/>
@@ -4860,6 +4886,7 @@
               </a:defRPr>
             </a:lvl5pPr>
             <a:lvl6pPr>
+              <a:buNone/>
               <a:defRPr sz="2100" b="0">
                 <a:solidFill>
                   <a:srgbClr val="007D87"/>
@@ -4870,6 +4897,7 @@
               </a:defRPr>
             </a:lvl6pPr>
             <a:lvl7pPr>
+              <a:buNone/>
               <a:defRPr sz="2100" b="0">
                 <a:solidFill>
                   <a:srgbClr val="007D87"/>
@@ -4880,6 +4908,7 @@
               </a:defRPr>
             </a:lvl7pPr>
             <a:lvl8pPr>
+              <a:buNone/>
               <a:defRPr sz="2100" b="0">
                 <a:solidFill>
                   <a:srgbClr val="007D87"/>
@@ -4890,6 +4919,7 @@
               </a:defRPr>
             </a:lvl8pPr>
             <a:lvl9pPr>
+              <a:buNone/>
               <a:defRPr sz="2100" b="0">
                 <a:solidFill>
                   <a:srgbClr val="007D87"/>
@@ -4902,6 +4932,7 @@
           </a:lstStyle>
           <a:p xmlns:a="http://schemas.openxmlformats.org/drawingml/2006/main">
             <a:pPr>
+              <a:buNone/>
               <a:defRPr sz="2100" b="0">
                 <a:solidFill>
                   <a:srgbClr val="007D87"/>
@@ -4925,6 +4956,7 @@
           </a:p>
           <a:p xmlns:a="http://schemas.openxmlformats.org/drawingml/2006/main">
             <a:pPr>
+              <a:buNone/>
               <a:defRPr sz="2100" b="0">
                 <a:solidFill>
                   <a:srgbClr val="007D87"/>
@@ -4992,6 +5024,7 @@
               </a:defRPr>
             </a:defPPr>
             <a:lvl1pPr>
+              <a:buNone/>
               <a:defRPr sz="1725" b="0">
                 <a:solidFill>
                   <a:srgbClr val="52636D"/>
@@ -5002,6 +5035,7 @@
               </a:defRPr>
             </a:lvl1pPr>
             <a:lvl2pPr>
+              <a:buNone/>
               <a:defRPr sz="1725" b="0">
                 <a:solidFill>
                   <a:srgbClr val="52636D"/>
@@ -5012,6 +5046,7 @@
               </a:defRPr>
             </a:lvl2pPr>
             <a:lvl3pPr>
+              <a:buNone/>
               <a:defRPr sz="1725" b="0">
                 <a:solidFill>
                   <a:srgbClr val="52636D"/>
@@ -5022,6 +5057,7 @@
               </a:defRPr>
             </a:lvl3pPr>
             <a:lvl4pPr>
+              <a:buNone/>
               <a:defRPr sz="1725" b="0">
                 <a:solidFill>
                   <a:srgbClr val="52636D"/>
@@ -5032,6 +5068,7 @@
               </a:defRPr>
             </a:lvl4pPr>
             <a:lvl5pPr>
+              <a:buNone/>
               <a:defRPr sz="1725" b="0">
                 <a:solidFill>
                   <a:srgbClr val="52636D"/>
@@ -5042,6 +5079,7 @@
               </a:defRPr>
             </a:lvl5pPr>
             <a:lvl6pPr>
+              <a:buNone/>
               <a:defRPr sz="1725" b="0">
                 <a:solidFill>
                   <a:srgbClr val="52636D"/>
@@ -5052,6 +5090,7 @@
               </a:defRPr>
             </a:lvl6pPr>
             <a:lvl7pPr>
+              <a:buNone/>
               <a:defRPr sz="1725" b="0">
                 <a:solidFill>
                   <a:srgbClr val="52636D"/>
@@ -5062,6 +5101,7 @@
               </a:defRPr>
             </a:lvl7pPr>
             <a:lvl8pPr>
+              <a:buNone/>
               <a:defRPr sz="1725" b="0">
                 <a:solidFill>
                   <a:srgbClr val="52636D"/>
@@ -5072,6 +5112,7 @@
               </a:defRPr>
             </a:lvl8pPr>
             <a:lvl9pPr>
+              <a:buNone/>
               <a:defRPr sz="1725" b="0">
                 <a:solidFill>
                   <a:srgbClr val="52636D"/>
@@ -5084,6 +5125,7 @@
           </a:lstStyle>
           <a:p xmlns:a="http://schemas.openxmlformats.org/drawingml/2006/main">
             <a:pPr>
+              <a:buNone/>
               <a:defRPr sz="1725" b="0">
                 <a:solidFill>
                   <a:srgbClr val="52636D"/>
@@ -5103,29 +5145,6 @@
                 <a:cs typeface="DejaVu Sans"/>
               </a:rPr>
               <a:t>Daniel Valarezo   Esteban Figueroa   Julián Jiménez</a:t>
-            </a:r>
-          </a:p>
-          <a:p xmlns:a="http://schemas.openxmlformats.org/drawingml/2006/main">
-            <a:pPr>
-              <a:defRPr sz="1725" b="0">
-                <a:solidFill>
-                  <a:srgbClr val="52636D"/>
-                </a:solidFill>
-                <a:latin typeface="DejaVu Sans"/>
-                <a:ea typeface="DejaVu Sans"/>
-                <a:cs typeface="DejaVu Sans"/>
-              </a:defRPr>
-            </a:pPr>
-            <a:r>
-              <a:rPr sz="1725" b="0">
-                <a:solidFill>
-                  <a:srgbClr val="52636D"/>
-                </a:solidFill>
-                <a:latin typeface="DejaVu Sans"/>
-                <a:ea typeface="DejaVu Sans"/>
-                <a:cs typeface="DejaVu Sans"/>
-              </a:rPr>
-              <a:t>Cuarto integrante por definir</a:t>
             </a:r>
           </a:p>
         </p:txBody>
@@ -5174,6 +5193,7 @@
               </a:defRPr>
             </a:defPPr>
             <a:lvl1pPr>
+              <a:buNone/>
               <a:defRPr sz="1500" b="0">
                 <a:solidFill>
                   <a:srgbClr val="52636D"/>
@@ -5184,6 +5204,7 @@
               </a:defRPr>
             </a:lvl1pPr>
             <a:lvl2pPr>
+              <a:buNone/>
               <a:defRPr sz="1500" b="0">
                 <a:solidFill>
                   <a:srgbClr val="52636D"/>
@@ -5194,6 +5215,7 @@
               </a:defRPr>
             </a:lvl2pPr>
             <a:lvl3pPr>
+              <a:buNone/>
               <a:defRPr sz="1500" b="0">
                 <a:solidFill>
                   <a:srgbClr val="52636D"/>
@@ -5204,6 +5226,7 @@
               </a:defRPr>
             </a:lvl3pPr>
             <a:lvl4pPr>
+              <a:buNone/>
               <a:defRPr sz="1500" b="0">
                 <a:solidFill>
                   <a:srgbClr val="52636D"/>
@@ -5214,6 +5237,7 @@
               </a:defRPr>
             </a:lvl4pPr>
             <a:lvl5pPr>
+              <a:buNone/>
               <a:defRPr sz="1500" b="0">
                 <a:solidFill>
                   <a:srgbClr val="52636D"/>
@@ -5224,6 +5248,7 @@
               </a:defRPr>
             </a:lvl5pPr>
             <a:lvl6pPr>
+              <a:buNone/>
               <a:defRPr sz="1500" b="0">
                 <a:solidFill>
                   <a:srgbClr val="52636D"/>
@@ -5234,6 +5259,7 @@
               </a:defRPr>
             </a:lvl6pPr>
             <a:lvl7pPr>
+              <a:buNone/>
               <a:defRPr sz="1500" b="0">
                 <a:solidFill>
                   <a:srgbClr val="52636D"/>
@@ -5244,6 +5270,7 @@
               </a:defRPr>
             </a:lvl7pPr>
             <a:lvl8pPr>
+              <a:buNone/>
               <a:defRPr sz="1500" b="0">
                 <a:solidFill>
                   <a:srgbClr val="52636D"/>
@@ -5254,6 +5281,7 @@
               </a:defRPr>
             </a:lvl8pPr>
             <a:lvl9pPr>
+              <a:buNone/>
               <a:defRPr sz="1500" b="0">
                 <a:solidFill>
                   <a:srgbClr val="52636D"/>
@@ -5266,6 +5294,7 @@
           </a:lstStyle>
           <a:p xmlns:a="http://schemas.openxmlformats.org/drawingml/2006/main">
             <a:pPr>
+              <a:buNone/>
               <a:defRPr sz="1500" b="0">
                 <a:solidFill>
                   <a:srgbClr val="52636D"/>
@@ -5362,6 +5391,7 @@
               </a:defRPr>
             </a:defPPr>
             <a:lvl1pPr>
+              <a:buNone/>
               <a:defRPr sz="3300" b="1">
                 <a:solidFill>
                   <a:srgbClr val="163447"/>
@@ -5372,6 +5402,7 @@
               </a:defRPr>
             </a:lvl1pPr>
             <a:lvl2pPr>
+              <a:buNone/>
               <a:defRPr sz="3300" b="1">
                 <a:solidFill>
                   <a:srgbClr val="163447"/>
@@ -5382,6 +5413,7 @@
               </a:defRPr>
             </a:lvl2pPr>
             <a:lvl3pPr>
+              <a:buNone/>
               <a:defRPr sz="3300" b="1">
                 <a:solidFill>
                   <a:srgbClr val="163447"/>
@@ -5392,6 +5424,7 @@
               </a:defRPr>
             </a:lvl3pPr>
             <a:lvl4pPr>
+              <a:buNone/>
               <a:defRPr sz="3300" b="1">
                 <a:solidFill>
                   <a:srgbClr val="163447"/>
@@ -5402,6 +5435,7 @@
               </a:defRPr>
             </a:lvl4pPr>
             <a:lvl5pPr>
+              <a:buNone/>
               <a:defRPr sz="3300" b="1">
                 <a:solidFill>
                   <a:srgbClr val="163447"/>
@@ -5412,6 +5446,7 @@
               </a:defRPr>
             </a:lvl5pPr>
             <a:lvl6pPr>
+              <a:buNone/>
               <a:defRPr sz="3300" b="1">
                 <a:solidFill>
                   <a:srgbClr val="163447"/>
@@ -5422,6 +5457,7 @@
               </a:defRPr>
             </a:lvl6pPr>
             <a:lvl7pPr>
+              <a:buNone/>
               <a:defRPr sz="3300" b="1">
                 <a:solidFill>
                   <a:srgbClr val="163447"/>
@@ -5432,6 +5468,7 @@
               </a:defRPr>
             </a:lvl7pPr>
             <a:lvl8pPr>
+              <a:buNone/>
               <a:defRPr sz="3300" b="1">
                 <a:solidFill>
                   <a:srgbClr val="163447"/>
@@ -5442,6 +5479,7 @@
               </a:defRPr>
             </a:lvl8pPr>
             <a:lvl9pPr>
+              <a:buNone/>
               <a:defRPr sz="3300" b="1">
                 <a:solidFill>
                   <a:srgbClr val="163447"/>
@@ -5454,6 +5492,7 @@
           </a:lstStyle>
           <a:p xmlns:a="http://schemas.openxmlformats.org/drawingml/2006/main">
             <a:pPr>
+              <a:buNone/>
               <a:defRPr sz="3300" b="1">
                 <a:solidFill>
                   <a:srgbClr val="163447"/>
@@ -5521,6 +5560,7 @@
               </a:defRPr>
             </a:defPPr>
             <a:lvl1pPr>
+              <a:buNone/>
               <a:defRPr sz="1125" b="0">
                 <a:solidFill>
                   <a:srgbClr val="52636D"/>
@@ -5531,6 +5571,7 @@
               </a:defRPr>
             </a:lvl1pPr>
             <a:lvl2pPr>
+              <a:buNone/>
               <a:defRPr sz="1125" b="0">
                 <a:solidFill>
                   <a:srgbClr val="52636D"/>
@@ -5541,6 +5582,7 @@
               </a:defRPr>
             </a:lvl2pPr>
             <a:lvl3pPr>
+              <a:buNone/>
               <a:defRPr sz="1125" b="0">
                 <a:solidFill>
                   <a:srgbClr val="52636D"/>
@@ -5551,6 +5593,7 @@
               </a:defRPr>
             </a:lvl3pPr>
             <a:lvl4pPr>
+              <a:buNone/>
               <a:defRPr sz="1125" b="0">
                 <a:solidFill>
                   <a:srgbClr val="52636D"/>
@@ -5561,6 +5604,7 @@
               </a:defRPr>
             </a:lvl4pPr>
             <a:lvl5pPr>
+              <a:buNone/>
               <a:defRPr sz="1125" b="0">
                 <a:solidFill>
                   <a:srgbClr val="52636D"/>
@@ -5571,6 +5615,7 @@
               </a:defRPr>
             </a:lvl5pPr>
             <a:lvl6pPr>
+              <a:buNone/>
               <a:defRPr sz="1125" b="0">
                 <a:solidFill>
                   <a:srgbClr val="52636D"/>
@@ -5581,6 +5626,7 @@
               </a:defRPr>
             </a:lvl6pPr>
             <a:lvl7pPr>
+              <a:buNone/>
               <a:defRPr sz="1125" b="0">
                 <a:solidFill>
                   <a:srgbClr val="52636D"/>
@@ -5591,6 +5637,7 @@
               </a:defRPr>
             </a:lvl7pPr>
             <a:lvl8pPr>
+              <a:buNone/>
               <a:defRPr sz="1125" b="0">
                 <a:solidFill>
                   <a:srgbClr val="52636D"/>
@@ -5601,6 +5648,7 @@
               </a:defRPr>
             </a:lvl8pPr>
             <a:lvl9pPr>
+              <a:buNone/>
               <a:defRPr sz="1125" b="0">
                 <a:solidFill>
                   <a:srgbClr val="52636D"/>
@@ -5613,6 +5661,7 @@
           </a:lstStyle>
           <a:p xmlns:a="http://schemas.openxmlformats.org/drawingml/2006/main">
             <a:pPr>
+              <a:buNone/>
               <a:defRPr sz="1125" b="0">
                 <a:solidFill>
                   <a:srgbClr val="52636D"/>
@@ -5680,6 +5729,7 @@
               </a:defRPr>
             </a:defPPr>
             <a:lvl1pPr>
+              <a:buNone/>
               <a:defRPr sz="1125" b="0">
                 <a:solidFill>
                   <a:srgbClr val="52636D"/>
@@ -5690,6 +5740,7 @@
               </a:defRPr>
             </a:lvl1pPr>
             <a:lvl2pPr>
+              <a:buNone/>
               <a:defRPr sz="1125" b="0">
                 <a:solidFill>
                   <a:srgbClr val="52636D"/>
@@ -5700,6 +5751,7 @@
               </a:defRPr>
             </a:lvl2pPr>
             <a:lvl3pPr>
+              <a:buNone/>
               <a:defRPr sz="1125" b="0">
                 <a:solidFill>
                   <a:srgbClr val="52636D"/>
@@ -5710,6 +5762,7 @@
               </a:defRPr>
             </a:lvl3pPr>
             <a:lvl4pPr>
+              <a:buNone/>
               <a:defRPr sz="1125" b="0">
                 <a:solidFill>
                   <a:srgbClr val="52636D"/>
@@ -5720,6 +5773,7 @@
               </a:defRPr>
             </a:lvl4pPr>
             <a:lvl5pPr>
+              <a:buNone/>
               <a:defRPr sz="1125" b="0">
                 <a:solidFill>
                   <a:srgbClr val="52636D"/>
@@ -5730,6 +5784,7 @@
               </a:defRPr>
             </a:lvl5pPr>
             <a:lvl6pPr>
+              <a:buNone/>
               <a:defRPr sz="1125" b="0">
                 <a:solidFill>
                   <a:srgbClr val="52636D"/>
@@ -5740,6 +5795,7 @@
               </a:defRPr>
             </a:lvl6pPr>
             <a:lvl7pPr>
+              <a:buNone/>
               <a:defRPr sz="1125" b="0">
                 <a:solidFill>
                   <a:srgbClr val="52636D"/>
@@ -5750,6 +5806,7 @@
               </a:defRPr>
             </a:lvl7pPr>
             <a:lvl8pPr>
+              <a:buNone/>
               <a:defRPr sz="1125" b="0">
                 <a:solidFill>
                   <a:srgbClr val="52636D"/>
@@ -5760,6 +5817,7 @@
               </a:defRPr>
             </a:lvl8pPr>
             <a:lvl9pPr>
+              <a:buNone/>
               <a:defRPr sz="1125" b="0">
                 <a:solidFill>
                   <a:srgbClr val="52636D"/>
@@ -5772,6 +5830,7 @@
           </a:lstStyle>
           <a:p xmlns:a="http://schemas.openxmlformats.org/drawingml/2006/main">
             <a:pPr>
+              <a:buNone/>
               <a:defRPr sz="1125" b="0">
                 <a:solidFill>
                   <a:srgbClr val="52636D"/>
@@ -5800,7 +5859,7 @@
           <p:cNvPr id="4" name="">
             <a:extLst xmlns:a="http://schemas.openxmlformats.org/drawingml/2006/main">
               <a:ext uri="{FF2B5EF4-FFF2-40B4-BE49-F238E27FC236}">
-                <a16:creationId xmlns:a16="http://schemas.microsoft.com/office/drawing/2014/main" id="{2215802F-49D2-44AF-B7C4-0BDDEFB7204B}"/>
+                <a16:creationId xmlns:a16="http://schemas.microsoft.com/office/drawing/2014/main" id="{B2293756-4384-4EED-9EB3-7B1A8567834A}"/>
               </a:ext>
             </a:extLst>
           </p:cNvPr>
@@ -5809,7 +5868,7 @@
         </p:nvGraphicFramePr>
         <p:xfrm>
           <a:off xmlns:a="http://schemas.openxmlformats.org/drawingml/2006/main" x="609600" y="1428750"/>
-          <a:ext xmlns:a="http://schemas.openxmlformats.org/drawingml/2006/main" cx="10972800" cy="3048000"/>
+          <a:ext xmlns:a="http://schemas.openxmlformats.org/drawingml/2006/main" cx="10972800" cy="2438400"/>
         </p:xfrm>
         <a:graphic xmlns:a="http://schemas.openxmlformats.org/drawingml/2006/main">
           <a:graphicData uri="http://schemas.openxmlformats.org/drawingml/2006/table">
@@ -5976,7 +6035,7 @@
                           <a:ea typeface="DejaVu Sans"/>
                           <a:cs typeface="DejaVu Sans"/>
                         </a:rPr>
-                        <a:t>Obras y seguimiento. Documentación.</a:t>
+                        <a:t>Obras y seguimiento. Formulación y documentación.</a:t>
                       </a:r>
                     </a:p>
                   </a:txBody>
@@ -6060,7 +6119,7 @@
                           <a:ea typeface="DejaVu Sans"/>
                           <a:cs typeface="DejaVu Sans"/>
                         </a:rPr>
-                        <a:t>Trabajadores, disponibilidad y apoyo a persistencia.</a:t>
+                        <a:t>Trabajadores, planificación, asignación y persistencia.</a:t>
                       </a:r>
                     </a:p>
                   </a:txBody>
@@ -6144,7 +6203,7 @@
                           <a:ea typeface="DejaVu Sans"/>
                           <a:cs typeface="DejaVu Sans"/>
                         </a:rPr>
-                        <a:t>Actividades, prioridades y grafo de dependencias.</a:t>
+                        <a:t>Actividades, prioridades, dependencias, UML y comparación.</a:t>
                       </a:r>
                     </a:p>
                   </a:txBody>
@@ -6163,90 +6222,6 @@
                     </a:lnB>
                     <a:solidFill>
                       <a:srgbClr val="FFFFFF"/>
-                    </a:solidFill>
-                  </a:tcPr>
-                </a:tc>
-              </a:tr>
-              <a:tr h="609600">
-                <a:tc>
-                  <a:txBody>
-                    <a:bodyPr wrap="square" lIns="123825" tIns="85725" rIns="123825" bIns="85725">
-                      <a:noAutofit/>
-                    </a:bodyPr>
-                    <a:lstStyle/>
-                    <a:p>
-                      <a:r>
-                        <a:rPr sz="1800" b="0">
-                          <a:solidFill>
-                            <a:srgbClr val="163447"/>
-                          </a:solidFill>
-                          <a:latin typeface="DejaVu Sans"/>
-                          <a:ea typeface="DejaVu Sans"/>
-                          <a:cs typeface="DejaVu Sans"/>
-                        </a:rPr>
-                        <a:t>Cuarto integrante por definir</a:t>
-                      </a:r>
-                    </a:p>
-                  </a:txBody>
-                  <a:tcPr marL="91440" marR="91440" marT="45720" marB="45720" anchor="ctr">
-                    <a:lnL w="9525">
-                      <a:solidFill>
-                        <a:srgbClr val="B9CCD1"/>
-                      </a:solidFill>
-                      <a:prstDash val="solid"/>
-                    </a:lnL>
-                    <a:lnR w="9525">
-                      <a:solidFill>
-                        <a:srgbClr val="B9CCD1"/>
-                      </a:solidFill>
-                      <a:prstDash val="solid"/>
-                    </a:lnR>
-                    <a:lnB w="9525">
-                      <a:solidFill>
-                        <a:srgbClr val="B9CCD1"/>
-                      </a:solidFill>
-                      <a:prstDash val="solid"/>
-                    </a:lnB>
-                    <a:solidFill>
-                      <a:srgbClr val="EDF4F5"/>
-                    </a:solidFill>
-                  </a:tcPr>
-                </a:tc>
-                <a:tc>
-                  <a:txBody>
-                    <a:bodyPr wrap="square" lIns="123825" tIns="85725" rIns="123825" bIns="85725">
-                      <a:noAutofit/>
-                    </a:bodyPr>
-                    <a:lstStyle/>
-                    <a:p>
-                      <a:r>
-                        <a:rPr sz="1800" b="0">
-                          <a:solidFill>
-                            <a:srgbClr val="163447"/>
-                          </a:solidFill>
-                          <a:latin typeface="DejaVu Sans"/>
-                          <a:ea typeface="DejaVu Sans"/>
-                          <a:cs typeface="DejaVu Sans"/>
-                        </a:rPr>
-                        <a:t>Planificación, asignación e integración del servicio.</a:t>
-                      </a:r>
-                    </a:p>
-                  </a:txBody>
-                  <a:tcPr marL="91440" marR="91440" marT="45720" marB="45720" anchor="ctr">
-                    <a:lnR w="9525">
-                      <a:solidFill>
-                        <a:srgbClr val="B9CCD1"/>
-                      </a:solidFill>
-                      <a:prstDash val="solid"/>
-                    </a:lnR>
-                    <a:lnB w="9525">
-                      <a:solidFill>
-                        <a:srgbClr val="B9CCD1"/>
-                      </a:solidFill>
-                      <a:prstDash val="solid"/>
-                    </a:lnB>
-                    <a:solidFill>
-                      <a:srgbClr val="EDF4F5"/>
                     </a:solidFill>
                   </a:tcPr>
                 </a:tc>
@@ -6299,6 +6274,7 @@
               </a:defRPr>
             </a:defPPr>
             <a:lvl1pPr>
+              <a:buNone/>
               <a:defRPr sz="2100" b="1">
                 <a:solidFill>
                   <a:srgbClr val="007D87"/>
@@ -6309,6 +6285,7 @@
               </a:defRPr>
             </a:lvl1pPr>
             <a:lvl2pPr>
+              <a:buNone/>
               <a:defRPr sz="2100" b="1">
                 <a:solidFill>
                   <a:srgbClr val="007D87"/>
@@ -6319,6 +6296,7 @@
               </a:defRPr>
             </a:lvl2pPr>
             <a:lvl3pPr>
+              <a:buNone/>
               <a:defRPr sz="2100" b="1">
                 <a:solidFill>
                   <a:srgbClr val="007D87"/>
@@ -6329,6 +6307,7 @@
               </a:defRPr>
             </a:lvl3pPr>
             <a:lvl4pPr>
+              <a:buNone/>
               <a:defRPr sz="2100" b="1">
                 <a:solidFill>
                   <a:srgbClr val="007D87"/>
@@ -6339,6 +6318,7 @@
               </a:defRPr>
             </a:lvl4pPr>
             <a:lvl5pPr>
+              <a:buNone/>
               <a:defRPr sz="2100" b="1">
                 <a:solidFill>
                   <a:srgbClr val="007D87"/>
@@ -6349,6 +6329,7 @@
               </a:defRPr>
             </a:lvl5pPr>
             <a:lvl6pPr>
+              <a:buNone/>
               <a:defRPr sz="2100" b="1">
                 <a:solidFill>
                   <a:srgbClr val="007D87"/>
@@ -6359,6 +6340,7 @@
               </a:defRPr>
             </a:lvl6pPr>
             <a:lvl7pPr>
+              <a:buNone/>
               <a:defRPr sz="2100" b="1">
                 <a:solidFill>
                   <a:srgbClr val="007D87"/>
@@ -6369,6 +6351,7 @@
               </a:defRPr>
             </a:lvl7pPr>
             <a:lvl8pPr>
+              <a:buNone/>
               <a:defRPr sz="2100" b="1">
                 <a:solidFill>
                   <a:srgbClr val="007D87"/>
@@ -6379,6 +6362,7 @@
               </a:defRPr>
             </a:lvl8pPr>
             <a:lvl9pPr>
+              <a:buNone/>
               <a:defRPr sz="2100" b="1">
                 <a:solidFill>
                   <a:srgbClr val="007D87"/>
@@ -6391,6 +6375,7 @@
           </a:lstStyle>
           <a:p xmlns:a="http://schemas.openxmlformats.org/drawingml/2006/main">
             <a:pPr>
+              <a:buNone/>
               <a:defRPr sz="2100" b="1">
                 <a:solidFill>
                   <a:srgbClr val="007D87"/>
@@ -6458,6 +6443,7 @@
               </a:defRPr>
             </a:defPPr>
             <a:lvl1pPr>
+              <a:buNone/>
               <a:defRPr sz="2025" b="0">
                 <a:solidFill>
                   <a:srgbClr val="163447"/>
@@ -6468,6 +6454,7 @@
               </a:defRPr>
             </a:lvl1pPr>
             <a:lvl2pPr>
+              <a:buNone/>
               <a:defRPr sz="2025" b="0">
                 <a:solidFill>
                   <a:srgbClr val="163447"/>
@@ -6478,6 +6465,7 @@
               </a:defRPr>
             </a:lvl2pPr>
             <a:lvl3pPr>
+              <a:buNone/>
               <a:defRPr sz="2025" b="0">
                 <a:solidFill>
                   <a:srgbClr val="163447"/>
@@ -6488,6 +6476,7 @@
               </a:defRPr>
             </a:lvl3pPr>
             <a:lvl4pPr>
+              <a:buNone/>
               <a:defRPr sz="2025" b="0">
                 <a:solidFill>
                   <a:srgbClr val="163447"/>
@@ -6498,6 +6487,7 @@
               </a:defRPr>
             </a:lvl4pPr>
             <a:lvl5pPr>
+              <a:buNone/>
               <a:defRPr sz="2025" b="0">
                 <a:solidFill>
                   <a:srgbClr val="163447"/>
@@ -6508,6 +6498,7 @@
               </a:defRPr>
             </a:lvl5pPr>
             <a:lvl6pPr>
+              <a:buNone/>
               <a:defRPr sz="2025" b="0">
                 <a:solidFill>
                   <a:srgbClr val="163447"/>
@@ -6518,6 +6509,7 @@
               </a:defRPr>
             </a:lvl6pPr>
             <a:lvl7pPr>
+              <a:buNone/>
               <a:defRPr sz="2025" b="0">
                 <a:solidFill>
                   <a:srgbClr val="163447"/>
@@ -6528,6 +6520,7 @@
               </a:defRPr>
             </a:lvl7pPr>
             <a:lvl8pPr>
+              <a:buNone/>
               <a:defRPr sz="2025" b="0">
                 <a:solidFill>
                   <a:srgbClr val="163447"/>
@@ -6538,6 +6531,7 @@
               </a:defRPr>
             </a:lvl8pPr>
             <a:lvl9pPr>
+              <a:buNone/>
               <a:defRPr sz="2025" b="0">
                 <a:solidFill>
                   <a:srgbClr val="163447"/>
@@ -6550,6 +6544,7 @@
           </a:lstStyle>
           <a:p xmlns:a="http://schemas.openxmlformats.org/drawingml/2006/main">
             <a:pPr>
+              <a:buNone/>
               <a:defRPr sz="2025" b="0">
                 <a:solidFill>
                   <a:srgbClr val="163447"/>
@@ -6617,6 +6612,7 @@
               </a:defRPr>
             </a:defPPr>
             <a:lvl1pPr>
+              <a:buNone/>
               <a:defRPr sz="1350" b="0">
                 <a:solidFill>
                   <a:srgbClr val="52636D"/>
@@ -6627,6 +6623,7 @@
               </a:defRPr>
             </a:lvl1pPr>
             <a:lvl2pPr>
+              <a:buNone/>
               <a:defRPr sz="1350" b="0">
                 <a:solidFill>
                   <a:srgbClr val="52636D"/>
@@ -6637,6 +6634,7 @@
               </a:defRPr>
             </a:lvl2pPr>
             <a:lvl3pPr>
+              <a:buNone/>
               <a:defRPr sz="1350" b="0">
                 <a:solidFill>
                   <a:srgbClr val="52636D"/>
@@ -6647,6 +6645,7 @@
               </a:defRPr>
             </a:lvl3pPr>
             <a:lvl4pPr>
+              <a:buNone/>
               <a:defRPr sz="1350" b="0">
                 <a:solidFill>
                   <a:srgbClr val="52636D"/>
@@ -6657,6 +6656,7 @@
               </a:defRPr>
             </a:lvl4pPr>
             <a:lvl5pPr>
+              <a:buNone/>
               <a:defRPr sz="1350" b="0">
                 <a:solidFill>
                   <a:srgbClr val="52636D"/>
@@ -6667,6 +6667,7 @@
               </a:defRPr>
             </a:lvl5pPr>
             <a:lvl6pPr>
+              <a:buNone/>
               <a:defRPr sz="1350" b="0">
                 <a:solidFill>
                   <a:srgbClr val="52636D"/>
@@ -6677,6 +6678,7 @@
               </a:defRPr>
             </a:lvl6pPr>
             <a:lvl7pPr>
+              <a:buNone/>
               <a:defRPr sz="1350" b="0">
                 <a:solidFill>
                   <a:srgbClr val="52636D"/>
@@ -6687,6 +6689,7 @@
               </a:defRPr>
             </a:lvl7pPr>
             <a:lvl8pPr>
+              <a:buNone/>
               <a:defRPr sz="1350" b="0">
                 <a:solidFill>
                   <a:srgbClr val="52636D"/>
@@ -6697,6 +6700,7 @@
               </a:defRPr>
             </a:lvl8pPr>
             <a:lvl9pPr>
+              <a:buNone/>
               <a:defRPr sz="1350" b="0">
                 <a:solidFill>
                   <a:srgbClr val="52636D"/>
@@ -6709,6 +6713,7 @@
           </a:lstStyle>
           <a:p xmlns:a="http://schemas.openxmlformats.org/drawingml/2006/main">
             <a:pPr>
+              <a:buNone/>
               <a:defRPr sz="1350" b="0">
                 <a:solidFill>
                   <a:srgbClr val="52636D"/>
@@ -6805,6 +6810,7 @@
               </a:defRPr>
             </a:defPPr>
             <a:lvl1pPr>
+              <a:buNone/>
               <a:defRPr sz="3300" b="1">
                 <a:solidFill>
                   <a:srgbClr val="163447"/>
@@ -6815,6 +6821,7 @@
               </a:defRPr>
             </a:lvl1pPr>
             <a:lvl2pPr>
+              <a:buNone/>
               <a:defRPr sz="3300" b="1">
                 <a:solidFill>
                   <a:srgbClr val="163447"/>
@@ -6825,6 +6832,7 @@
               </a:defRPr>
             </a:lvl2pPr>
             <a:lvl3pPr>
+              <a:buNone/>
               <a:defRPr sz="3300" b="1">
                 <a:solidFill>
                   <a:srgbClr val="163447"/>
@@ -6835,6 +6843,7 @@
               </a:defRPr>
             </a:lvl3pPr>
             <a:lvl4pPr>
+              <a:buNone/>
               <a:defRPr sz="3300" b="1">
                 <a:solidFill>
                   <a:srgbClr val="163447"/>
@@ -6845,6 +6854,7 @@
               </a:defRPr>
             </a:lvl4pPr>
             <a:lvl5pPr>
+              <a:buNone/>
               <a:defRPr sz="3300" b="1">
                 <a:solidFill>
                   <a:srgbClr val="163447"/>
@@ -6855,6 +6865,7 @@
               </a:defRPr>
             </a:lvl5pPr>
             <a:lvl6pPr>
+              <a:buNone/>
               <a:defRPr sz="3300" b="1">
                 <a:solidFill>
                   <a:srgbClr val="163447"/>
@@ -6865,6 +6876,7 @@
               </a:defRPr>
             </a:lvl6pPr>
             <a:lvl7pPr>
+              <a:buNone/>
               <a:defRPr sz="3300" b="1">
                 <a:solidFill>
                   <a:srgbClr val="163447"/>
@@ -6875,6 +6887,7 @@
               </a:defRPr>
             </a:lvl7pPr>
             <a:lvl8pPr>
+              <a:buNone/>
               <a:defRPr sz="3300" b="1">
                 <a:solidFill>
                   <a:srgbClr val="163447"/>
@@ -6885,6 +6898,7 @@
               </a:defRPr>
             </a:lvl8pPr>
             <a:lvl9pPr>
+              <a:buNone/>
               <a:defRPr sz="3300" b="1">
                 <a:solidFill>
                   <a:srgbClr val="163447"/>
@@ -6897,6 +6911,7 @@
           </a:lstStyle>
           <a:p xmlns:a="http://schemas.openxmlformats.org/drawingml/2006/main">
             <a:pPr>
+              <a:buNone/>
               <a:defRPr sz="3300" b="1">
                 <a:solidFill>
                   <a:srgbClr val="163447"/>
@@ -6964,6 +6979,7 @@
               </a:defRPr>
             </a:defPPr>
             <a:lvl1pPr>
+              <a:buNone/>
               <a:defRPr sz="1125" b="0">
                 <a:solidFill>
                   <a:srgbClr val="52636D"/>
@@ -6974,6 +6990,7 @@
               </a:defRPr>
             </a:lvl1pPr>
             <a:lvl2pPr>
+              <a:buNone/>
               <a:defRPr sz="1125" b="0">
                 <a:solidFill>
                   <a:srgbClr val="52636D"/>
@@ -6984,6 +7001,7 @@
               </a:defRPr>
             </a:lvl2pPr>
             <a:lvl3pPr>
+              <a:buNone/>
               <a:defRPr sz="1125" b="0">
                 <a:solidFill>
                   <a:srgbClr val="52636D"/>
@@ -6994,6 +7012,7 @@
               </a:defRPr>
             </a:lvl3pPr>
             <a:lvl4pPr>
+              <a:buNone/>
               <a:defRPr sz="1125" b="0">
                 <a:solidFill>
                   <a:srgbClr val="52636D"/>
@@ -7004,6 +7023,7 @@
               </a:defRPr>
             </a:lvl4pPr>
             <a:lvl5pPr>
+              <a:buNone/>
               <a:defRPr sz="1125" b="0">
                 <a:solidFill>
                   <a:srgbClr val="52636D"/>
@@ -7014,6 +7034,7 @@
               </a:defRPr>
             </a:lvl5pPr>
             <a:lvl6pPr>
+              <a:buNone/>
               <a:defRPr sz="1125" b="0">
                 <a:solidFill>
                   <a:srgbClr val="52636D"/>
@@ -7024,6 +7045,7 @@
               </a:defRPr>
             </a:lvl6pPr>
             <a:lvl7pPr>
+              <a:buNone/>
               <a:defRPr sz="1125" b="0">
                 <a:solidFill>
                   <a:srgbClr val="52636D"/>
@@ -7034,6 +7056,7 @@
               </a:defRPr>
             </a:lvl7pPr>
             <a:lvl8pPr>
+              <a:buNone/>
               <a:defRPr sz="1125" b="0">
                 <a:solidFill>
                   <a:srgbClr val="52636D"/>
@@ -7044,6 +7067,7 @@
               </a:defRPr>
             </a:lvl8pPr>
             <a:lvl9pPr>
+              <a:buNone/>
               <a:defRPr sz="1125" b="0">
                 <a:solidFill>
                   <a:srgbClr val="52636D"/>
@@ -7056,6 +7080,7 @@
           </a:lstStyle>
           <a:p xmlns:a="http://schemas.openxmlformats.org/drawingml/2006/main">
             <a:pPr>
+              <a:buNone/>
               <a:defRPr sz="1125" b="0">
                 <a:solidFill>
                   <a:srgbClr val="52636D"/>
@@ -7123,6 +7148,7 @@
               </a:defRPr>
             </a:defPPr>
             <a:lvl1pPr>
+              <a:buNone/>
               <a:defRPr sz="1125" b="0">
                 <a:solidFill>
                   <a:srgbClr val="52636D"/>
@@ -7133,6 +7159,7 @@
               </a:defRPr>
             </a:lvl1pPr>
             <a:lvl2pPr>
+              <a:buNone/>
               <a:defRPr sz="1125" b="0">
                 <a:solidFill>
                   <a:srgbClr val="52636D"/>
@@ -7143,6 +7170,7 @@
               </a:defRPr>
             </a:lvl2pPr>
             <a:lvl3pPr>
+              <a:buNone/>
               <a:defRPr sz="1125" b="0">
                 <a:solidFill>
                   <a:srgbClr val="52636D"/>
@@ -7153,6 +7181,7 @@
               </a:defRPr>
             </a:lvl3pPr>
             <a:lvl4pPr>
+              <a:buNone/>
               <a:defRPr sz="1125" b="0">
                 <a:solidFill>
                   <a:srgbClr val="52636D"/>
@@ -7163,6 +7192,7 @@
               </a:defRPr>
             </a:lvl4pPr>
             <a:lvl5pPr>
+              <a:buNone/>
               <a:defRPr sz="1125" b="0">
                 <a:solidFill>
                   <a:srgbClr val="52636D"/>
@@ -7173,6 +7203,7 @@
               </a:defRPr>
             </a:lvl5pPr>
             <a:lvl6pPr>
+              <a:buNone/>
               <a:defRPr sz="1125" b="0">
                 <a:solidFill>
                   <a:srgbClr val="52636D"/>
@@ -7183,6 +7214,7 @@
               </a:defRPr>
             </a:lvl6pPr>
             <a:lvl7pPr>
+              <a:buNone/>
               <a:defRPr sz="1125" b="0">
                 <a:solidFill>
                   <a:srgbClr val="52636D"/>
@@ -7193,6 +7225,7 @@
               </a:defRPr>
             </a:lvl7pPr>
             <a:lvl8pPr>
+              <a:buNone/>
               <a:defRPr sz="1125" b="0">
                 <a:solidFill>
                   <a:srgbClr val="52636D"/>
@@ -7203,6 +7236,7 @@
               </a:defRPr>
             </a:lvl8pPr>
             <a:lvl9pPr>
+              <a:buNone/>
               <a:defRPr sz="1125" b="0">
                 <a:solidFill>
                   <a:srgbClr val="52636D"/>
@@ -7215,6 +7249,7 @@
           </a:lstStyle>
           <a:p xmlns:a="http://schemas.openxmlformats.org/drawingml/2006/main">
             <a:pPr>
+              <a:buNone/>
               <a:defRPr sz="1125" b="0">
                 <a:solidFill>
                   <a:srgbClr val="52636D"/>
@@ -7282,6 +7317,7 @@
               </a:defRPr>
             </a:defPPr>
             <a:lvl1pPr>
+              <a:buNone/>
               <a:defRPr sz="2250" b="1">
                 <a:solidFill>
                   <a:srgbClr val="007D87"/>
@@ -7292,6 +7328,7 @@
               </a:defRPr>
             </a:lvl1pPr>
             <a:lvl2pPr>
+              <a:buNone/>
               <a:defRPr sz="2250" b="1">
                 <a:solidFill>
                   <a:srgbClr val="007D87"/>
@@ -7302,6 +7339,7 @@
               </a:defRPr>
             </a:lvl2pPr>
             <a:lvl3pPr>
+              <a:buNone/>
               <a:defRPr sz="2250" b="1">
                 <a:solidFill>
                   <a:srgbClr val="007D87"/>
@@ -7312,6 +7350,7 @@
               </a:defRPr>
             </a:lvl3pPr>
             <a:lvl4pPr>
+              <a:buNone/>
               <a:defRPr sz="2250" b="1">
                 <a:solidFill>
                   <a:srgbClr val="007D87"/>
@@ -7322,6 +7361,7 @@
               </a:defRPr>
             </a:lvl4pPr>
             <a:lvl5pPr>
+              <a:buNone/>
               <a:defRPr sz="2250" b="1">
                 <a:solidFill>
                   <a:srgbClr val="007D87"/>
@@ -7332,6 +7372,7 @@
               </a:defRPr>
             </a:lvl5pPr>
             <a:lvl6pPr>
+              <a:buNone/>
               <a:defRPr sz="2250" b="1">
                 <a:solidFill>
                   <a:srgbClr val="007D87"/>
@@ -7342,6 +7383,7 @@
               </a:defRPr>
             </a:lvl6pPr>
             <a:lvl7pPr>
+              <a:buNone/>
               <a:defRPr sz="2250" b="1">
                 <a:solidFill>
                   <a:srgbClr val="007D87"/>
@@ -7352,6 +7394,7 @@
               </a:defRPr>
             </a:lvl7pPr>
             <a:lvl8pPr>
+              <a:buNone/>
               <a:defRPr sz="2250" b="1">
                 <a:solidFill>
                   <a:srgbClr val="007D87"/>
@@ -7362,6 +7405,7 @@
               </a:defRPr>
             </a:lvl8pPr>
             <a:lvl9pPr>
+              <a:buNone/>
               <a:defRPr sz="2250" b="1">
                 <a:solidFill>
                   <a:srgbClr val="007D87"/>
@@ -7374,6 +7418,7 @@
           </a:lstStyle>
           <a:p xmlns:a="http://schemas.openxmlformats.org/drawingml/2006/main">
             <a:pPr>
+              <a:buNone/>
               <a:defRPr sz="2250" b="1">
                 <a:solidFill>
                   <a:srgbClr val="007D87"/>
@@ -7441,6 +7486,7 @@
               </a:defRPr>
             </a:defPPr>
             <a:lvl1pPr>
+              <a:buNone/>
               <a:defRPr sz="2400" b="0">
                 <a:solidFill>
                   <a:srgbClr val="163447"/>
@@ -7451,6 +7497,7 @@
               </a:defRPr>
             </a:lvl1pPr>
             <a:lvl2pPr>
+              <a:buNone/>
               <a:defRPr sz="2400" b="0">
                 <a:solidFill>
                   <a:srgbClr val="163447"/>
@@ -7461,6 +7508,7 @@
               </a:defRPr>
             </a:lvl2pPr>
             <a:lvl3pPr>
+              <a:buNone/>
               <a:defRPr sz="2400" b="0">
                 <a:solidFill>
                   <a:srgbClr val="163447"/>
@@ -7471,6 +7519,7 @@
               </a:defRPr>
             </a:lvl3pPr>
             <a:lvl4pPr>
+              <a:buNone/>
               <a:defRPr sz="2400" b="0">
                 <a:solidFill>
                   <a:srgbClr val="163447"/>
@@ -7481,6 +7530,7 @@
               </a:defRPr>
             </a:lvl4pPr>
             <a:lvl5pPr>
+              <a:buNone/>
               <a:defRPr sz="2400" b="0">
                 <a:solidFill>
                   <a:srgbClr val="163447"/>
@@ -7491,6 +7541,7 @@
               </a:defRPr>
             </a:lvl5pPr>
             <a:lvl6pPr>
+              <a:buNone/>
               <a:defRPr sz="2400" b="0">
                 <a:solidFill>
                   <a:srgbClr val="163447"/>
@@ -7501,6 +7552,7 @@
               </a:defRPr>
             </a:lvl6pPr>
             <a:lvl7pPr>
+              <a:buNone/>
               <a:defRPr sz="2400" b="0">
                 <a:solidFill>
                   <a:srgbClr val="163447"/>
@@ -7511,6 +7563,7 @@
               </a:defRPr>
             </a:lvl7pPr>
             <a:lvl8pPr>
+              <a:buNone/>
               <a:defRPr sz="2400" b="0">
                 <a:solidFill>
                   <a:srgbClr val="163447"/>
@@ -7521,6 +7574,7 @@
               </a:defRPr>
             </a:lvl8pPr>
             <a:lvl9pPr>
+              <a:buNone/>
               <a:defRPr sz="2400" b="0">
                 <a:solidFill>
                   <a:srgbClr val="163447"/>
@@ -7533,6 +7587,7 @@
           </a:lstStyle>
           <a:p xmlns:a="http://schemas.openxmlformats.org/drawingml/2006/main">
             <a:pPr>
+              <a:buNone/>
               <a:defRPr sz="2400" b="0">
                 <a:solidFill>
                   <a:srgbClr val="163447"/>
@@ -7600,6 +7655,7 @@
               </a:defRPr>
             </a:defPPr>
             <a:lvl1pPr>
+              <a:buNone/>
               <a:defRPr sz="2250" b="1">
                 <a:solidFill>
                   <a:srgbClr val="007D87"/>
@@ -7610,6 +7666,7 @@
               </a:defRPr>
             </a:lvl1pPr>
             <a:lvl2pPr>
+              <a:buNone/>
               <a:defRPr sz="2250" b="1">
                 <a:solidFill>
                   <a:srgbClr val="007D87"/>
@@ -7620,6 +7677,7 @@
               </a:defRPr>
             </a:lvl2pPr>
             <a:lvl3pPr>
+              <a:buNone/>
               <a:defRPr sz="2250" b="1">
                 <a:solidFill>
                   <a:srgbClr val="007D87"/>
@@ -7630,6 +7688,7 @@
               </a:defRPr>
             </a:lvl3pPr>
             <a:lvl4pPr>
+              <a:buNone/>
               <a:defRPr sz="2250" b="1">
                 <a:solidFill>
                   <a:srgbClr val="007D87"/>
@@ -7640,6 +7699,7 @@
               </a:defRPr>
             </a:lvl4pPr>
             <a:lvl5pPr>
+              <a:buNone/>
               <a:defRPr sz="2250" b="1">
                 <a:solidFill>
                   <a:srgbClr val="007D87"/>
@@ -7650,6 +7710,7 @@
               </a:defRPr>
             </a:lvl5pPr>
             <a:lvl6pPr>
+              <a:buNone/>
               <a:defRPr sz="2250" b="1">
                 <a:solidFill>
                   <a:srgbClr val="007D87"/>
@@ -7660,6 +7721,7 @@
               </a:defRPr>
             </a:lvl6pPr>
             <a:lvl7pPr>
+              <a:buNone/>
               <a:defRPr sz="2250" b="1">
                 <a:solidFill>
                   <a:srgbClr val="007D87"/>
@@ -7670,6 +7732,7 @@
               </a:defRPr>
             </a:lvl7pPr>
             <a:lvl8pPr>
+              <a:buNone/>
               <a:defRPr sz="2250" b="1">
                 <a:solidFill>
                   <a:srgbClr val="007D87"/>
@@ -7680,6 +7743,7 @@
               </a:defRPr>
             </a:lvl8pPr>
             <a:lvl9pPr>
+              <a:buNone/>
               <a:defRPr sz="2250" b="1">
                 <a:solidFill>
                   <a:srgbClr val="007D87"/>
@@ -7692,6 +7756,7 @@
           </a:lstStyle>
           <a:p xmlns:a="http://schemas.openxmlformats.org/drawingml/2006/main">
             <a:pPr>
+              <a:buNone/>
               <a:defRPr sz="2250" b="1">
                 <a:solidFill>
                   <a:srgbClr val="007D87"/>
@@ -7759,6 +7824,7 @@
               </a:defRPr>
             </a:defPPr>
             <a:lvl1pPr>
+              <a:buNone/>
               <a:defRPr sz="2250" b="0">
                 <a:solidFill>
                   <a:srgbClr val="163447"/>
@@ -7769,6 +7835,7 @@
               </a:defRPr>
             </a:lvl1pPr>
             <a:lvl2pPr>
+              <a:buNone/>
               <a:defRPr sz="2250" b="0">
                 <a:solidFill>
                   <a:srgbClr val="163447"/>
@@ -7779,6 +7846,7 @@
               </a:defRPr>
             </a:lvl2pPr>
             <a:lvl3pPr>
+              <a:buNone/>
               <a:defRPr sz="2250" b="0">
                 <a:solidFill>
                   <a:srgbClr val="163447"/>
@@ -7789,6 +7857,7 @@
               </a:defRPr>
             </a:lvl3pPr>
             <a:lvl4pPr>
+              <a:buNone/>
               <a:defRPr sz="2250" b="0">
                 <a:solidFill>
                   <a:srgbClr val="163447"/>
@@ -7799,6 +7868,7 @@
               </a:defRPr>
             </a:lvl4pPr>
             <a:lvl5pPr>
+              <a:buNone/>
               <a:defRPr sz="2250" b="0">
                 <a:solidFill>
                   <a:srgbClr val="163447"/>
@@ -7809,6 +7879,7 @@
               </a:defRPr>
             </a:lvl5pPr>
             <a:lvl6pPr>
+              <a:buNone/>
               <a:defRPr sz="2250" b="0">
                 <a:solidFill>
                   <a:srgbClr val="163447"/>
@@ -7819,6 +7890,7 @@
               </a:defRPr>
             </a:lvl6pPr>
             <a:lvl7pPr>
+              <a:buNone/>
               <a:defRPr sz="2250" b="0">
                 <a:solidFill>
                   <a:srgbClr val="163447"/>
@@ -7829,6 +7901,7 @@
               </a:defRPr>
             </a:lvl7pPr>
             <a:lvl8pPr>
+              <a:buNone/>
               <a:defRPr sz="2250" b="0">
                 <a:solidFill>
                   <a:srgbClr val="163447"/>
@@ -7839,6 +7912,7 @@
               </a:defRPr>
             </a:lvl8pPr>
             <a:lvl9pPr>
+              <a:buNone/>
               <a:defRPr sz="2250" b="0">
                 <a:solidFill>
                   <a:srgbClr val="163447"/>
@@ -7851,6 +7925,7 @@
           </a:lstStyle>
           <a:p xmlns:a="http://schemas.openxmlformats.org/drawingml/2006/main">
             <a:pPr>
+              <a:buNone/>
               <a:defRPr sz="2250" b="0">
                 <a:solidFill>
                   <a:srgbClr val="163447"/>
@@ -7918,6 +7993,7 @@
               </a:defRPr>
             </a:defPPr>
             <a:lvl1pPr>
+              <a:buNone/>
               <a:defRPr sz="2250" b="1">
                 <a:solidFill>
                   <a:srgbClr val="007D87"/>
@@ -7928,6 +8004,7 @@
               </a:defRPr>
             </a:lvl1pPr>
             <a:lvl2pPr>
+              <a:buNone/>
               <a:defRPr sz="2250" b="1">
                 <a:solidFill>
                   <a:srgbClr val="007D87"/>
@@ -7938,6 +8015,7 @@
               </a:defRPr>
             </a:lvl2pPr>
             <a:lvl3pPr>
+              <a:buNone/>
               <a:defRPr sz="2250" b="1">
                 <a:solidFill>
                   <a:srgbClr val="007D87"/>
@@ -7948,6 +8026,7 @@
               </a:defRPr>
             </a:lvl3pPr>
             <a:lvl4pPr>
+              <a:buNone/>
               <a:defRPr sz="2250" b="1">
                 <a:solidFill>
                   <a:srgbClr val="007D87"/>
@@ -7958,6 +8037,7 @@
               </a:defRPr>
             </a:lvl4pPr>
             <a:lvl5pPr>
+              <a:buNone/>
               <a:defRPr sz="2250" b="1">
                 <a:solidFill>
                   <a:srgbClr val="007D87"/>
@@ -7968,6 +8048,7 @@
               </a:defRPr>
             </a:lvl5pPr>
             <a:lvl6pPr>
+              <a:buNone/>
               <a:defRPr sz="2250" b="1">
                 <a:solidFill>
                   <a:srgbClr val="007D87"/>
@@ -7978,6 +8059,7 @@
               </a:defRPr>
             </a:lvl6pPr>
             <a:lvl7pPr>
+              <a:buNone/>
               <a:defRPr sz="2250" b="1">
                 <a:solidFill>
                   <a:srgbClr val="007D87"/>
@@ -7988,6 +8070,7 @@
               </a:defRPr>
             </a:lvl7pPr>
             <a:lvl8pPr>
+              <a:buNone/>
               <a:defRPr sz="2250" b="1">
                 <a:solidFill>
                   <a:srgbClr val="007D87"/>
@@ -7998,6 +8081,7 @@
               </a:defRPr>
             </a:lvl8pPr>
             <a:lvl9pPr>
+              <a:buNone/>
               <a:defRPr sz="2250" b="1">
                 <a:solidFill>
                   <a:srgbClr val="007D87"/>
@@ -8010,6 +8094,7 @@
           </a:lstStyle>
           <a:p xmlns:a="http://schemas.openxmlformats.org/drawingml/2006/main">
             <a:pPr>
+              <a:buNone/>
               <a:defRPr sz="2250" b="1">
                 <a:solidFill>
                   <a:srgbClr val="007D87"/>
@@ -8077,6 +8162,7 @@
               </a:defRPr>
             </a:defPPr>
             <a:lvl1pPr>
+              <a:buNone/>
               <a:defRPr sz="2250" b="0">
                 <a:solidFill>
                   <a:srgbClr val="163447"/>
@@ -8087,6 +8173,7 @@
               </a:defRPr>
             </a:lvl1pPr>
             <a:lvl2pPr>
+              <a:buNone/>
               <a:defRPr sz="2250" b="0">
                 <a:solidFill>
                   <a:srgbClr val="163447"/>
@@ -8097,6 +8184,7 @@
               </a:defRPr>
             </a:lvl2pPr>
             <a:lvl3pPr>
+              <a:buNone/>
               <a:defRPr sz="2250" b="0">
                 <a:solidFill>
                   <a:srgbClr val="163447"/>
@@ -8107,6 +8195,7 @@
               </a:defRPr>
             </a:lvl3pPr>
             <a:lvl4pPr>
+              <a:buNone/>
               <a:defRPr sz="2250" b="0">
                 <a:solidFill>
                   <a:srgbClr val="163447"/>
@@ -8117,6 +8206,7 @@
               </a:defRPr>
             </a:lvl4pPr>
             <a:lvl5pPr>
+              <a:buNone/>
               <a:defRPr sz="2250" b="0">
                 <a:solidFill>
                   <a:srgbClr val="163447"/>
@@ -8127,6 +8217,7 @@
               </a:defRPr>
             </a:lvl5pPr>
             <a:lvl6pPr>
+              <a:buNone/>
               <a:defRPr sz="2250" b="0">
                 <a:solidFill>
                   <a:srgbClr val="163447"/>
@@ -8137,6 +8228,7 @@
               </a:defRPr>
             </a:lvl6pPr>
             <a:lvl7pPr>
+              <a:buNone/>
               <a:defRPr sz="2250" b="0">
                 <a:solidFill>
                   <a:srgbClr val="163447"/>
@@ -8147,6 +8239,7 @@
               </a:defRPr>
             </a:lvl7pPr>
             <a:lvl8pPr>
+              <a:buNone/>
               <a:defRPr sz="2250" b="0">
                 <a:solidFill>
                   <a:srgbClr val="163447"/>
@@ -8157,6 +8250,7 @@
               </a:defRPr>
             </a:lvl8pPr>
             <a:lvl9pPr>
+              <a:buNone/>
               <a:defRPr sz="2250" b="0">
                 <a:solidFill>
                   <a:srgbClr val="163447"/>
@@ -8169,6 +8263,7 @@
           </a:lstStyle>
           <a:p xmlns:a="http://schemas.openxmlformats.org/drawingml/2006/main">
             <a:pPr>
+              <a:buNone/>
               <a:defRPr sz="2250" b="0">
                 <a:solidFill>
                   <a:srgbClr val="163447"/>
@@ -8236,6 +8331,7 @@
               </a:defRPr>
             </a:defPPr>
             <a:lvl1pPr>
+              <a:buNone/>
               <a:defRPr sz="1575" b="0">
                 <a:solidFill>
                   <a:srgbClr val="52636D"/>
@@ -8246,6 +8342,7 @@
               </a:defRPr>
             </a:lvl1pPr>
             <a:lvl2pPr>
+              <a:buNone/>
               <a:defRPr sz="1575" b="0">
                 <a:solidFill>
                   <a:srgbClr val="52636D"/>
@@ -8256,6 +8353,7 @@
               </a:defRPr>
             </a:lvl2pPr>
             <a:lvl3pPr>
+              <a:buNone/>
               <a:defRPr sz="1575" b="0">
                 <a:solidFill>
                   <a:srgbClr val="52636D"/>
@@ -8266,6 +8364,7 @@
               </a:defRPr>
             </a:lvl3pPr>
             <a:lvl4pPr>
+              <a:buNone/>
               <a:defRPr sz="1575" b="0">
                 <a:solidFill>
                   <a:srgbClr val="52636D"/>
@@ -8276,6 +8375,7 @@
               </a:defRPr>
             </a:lvl4pPr>
             <a:lvl5pPr>
+              <a:buNone/>
               <a:defRPr sz="1575" b="0">
                 <a:solidFill>
                   <a:srgbClr val="52636D"/>
@@ -8286,6 +8386,7 @@
               </a:defRPr>
             </a:lvl5pPr>
             <a:lvl6pPr>
+              <a:buNone/>
               <a:defRPr sz="1575" b="0">
                 <a:solidFill>
                   <a:srgbClr val="52636D"/>
@@ -8296,6 +8397,7 @@
               </a:defRPr>
             </a:lvl6pPr>
             <a:lvl7pPr>
+              <a:buNone/>
               <a:defRPr sz="1575" b="0">
                 <a:solidFill>
                   <a:srgbClr val="52636D"/>
@@ -8306,6 +8408,7 @@
               </a:defRPr>
             </a:lvl7pPr>
             <a:lvl8pPr>
+              <a:buNone/>
               <a:defRPr sz="1575" b="0">
                 <a:solidFill>
                   <a:srgbClr val="52636D"/>
@@ -8316,6 +8419,7 @@
               </a:defRPr>
             </a:lvl8pPr>
             <a:lvl9pPr>
+              <a:buNone/>
               <a:defRPr sz="1575" b="0">
                 <a:solidFill>
                   <a:srgbClr val="52636D"/>
@@ -8328,6 +8432,7 @@
           </a:lstStyle>
           <a:p xmlns:a="http://schemas.openxmlformats.org/drawingml/2006/main">
             <a:pPr>
+              <a:buNone/>
               <a:defRPr sz="1575" b="0">
                 <a:solidFill>
                   <a:srgbClr val="52636D"/>
@@ -8424,6 +8529,7 @@
               </a:defRPr>
             </a:defPPr>
             <a:lvl1pPr>
+              <a:buNone/>
               <a:defRPr sz="3300" b="1">
                 <a:solidFill>
                   <a:srgbClr val="163447"/>
@@ -8434,6 +8540,7 @@
               </a:defRPr>
             </a:lvl1pPr>
             <a:lvl2pPr>
+              <a:buNone/>
               <a:defRPr sz="3300" b="1">
                 <a:solidFill>
                   <a:srgbClr val="163447"/>
@@ -8444,6 +8551,7 @@
               </a:defRPr>
             </a:lvl2pPr>
             <a:lvl3pPr>
+              <a:buNone/>
               <a:defRPr sz="3300" b="1">
                 <a:solidFill>
                   <a:srgbClr val="163447"/>
@@ -8454,6 +8562,7 @@
               </a:defRPr>
             </a:lvl3pPr>
             <a:lvl4pPr>
+              <a:buNone/>
               <a:defRPr sz="3300" b="1">
                 <a:solidFill>
                   <a:srgbClr val="163447"/>
@@ -8464,6 +8573,7 @@
               </a:defRPr>
             </a:lvl4pPr>
             <a:lvl5pPr>
+              <a:buNone/>
               <a:defRPr sz="3300" b="1">
                 <a:solidFill>
                   <a:srgbClr val="163447"/>
@@ -8474,6 +8584,7 @@
               </a:defRPr>
             </a:lvl5pPr>
             <a:lvl6pPr>
+              <a:buNone/>
               <a:defRPr sz="3300" b="1">
                 <a:solidFill>
                   <a:srgbClr val="163447"/>
@@ -8484,6 +8595,7 @@
               </a:defRPr>
             </a:lvl6pPr>
             <a:lvl7pPr>
+              <a:buNone/>
               <a:defRPr sz="3300" b="1">
                 <a:solidFill>
                   <a:srgbClr val="163447"/>
@@ -8494,6 +8606,7 @@
               </a:defRPr>
             </a:lvl7pPr>
             <a:lvl8pPr>
+              <a:buNone/>
               <a:defRPr sz="3300" b="1">
                 <a:solidFill>
                   <a:srgbClr val="163447"/>
@@ -8504,6 +8617,7 @@
               </a:defRPr>
             </a:lvl8pPr>
             <a:lvl9pPr>
+              <a:buNone/>
               <a:defRPr sz="3300" b="1">
                 <a:solidFill>
                   <a:srgbClr val="163447"/>
@@ -8516,6 +8630,7 @@
           </a:lstStyle>
           <a:p xmlns:a="http://schemas.openxmlformats.org/drawingml/2006/main">
             <a:pPr>
+              <a:buNone/>
               <a:defRPr sz="3300" b="1">
                 <a:solidFill>
                   <a:srgbClr val="163447"/>
@@ -8583,6 +8698,7 @@
               </a:defRPr>
             </a:defPPr>
             <a:lvl1pPr>
+              <a:buNone/>
               <a:defRPr sz="1125" b="0">
                 <a:solidFill>
                   <a:srgbClr val="52636D"/>
@@ -8593,6 +8709,7 @@
               </a:defRPr>
             </a:lvl1pPr>
             <a:lvl2pPr>
+              <a:buNone/>
               <a:defRPr sz="1125" b="0">
                 <a:solidFill>
                   <a:srgbClr val="52636D"/>
@@ -8603,6 +8720,7 @@
               </a:defRPr>
             </a:lvl2pPr>
             <a:lvl3pPr>
+              <a:buNone/>
               <a:defRPr sz="1125" b="0">
                 <a:solidFill>
                   <a:srgbClr val="52636D"/>
@@ -8613,6 +8731,7 @@
               </a:defRPr>
             </a:lvl3pPr>
             <a:lvl4pPr>
+              <a:buNone/>
               <a:defRPr sz="1125" b="0">
                 <a:solidFill>
                   <a:srgbClr val="52636D"/>
@@ -8623,6 +8742,7 @@
               </a:defRPr>
             </a:lvl4pPr>
             <a:lvl5pPr>
+              <a:buNone/>
               <a:defRPr sz="1125" b="0">
                 <a:solidFill>
                   <a:srgbClr val="52636D"/>
@@ -8633,6 +8753,7 @@
               </a:defRPr>
             </a:lvl5pPr>
             <a:lvl6pPr>
+              <a:buNone/>
               <a:defRPr sz="1125" b="0">
                 <a:solidFill>
                   <a:srgbClr val="52636D"/>
@@ -8643,6 +8764,7 @@
               </a:defRPr>
             </a:lvl6pPr>
             <a:lvl7pPr>
+              <a:buNone/>
               <a:defRPr sz="1125" b="0">
                 <a:solidFill>
                   <a:srgbClr val="52636D"/>
@@ -8653,6 +8775,7 @@
               </a:defRPr>
             </a:lvl7pPr>
             <a:lvl8pPr>
+              <a:buNone/>
               <a:defRPr sz="1125" b="0">
                 <a:solidFill>
                   <a:srgbClr val="52636D"/>
@@ -8663,6 +8786,7 @@
               </a:defRPr>
             </a:lvl8pPr>
             <a:lvl9pPr>
+              <a:buNone/>
               <a:defRPr sz="1125" b="0">
                 <a:solidFill>
                   <a:srgbClr val="52636D"/>
@@ -8675,6 +8799,7 @@
           </a:lstStyle>
           <a:p xmlns:a="http://schemas.openxmlformats.org/drawingml/2006/main">
             <a:pPr>
+              <a:buNone/>
               <a:defRPr sz="1125" b="0">
                 <a:solidFill>
                   <a:srgbClr val="52636D"/>
@@ -8742,6 +8867,7 @@
               </a:defRPr>
             </a:defPPr>
             <a:lvl1pPr>
+              <a:buNone/>
               <a:defRPr sz="1125" b="0">
                 <a:solidFill>
                   <a:srgbClr val="52636D"/>
@@ -8752,6 +8878,7 @@
               </a:defRPr>
             </a:lvl1pPr>
             <a:lvl2pPr>
+              <a:buNone/>
               <a:defRPr sz="1125" b="0">
                 <a:solidFill>
                   <a:srgbClr val="52636D"/>
@@ -8762,6 +8889,7 @@
               </a:defRPr>
             </a:lvl2pPr>
             <a:lvl3pPr>
+              <a:buNone/>
               <a:defRPr sz="1125" b="0">
                 <a:solidFill>
                   <a:srgbClr val="52636D"/>
@@ -8772,6 +8900,7 @@
               </a:defRPr>
             </a:lvl3pPr>
             <a:lvl4pPr>
+              <a:buNone/>
               <a:defRPr sz="1125" b="0">
                 <a:solidFill>
                   <a:srgbClr val="52636D"/>
@@ -8782,6 +8911,7 @@
               </a:defRPr>
             </a:lvl4pPr>
             <a:lvl5pPr>
+              <a:buNone/>
               <a:defRPr sz="1125" b="0">
                 <a:solidFill>
                   <a:srgbClr val="52636D"/>
@@ -8792,6 +8922,7 @@
               </a:defRPr>
             </a:lvl5pPr>
             <a:lvl6pPr>
+              <a:buNone/>
               <a:defRPr sz="1125" b="0">
                 <a:solidFill>
                   <a:srgbClr val="52636D"/>
@@ -8802,6 +8933,7 @@
               </a:defRPr>
             </a:lvl6pPr>
             <a:lvl7pPr>
+              <a:buNone/>
               <a:defRPr sz="1125" b="0">
                 <a:solidFill>
                   <a:srgbClr val="52636D"/>
@@ -8812,6 +8944,7 @@
               </a:defRPr>
             </a:lvl7pPr>
             <a:lvl8pPr>
+              <a:buNone/>
               <a:defRPr sz="1125" b="0">
                 <a:solidFill>
                   <a:srgbClr val="52636D"/>
@@ -8822,6 +8955,7 @@
               </a:defRPr>
             </a:lvl8pPr>
             <a:lvl9pPr>
+              <a:buNone/>
               <a:defRPr sz="1125" b="0">
                 <a:solidFill>
                   <a:srgbClr val="52636D"/>
@@ -8834,6 +8968,7 @@
           </a:lstStyle>
           <a:p xmlns:a="http://schemas.openxmlformats.org/drawingml/2006/main">
             <a:pPr>
+              <a:buNone/>
               <a:defRPr sz="1125" b="0">
                 <a:solidFill>
                   <a:srgbClr val="52636D"/>
@@ -8862,7 +8997,7 @@
           <p:cNvPr id="4" name="">
             <a:extLst xmlns:a="http://schemas.openxmlformats.org/drawingml/2006/main">
               <a:ext uri="{FF2B5EF4-FFF2-40B4-BE49-F238E27FC236}">
-                <a16:creationId xmlns:a16="http://schemas.microsoft.com/office/drawing/2014/main" id="{0E6D7CEA-3E0A-4365-8E19-7CBA51F07112}"/>
+                <a16:creationId xmlns:a16="http://schemas.microsoft.com/office/drawing/2014/main" id="{8CB89A1C-2ADC-4A96-B035-24C2CC19E184}"/>
               </a:ext>
             </a:extLst>
           </p:cNvPr>
@@ -9193,6 +9328,7 @@
               </a:defRPr>
             </a:defPPr>
             <a:lvl1pPr>
+              <a:buNone/>
               <a:defRPr sz="2250" b="1">
                 <a:solidFill>
                   <a:srgbClr val="007D87"/>
@@ -9203,6 +9339,7 @@
               </a:defRPr>
             </a:lvl1pPr>
             <a:lvl2pPr>
+              <a:buNone/>
               <a:defRPr sz="2250" b="1">
                 <a:solidFill>
                   <a:srgbClr val="007D87"/>
@@ -9213,6 +9350,7 @@
               </a:defRPr>
             </a:lvl2pPr>
             <a:lvl3pPr>
+              <a:buNone/>
               <a:defRPr sz="2250" b="1">
                 <a:solidFill>
                   <a:srgbClr val="007D87"/>
@@ -9223,6 +9361,7 @@
               </a:defRPr>
             </a:lvl3pPr>
             <a:lvl4pPr>
+              <a:buNone/>
               <a:defRPr sz="2250" b="1">
                 <a:solidFill>
                   <a:srgbClr val="007D87"/>
@@ -9233,6 +9372,7 @@
               </a:defRPr>
             </a:lvl4pPr>
             <a:lvl5pPr>
+              <a:buNone/>
               <a:defRPr sz="2250" b="1">
                 <a:solidFill>
                   <a:srgbClr val="007D87"/>
@@ -9243,6 +9383,7 @@
               </a:defRPr>
             </a:lvl5pPr>
             <a:lvl6pPr>
+              <a:buNone/>
               <a:defRPr sz="2250" b="1">
                 <a:solidFill>
                   <a:srgbClr val="007D87"/>
@@ -9253,6 +9394,7 @@
               </a:defRPr>
             </a:lvl6pPr>
             <a:lvl7pPr>
+              <a:buNone/>
               <a:defRPr sz="2250" b="1">
                 <a:solidFill>
                   <a:srgbClr val="007D87"/>
@@ -9263,6 +9405,7 @@
               </a:defRPr>
             </a:lvl7pPr>
             <a:lvl8pPr>
+              <a:buNone/>
               <a:defRPr sz="2250" b="1">
                 <a:solidFill>
                   <a:srgbClr val="007D87"/>
@@ -9273,6 +9416,7 @@
               </a:defRPr>
             </a:lvl8pPr>
             <a:lvl9pPr>
+              <a:buNone/>
               <a:defRPr sz="2250" b="1">
                 <a:solidFill>
                   <a:srgbClr val="007D87"/>
@@ -9285,6 +9429,7 @@
           </a:lstStyle>
           <a:p xmlns:a="http://schemas.openxmlformats.org/drawingml/2006/main">
             <a:pPr>
+              <a:buNone/>
               <a:defRPr sz="2250" b="1">
                 <a:solidFill>
                   <a:srgbClr val="007D87"/>
@@ -9352,6 +9497,7 @@
               </a:defRPr>
             </a:defPPr>
             <a:lvl1pPr>
+              <a:buNone/>
               <a:defRPr sz="2100" b="0">
                 <a:solidFill>
                   <a:srgbClr val="163447"/>
@@ -9362,6 +9508,7 @@
               </a:defRPr>
             </a:lvl1pPr>
             <a:lvl2pPr>
+              <a:buNone/>
               <a:defRPr sz="2100" b="0">
                 <a:solidFill>
                   <a:srgbClr val="163447"/>
@@ -9372,6 +9519,7 @@
               </a:defRPr>
             </a:lvl2pPr>
             <a:lvl3pPr>
+              <a:buNone/>
               <a:defRPr sz="2100" b="0">
                 <a:solidFill>
                   <a:srgbClr val="163447"/>
@@ -9382,6 +9530,7 @@
               </a:defRPr>
             </a:lvl3pPr>
             <a:lvl4pPr>
+              <a:buNone/>
               <a:defRPr sz="2100" b="0">
                 <a:solidFill>
                   <a:srgbClr val="163447"/>
@@ -9392,6 +9541,7 @@
               </a:defRPr>
             </a:lvl4pPr>
             <a:lvl5pPr>
+              <a:buNone/>
               <a:defRPr sz="2100" b="0">
                 <a:solidFill>
                   <a:srgbClr val="163447"/>
@@ -9402,6 +9552,7 @@
               </a:defRPr>
             </a:lvl5pPr>
             <a:lvl6pPr>
+              <a:buNone/>
               <a:defRPr sz="2100" b="0">
                 <a:solidFill>
                   <a:srgbClr val="163447"/>
@@ -9412,6 +9563,7 @@
               </a:defRPr>
             </a:lvl6pPr>
             <a:lvl7pPr>
+              <a:buNone/>
               <a:defRPr sz="2100" b="0">
                 <a:solidFill>
                   <a:srgbClr val="163447"/>
@@ -9422,6 +9574,7 @@
               </a:defRPr>
             </a:lvl7pPr>
             <a:lvl8pPr>
+              <a:buNone/>
               <a:defRPr sz="2100" b="0">
                 <a:solidFill>
                   <a:srgbClr val="163447"/>
@@ -9432,6 +9585,7 @@
               </a:defRPr>
             </a:lvl8pPr>
             <a:lvl9pPr>
+              <a:buNone/>
               <a:defRPr sz="2100" b="0">
                 <a:solidFill>
                   <a:srgbClr val="163447"/>
@@ -9444,6 +9598,7 @@
           </a:lstStyle>
           <a:p xmlns:a="http://schemas.openxmlformats.org/drawingml/2006/main">
             <a:pPr>
+              <a:buNone/>
               <a:defRPr sz="2100" b="0">
                 <a:solidFill>
                   <a:srgbClr val="163447"/>
@@ -9511,6 +9666,7 @@
               </a:defRPr>
             </a:defPPr>
             <a:lvl1pPr>
+              <a:buNone/>
               <a:defRPr sz="1500" b="0">
                 <a:solidFill>
                   <a:srgbClr val="52636D"/>
@@ -9521,6 +9677,7 @@
               </a:defRPr>
             </a:lvl1pPr>
             <a:lvl2pPr>
+              <a:buNone/>
               <a:defRPr sz="1500" b="0">
                 <a:solidFill>
                   <a:srgbClr val="52636D"/>
@@ -9531,6 +9688,7 @@
               </a:defRPr>
             </a:lvl2pPr>
             <a:lvl3pPr>
+              <a:buNone/>
               <a:defRPr sz="1500" b="0">
                 <a:solidFill>
                   <a:srgbClr val="52636D"/>
@@ -9541,6 +9699,7 @@
               </a:defRPr>
             </a:lvl3pPr>
             <a:lvl4pPr>
+              <a:buNone/>
               <a:defRPr sz="1500" b="0">
                 <a:solidFill>
                   <a:srgbClr val="52636D"/>
@@ -9551,6 +9710,7 @@
               </a:defRPr>
             </a:lvl4pPr>
             <a:lvl5pPr>
+              <a:buNone/>
               <a:defRPr sz="1500" b="0">
                 <a:solidFill>
                   <a:srgbClr val="52636D"/>
@@ -9561,6 +9721,7 @@
               </a:defRPr>
             </a:lvl5pPr>
             <a:lvl6pPr>
+              <a:buNone/>
               <a:defRPr sz="1500" b="0">
                 <a:solidFill>
                   <a:srgbClr val="52636D"/>
@@ -9571,6 +9732,7 @@
               </a:defRPr>
             </a:lvl6pPr>
             <a:lvl7pPr>
+              <a:buNone/>
               <a:defRPr sz="1500" b="0">
                 <a:solidFill>
                   <a:srgbClr val="52636D"/>
@@ -9581,6 +9743,7 @@
               </a:defRPr>
             </a:lvl7pPr>
             <a:lvl8pPr>
+              <a:buNone/>
               <a:defRPr sz="1500" b="0">
                 <a:solidFill>
                   <a:srgbClr val="52636D"/>
@@ -9591,6 +9754,7 @@
               </a:defRPr>
             </a:lvl8pPr>
             <a:lvl9pPr>
+              <a:buNone/>
               <a:defRPr sz="1500" b="0">
                 <a:solidFill>
                   <a:srgbClr val="52636D"/>
@@ -9603,6 +9767,7 @@
           </a:lstStyle>
           <a:p xmlns:a="http://schemas.openxmlformats.org/drawingml/2006/main">
             <a:pPr>
+              <a:buNone/>
               <a:defRPr sz="1500" b="0">
                 <a:solidFill>
                   <a:srgbClr val="52636D"/>
@@ -9699,6 +9864,7 @@
               </a:defRPr>
             </a:defPPr>
             <a:lvl1pPr>
+              <a:buNone/>
               <a:defRPr sz="3300" b="1">
                 <a:solidFill>
                   <a:srgbClr val="163447"/>
@@ -9709,6 +9875,7 @@
               </a:defRPr>
             </a:lvl1pPr>
             <a:lvl2pPr>
+              <a:buNone/>
               <a:defRPr sz="3300" b="1">
                 <a:solidFill>
                   <a:srgbClr val="163447"/>
@@ -9719,6 +9886,7 @@
               </a:defRPr>
             </a:lvl2pPr>
             <a:lvl3pPr>
+              <a:buNone/>
               <a:defRPr sz="3300" b="1">
                 <a:solidFill>
                   <a:srgbClr val="163447"/>
@@ -9729,6 +9897,7 @@
               </a:defRPr>
             </a:lvl3pPr>
             <a:lvl4pPr>
+              <a:buNone/>
               <a:defRPr sz="3300" b="1">
                 <a:solidFill>
                   <a:srgbClr val="163447"/>
@@ -9739,6 +9908,7 @@
               </a:defRPr>
             </a:lvl4pPr>
             <a:lvl5pPr>
+              <a:buNone/>
               <a:defRPr sz="3300" b="1">
                 <a:solidFill>
                   <a:srgbClr val="163447"/>
@@ -9749,6 +9919,7 @@
               </a:defRPr>
             </a:lvl5pPr>
             <a:lvl6pPr>
+              <a:buNone/>
               <a:defRPr sz="3300" b="1">
                 <a:solidFill>
                   <a:srgbClr val="163447"/>
@@ -9759,6 +9930,7 @@
               </a:defRPr>
             </a:lvl6pPr>
             <a:lvl7pPr>
+              <a:buNone/>
               <a:defRPr sz="3300" b="1">
                 <a:solidFill>
                   <a:srgbClr val="163447"/>
@@ -9769,6 +9941,7 @@
               </a:defRPr>
             </a:lvl7pPr>
             <a:lvl8pPr>
+              <a:buNone/>
               <a:defRPr sz="3300" b="1">
                 <a:solidFill>
                   <a:srgbClr val="163447"/>
@@ -9779,6 +9952,7 @@
               </a:defRPr>
             </a:lvl8pPr>
             <a:lvl9pPr>
+              <a:buNone/>
               <a:defRPr sz="3300" b="1">
                 <a:solidFill>
                   <a:srgbClr val="163447"/>
@@ -9791,6 +9965,7 @@
           </a:lstStyle>
           <a:p xmlns:a="http://schemas.openxmlformats.org/drawingml/2006/main">
             <a:pPr>
+              <a:buNone/>
               <a:defRPr sz="3300" b="1">
                 <a:solidFill>
                   <a:srgbClr val="163447"/>
@@ -9858,6 +10033,7 @@
               </a:defRPr>
             </a:defPPr>
             <a:lvl1pPr>
+              <a:buNone/>
               <a:defRPr sz="1125" b="0">
                 <a:solidFill>
                   <a:srgbClr val="52636D"/>
@@ -9868,6 +10044,7 @@
               </a:defRPr>
             </a:lvl1pPr>
             <a:lvl2pPr>
+              <a:buNone/>
               <a:defRPr sz="1125" b="0">
                 <a:solidFill>
                   <a:srgbClr val="52636D"/>
@@ -9878,6 +10055,7 @@
               </a:defRPr>
             </a:lvl2pPr>
             <a:lvl3pPr>
+              <a:buNone/>
               <a:defRPr sz="1125" b="0">
                 <a:solidFill>
                   <a:srgbClr val="52636D"/>
@@ -9888,6 +10066,7 @@
               </a:defRPr>
             </a:lvl3pPr>
             <a:lvl4pPr>
+              <a:buNone/>
               <a:defRPr sz="1125" b="0">
                 <a:solidFill>
                   <a:srgbClr val="52636D"/>
@@ -9898,6 +10077,7 @@
               </a:defRPr>
             </a:lvl4pPr>
             <a:lvl5pPr>
+              <a:buNone/>
               <a:defRPr sz="1125" b="0">
                 <a:solidFill>
                   <a:srgbClr val="52636D"/>
@@ -9908,6 +10088,7 @@
               </a:defRPr>
             </a:lvl5pPr>
             <a:lvl6pPr>
+              <a:buNone/>
               <a:defRPr sz="1125" b="0">
                 <a:solidFill>
                   <a:srgbClr val="52636D"/>
@@ -9918,6 +10099,7 @@
               </a:defRPr>
             </a:lvl6pPr>
             <a:lvl7pPr>
+              <a:buNone/>
               <a:defRPr sz="1125" b="0">
                 <a:solidFill>
                   <a:srgbClr val="52636D"/>
@@ -9928,6 +10110,7 @@
               </a:defRPr>
             </a:lvl7pPr>
             <a:lvl8pPr>
+              <a:buNone/>
               <a:defRPr sz="1125" b="0">
                 <a:solidFill>
                   <a:srgbClr val="52636D"/>
@@ -9938,6 +10121,7 @@
               </a:defRPr>
             </a:lvl8pPr>
             <a:lvl9pPr>
+              <a:buNone/>
               <a:defRPr sz="1125" b="0">
                 <a:solidFill>
                   <a:srgbClr val="52636D"/>
@@ -9950,6 +10134,7 @@
           </a:lstStyle>
           <a:p xmlns:a="http://schemas.openxmlformats.org/drawingml/2006/main">
             <a:pPr>
+              <a:buNone/>
               <a:defRPr sz="1125" b="0">
                 <a:solidFill>
                   <a:srgbClr val="52636D"/>
@@ -10017,6 +10202,7 @@
               </a:defRPr>
             </a:defPPr>
             <a:lvl1pPr>
+              <a:buNone/>
               <a:defRPr sz="1125" b="0">
                 <a:solidFill>
                   <a:srgbClr val="52636D"/>
@@ -10027,6 +10213,7 @@
               </a:defRPr>
             </a:lvl1pPr>
             <a:lvl2pPr>
+              <a:buNone/>
               <a:defRPr sz="1125" b="0">
                 <a:solidFill>
                   <a:srgbClr val="52636D"/>
@@ -10037,6 +10224,7 @@
               </a:defRPr>
             </a:lvl2pPr>
             <a:lvl3pPr>
+              <a:buNone/>
               <a:defRPr sz="1125" b="0">
                 <a:solidFill>
                   <a:srgbClr val="52636D"/>
@@ -10047,6 +10235,7 @@
               </a:defRPr>
             </a:lvl3pPr>
             <a:lvl4pPr>
+              <a:buNone/>
               <a:defRPr sz="1125" b="0">
                 <a:solidFill>
                   <a:srgbClr val="52636D"/>
@@ -10057,6 +10246,7 @@
               </a:defRPr>
             </a:lvl4pPr>
             <a:lvl5pPr>
+              <a:buNone/>
               <a:defRPr sz="1125" b="0">
                 <a:solidFill>
                   <a:srgbClr val="52636D"/>
@@ -10067,6 +10257,7 @@
               </a:defRPr>
             </a:lvl5pPr>
             <a:lvl6pPr>
+              <a:buNone/>
               <a:defRPr sz="1125" b="0">
                 <a:solidFill>
                   <a:srgbClr val="52636D"/>
@@ -10077,6 +10268,7 @@
               </a:defRPr>
             </a:lvl6pPr>
             <a:lvl7pPr>
+              <a:buNone/>
               <a:defRPr sz="1125" b="0">
                 <a:solidFill>
                   <a:srgbClr val="52636D"/>
@@ -10087,6 +10279,7 @@
               </a:defRPr>
             </a:lvl7pPr>
             <a:lvl8pPr>
+              <a:buNone/>
               <a:defRPr sz="1125" b="0">
                 <a:solidFill>
                   <a:srgbClr val="52636D"/>
@@ -10097,6 +10290,7 @@
               </a:defRPr>
             </a:lvl8pPr>
             <a:lvl9pPr>
+              <a:buNone/>
               <a:defRPr sz="1125" b="0">
                 <a:solidFill>
                   <a:srgbClr val="52636D"/>
@@ -10109,6 +10303,7 @@
           </a:lstStyle>
           <a:p xmlns:a="http://schemas.openxmlformats.org/drawingml/2006/main">
             <a:pPr>
+              <a:buNone/>
               <a:defRPr sz="1125" b="0">
                 <a:solidFill>
                   <a:srgbClr val="52636D"/>
@@ -10137,7 +10332,7 @@
           <p:cNvPr id="4" name="">
             <a:extLst xmlns:a="http://schemas.openxmlformats.org/drawingml/2006/main">
               <a:ext uri="{FF2B5EF4-FFF2-40B4-BE49-F238E27FC236}">
-                <a16:creationId xmlns:a16="http://schemas.microsoft.com/office/drawing/2014/main" id="{36B92C4C-D84A-4F35-B71F-C30CCD896451}"/>
+                <a16:creationId xmlns:a16="http://schemas.microsoft.com/office/drawing/2014/main" id="{5F4C2F03-5B28-47CD-9984-EE0ABE966FD5}"/>
               </a:ext>
             </a:extLst>
           </p:cNvPr>
@@ -10762,7 +10957,7 @@
                           <a:ea typeface="DejaVu Sans"/>
                           <a:cs typeface="DejaVu Sans"/>
                         </a:rPr>
-                        <a:t>Cuarto integrante</a:t>
+                        <a:t>Esteban</a:t>
                       </a:r>
                     </a:p>
                   </a:txBody>
@@ -10884,7 +11079,7 @@
                           <a:ea typeface="DejaVu Sans"/>
                           <a:cs typeface="DejaVu Sans"/>
                         </a:rPr>
-                        <a:t>Daniel con Julián</a:t>
+                        <a:t>Daniel</a:t>
                       </a:r>
                     </a:p>
                   </a:txBody>
@@ -10955,6 +11150,7 @@
               </a:defRPr>
             </a:defPPr>
             <a:lvl1pPr>
+              <a:buNone/>
               <a:defRPr sz="1500" b="0">
                 <a:solidFill>
                   <a:srgbClr val="52636D"/>
@@ -10965,6 +11161,7 @@
               </a:defRPr>
             </a:lvl1pPr>
             <a:lvl2pPr>
+              <a:buNone/>
               <a:defRPr sz="1500" b="0">
                 <a:solidFill>
                   <a:srgbClr val="52636D"/>
@@ -10975,6 +11172,7 @@
               </a:defRPr>
             </a:lvl2pPr>
             <a:lvl3pPr>
+              <a:buNone/>
               <a:defRPr sz="1500" b="0">
                 <a:solidFill>
                   <a:srgbClr val="52636D"/>
@@ -10985,6 +11183,7 @@
               </a:defRPr>
             </a:lvl3pPr>
             <a:lvl4pPr>
+              <a:buNone/>
               <a:defRPr sz="1500" b="0">
                 <a:solidFill>
                   <a:srgbClr val="52636D"/>
@@ -10995,6 +11194,7 @@
               </a:defRPr>
             </a:lvl4pPr>
             <a:lvl5pPr>
+              <a:buNone/>
               <a:defRPr sz="1500" b="0">
                 <a:solidFill>
                   <a:srgbClr val="52636D"/>
@@ -11005,6 +11205,7 @@
               </a:defRPr>
             </a:lvl5pPr>
             <a:lvl6pPr>
+              <a:buNone/>
               <a:defRPr sz="1500" b="0">
                 <a:solidFill>
                   <a:srgbClr val="52636D"/>
@@ -11015,6 +11216,7 @@
               </a:defRPr>
             </a:lvl6pPr>
             <a:lvl7pPr>
+              <a:buNone/>
               <a:defRPr sz="1500" b="0">
                 <a:solidFill>
                   <a:srgbClr val="52636D"/>
@@ -11025,6 +11227,7 @@
               </a:defRPr>
             </a:lvl7pPr>
             <a:lvl8pPr>
+              <a:buNone/>
               <a:defRPr sz="1500" b="0">
                 <a:solidFill>
                   <a:srgbClr val="52636D"/>
@@ -11035,6 +11238,7 @@
               </a:defRPr>
             </a:lvl8pPr>
             <a:lvl9pPr>
+              <a:buNone/>
               <a:defRPr sz="1500" b="0">
                 <a:solidFill>
                   <a:srgbClr val="52636D"/>
@@ -11047,6 +11251,7 @@
           </a:lstStyle>
           <a:p xmlns:a="http://schemas.openxmlformats.org/drawingml/2006/main">
             <a:pPr>
+              <a:buNone/>
               <a:defRPr sz="1500" b="0">
                 <a:solidFill>
                   <a:srgbClr val="52636D"/>
@@ -11104,7 +11309,7 @@
           <p:cNvPr id="28" name="">
             <a:extLst xmlns:a="http://schemas.openxmlformats.org/drawingml/2006/main">
               <a:ext uri="{FF2B5EF4-FFF2-40B4-BE49-F238E27FC236}">
-                <a16:creationId xmlns:a16="http://schemas.microsoft.com/office/drawing/2014/main" id="{4C924BFA-1655-4163-89AD-E9E9599A64D5}"/>
+                <a16:creationId xmlns:a16="http://schemas.microsoft.com/office/drawing/2014/main" id="{A8E82A91-9C09-4D83-B522-127D783CBCF1}"/>
               </a:ext>
             </a:extLst>
           </p:cNvPr>
@@ -11135,7 +11340,7 @@
           <p:cNvPr id="26" name="">
             <a:extLst xmlns:a="http://schemas.openxmlformats.org/drawingml/2006/main">
               <a:ext uri="{FF2B5EF4-FFF2-40B4-BE49-F238E27FC236}">
-                <a16:creationId xmlns:a16="http://schemas.microsoft.com/office/drawing/2014/main" id="{3AC14DA9-378A-4A64-A9B0-406B674CF66A}"/>
+                <a16:creationId xmlns:a16="http://schemas.microsoft.com/office/drawing/2014/main" id="{6929CE8E-2169-43A5-8A7F-D75CBDC83FCF}"/>
               </a:ext>
             </a:extLst>
           </p:cNvPr>
@@ -11166,7 +11371,7 @@
           <p:cNvPr id="24" name="">
             <a:extLst xmlns:a="http://schemas.openxmlformats.org/drawingml/2006/main">
               <a:ext uri="{FF2B5EF4-FFF2-40B4-BE49-F238E27FC236}">
-                <a16:creationId xmlns:a16="http://schemas.microsoft.com/office/drawing/2014/main" id="{4E30FECB-82D4-49E6-BB43-FCADC8C2CE58}"/>
+                <a16:creationId xmlns:a16="http://schemas.microsoft.com/office/drawing/2014/main" id="{E95F51FA-0243-4B7F-A9AB-956CF988BBCB}"/>
               </a:ext>
             </a:extLst>
           </p:cNvPr>
@@ -11197,7 +11402,7 @@
           <p:cNvPr id="22" name="">
             <a:extLst xmlns:a="http://schemas.openxmlformats.org/drawingml/2006/main">
               <a:ext uri="{FF2B5EF4-FFF2-40B4-BE49-F238E27FC236}">
-                <a16:creationId xmlns:a16="http://schemas.microsoft.com/office/drawing/2014/main" id="{1BCABBEF-01DE-4E66-9712-9244830EFF23}"/>
+                <a16:creationId xmlns:a16="http://schemas.microsoft.com/office/drawing/2014/main" id="{ACBC93F4-B53F-4013-805C-7364AD354E45}"/>
               </a:ext>
             </a:extLst>
           </p:cNvPr>
@@ -11267,6 +11472,7 @@
               </a:defRPr>
             </a:defPPr>
             <a:lvl1pPr>
+              <a:buNone/>
               <a:defRPr sz="3300" b="1">
                 <a:solidFill>
                   <a:srgbClr val="163447"/>
@@ -11277,6 +11483,7 @@
               </a:defRPr>
             </a:lvl1pPr>
             <a:lvl2pPr>
+              <a:buNone/>
               <a:defRPr sz="3300" b="1">
                 <a:solidFill>
                   <a:srgbClr val="163447"/>
@@ -11287,6 +11494,7 @@
               </a:defRPr>
             </a:lvl2pPr>
             <a:lvl3pPr>
+              <a:buNone/>
               <a:defRPr sz="3300" b="1">
                 <a:solidFill>
                   <a:srgbClr val="163447"/>
@@ -11297,6 +11505,7 @@
               </a:defRPr>
             </a:lvl3pPr>
             <a:lvl4pPr>
+              <a:buNone/>
               <a:defRPr sz="3300" b="1">
                 <a:solidFill>
                   <a:srgbClr val="163447"/>
@@ -11307,6 +11516,7 @@
               </a:defRPr>
             </a:lvl4pPr>
             <a:lvl5pPr>
+              <a:buNone/>
               <a:defRPr sz="3300" b="1">
                 <a:solidFill>
                   <a:srgbClr val="163447"/>
@@ -11317,6 +11527,7 @@
               </a:defRPr>
             </a:lvl5pPr>
             <a:lvl6pPr>
+              <a:buNone/>
               <a:defRPr sz="3300" b="1">
                 <a:solidFill>
                   <a:srgbClr val="163447"/>
@@ -11327,6 +11538,7 @@
               </a:defRPr>
             </a:lvl6pPr>
             <a:lvl7pPr>
+              <a:buNone/>
               <a:defRPr sz="3300" b="1">
                 <a:solidFill>
                   <a:srgbClr val="163447"/>
@@ -11337,6 +11549,7 @@
               </a:defRPr>
             </a:lvl7pPr>
             <a:lvl8pPr>
+              <a:buNone/>
               <a:defRPr sz="3300" b="1">
                 <a:solidFill>
                   <a:srgbClr val="163447"/>
@@ -11347,6 +11560,7 @@
               </a:defRPr>
             </a:lvl8pPr>
             <a:lvl9pPr>
+              <a:buNone/>
               <a:defRPr sz="3300" b="1">
                 <a:solidFill>
                   <a:srgbClr val="163447"/>
@@ -11359,6 +11573,7 @@
           </a:lstStyle>
           <a:p xmlns:a="http://schemas.openxmlformats.org/drawingml/2006/main">
             <a:pPr>
+              <a:buNone/>
               <a:defRPr sz="3300" b="1">
                 <a:solidFill>
                   <a:srgbClr val="163447"/>
@@ -11426,6 +11641,7 @@
               </a:defRPr>
             </a:defPPr>
             <a:lvl1pPr>
+              <a:buNone/>
               <a:defRPr sz="1125" b="0">
                 <a:solidFill>
                   <a:srgbClr val="52636D"/>
@@ -11436,6 +11652,7 @@
               </a:defRPr>
             </a:lvl1pPr>
             <a:lvl2pPr>
+              <a:buNone/>
               <a:defRPr sz="1125" b="0">
                 <a:solidFill>
                   <a:srgbClr val="52636D"/>
@@ -11446,6 +11663,7 @@
               </a:defRPr>
             </a:lvl2pPr>
             <a:lvl3pPr>
+              <a:buNone/>
               <a:defRPr sz="1125" b="0">
                 <a:solidFill>
                   <a:srgbClr val="52636D"/>
@@ -11456,6 +11674,7 @@
               </a:defRPr>
             </a:lvl3pPr>
             <a:lvl4pPr>
+              <a:buNone/>
               <a:defRPr sz="1125" b="0">
                 <a:solidFill>
                   <a:srgbClr val="52636D"/>
@@ -11466,6 +11685,7 @@
               </a:defRPr>
             </a:lvl4pPr>
             <a:lvl5pPr>
+              <a:buNone/>
               <a:defRPr sz="1125" b="0">
                 <a:solidFill>
                   <a:srgbClr val="52636D"/>
@@ -11476,6 +11696,7 @@
               </a:defRPr>
             </a:lvl5pPr>
             <a:lvl6pPr>
+              <a:buNone/>
               <a:defRPr sz="1125" b="0">
                 <a:solidFill>
                   <a:srgbClr val="52636D"/>
@@ -11486,6 +11707,7 @@
               </a:defRPr>
             </a:lvl6pPr>
             <a:lvl7pPr>
+              <a:buNone/>
               <a:defRPr sz="1125" b="0">
                 <a:solidFill>
                   <a:srgbClr val="52636D"/>
@@ -11496,6 +11718,7 @@
               </a:defRPr>
             </a:lvl7pPr>
             <a:lvl8pPr>
+              <a:buNone/>
               <a:defRPr sz="1125" b="0">
                 <a:solidFill>
                   <a:srgbClr val="52636D"/>
@@ -11506,6 +11729,7 @@
               </a:defRPr>
             </a:lvl8pPr>
             <a:lvl9pPr>
+              <a:buNone/>
               <a:defRPr sz="1125" b="0">
                 <a:solidFill>
                   <a:srgbClr val="52636D"/>
@@ -11518,6 +11742,7 @@
           </a:lstStyle>
           <a:p xmlns:a="http://schemas.openxmlformats.org/drawingml/2006/main">
             <a:pPr>
+              <a:buNone/>
               <a:defRPr sz="1125" b="0">
                 <a:solidFill>
                   <a:srgbClr val="52636D"/>
@@ -11585,6 +11810,7 @@
               </a:defRPr>
             </a:defPPr>
             <a:lvl1pPr>
+              <a:buNone/>
               <a:defRPr sz="1125" b="0">
                 <a:solidFill>
                   <a:srgbClr val="52636D"/>
@@ -11595,6 +11821,7 @@
               </a:defRPr>
             </a:lvl1pPr>
             <a:lvl2pPr>
+              <a:buNone/>
               <a:defRPr sz="1125" b="0">
                 <a:solidFill>
                   <a:srgbClr val="52636D"/>
@@ -11605,6 +11832,7 @@
               </a:defRPr>
             </a:lvl2pPr>
             <a:lvl3pPr>
+              <a:buNone/>
               <a:defRPr sz="1125" b="0">
                 <a:solidFill>
                   <a:srgbClr val="52636D"/>
@@ -11615,6 +11843,7 @@
               </a:defRPr>
             </a:lvl3pPr>
             <a:lvl4pPr>
+              <a:buNone/>
               <a:defRPr sz="1125" b="0">
                 <a:solidFill>
                   <a:srgbClr val="52636D"/>
@@ -11625,6 +11854,7 @@
               </a:defRPr>
             </a:lvl4pPr>
             <a:lvl5pPr>
+              <a:buNone/>
               <a:defRPr sz="1125" b="0">
                 <a:solidFill>
                   <a:srgbClr val="52636D"/>
@@ -11635,6 +11865,7 @@
               </a:defRPr>
             </a:lvl5pPr>
             <a:lvl6pPr>
+              <a:buNone/>
               <a:defRPr sz="1125" b="0">
                 <a:solidFill>
                   <a:srgbClr val="52636D"/>
@@ -11645,6 +11876,7 @@
               </a:defRPr>
             </a:lvl6pPr>
             <a:lvl7pPr>
+              <a:buNone/>
               <a:defRPr sz="1125" b="0">
                 <a:solidFill>
                   <a:srgbClr val="52636D"/>
@@ -11655,6 +11887,7 @@
               </a:defRPr>
             </a:lvl7pPr>
             <a:lvl8pPr>
+              <a:buNone/>
               <a:defRPr sz="1125" b="0">
                 <a:solidFill>
                   <a:srgbClr val="52636D"/>
@@ -11665,6 +11898,7 @@
               </a:defRPr>
             </a:lvl8pPr>
             <a:lvl9pPr>
+              <a:buNone/>
               <a:defRPr sz="1125" b="0">
                 <a:solidFill>
                   <a:srgbClr val="52636D"/>
@@ -11677,6 +11911,7 @@
           </a:lstStyle>
           <a:p xmlns:a="http://schemas.openxmlformats.org/drawingml/2006/main">
             <a:pPr>
+              <a:buNone/>
               <a:defRPr sz="1125" b="0">
                 <a:solidFill>
                   <a:srgbClr val="52636D"/>
@@ -11777,6 +12012,7 @@
               </a:defRPr>
             </a:defPPr>
             <a:lvl1pPr>
+              <a:buNone/>
               <a:defRPr sz="1875" b="1">
                 <a:solidFill>
                   <a:srgbClr val="163447"/>
@@ -11787,6 +12023,7 @@
               </a:defRPr>
             </a:lvl1pPr>
             <a:lvl2pPr>
+              <a:buNone/>
               <a:defRPr sz="1875" b="1">
                 <a:solidFill>
                   <a:srgbClr val="163447"/>
@@ -11797,6 +12034,7 @@
               </a:defRPr>
             </a:lvl2pPr>
             <a:lvl3pPr>
+              <a:buNone/>
               <a:defRPr sz="1875" b="1">
                 <a:solidFill>
                   <a:srgbClr val="163447"/>
@@ -11807,6 +12045,7 @@
               </a:defRPr>
             </a:lvl3pPr>
             <a:lvl4pPr>
+              <a:buNone/>
               <a:defRPr sz="1875" b="1">
                 <a:solidFill>
                   <a:srgbClr val="163447"/>
@@ -11817,6 +12056,7 @@
               </a:defRPr>
             </a:lvl4pPr>
             <a:lvl5pPr>
+              <a:buNone/>
               <a:defRPr sz="1875" b="1">
                 <a:solidFill>
                   <a:srgbClr val="163447"/>
@@ -11827,6 +12067,7 @@
               </a:defRPr>
             </a:lvl5pPr>
             <a:lvl6pPr>
+              <a:buNone/>
               <a:defRPr sz="1875" b="1">
                 <a:solidFill>
                   <a:srgbClr val="163447"/>
@@ -11837,6 +12078,7 @@
               </a:defRPr>
             </a:lvl6pPr>
             <a:lvl7pPr>
+              <a:buNone/>
               <a:defRPr sz="1875" b="1">
                 <a:solidFill>
                   <a:srgbClr val="163447"/>
@@ -11847,6 +12089,7 @@
               </a:defRPr>
             </a:lvl7pPr>
             <a:lvl8pPr>
+              <a:buNone/>
               <a:defRPr sz="1875" b="1">
                 <a:solidFill>
                   <a:srgbClr val="163447"/>
@@ -11857,6 +12100,7 @@
               </a:defRPr>
             </a:lvl8pPr>
             <a:lvl9pPr>
+              <a:buNone/>
               <a:defRPr sz="1875" b="1">
                 <a:solidFill>
                   <a:srgbClr val="163447"/>
@@ -11869,6 +12113,7 @@
           </a:lstStyle>
           <a:p xmlns:a="http://schemas.openxmlformats.org/drawingml/2006/main">
             <a:pPr>
+              <a:buNone/>
               <a:defRPr sz="1875" b="1">
                 <a:solidFill>
                   <a:srgbClr val="163447"/>
@@ -11936,6 +12181,7 @@
               </a:defRPr>
             </a:defPPr>
             <a:lvl1pPr>
+              <a:buNone/>
               <a:defRPr sz="1650" b="0">
                 <a:solidFill>
                   <a:srgbClr val="163447"/>
@@ -11946,6 +12192,7 @@
               </a:defRPr>
             </a:lvl1pPr>
             <a:lvl2pPr>
+              <a:buNone/>
               <a:defRPr sz="1650" b="0">
                 <a:solidFill>
                   <a:srgbClr val="163447"/>
@@ -11956,6 +12203,7 @@
               </a:defRPr>
             </a:lvl2pPr>
             <a:lvl3pPr>
+              <a:buNone/>
               <a:defRPr sz="1650" b="0">
                 <a:solidFill>
                   <a:srgbClr val="163447"/>
@@ -11966,6 +12214,7 @@
               </a:defRPr>
             </a:lvl3pPr>
             <a:lvl4pPr>
+              <a:buNone/>
               <a:defRPr sz="1650" b="0">
                 <a:solidFill>
                   <a:srgbClr val="163447"/>
@@ -11976,6 +12225,7 @@
               </a:defRPr>
             </a:lvl4pPr>
             <a:lvl5pPr>
+              <a:buNone/>
               <a:defRPr sz="1650" b="0">
                 <a:solidFill>
                   <a:srgbClr val="163447"/>
@@ -11986,6 +12236,7 @@
               </a:defRPr>
             </a:lvl5pPr>
             <a:lvl6pPr>
+              <a:buNone/>
               <a:defRPr sz="1650" b="0">
                 <a:solidFill>
                   <a:srgbClr val="163447"/>
@@ -11996,6 +12247,7 @@
               </a:defRPr>
             </a:lvl6pPr>
             <a:lvl7pPr>
+              <a:buNone/>
               <a:defRPr sz="1650" b="0">
                 <a:solidFill>
                   <a:srgbClr val="163447"/>
@@ -12006,6 +12258,7 @@
               </a:defRPr>
             </a:lvl7pPr>
             <a:lvl8pPr>
+              <a:buNone/>
               <a:defRPr sz="1650" b="0">
                 <a:solidFill>
                   <a:srgbClr val="163447"/>
@@ -12016,6 +12269,7 @@
               </a:defRPr>
             </a:lvl8pPr>
             <a:lvl9pPr>
+              <a:buNone/>
               <a:defRPr sz="1650" b="0">
                 <a:solidFill>
                   <a:srgbClr val="163447"/>
@@ -12028,6 +12282,7 @@
           </a:lstStyle>
           <a:p xmlns:a="http://schemas.openxmlformats.org/drawingml/2006/main">
             <a:pPr>
+              <a:buNone/>
               <a:defRPr sz="1650" b="0">
                 <a:solidFill>
                   <a:srgbClr val="163447"/>
@@ -12051,6 +12306,7 @@
           </a:p>
           <a:p xmlns:a="http://schemas.openxmlformats.org/drawingml/2006/main">
             <a:pPr>
+              <a:buNone/>
               <a:defRPr sz="1650" b="0">
                 <a:solidFill>
                   <a:srgbClr val="163447"/>
@@ -12074,6 +12330,7 @@
           </a:p>
           <a:p xmlns:a="http://schemas.openxmlformats.org/drawingml/2006/main">
             <a:pPr>
+              <a:buNone/>
               <a:defRPr sz="1650" b="0">
                 <a:solidFill>
                   <a:srgbClr val="163447"/>
@@ -12174,6 +12431,7 @@
               </a:defRPr>
             </a:defPPr>
             <a:lvl1pPr>
+              <a:buNone/>
               <a:defRPr sz="1875" b="1">
                 <a:solidFill>
                   <a:srgbClr val="163447"/>
@@ -12184,6 +12442,7 @@
               </a:defRPr>
             </a:lvl1pPr>
             <a:lvl2pPr>
+              <a:buNone/>
               <a:defRPr sz="1875" b="1">
                 <a:solidFill>
                   <a:srgbClr val="163447"/>
@@ -12194,6 +12453,7 @@
               </a:defRPr>
             </a:lvl2pPr>
             <a:lvl3pPr>
+              <a:buNone/>
               <a:defRPr sz="1875" b="1">
                 <a:solidFill>
                   <a:srgbClr val="163447"/>
@@ -12204,6 +12464,7 @@
               </a:defRPr>
             </a:lvl3pPr>
             <a:lvl4pPr>
+              <a:buNone/>
               <a:defRPr sz="1875" b="1">
                 <a:solidFill>
                   <a:srgbClr val="163447"/>
@@ -12214,6 +12475,7 @@
               </a:defRPr>
             </a:lvl4pPr>
             <a:lvl5pPr>
+              <a:buNone/>
               <a:defRPr sz="1875" b="1">
                 <a:solidFill>
                   <a:srgbClr val="163447"/>
@@ -12224,6 +12486,7 @@
               </a:defRPr>
             </a:lvl5pPr>
             <a:lvl6pPr>
+              <a:buNone/>
               <a:defRPr sz="1875" b="1">
                 <a:solidFill>
                   <a:srgbClr val="163447"/>
@@ -12234,6 +12497,7 @@
               </a:defRPr>
             </a:lvl6pPr>
             <a:lvl7pPr>
+              <a:buNone/>
               <a:defRPr sz="1875" b="1">
                 <a:solidFill>
                   <a:srgbClr val="163447"/>
@@ -12244,6 +12508,7 @@
               </a:defRPr>
             </a:lvl7pPr>
             <a:lvl8pPr>
+              <a:buNone/>
               <a:defRPr sz="1875" b="1">
                 <a:solidFill>
                   <a:srgbClr val="163447"/>
@@ -12254,6 +12519,7 @@
               </a:defRPr>
             </a:lvl8pPr>
             <a:lvl9pPr>
+              <a:buNone/>
               <a:defRPr sz="1875" b="1">
                 <a:solidFill>
                   <a:srgbClr val="163447"/>
@@ -12266,6 +12532,7 @@
           </a:lstStyle>
           <a:p xmlns:a="http://schemas.openxmlformats.org/drawingml/2006/main">
             <a:pPr>
+              <a:buNone/>
               <a:defRPr sz="1875" b="1">
                 <a:solidFill>
                   <a:srgbClr val="163447"/>
@@ -12333,6 +12600,7 @@
               </a:defRPr>
             </a:defPPr>
             <a:lvl1pPr>
+              <a:buNone/>
               <a:defRPr sz="1650" b="0">
                 <a:solidFill>
                   <a:srgbClr val="163447"/>
@@ -12343,6 +12611,7 @@
               </a:defRPr>
             </a:lvl1pPr>
             <a:lvl2pPr>
+              <a:buNone/>
               <a:defRPr sz="1650" b="0">
                 <a:solidFill>
                   <a:srgbClr val="163447"/>
@@ -12353,6 +12622,7 @@
               </a:defRPr>
             </a:lvl2pPr>
             <a:lvl3pPr>
+              <a:buNone/>
               <a:defRPr sz="1650" b="0">
                 <a:solidFill>
                   <a:srgbClr val="163447"/>
@@ -12363,6 +12633,7 @@
               </a:defRPr>
             </a:lvl3pPr>
             <a:lvl4pPr>
+              <a:buNone/>
               <a:defRPr sz="1650" b="0">
                 <a:solidFill>
                   <a:srgbClr val="163447"/>
@@ -12373,6 +12644,7 @@
               </a:defRPr>
             </a:lvl4pPr>
             <a:lvl5pPr>
+              <a:buNone/>
               <a:defRPr sz="1650" b="0">
                 <a:solidFill>
                   <a:srgbClr val="163447"/>
@@ -12383,6 +12655,7 @@
               </a:defRPr>
             </a:lvl5pPr>
             <a:lvl6pPr>
+              <a:buNone/>
               <a:defRPr sz="1650" b="0">
                 <a:solidFill>
                   <a:srgbClr val="163447"/>
@@ -12393,6 +12666,7 @@
               </a:defRPr>
             </a:lvl6pPr>
             <a:lvl7pPr>
+              <a:buNone/>
               <a:defRPr sz="1650" b="0">
                 <a:solidFill>
                   <a:srgbClr val="163447"/>
@@ -12403,6 +12677,7 @@
               </a:defRPr>
             </a:lvl7pPr>
             <a:lvl8pPr>
+              <a:buNone/>
               <a:defRPr sz="1650" b="0">
                 <a:solidFill>
                   <a:srgbClr val="163447"/>
@@ -12413,6 +12688,7 @@
               </a:defRPr>
             </a:lvl8pPr>
             <a:lvl9pPr>
+              <a:buNone/>
               <a:defRPr sz="1650" b="0">
                 <a:solidFill>
                   <a:srgbClr val="163447"/>
@@ -12425,6 +12701,7 @@
           </a:lstStyle>
           <a:p xmlns:a="http://schemas.openxmlformats.org/drawingml/2006/main">
             <a:pPr>
+              <a:buNone/>
               <a:defRPr sz="1650" b="0">
                 <a:solidFill>
                   <a:srgbClr val="163447"/>
@@ -12448,6 +12725,7 @@
           </a:p>
           <a:p xmlns:a="http://schemas.openxmlformats.org/drawingml/2006/main">
             <a:pPr>
+              <a:buNone/>
               <a:defRPr sz="1650" b="0">
                 <a:solidFill>
                   <a:srgbClr val="163447"/>
@@ -12471,6 +12749,7 @@
           </a:p>
           <a:p xmlns:a="http://schemas.openxmlformats.org/drawingml/2006/main">
             <a:pPr>
+              <a:buNone/>
               <a:defRPr sz="1650" b="0">
                 <a:solidFill>
                   <a:srgbClr val="163447"/>
@@ -12571,6 +12850,7 @@
               </a:defRPr>
             </a:defPPr>
             <a:lvl1pPr>
+              <a:buNone/>
               <a:defRPr sz="1875" b="1">
                 <a:solidFill>
                   <a:srgbClr val="163447"/>
@@ -12581,6 +12861,7 @@
               </a:defRPr>
             </a:lvl1pPr>
             <a:lvl2pPr>
+              <a:buNone/>
               <a:defRPr sz="1875" b="1">
                 <a:solidFill>
                   <a:srgbClr val="163447"/>
@@ -12591,6 +12872,7 @@
               </a:defRPr>
             </a:lvl2pPr>
             <a:lvl3pPr>
+              <a:buNone/>
               <a:defRPr sz="1875" b="1">
                 <a:solidFill>
                   <a:srgbClr val="163447"/>
@@ -12601,6 +12883,7 @@
               </a:defRPr>
             </a:lvl3pPr>
             <a:lvl4pPr>
+              <a:buNone/>
               <a:defRPr sz="1875" b="1">
                 <a:solidFill>
                   <a:srgbClr val="163447"/>
@@ -12611,6 +12894,7 @@
               </a:defRPr>
             </a:lvl4pPr>
             <a:lvl5pPr>
+              <a:buNone/>
               <a:defRPr sz="1875" b="1">
                 <a:solidFill>
                   <a:srgbClr val="163447"/>
@@ -12621,6 +12905,7 @@
               </a:defRPr>
             </a:lvl5pPr>
             <a:lvl6pPr>
+              <a:buNone/>
               <a:defRPr sz="1875" b="1">
                 <a:solidFill>
                   <a:srgbClr val="163447"/>
@@ -12631,6 +12916,7 @@
               </a:defRPr>
             </a:lvl6pPr>
             <a:lvl7pPr>
+              <a:buNone/>
               <a:defRPr sz="1875" b="1">
                 <a:solidFill>
                   <a:srgbClr val="163447"/>
@@ -12641,6 +12927,7 @@
               </a:defRPr>
             </a:lvl7pPr>
             <a:lvl8pPr>
+              <a:buNone/>
               <a:defRPr sz="1875" b="1">
                 <a:solidFill>
                   <a:srgbClr val="163447"/>
@@ -12651,6 +12938,7 @@
               </a:defRPr>
             </a:lvl8pPr>
             <a:lvl9pPr>
+              <a:buNone/>
               <a:defRPr sz="1875" b="1">
                 <a:solidFill>
                   <a:srgbClr val="163447"/>
@@ -12663,6 +12951,7 @@
           </a:lstStyle>
           <a:p xmlns:a="http://schemas.openxmlformats.org/drawingml/2006/main">
             <a:pPr>
+              <a:buNone/>
               <a:defRPr sz="1875" b="1">
                 <a:solidFill>
                   <a:srgbClr val="163447"/>
@@ -12730,6 +13019,7 @@
               </a:defRPr>
             </a:defPPr>
             <a:lvl1pPr>
+              <a:buNone/>
               <a:defRPr sz="1650" b="0">
                 <a:solidFill>
                   <a:srgbClr val="163447"/>
@@ -12740,6 +13030,7 @@
               </a:defRPr>
             </a:lvl1pPr>
             <a:lvl2pPr>
+              <a:buNone/>
               <a:defRPr sz="1650" b="0">
                 <a:solidFill>
                   <a:srgbClr val="163447"/>
@@ -12750,6 +13041,7 @@
               </a:defRPr>
             </a:lvl2pPr>
             <a:lvl3pPr>
+              <a:buNone/>
               <a:defRPr sz="1650" b="0">
                 <a:solidFill>
                   <a:srgbClr val="163447"/>
@@ -12760,6 +13052,7 @@
               </a:defRPr>
             </a:lvl3pPr>
             <a:lvl4pPr>
+              <a:buNone/>
               <a:defRPr sz="1650" b="0">
                 <a:solidFill>
                   <a:srgbClr val="163447"/>
@@ -12770,6 +13063,7 @@
               </a:defRPr>
             </a:lvl4pPr>
             <a:lvl5pPr>
+              <a:buNone/>
               <a:defRPr sz="1650" b="0">
                 <a:solidFill>
                   <a:srgbClr val="163447"/>
@@ -12780,6 +13074,7 @@
               </a:defRPr>
             </a:lvl5pPr>
             <a:lvl6pPr>
+              <a:buNone/>
               <a:defRPr sz="1650" b="0">
                 <a:solidFill>
                   <a:srgbClr val="163447"/>
@@ -12790,6 +13085,7 @@
               </a:defRPr>
             </a:lvl6pPr>
             <a:lvl7pPr>
+              <a:buNone/>
               <a:defRPr sz="1650" b="0">
                 <a:solidFill>
                   <a:srgbClr val="163447"/>
@@ -12800,6 +13096,7 @@
               </a:defRPr>
             </a:lvl7pPr>
             <a:lvl8pPr>
+              <a:buNone/>
               <a:defRPr sz="1650" b="0">
                 <a:solidFill>
                   <a:srgbClr val="163447"/>
@@ -12810,6 +13107,7 @@
               </a:defRPr>
             </a:lvl8pPr>
             <a:lvl9pPr>
+              <a:buNone/>
               <a:defRPr sz="1650" b="0">
                 <a:solidFill>
                   <a:srgbClr val="163447"/>
@@ -12822,6 +13120,7 @@
           </a:lstStyle>
           <a:p xmlns:a="http://schemas.openxmlformats.org/drawingml/2006/main">
             <a:pPr>
+              <a:buNone/>
               <a:defRPr sz="1650" b="0">
                 <a:solidFill>
                   <a:srgbClr val="163447"/>
@@ -12845,6 +13144,7 @@
           </a:p>
           <a:p xmlns:a="http://schemas.openxmlformats.org/drawingml/2006/main">
             <a:pPr>
+              <a:buNone/>
               <a:defRPr sz="1650" b="0">
                 <a:solidFill>
                   <a:srgbClr val="163447"/>
@@ -12868,6 +13168,7 @@
           </a:p>
           <a:p xmlns:a="http://schemas.openxmlformats.org/drawingml/2006/main">
             <a:pPr>
+              <a:buNone/>
               <a:defRPr sz="1650" b="0">
                 <a:solidFill>
                   <a:srgbClr val="163447"/>
@@ -12968,6 +13269,7 @@
               </a:defRPr>
             </a:defPPr>
             <a:lvl1pPr>
+              <a:buNone/>
               <a:defRPr sz="1875" b="1">
                 <a:solidFill>
                   <a:srgbClr val="163447"/>
@@ -12978,6 +13280,7 @@
               </a:defRPr>
             </a:lvl1pPr>
             <a:lvl2pPr>
+              <a:buNone/>
               <a:defRPr sz="1875" b="1">
                 <a:solidFill>
                   <a:srgbClr val="163447"/>
@@ -12988,6 +13291,7 @@
               </a:defRPr>
             </a:lvl2pPr>
             <a:lvl3pPr>
+              <a:buNone/>
               <a:defRPr sz="1875" b="1">
                 <a:solidFill>
                   <a:srgbClr val="163447"/>
@@ -12998,6 +13302,7 @@
               </a:defRPr>
             </a:lvl3pPr>
             <a:lvl4pPr>
+              <a:buNone/>
               <a:defRPr sz="1875" b="1">
                 <a:solidFill>
                   <a:srgbClr val="163447"/>
@@ -13008,6 +13313,7 @@
               </a:defRPr>
             </a:lvl4pPr>
             <a:lvl5pPr>
+              <a:buNone/>
               <a:defRPr sz="1875" b="1">
                 <a:solidFill>
                   <a:srgbClr val="163447"/>
@@ -13018,6 +13324,7 @@
               </a:defRPr>
             </a:lvl5pPr>
             <a:lvl6pPr>
+              <a:buNone/>
               <a:defRPr sz="1875" b="1">
                 <a:solidFill>
                   <a:srgbClr val="163447"/>
@@ -13028,6 +13335,7 @@
               </a:defRPr>
             </a:lvl6pPr>
             <a:lvl7pPr>
+              <a:buNone/>
               <a:defRPr sz="1875" b="1">
                 <a:solidFill>
                   <a:srgbClr val="163447"/>
@@ -13038,6 +13346,7 @@
               </a:defRPr>
             </a:lvl7pPr>
             <a:lvl8pPr>
+              <a:buNone/>
               <a:defRPr sz="1875" b="1">
                 <a:solidFill>
                   <a:srgbClr val="163447"/>
@@ -13048,6 +13357,7 @@
               </a:defRPr>
             </a:lvl8pPr>
             <a:lvl9pPr>
+              <a:buNone/>
               <a:defRPr sz="1875" b="1">
                 <a:solidFill>
                   <a:srgbClr val="163447"/>
@@ -13060,6 +13370,7 @@
           </a:lstStyle>
           <a:p xmlns:a="http://schemas.openxmlformats.org/drawingml/2006/main">
             <a:pPr>
+              <a:buNone/>
               <a:defRPr sz="1875" b="1">
                 <a:solidFill>
                   <a:srgbClr val="163447"/>
@@ -13127,6 +13438,7 @@
               </a:defRPr>
             </a:defPPr>
             <a:lvl1pPr>
+              <a:buNone/>
               <a:defRPr sz="1650" b="0">
                 <a:solidFill>
                   <a:srgbClr val="163447"/>
@@ -13137,6 +13449,7 @@
               </a:defRPr>
             </a:lvl1pPr>
             <a:lvl2pPr>
+              <a:buNone/>
               <a:defRPr sz="1650" b="0">
                 <a:solidFill>
                   <a:srgbClr val="163447"/>
@@ -13147,6 +13460,7 @@
               </a:defRPr>
             </a:lvl2pPr>
             <a:lvl3pPr>
+              <a:buNone/>
               <a:defRPr sz="1650" b="0">
                 <a:solidFill>
                   <a:srgbClr val="163447"/>
@@ -13157,6 +13471,7 @@
               </a:defRPr>
             </a:lvl3pPr>
             <a:lvl4pPr>
+              <a:buNone/>
               <a:defRPr sz="1650" b="0">
                 <a:solidFill>
                   <a:srgbClr val="163447"/>
@@ -13167,6 +13482,7 @@
               </a:defRPr>
             </a:lvl4pPr>
             <a:lvl5pPr>
+              <a:buNone/>
               <a:defRPr sz="1650" b="0">
                 <a:solidFill>
                   <a:srgbClr val="163447"/>
@@ -13177,6 +13493,7 @@
               </a:defRPr>
             </a:lvl5pPr>
             <a:lvl6pPr>
+              <a:buNone/>
               <a:defRPr sz="1650" b="0">
                 <a:solidFill>
                   <a:srgbClr val="163447"/>
@@ -13187,6 +13504,7 @@
               </a:defRPr>
             </a:lvl6pPr>
             <a:lvl7pPr>
+              <a:buNone/>
               <a:defRPr sz="1650" b="0">
                 <a:solidFill>
                   <a:srgbClr val="163447"/>
@@ -13197,6 +13515,7 @@
               </a:defRPr>
             </a:lvl7pPr>
             <a:lvl8pPr>
+              <a:buNone/>
               <a:defRPr sz="1650" b="0">
                 <a:solidFill>
                   <a:srgbClr val="163447"/>
@@ -13207,6 +13526,7 @@
               </a:defRPr>
             </a:lvl8pPr>
             <a:lvl9pPr>
+              <a:buNone/>
               <a:defRPr sz="1650" b="0">
                 <a:solidFill>
                   <a:srgbClr val="163447"/>
@@ -13219,6 +13539,7 @@
           </a:lstStyle>
           <a:p xmlns:a="http://schemas.openxmlformats.org/drawingml/2006/main">
             <a:pPr>
+              <a:buNone/>
               <a:defRPr sz="1650" b="0">
                 <a:solidFill>
                   <a:srgbClr val="163447"/>
@@ -13242,6 +13563,7 @@
           </a:p>
           <a:p xmlns:a="http://schemas.openxmlformats.org/drawingml/2006/main">
             <a:pPr>
+              <a:buNone/>
               <a:defRPr sz="1650" b="0">
                 <a:solidFill>
                   <a:srgbClr val="163447"/>
@@ -13265,6 +13587,7 @@
           </a:p>
           <a:p xmlns:a="http://schemas.openxmlformats.org/drawingml/2006/main">
             <a:pPr>
+              <a:buNone/>
               <a:defRPr sz="1650" b="0">
                 <a:solidFill>
                   <a:srgbClr val="163447"/>
@@ -13365,6 +13688,7 @@
               </a:defRPr>
             </a:defPPr>
             <a:lvl1pPr>
+              <a:buNone/>
               <a:defRPr sz="1875" b="1">
                 <a:solidFill>
                   <a:srgbClr val="163447"/>
@@ -13375,6 +13699,7 @@
               </a:defRPr>
             </a:lvl1pPr>
             <a:lvl2pPr>
+              <a:buNone/>
               <a:defRPr sz="1875" b="1">
                 <a:solidFill>
                   <a:srgbClr val="163447"/>
@@ -13385,6 +13710,7 @@
               </a:defRPr>
             </a:lvl2pPr>
             <a:lvl3pPr>
+              <a:buNone/>
               <a:defRPr sz="1875" b="1">
                 <a:solidFill>
                   <a:srgbClr val="163447"/>
@@ -13395,6 +13721,7 @@
               </a:defRPr>
             </a:lvl3pPr>
             <a:lvl4pPr>
+              <a:buNone/>
               <a:defRPr sz="1875" b="1">
                 <a:solidFill>
                   <a:srgbClr val="163447"/>
@@ -13405,6 +13732,7 @@
               </a:defRPr>
             </a:lvl4pPr>
             <a:lvl5pPr>
+              <a:buNone/>
               <a:defRPr sz="1875" b="1">
                 <a:solidFill>
                   <a:srgbClr val="163447"/>
@@ -13415,6 +13743,7 @@
               </a:defRPr>
             </a:lvl5pPr>
             <a:lvl6pPr>
+              <a:buNone/>
               <a:defRPr sz="1875" b="1">
                 <a:solidFill>
                   <a:srgbClr val="163447"/>
@@ -13425,6 +13754,7 @@
               </a:defRPr>
             </a:lvl6pPr>
             <a:lvl7pPr>
+              <a:buNone/>
               <a:defRPr sz="1875" b="1">
                 <a:solidFill>
                   <a:srgbClr val="163447"/>
@@ -13435,6 +13765,7 @@
               </a:defRPr>
             </a:lvl7pPr>
             <a:lvl8pPr>
+              <a:buNone/>
               <a:defRPr sz="1875" b="1">
                 <a:solidFill>
                   <a:srgbClr val="163447"/>
@@ -13445,6 +13776,7 @@
               </a:defRPr>
             </a:lvl8pPr>
             <a:lvl9pPr>
+              <a:buNone/>
               <a:defRPr sz="1875" b="1">
                 <a:solidFill>
                   <a:srgbClr val="163447"/>
@@ -13457,6 +13789,7 @@
           </a:lstStyle>
           <a:p xmlns:a="http://schemas.openxmlformats.org/drawingml/2006/main">
             <a:pPr>
+              <a:buNone/>
               <a:defRPr sz="1875" b="1">
                 <a:solidFill>
                   <a:srgbClr val="163447"/>
@@ -13524,6 +13857,7 @@
               </a:defRPr>
             </a:defPPr>
             <a:lvl1pPr>
+              <a:buNone/>
               <a:defRPr sz="1650" b="0">
                 <a:solidFill>
                   <a:srgbClr val="163447"/>
@@ -13534,6 +13868,7 @@
               </a:defRPr>
             </a:lvl1pPr>
             <a:lvl2pPr>
+              <a:buNone/>
               <a:defRPr sz="1650" b="0">
                 <a:solidFill>
                   <a:srgbClr val="163447"/>
@@ -13544,6 +13879,7 @@
               </a:defRPr>
             </a:lvl2pPr>
             <a:lvl3pPr>
+              <a:buNone/>
               <a:defRPr sz="1650" b="0">
                 <a:solidFill>
                   <a:srgbClr val="163447"/>
@@ -13554,6 +13890,7 @@
               </a:defRPr>
             </a:lvl3pPr>
             <a:lvl4pPr>
+              <a:buNone/>
               <a:defRPr sz="1650" b="0">
                 <a:solidFill>
                   <a:srgbClr val="163447"/>
@@ -13564,6 +13901,7 @@
               </a:defRPr>
             </a:lvl4pPr>
             <a:lvl5pPr>
+              <a:buNone/>
               <a:defRPr sz="1650" b="0">
                 <a:solidFill>
                   <a:srgbClr val="163447"/>
@@ -13574,6 +13912,7 @@
               </a:defRPr>
             </a:lvl5pPr>
             <a:lvl6pPr>
+              <a:buNone/>
               <a:defRPr sz="1650" b="0">
                 <a:solidFill>
                   <a:srgbClr val="163447"/>
@@ -13584,6 +13923,7 @@
               </a:defRPr>
             </a:lvl6pPr>
             <a:lvl7pPr>
+              <a:buNone/>
               <a:defRPr sz="1650" b="0">
                 <a:solidFill>
                   <a:srgbClr val="163447"/>
@@ -13594,6 +13934,7 @@
               </a:defRPr>
             </a:lvl7pPr>
             <a:lvl8pPr>
+              <a:buNone/>
               <a:defRPr sz="1650" b="0">
                 <a:solidFill>
                   <a:srgbClr val="163447"/>
@@ -13604,6 +13945,7 @@
               </a:defRPr>
             </a:lvl8pPr>
             <a:lvl9pPr>
+              <a:buNone/>
               <a:defRPr sz="1650" b="0">
                 <a:solidFill>
                   <a:srgbClr val="163447"/>
@@ -13616,6 +13958,7 @@
           </a:lstStyle>
           <a:p xmlns:a="http://schemas.openxmlformats.org/drawingml/2006/main">
             <a:pPr>
+              <a:buNone/>
               <a:defRPr sz="1650" b="0">
                 <a:solidFill>
                   <a:srgbClr val="163447"/>
@@ -13639,6 +13982,7 @@
           </a:p>
           <a:p xmlns:a="http://schemas.openxmlformats.org/drawingml/2006/main">
             <a:pPr>
+              <a:buNone/>
               <a:defRPr sz="1650" b="0">
                 <a:solidFill>
                   <a:srgbClr val="163447"/>
@@ -13662,6 +14006,7 @@
           </a:p>
           <a:p xmlns:a="http://schemas.openxmlformats.org/drawingml/2006/main">
             <a:pPr>
+              <a:buNone/>
               <a:defRPr sz="1650" b="0">
                 <a:solidFill>
                   <a:srgbClr val="163447"/>
@@ -13762,6 +14107,7 @@
               </a:defRPr>
             </a:defPPr>
             <a:lvl1pPr>
+              <a:buNone/>
               <a:defRPr sz="1875" b="1">
                 <a:solidFill>
                   <a:srgbClr val="163447"/>
@@ -13772,6 +14118,7 @@
               </a:defRPr>
             </a:lvl1pPr>
             <a:lvl2pPr>
+              <a:buNone/>
               <a:defRPr sz="1875" b="1">
                 <a:solidFill>
                   <a:srgbClr val="163447"/>
@@ -13782,6 +14129,7 @@
               </a:defRPr>
             </a:lvl2pPr>
             <a:lvl3pPr>
+              <a:buNone/>
               <a:defRPr sz="1875" b="1">
                 <a:solidFill>
                   <a:srgbClr val="163447"/>
@@ -13792,6 +14140,7 @@
               </a:defRPr>
             </a:lvl3pPr>
             <a:lvl4pPr>
+              <a:buNone/>
               <a:defRPr sz="1875" b="1">
                 <a:solidFill>
                   <a:srgbClr val="163447"/>
@@ -13802,6 +14151,7 @@
               </a:defRPr>
             </a:lvl4pPr>
             <a:lvl5pPr>
+              <a:buNone/>
               <a:defRPr sz="1875" b="1">
                 <a:solidFill>
                   <a:srgbClr val="163447"/>
@@ -13812,6 +14162,7 @@
               </a:defRPr>
             </a:lvl5pPr>
             <a:lvl6pPr>
+              <a:buNone/>
               <a:defRPr sz="1875" b="1">
                 <a:solidFill>
                   <a:srgbClr val="163447"/>
@@ -13822,6 +14173,7 @@
               </a:defRPr>
             </a:lvl6pPr>
             <a:lvl7pPr>
+              <a:buNone/>
               <a:defRPr sz="1875" b="1">
                 <a:solidFill>
                   <a:srgbClr val="163447"/>
@@ -13832,6 +14184,7 @@
               </a:defRPr>
             </a:lvl7pPr>
             <a:lvl8pPr>
+              <a:buNone/>
               <a:defRPr sz="1875" b="1">
                 <a:solidFill>
                   <a:srgbClr val="163447"/>
@@ -13842,6 +14195,7 @@
               </a:defRPr>
             </a:lvl8pPr>
             <a:lvl9pPr>
+              <a:buNone/>
               <a:defRPr sz="1875" b="1">
                 <a:solidFill>
                   <a:srgbClr val="163447"/>
@@ -13854,6 +14208,7 @@
           </a:lstStyle>
           <a:p xmlns:a="http://schemas.openxmlformats.org/drawingml/2006/main">
             <a:pPr>
+              <a:buNone/>
               <a:defRPr sz="1875" b="1">
                 <a:solidFill>
                   <a:srgbClr val="163447"/>
@@ -13921,6 +14276,7 @@
               </a:defRPr>
             </a:defPPr>
             <a:lvl1pPr>
+              <a:buNone/>
               <a:defRPr sz="1650" b="0">
                 <a:solidFill>
                   <a:srgbClr val="163447"/>
@@ -13931,6 +14287,7 @@
               </a:defRPr>
             </a:lvl1pPr>
             <a:lvl2pPr>
+              <a:buNone/>
               <a:defRPr sz="1650" b="0">
                 <a:solidFill>
                   <a:srgbClr val="163447"/>
@@ -13941,6 +14298,7 @@
               </a:defRPr>
             </a:lvl2pPr>
             <a:lvl3pPr>
+              <a:buNone/>
               <a:defRPr sz="1650" b="0">
                 <a:solidFill>
                   <a:srgbClr val="163447"/>
@@ -13951,6 +14309,7 @@
               </a:defRPr>
             </a:lvl3pPr>
             <a:lvl4pPr>
+              <a:buNone/>
               <a:defRPr sz="1650" b="0">
                 <a:solidFill>
                   <a:srgbClr val="163447"/>
@@ -13961,6 +14320,7 @@
               </a:defRPr>
             </a:lvl4pPr>
             <a:lvl5pPr>
+              <a:buNone/>
               <a:defRPr sz="1650" b="0">
                 <a:solidFill>
                   <a:srgbClr val="163447"/>
@@ -13971,6 +14331,7 @@
               </a:defRPr>
             </a:lvl5pPr>
             <a:lvl6pPr>
+              <a:buNone/>
               <a:defRPr sz="1650" b="0">
                 <a:solidFill>
                   <a:srgbClr val="163447"/>
@@ -13981,6 +14342,7 @@
               </a:defRPr>
             </a:lvl6pPr>
             <a:lvl7pPr>
+              <a:buNone/>
               <a:defRPr sz="1650" b="0">
                 <a:solidFill>
                   <a:srgbClr val="163447"/>
@@ -13991,6 +14353,7 @@
               </a:defRPr>
             </a:lvl7pPr>
             <a:lvl8pPr>
+              <a:buNone/>
               <a:defRPr sz="1650" b="0">
                 <a:solidFill>
                   <a:srgbClr val="163447"/>
@@ -14001,6 +14364,7 @@
               </a:defRPr>
             </a:lvl8pPr>
             <a:lvl9pPr>
+              <a:buNone/>
               <a:defRPr sz="1650" b="0">
                 <a:solidFill>
                   <a:srgbClr val="163447"/>
@@ -14013,6 +14377,7 @@
           </a:lstStyle>
           <a:p xmlns:a="http://schemas.openxmlformats.org/drawingml/2006/main">
             <a:pPr>
+              <a:buNone/>
               <a:defRPr sz="1650" b="0">
                 <a:solidFill>
                   <a:srgbClr val="163447"/>
@@ -14036,6 +14401,7 @@
           </a:p>
           <a:p xmlns:a="http://schemas.openxmlformats.org/drawingml/2006/main">
             <a:pPr>
+              <a:buNone/>
               <a:defRPr sz="1650" b="0">
                 <a:solidFill>
                   <a:srgbClr val="163447"/>
@@ -14103,6 +14469,7 @@
               </a:defRPr>
             </a:defPPr>
             <a:lvl1pPr>
+              <a:buNone/>
               <a:defRPr sz="1500" b="0">
                 <a:solidFill>
                   <a:srgbClr val="163447"/>
@@ -14113,6 +14480,7 @@
               </a:defRPr>
             </a:lvl1pPr>
             <a:lvl2pPr>
+              <a:buNone/>
               <a:defRPr sz="1500" b="0">
                 <a:solidFill>
                   <a:srgbClr val="163447"/>
@@ -14123,6 +14491,7 @@
               </a:defRPr>
             </a:lvl2pPr>
             <a:lvl3pPr>
+              <a:buNone/>
               <a:defRPr sz="1500" b="0">
                 <a:solidFill>
                   <a:srgbClr val="163447"/>
@@ -14133,6 +14502,7 @@
               </a:defRPr>
             </a:lvl3pPr>
             <a:lvl4pPr>
+              <a:buNone/>
               <a:defRPr sz="1500" b="0">
                 <a:solidFill>
                   <a:srgbClr val="163447"/>
@@ -14143,6 +14513,7 @@
               </a:defRPr>
             </a:lvl4pPr>
             <a:lvl5pPr>
+              <a:buNone/>
               <a:defRPr sz="1500" b="0">
                 <a:solidFill>
                   <a:srgbClr val="163447"/>
@@ -14153,6 +14524,7 @@
               </a:defRPr>
             </a:lvl5pPr>
             <a:lvl6pPr>
+              <a:buNone/>
               <a:defRPr sz="1500" b="0">
                 <a:solidFill>
                   <a:srgbClr val="163447"/>
@@ -14163,6 +14535,7 @@
               </a:defRPr>
             </a:lvl6pPr>
             <a:lvl7pPr>
+              <a:buNone/>
               <a:defRPr sz="1500" b="0">
                 <a:solidFill>
                   <a:srgbClr val="163447"/>
@@ -14173,6 +14546,7 @@
               </a:defRPr>
             </a:lvl7pPr>
             <a:lvl8pPr>
+              <a:buNone/>
               <a:defRPr sz="1500" b="0">
                 <a:solidFill>
                   <a:srgbClr val="163447"/>
@@ -14183,6 +14557,7 @@
               </a:defRPr>
             </a:lvl8pPr>
             <a:lvl9pPr>
+              <a:buNone/>
               <a:defRPr sz="1500" b="0">
                 <a:solidFill>
                   <a:srgbClr val="163447"/>
@@ -14195,6 +14570,7 @@
           </a:lstStyle>
           <a:p xmlns:a="http://schemas.openxmlformats.org/drawingml/2006/main">
             <a:pPr>
+              <a:buNone/>
               <a:defRPr sz="1500" b="0">
                 <a:solidFill>
                   <a:srgbClr val="163447"/>
@@ -14262,6 +14638,7 @@
               </a:defRPr>
             </a:defPPr>
             <a:lvl1pPr>
+              <a:buNone/>
               <a:defRPr sz="1350" b="0">
                 <a:solidFill>
                   <a:srgbClr val="163447"/>
@@ -14272,6 +14649,7 @@
               </a:defRPr>
             </a:lvl1pPr>
             <a:lvl2pPr>
+              <a:buNone/>
               <a:defRPr sz="1350" b="0">
                 <a:solidFill>
                   <a:srgbClr val="163447"/>
@@ -14282,6 +14660,7 @@
               </a:defRPr>
             </a:lvl2pPr>
             <a:lvl3pPr>
+              <a:buNone/>
               <a:defRPr sz="1350" b="0">
                 <a:solidFill>
                   <a:srgbClr val="163447"/>
@@ -14292,6 +14671,7 @@
               </a:defRPr>
             </a:lvl3pPr>
             <a:lvl4pPr>
+              <a:buNone/>
               <a:defRPr sz="1350" b="0">
                 <a:solidFill>
                   <a:srgbClr val="163447"/>
@@ -14302,6 +14682,7 @@
               </a:defRPr>
             </a:lvl4pPr>
             <a:lvl5pPr>
+              <a:buNone/>
               <a:defRPr sz="1350" b="0">
                 <a:solidFill>
                   <a:srgbClr val="163447"/>
@@ -14312,6 +14693,7 @@
               </a:defRPr>
             </a:lvl5pPr>
             <a:lvl6pPr>
+              <a:buNone/>
               <a:defRPr sz="1350" b="0">
                 <a:solidFill>
                   <a:srgbClr val="163447"/>
@@ -14322,6 +14704,7 @@
               </a:defRPr>
             </a:lvl6pPr>
             <a:lvl7pPr>
+              <a:buNone/>
               <a:defRPr sz="1350" b="0">
                 <a:solidFill>
                   <a:srgbClr val="163447"/>
@@ -14332,6 +14715,7 @@
               </a:defRPr>
             </a:lvl7pPr>
             <a:lvl8pPr>
+              <a:buNone/>
               <a:defRPr sz="1350" b="0">
                 <a:solidFill>
                   <a:srgbClr val="163447"/>
@@ -14342,6 +14726,7 @@
               </a:defRPr>
             </a:lvl8pPr>
             <a:lvl9pPr>
+              <a:buNone/>
               <a:defRPr sz="1350" b="0">
                 <a:solidFill>
                   <a:srgbClr val="163447"/>
@@ -14354,6 +14739,7 @@
           </a:lstStyle>
           <a:p xmlns:a="http://schemas.openxmlformats.org/drawingml/2006/main">
             <a:pPr>
+              <a:buNone/>
               <a:defRPr sz="1350" b="0">
                 <a:solidFill>
                   <a:srgbClr val="163447"/>
@@ -14421,6 +14807,7 @@
               </a:defRPr>
             </a:defPPr>
             <a:lvl1pPr>
+              <a:buNone/>
               <a:defRPr sz="1500" b="0">
                 <a:solidFill>
                   <a:srgbClr val="163447"/>
@@ -14431,6 +14818,7 @@
               </a:defRPr>
             </a:lvl1pPr>
             <a:lvl2pPr>
+              <a:buNone/>
               <a:defRPr sz="1500" b="0">
                 <a:solidFill>
                   <a:srgbClr val="163447"/>
@@ -14441,6 +14829,7 @@
               </a:defRPr>
             </a:lvl2pPr>
             <a:lvl3pPr>
+              <a:buNone/>
               <a:defRPr sz="1500" b="0">
                 <a:solidFill>
                   <a:srgbClr val="163447"/>
@@ -14451,6 +14840,7 @@
               </a:defRPr>
             </a:lvl3pPr>
             <a:lvl4pPr>
+              <a:buNone/>
               <a:defRPr sz="1500" b="0">
                 <a:solidFill>
                   <a:srgbClr val="163447"/>
@@ -14461,6 +14851,7 @@
               </a:defRPr>
             </a:lvl4pPr>
             <a:lvl5pPr>
+              <a:buNone/>
               <a:defRPr sz="1500" b="0">
                 <a:solidFill>
                   <a:srgbClr val="163447"/>
@@ -14471,6 +14862,7 @@
               </a:defRPr>
             </a:lvl5pPr>
             <a:lvl6pPr>
+              <a:buNone/>
               <a:defRPr sz="1500" b="0">
                 <a:solidFill>
                   <a:srgbClr val="163447"/>
@@ -14481,6 +14873,7 @@
               </a:defRPr>
             </a:lvl6pPr>
             <a:lvl7pPr>
+              <a:buNone/>
               <a:defRPr sz="1500" b="0">
                 <a:solidFill>
                   <a:srgbClr val="163447"/>
@@ -14491,6 +14884,7 @@
               </a:defRPr>
             </a:lvl7pPr>
             <a:lvl8pPr>
+              <a:buNone/>
               <a:defRPr sz="1500" b="0">
                 <a:solidFill>
                   <a:srgbClr val="163447"/>
@@ -14501,6 +14895,7 @@
               </a:defRPr>
             </a:lvl8pPr>
             <a:lvl9pPr>
+              <a:buNone/>
               <a:defRPr sz="1500" b="0">
                 <a:solidFill>
                   <a:srgbClr val="163447"/>
@@ -14513,6 +14908,7 @@
           </a:lstStyle>
           <a:p xmlns:a="http://schemas.openxmlformats.org/drawingml/2006/main">
             <a:pPr>
+              <a:buNone/>
               <a:defRPr sz="1500" b="0">
                 <a:solidFill>
                   <a:srgbClr val="163447"/>
@@ -14580,6 +14976,7 @@
               </a:defRPr>
             </a:defPPr>
             <a:lvl1pPr>
+              <a:buNone/>
               <a:defRPr sz="1350" b="0">
                 <a:solidFill>
                   <a:srgbClr val="163447"/>
@@ -14590,6 +14987,7 @@
               </a:defRPr>
             </a:lvl1pPr>
             <a:lvl2pPr>
+              <a:buNone/>
               <a:defRPr sz="1350" b="0">
                 <a:solidFill>
                   <a:srgbClr val="163447"/>
@@ -14600,6 +14998,7 @@
               </a:defRPr>
             </a:lvl2pPr>
             <a:lvl3pPr>
+              <a:buNone/>
               <a:defRPr sz="1350" b="0">
                 <a:solidFill>
                   <a:srgbClr val="163447"/>
@@ -14610,6 +15009,7 @@
               </a:defRPr>
             </a:lvl3pPr>
             <a:lvl4pPr>
+              <a:buNone/>
               <a:defRPr sz="1350" b="0">
                 <a:solidFill>
                   <a:srgbClr val="163447"/>
@@ -14620,6 +15020,7 @@
               </a:defRPr>
             </a:lvl4pPr>
             <a:lvl5pPr>
+              <a:buNone/>
               <a:defRPr sz="1350" b="0">
                 <a:solidFill>
                   <a:srgbClr val="163447"/>
@@ -14630,6 +15031,7 @@
               </a:defRPr>
             </a:lvl5pPr>
             <a:lvl6pPr>
+              <a:buNone/>
               <a:defRPr sz="1350" b="0">
                 <a:solidFill>
                   <a:srgbClr val="163447"/>
@@ -14640,6 +15042,7 @@
               </a:defRPr>
             </a:lvl6pPr>
             <a:lvl7pPr>
+              <a:buNone/>
               <a:defRPr sz="1350" b="0">
                 <a:solidFill>
                   <a:srgbClr val="163447"/>
@@ -14650,6 +15053,7 @@
               </a:defRPr>
             </a:lvl7pPr>
             <a:lvl8pPr>
+              <a:buNone/>
               <a:defRPr sz="1350" b="0">
                 <a:solidFill>
                   <a:srgbClr val="163447"/>
@@ -14660,6 +15064,7 @@
               </a:defRPr>
             </a:lvl8pPr>
             <a:lvl9pPr>
+              <a:buNone/>
               <a:defRPr sz="1350" b="0">
                 <a:solidFill>
                   <a:srgbClr val="163447"/>
@@ -14672,6 +15077,7 @@
           </a:lstStyle>
           <a:p xmlns:a="http://schemas.openxmlformats.org/drawingml/2006/main">
             <a:pPr>
+              <a:buNone/>
               <a:defRPr sz="1350" b="0">
                 <a:solidFill>
                   <a:srgbClr val="163447"/>
@@ -14768,6 +15174,7 @@
               </a:defRPr>
             </a:defPPr>
             <a:lvl1pPr>
+              <a:buNone/>
               <a:defRPr sz="3300" b="1">
                 <a:solidFill>
                   <a:srgbClr val="163447"/>
@@ -14778,6 +15185,7 @@
               </a:defRPr>
             </a:lvl1pPr>
             <a:lvl2pPr>
+              <a:buNone/>
               <a:defRPr sz="3300" b="1">
                 <a:solidFill>
                   <a:srgbClr val="163447"/>
@@ -14788,6 +15196,7 @@
               </a:defRPr>
             </a:lvl2pPr>
             <a:lvl3pPr>
+              <a:buNone/>
               <a:defRPr sz="3300" b="1">
                 <a:solidFill>
                   <a:srgbClr val="163447"/>
@@ -14798,6 +15207,7 @@
               </a:defRPr>
             </a:lvl3pPr>
             <a:lvl4pPr>
+              <a:buNone/>
               <a:defRPr sz="3300" b="1">
                 <a:solidFill>
                   <a:srgbClr val="163447"/>
@@ -14808,6 +15218,7 @@
               </a:defRPr>
             </a:lvl4pPr>
             <a:lvl5pPr>
+              <a:buNone/>
               <a:defRPr sz="3300" b="1">
                 <a:solidFill>
                   <a:srgbClr val="163447"/>
@@ -14818,6 +15229,7 @@
               </a:defRPr>
             </a:lvl5pPr>
             <a:lvl6pPr>
+              <a:buNone/>
               <a:defRPr sz="3300" b="1">
                 <a:solidFill>
                   <a:srgbClr val="163447"/>
@@ -14828,6 +15240,7 @@
               </a:defRPr>
             </a:lvl6pPr>
             <a:lvl7pPr>
+              <a:buNone/>
               <a:defRPr sz="3300" b="1">
                 <a:solidFill>
                   <a:srgbClr val="163447"/>
@@ -14838,6 +15251,7 @@
               </a:defRPr>
             </a:lvl7pPr>
             <a:lvl8pPr>
+              <a:buNone/>
               <a:defRPr sz="3300" b="1">
                 <a:solidFill>
                   <a:srgbClr val="163447"/>
@@ -14848,6 +15262,7 @@
               </a:defRPr>
             </a:lvl8pPr>
             <a:lvl9pPr>
+              <a:buNone/>
               <a:defRPr sz="3300" b="1">
                 <a:solidFill>
                   <a:srgbClr val="163447"/>
@@ -14860,6 +15275,7 @@
           </a:lstStyle>
           <a:p xmlns:a="http://schemas.openxmlformats.org/drawingml/2006/main">
             <a:pPr>
+              <a:buNone/>
               <a:defRPr sz="3300" b="1">
                 <a:solidFill>
                   <a:srgbClr val="163447"/>
@@ -14927,6 +15343,7 @@
               </a:defRPr>
             </a:defPPr>
             <a:lvl1pPr>
+              <a:buNone/>
               <a:defRPr sz="1125" b="0">
                 <a:solidFill>
                   <a:srgbClr val="52636D"/>
@@ -14937,6 +15354,7 @@
               </a:defRPr>
             </a:lvl1pPr>
             <a:lvl2pPr>
+              <a:buNone/>
               <a:defRPr sz="1125" b="0">
                 <a:solidFill>
                   <a:srgbClr val="52636D"/>
@@ -14947,6 +15365,7 @@
               </a:defRPr>
             </a:lvl2pPr>
             <a:lvl3pPr>
+              <a:buNone/>
               <a:defRPr sz="1125" b="0">
                 <a:solidFill>
                   <a:srgbClr val="52636D"/>
@@ -14957,6 +15376,7 @@
               </a:defRPr>
             </a:lvl3pPr>
             <a:lvl4pPr>
+              <a:buNone/>
               <a:defRPr sz="1125" b="0">
                 <a:solidFill>
                   <a:srgbClr val="52636D"/>
@@ -14967,6 +15387,7 @@
               </a:defRPr>
             </a:lvl4pPr>
             <a:lvl5pPr>
+              <a:buNone/>
               <a:defRPr sz="1125" b="0">
                 <a:solidFill>
                   <a:srgbClr val="52636D"/>
@@ -14977,6 +15398,7 @@
               </a:defRPr>
             </a:lvl5pPr>
             <a:lvl6pPr>
+              <a:buNone/>
               <a:defRPr sz="1125" b="0">
                 <a:solidFill>
                   <a:srgbClr val="52636D"/>
@@ -14987,6 +15409,7 @@
               </a:defRPr>
             </a:lvl6pPr>
             <a:lvl7pPr>
+              <a:buNone/>
               <a:defRPr sz="1125" b="0">
                 <a:solidFill>
                   <a:srgbClr val="52636D"/>
@@ -14997,6 +15420,7 @@
               </a:defRPr>
             </a:lvl7pPr>
             <a:lvl8pPr>
+              <a:buNone/>
               <a:defRPr sz="1125" b="0">
                 <a:solidFill>
                   <a:srgbClr val="52636D"/>
@@ -15007,6 +15431,7 @@
               </a:defRPr>
             </a:lvl8pPr>
             <a:lvl9pPr>
+              <a:buNone/>
               <a:defRPr sz="1125" b="0">
                 <a:solidFill>
                   <a:srgbClr val="52636D"/>
@@ -15019,6 +15444,7 @@
           </a:lstStyle>
           <a:p xmlns:a="http://schemas.openxmlformats.org/drawingml/2006/main">
             <a:pPr>
+              <a:buNone/>
               <a:defRPr sz="1125" b="0">
                 <a:solidFill>
                   <a:srgbClr val="52636D"/>
@@ -15086,6 +15512,7 @@
               </a:defRPr>
             </a:defPPr>
             <a:lvl1pPr>
+              <a:buNone/>
               <a:defRPr sz="1125" b="0">
                 <a:solidFill>
                   <a:srgbClr val="52636D"/>
@@ -15096,6 +15523,7 @@
               </a:defRPr>
             </a:lvl1pPr>
             <a:lvl2pPr>
+              <a:buNone/>
               <a:defRPr sz="1125" b="0">
                 <a:solidFill>
                   <a:srgbClr val="52636D"/>
@@ -15106,6 +15534,7 @@
               </a:defRPr>
             </a:lvl2pPr>
             <a:lvl3pPr>
+              <a:buNone/>
               <a:defRPr sz="1125" b="0">
                 <a:solidFill>
                   <a:srgbClr val="52636D"/>
@@ -15116,6 +15545,7 @@
               </a:defRPr>
             </a:lvl3pPr>
             <a:lvl4pPr>
+              <a:buNone/>
               <a:defRPr sz="1125" b="0">
                 <a:solidFill>
                   <a:srgbClr val="52636D"/>
@@ -15126,6 +15556,7 @@
               </a:defRPr>
             </a:lvl4pPr>
             <a:lvl5pPr>
+              <a:buNone/>
               <a:defRPr sz="1125" b="0">
                 <a:solidFill>
                   <a:srgbClr val="52636D"/>
@@ -15136,6 +15567,7 @@
               </a:defRPr>
             </a:lvl5pPr>
             <a:lvl6pPr>
+              <a:buNone/>
               <a:defRPr sz="1125" b="0">
                 <a:solidFill>
                   <a:srgbClr val="52636D"/>
@@ -15146,6 +15578,7 @@
               </a:defRPr>
             </a:lvl6pPr>
             <a:lvl7pPr>
+              <a:buNone/>
               <a:defRPr sz="1125" b="0">
                 <a:solidFill>
                   <a:srgbClr val="52636D"/>
@@ -15156,6 +15589,7 @@
               </a:defRPr>
             </a:lvl7pPr>
             <a:lvl8pPr>
+              <a:buNone/>
               <a:defRPr sz="1125" b="0">
                 <a:solidFill>
                   <a:srgbClr val="52636D"/>
@@ -15166,6 +15600,7 @@
               </a:defRPr>
             </a:lvl8pPr>
             <a:lvl9pPr>
+              <a:buNone/>
               <a:defRPr sz="1125" b="0">
                 <a:solidFill>
                   <a:srgbClr val="52636D"/>
@@ -15178,6 +15613,7 @@
           </a:lstStyle>
           <a:p xmlns:a="http://schemas.openxmlformats.org/drawingml/2006/main">
             <a:pPr>
+              <a:buNone/>
               <a:defRPr sz="1125" b="0">
                 <a:solidFill>
                   <a:srgbClr val="52636D"/>
@@ -15206,7 +15642,7 @@
           <p:cNvPr id="4" name="">
             <a:extLst xmlns:a="http://schemas.openxmlformats.org/drawingml/2006/main">
               <a:ext uri="{FF2B5EF4-FFF2-40B4-BE49-F238E27FC236}">
-                <a16:creationId xmlns:a16="http://schemas.microsoft.com/office/drawing/2014/main" id="{CAA27D37-0B95-42EC-988C-42D70A20EA63}"/>
+                <a16:creationId xmlns:a16="http://schemas.microsoft.com/office/drawing/2014/main" id="{950936E1-02A1-4DBE-929D-1293097E88D8}"/>
               </a:ext>
             </a:extLst>
           </p:cNvPr>
@@ -15780,6 +16216,7 @@
               </a:defRPr>
             </a:defPPr>
             <a:lvl1pPr>
+              <a:buNone/>
               <a:defRPr sz="1950" b="0">
                 <a:solidFill>
                   <a:srgbClr val="52636D"/>
@@ -15790,6 +16227,7 @@
               </a:defRPr>
             </a:lvl1pPr>
             <a:lvl2pPr>
+              <a:buNone/>
               <a:defRPr sz="1950" b="0">
                 <a:solidFill>
                   <a:srgbClr val="52636D"/>
@@ -15800,6 +16238,7 @@
               </a:defRPr>
             </a:lvl2pPr>
             <a:lvl3pPr>
+              <a:buNone/>
               <a:defRPr sz="1950" b="0">
                 <a:solidFill>
                   <a:srgbClr val="52636D"/>
@@ -15810,6 +16249,7 @@
               </a:defRPr>
             </a:lvl3pPr>
             <a:lvl4pPr>
+              <a:buNone/>
               <a:defRPr sz="1950" b="0">
                 <a:solidFill>
                   <a:srgbClr val="52636D"/>
@@ -15820,6 +16260,7 @@
               </a:defRPr>
             </a:lvl4pPr>
             <a:lvl5pPr>
+              <a:buNone/>
               <a:defRPr sz="1950" b="0">
                 <a:solidFill>
                   <a:srgbClr val="52636D"/>
@@ -15830,6 +16271,7 @@
               </a:defRPr>
             </a:lvl5pPr>
             <a:lvl6pPr>
+              <a:buNone/>
               <a:defRPr sz="1950" b="0">
                 <a:solidFill>
                   <a:srgbClr val="52636D"/>
@@ -15840,6 +16282,7 @@
               </a:defRPr>
             </a:lvl6pPr>
             <a:lvl7pPr>
+              <a:buNone/>
               <a:defRPr sz="1950" b="0">
                 <a:solidFill>
                   <a:srgbClr val="52636D"/>
@@ -15850,6 +16293,7 @@
               </a:defRPr>
             </a:lvl7pPr>
             <a:lvl8pPr>
+              <a:buNone/>
               <a:defRPr sz="1950" b="0">
                 <a:solidFill>
                   <a:srgbClr val="52636D"/>
@@ -15860,6 +16304,7 @@
               </a:defRPr>
             </a:lvl8pPr>
             <a:lvl9pPr>
+              <a:buNone/>
               <a:defRPr sz="1950" b="0">
                 <a:solidFill>
                   <a:srgbClr val="52636D"/>
@@ -15872,6 +16317,7 @@
           </a:lstStyle>
           <a:p xmlns:a="http://schemas.openxmlformats.org/drawingml/2006/main">
             <a:pPr>
+              <a:buNone/>
               <a:defRPr sz="1950" b="0">
                 <a:solidFill>
                   <a:srgbClr val="52636D"/>
@@ -15968,6 +16414,7 @@
               </a:defRPr>
             </a:defPPr>
             <a:lvl1pPr>
+              <a:buNone/>
               <a:defRPr sz="3300" b="1">
                 <a:solidFill>
                   <a:srgbClr val="163447"/>
@@ -15978,6 +16425,7 @@
               </a:defRPr>
             </a:lvl1pPr>
             <a:lvl2pPr>
+              <a:buNone/>
               <a:defRPr sz="3300" b="1">
                 <a:solidFill>
                   <a:srgbClr val="163447"/>
@@ -15988,6 +16436,7 @@
               </a:defRPr>
             </a:lvl2pPr>
             <a:lvl3pPr>
+              <a:buNone/>
               <a:defRPr sz="3300" b="1">
                 <a:solidFill>
                   <a:srgbClr val="163447"/>
@@ -15998,6 +16447,7 @@
               </a:defRPr>
             </a:lvl3pPr>
             <a:lvl4pPr>
+              <a:buNone/>
               <a:defRPr sz="3300" b="1">
                 <a:solidFill>
                   <a:srgbClr val="163447"/>
@@ -16008,6 +16458,7 @@
               </a:defRPr>
             </a:lvl4pPr>
             <a:lvl5pPr>
+              <a:buNone/>
               <a:defRPr sz="3300" b="1">
                 <a:solidFill>
                   <a:srgbClr val="163447"/>
@@ -16018,6 +16469,7 @@
               </a:defRPr>
             </a:lvl5pPr>
             <a:lvl6pPr>
+              <a:buNone/>
               <a:defRPr sz="3300" b="1">
                 <a:solidFill>
                   <a:srgbClr val="163447"/>
@@ -16028,6 +16480,7 @@
               </a:defRPr>
             </a:lvl6pPr>
             <a:lvl7pPr>
+              <a:buNone/>
               <a:defRPr sz="3300" b="1">
                 <a:solidFill>
                   <a:srgbClr val="163447"/>
@@ -16038,6 +16491,7 @@
               </a:defRPr>
             </a:lvl7pPr>
             <a:lvl8pPr>
+              <a:buNone/>
               <a:defRPr sz="3300" b="1">
                 <a:solidFill>
                   <a:srgbClr val="163447"/>
@@ -16048,6 +16502,7 @@
               </a:defRPr>
             </a:lvl8pPr>
             <a:lvl9pPr>
+              <a:buNone/>
               <a:defRPr sz="3300" b="1">
                 <a:solidFill>
                   <a:srgbClr val="163447"/>
@@ -16060,6 +16515,7 @@
           </a:lstStyle>
           <a:p xmlns:a="http://schemas.openxmlformats.org/drawingml/2006/main">
             <a:pPr>
+              <a:buNone/>
               <a:defRPr sz="3300" b="1">
                 <a:solidFill>
                   <a:srgbClr val="163447"/>
@@ -16127,6 +16583,7 @@
               </a:defRPr>
             </a:defPPr>
             <a:lvl1pPr>
+              <a:buNone/>
               <a:defRPr sz="1125" b="0">
                 <a:solidFill>
                   <a:srgbClr val="52636D"/>
@@ -16137,6 +16594,7 @@
               </a:defRPr>
             </a:lvl1pPr>
             <a:lvl2pPr>
+              <a:buNone/>
               <a:defRPr sz="1125" b="0">
                 <a:solidFill>
                   <a:srgbClr val="52636D"/>
@@ -16147,6 +16605,7 @@
               </a:defRPr>
             </a:lvl2pPr>
             <a:lvl3pPr>
+              <a:buNone/>
               <a:defRPr sz="1125" b="0">
                 <a:solidFill>
                   <a:srgbClr val="52636D"/>
@@ -16157,6 +16616,7 @@
               </a:defRPr>
             </a:lvl3pPr>
             <a:lvl4pPr>
+              <a:buNone/>
               <a:defRPr sz="1125" b="0">
                 <a:solidFill>
                   <a:srgbClr val="52636D"/>
@@ -16167,6 +16627,7 @@
               </a:defRPr>
             </a:lvl4pPr>
             <a:lvl5pPr>
+              <a:buNone/>
               <a:defRPr sz="1125" b="0">
                 <a:solidFill>
                   <a:srgbClr val="52636D"/>
@@ -16177,6 +16638,7 @@
               </a:defRPr>
             </a:lvl5pPr>
             <a:lvl6pPr>
+              <a:buNone/>
               <a:defRPr sz="1125" b="0">
                 <a:solidFill>
                   <a:srgbClr val="52636D"/>
@@ -16187,6 +16649,7 @@
               </a:defRPr>
             </a:lvl6pPr>
             <a:lvl7pPr>
+              <a:buNone/>
               <a:defRPr sz="1125" b="0">
                 <a:solidFill>
                   <a:srgbClr val="52636D"/>
@@ -16197,6 +16660,7 @@
               </a:defRPr>
             </a:lvl7pPr>
             <a:lvl8pPr>
+              <a:buNone/>
               <a:defRPr sz="1125" b="0">
                 <a:solidFill>
                   <a:srgbClr val="52636D"/>
@@ -16207,6 +16671,7 @@
               </a:defRPr>
             </a:lvl8pPr>
             <a:lvl9pPr>
+              <a:buNone/>
               <a:defRPr sz="1125" b="0">
                 <a:solidFill>
                   <a:srgbClr val="52636D"/>
@@ -16219,6 +16684,7 @@
           </a:lstStyle>
           <a:p xmlns:a="http://schemas.openxmlformats.org/drawingml/2006/main">
             <a:pPr>
+              <a:buNone/>
               <a:defRPr sz="1125" b="0">
                 <a:solidFill>
                   <a:srgbClr val="52636D"/>
@@ -16286,6 +16752,7 @@
               </a:defRPr>
             </a:defPPr>
             <a:lvl1pPr>
+              <a:buNone/>
               <a:defRPr sz="1125" b="0">
                 <a:solidFill>
                   <a:srgbClr val="52636D"/>
@@ -16296,6 +16763,7 @@
               </a:defRPr>
             </a:lvl1pPr>
             <a:lvl2pPr>
+              <a:buNone/>
               <a:defRPr sz="1125" b="0">
                 <a:solidFill>
                   <a:srgbClr val="52636D"/>
@@ -16306,6 +16774,7 @@
               </a:defRPr>
             </a:lvl2pPr>
             <a:lvl3pPr>
+              <a:buNone/>
               <a:defRPr sz="1125" b="0">
                 <a:solidFill>
                   <a:srgbClr val="52636D"/>
@@ -16316,6 +16785,7 @@
               </a:defRPr>
             </a:lvl3pPr>
             <a:lvl4pPr>
+              <a:buNone/>
               <a:defRPr sz="1125" b="0">
                 <a:solidFill>
                   <a:srgbClr val="52636D"/>
@@ -16326,6 +16796,7 @@
               </a:defRPr>
             </a:lvl4pPr>
             <a:lvl5pPr>
+              <a:buNone/>
               <a:defRPr sz="1125" b="0">
                 <a:solidFill>
                   <a:srgbClr val="52636D"/>
@@ -16336,6 +16807,7 @@
               </a:defRPr>
             </a:lvl5pPr>
             <a:lvl6pPr>
+              <a:buNone/>
               <a:defRPr sz="1125" b="0">
                 <a:solidFill>
                   <a:srgbClr val="52636D"/>
@@ -16346,6 +16818,7 @@
               </a:defRPr>
             </a:lvl6pPr>
             <a:lvl7pPr>
+              <a:buNone/>
               <a:defRPr sz="1125" b="0">
                 <a:solidFill>
                   <a:srgbClr val="52636D"/>
@@ -16356,6 +16829,7 @@
               </a:defRPr>
             </a:lvl7pPr>
             <a:lvl8pPr>
+              <a:buNone/>
               <a:defRPr sz="1125" b="0">
                 <a:solidFill>
                   <a:srgbClr val="52636D"/>
@@ -16366,6 +16840,7 @@
               </a:defRPr>
             </a:lvl8pPr>
             <a:lvl9pPr>
+              <a:buNone/>
               <a:defRPr sz="1125" b="0">
                 <a:solidFill>
                   <a:srgbClr val="52636D"/>
@@ -16378,6 +16853,7 @@
           </a:lstStyle>
           <a:p xmlns:a="http://schemas.openxmlformats.org/drawingml/2006/main">
             <a:pPr>
+              <a:buNone/>
               <a:defRPr sz="1125" b="0">
                 <a:solidFill>
                   <a:srgbClr val="52636D"/>
@@ -16406,7 +16882,7 @@
           <p:cNvPr id="4" name="">
             <a:extLst xmlns:a="http://schemas.openxmlformats.org/drawingml/2006/main">
               <a:ext uri="{FF2B5EF4-FFF2-40B4-BE49-F238E27FC236}">
-                <a16:creationId xmlns:a16="http://schemas.microsoft.com/office/drawing/2014/main" id="{673DA811-74F3-4261-AFDC-EB359098E5F3}"/>
+                <a16:creationId xmlns:a16="http://schemas.microsoft.com/office/drawing/2014/main" id="{89355E4E-D7F2-41E7-B880-1AA0C1CD7D00}"/>
               </a:ext>
             </a:extLst>
           </p:cNvPr>
@@ -17102,6 +17578,7 @@
               </a:defRPr>
             </a:defPPr>
             <a:lvl1pPr>
+              <a:buNone/>
               <a:defRPr sz="1650" b="0">
                 <a:solidFill>
                   <a:srgbClr val="52636D"/>
@@ -17112,6 +17589,7 @@
               </a:defRPr>
             </a:lvl1pPr>
             <a:lvl2pPr>
+              <a:buNone/>
               <a:defRPr sz="1650" b="0">
                 <a:solidFill>
                   <a:srgbClr val="52636D"/>
@@ -17122,6 +17600,7 @@
               </a:defRPr>
             </a:lvl2pPr>
             <a:lvl3pPr>
+              <a:buNone/>
               <a:defRPr sz="1650" b="0">
                 <a:solidFill>
                   <a:srgbClr val="52636D"/>
@@ -17132,6 +17611,7 @@
               </a:defRPr>
             </a:lvl3pPr>
             <a:lvl4pPr>
+              <a:buNone/>
               <a:defRPr sz="1650" b="0">
                 <a:solidFill>
                   <a:srgbClr val="52636D"/>
@@ -17142,6 +17622,7 @@
               </a:defRPr>
             </a:lvl4pPr>
             <a:lvl5pPr>
+              <a:buNone/>
               <a:defRPr sz="1650" b="0">
                 <a:solidFill>
                   <a:srgbClr val="52636D"/>
@@ -17152,6 +17633,7 @@
               </a:defRPr>
             </a:lvl5pPr>
             <a:lvl6pPr>
+              <a:buNone/>
               <a:defRPr sz="1650" b="0">
                 <a:solidFill>
                   <a:srgbClr val="52636D"/>
@@ -17162,6 +17644,7 @@
               </a:defRPr>
             </a:lvl6pPr>
             <a:lvl7pPr>
+              <a:buNone/>
               <a:defRPr sz="1650" b="0">
                 <a:solidFill>
                   <a:srgbClr val="52636D"/>
@@ -17172,6 +17655,7 @@
               </a:defRPr>
             </a:lvl7pPr>
             <a:lvl8pPr>
+              <a:buNone/>
               <a:defRPr sz="1650" b="0">
                 <a:solidFill>
                   <a:srgbClr val="52636D"/>
@@ -17182,6 +17666,7 @@
               </a:defRPr>
             </a:lvl8pPr>
             <a:lvl9pPr>
+              <a:buNone/>
               <a:defRPr sz="1650" b="0">
                 <a:solidFill>
                   <a:srgbClr val="52636D"/>
@@ -17194,6 +17679,7 @@
           </a:lstStyle>
           <a:p xmlns:a="http://schemas.openxmlformats.org/drawingml/2006/main">
             <a:pPr>
+              <a:buNone/>
               <a:defRPr sz="1650" b="0">
                 <a:solidFill>
                   <a:srgbClr val="52636D"/>
@@ -17261,6 +17747,7 @@
               </a:defRPr>
             </a:defPPr>
             <a:lvl1pPr>
+              <a:buNone/>
               <a:defRPr sz="1650" b="0">
                 <a:solidFill>
                   <a:srgbClr val="52636D"/>
@@ -17271,6 +17758,7 @@
               </a:defRPr>
             </a:lvl1pPr>
             <a:lvl2pPr>
+              <a:buNone/>
               <a:defRPr sz="1650" b="0">
                 <a:solidFill>
                   <a:srgbClr val="52636D"/>
@@ -17281,6 +17769,7 @@
               </a:defRPr>
             </a:lvl2pPr>
             <a:lvl3pPr>
+              <a:buNone/>
               <a:defRPr sz="1650" b="0">
                 <a:solidFill>
                   <a:srgbClr val="52636D"/>
@@ -17291,6 +17780,7 @@
               </a:defRPr>
             </a:lvl3pPr>
             <a:lvl4pPr>
+              <a:buNone/>
               <a:defRPr sz="1650" b="0">
                 <a:solidFill>
                   <a:srgbClr val="52636D"/>
@@ -17301,6 +17791,7 @@
               </a:defRPr>
             </a:lvl4pPr>
             <a:lvl5pPr>
+              <a:buNone/>
               <a:defRPr sz="1650" b="0">
                 <a:solidFill>
                   <a:srgbClr val="52636D"/>
@@ -17311,6 +17802,7 @@
               </a:defRPr>
             </a:lvl5pPr>
             <a:lvl6pPr>
+              <a:buNone/>
               <a:defRPr sz="1650" b="0">
                 <a:solidFill>
                   <a:srgbClr val="52636D"/>
@@ -17321,6 +17813,7 @@
               </a:defRPr>
             </a:lvl6pPr>
             <a:lvl7pPr>
+              <a:buNone/>
               <a:defRPr sz="1650" b="0">
                 <a:solidFill>
                   <a:srgbClr val="52636D"/>
@@ -17331,6 +17824,7 @@
               </a:defRPr>
             </a:lvl7pPr>
             <a:lvl8pPr>
+              <a:buNone/>
               <a:defRPr sz="1650" b="0">
                 <a:solidFill>
                   <a:srgbClr val="52636D"/>
@@ -17341,6 +17835,7 @@
               </a:defRPr>
             </a:lvl8pPr>
             <a:lvl9pPr>
+              <a:buNone/>
               <a:defRPr sz="1650" b="0">
                 <a:solidFill>
                   <a:srgbClr val="52636D"/>
@@ -17353,6 +17848,7 @@
           </a:lstStyle>
           <a:p xmlns:a="http://schemas.openxmlformats.org/drawingml/2006/main">
             <a:pPr>
+              <a:buNone/>
               <a:defRPr sz="1650" b="0">
                 <a:solidFill>
                   <a:srgbClr val="52636D"/>
@@ -17449,6 +17945,7 @@
               </a:defRPr>
             </a:defPPr>
             <a:lvl1pPr>
+              <a:buNone/>
               <a:defRPr sz="3300" b="1">
                 <a:solidFill>
                   <a:srgbClr val="163447"/>
@@ -17459,6 +17956,7 @@
               </a:defRPr>
             </a:lvl1pPr>
             <a:lvl2pPr>
+              <a:buNone/>
               <a:defRPr sz="3300" b="1">
                 <a:solidFill>
                   <a:srgbClr val="163447"/>
@@ -17469,6 +17967,7 @@
               </a:defRPr>
             </a:lvl2pPr>
             <a:lvl3pPr>
+              <a:buNone/>
               <a:defRPr sz="3300" b="1">
                 <a:solidFill>
                   <a:srgbClr val="163447"/>
@@ -17479,6 +17978,7 @@
               </a:defRPr>
             </a:lvl3pPr>
             <a:lvl4pPr>
+              <a:buNone/>
               <a:defRPr sz="3300" b="1">
                 <a:solidFill>
                   <a:srgbClr val="163447"/>
@@ -17489,6 +17989,7 @@
               </a:defRPr>
             </a:lvl4pPr>
             <a:lvl5pPr>
+              <a:buNone/>
               <a:defRPr sz="3300" b="1">
                 <a:solidFill>
                   <a:srgbClr val="163447"/>
@@ -17499,6 +18000,7 @@
               </a:defRPr>
             </a:lvl5pPr>
             <a:lvl6pPr>
+              <a:buNone/>
               <a:defRPr sz="3300" b="1">
                 <a:solidFill>
                   <a:srgbClr val="163447"/>
@@ -17509,6 +18011,7 @@
               </a:defRPr>
             </a:lvl6pPr>
             <a:lvl7pPr>
+              <a:buNone/>
               <a:defRPr sz="3300" b="1">
                 <a:solidFill>
                   <a:srgbClr val="163447"/>
@@ -17519,6 +18022,7 @@
               </a:defRPr>
             </a:lvl7pPr>
             <a:lvl8pPr>
+              <a:buNone/>
               <a:defRPr sz="3300" b="1">
                 <a:solidFill>
                   <a:srgbClr val="163447"/>
@@ -17529,6 +18033,7 @@
               </a:defRPr>
             </a:lvl8pPr>
             <a:lvl9pPr>
+              <a:buNone/>
               <a:defRPr sz="3300" b="1">
                 <a:solidFill>
                   <a:srgbClr val="163447"/>
@@ -17541,6 +18046,7 @@
           </a:lstStyle>
           <a:p xmlns:a="http://schemas.openxmlformats.org/drawingml/2006/main">
             <a:pPr>
+              <a:buNone/>
               <a:defRPr sz="3300" b="1">
                 <a:solidFill>
                   <a:srgbClr val="163447"/>
@@ -17608,6 +18114,7 @@
               </a:defRPr>
             </a:defPPr>
             <a:lvl1pPr>
+              <a:buNone/>
               <a:defRPr sz="1125" b="0">
                 <a:solidFill>
                   <a:srgbClr val="52636D"/>
@@ -17618,6 +18125,7 @@
               </a:defRPr>
             </a:lvl1pPr>
             <a:lvl2pPr>
+              <a:buNone/>
               <a:defRPr sz="1125" b="0">
                 <a:solidFill>
                   <a:srgbClr val="52636D"/>
@@ -17628,6 +18136,7 @@
               </a:defRPr>
             </a:lvl2pPr>
             <a:lvl3pPr>
+              <a:buNone/>
               <a:defRPr sz="1125" b="0">
                 <a:solidFill>
                   <a:srgbClr val="52636D"/>
@@ -17638,6 +18147,7 @@
               </a:defRPr>
             </a:lvl3pPr>
             <a:lvl4pPr>
+              <a:buNone/>
               <a:defRPr sz="1125" b="0">
                 <a:solidFill>
                   <a:srgbClr val="52636D"/>
@@ -17648,6 +18158,7 @@
               </a:defRPr>
             </a:lvl4pPr>
             <a:lvl5pPr>
+              <a:buNone/>
               <a:defRPr sz="1125" b="0">
                 <a:solidFill>
                   <a:srgbClr val="52636D"/>
@@ -17658,6 +18169,7 @@
               </a:defRPr>
             </a:lvl5pPr>
             <a:lvl6pPr>
+              <a:buNone/>
               <a:defRPr sz="1125" b="0">
                 <a:solidFill>
                   <a:srgbClr val="52636D"/>
@@ -17668,6 +18180,7 @@
               </a:defRPr>
             </a:lvl6pPr>
             <a:lvl7pPr>
+              <a:buNone/>
               <a:defRPr sz="1125" b="0">
                 <a:solidFill>
                   <a:srgbClr val="52636D"/>
@@ -17678,6 +18191,7 @@
               </a:defRPr>
             </a:lvl7pPr>
             <a:lvl8pPr>
+              <a:buNone/>
               <a:defRPr sz="1125" b="0">
                 <a:solidFill>
                   <a:srgbClr val="52636D"/>
@@ -17688,6 +18202,7 @@
               </a:defRPr>
             </a:lvl8pPr>
             <a:lvl9pPr>
+              <a:buNone/>
               <a:defRPr sz="1125" b="0">
                 <a:solidFill>
                   <a:srgbClr val="52636D"/>
@@ -17700,6 +18215,7 @@
           </a:lstStyle>
           <a:p xmlns:a="http://schemas.openxmlformats.org/drawingml/2006/main">
             <a:pPr>
+              <a:buNone/>
               <a:defRPr sz="1125" b="0">
                 <a:solidFill>
                   <a:srgbClr val="52636D"/>
@@ -17767,6 +18283,7 @@
               </a:defRPr>
             </a:defPPr>
             <a:lvl1pPr>
+              <a:buNone/>
               <a:defRPr sz="1125" b="0">
                 <a:solidFill>
                   <a:srgbClr val="52636D"/>
@@ -17777,6 +18294,7 @@
               </a:defRPr>
             </a:lvl1pPr>
             <a:lvl2pPr>
+              <a:buNone/>
               <a:defRPr sz="1125" b="0">
                 <a:solidFill>
                   <a:srgbClr val="52636D"/>
@@ -17787,6 +18305,7 @@
               </a:defRPr>
             </a:lvl2pPr>
             <a:lvl3pPr>
+              <a:buNone/>
               <a:defRPr sz="1125" b="0">
                 <a:solidFill>
                   <a:srgbClr val="52636D"/>
@@ -17797,6 +18316,7 @@
               </a:defRPr>
             </a:lvl3pPr>
             <a:lvl4pPr>
+              <a:buNone/>
               <a:defRPr sz="1125" b="0">
                 <a:solidFill>
                   <a:srgbClr val="52636D"/>
@@ -17807,6 +18327,7 @@
               </a:defRPr>
             </a:lvl4pPr>
             <a:lvl5pPr>
+              <a:buNone/>
               <a:defRPr sz="1125" b="0">
                 <a:solidFill>
                   <a:srgbClr val="52636D"/>
@@ -17817,6 +18338,7 @@
               </a:defRPr>
             </a:lvl5pPr>
             <a:lvl6pPr>
+              <a:buNone/>
               <a:defRPr sz="1125" b="0">
                 <a:solidFill>
                   <a:srgbClr val="52636D"/>
@@ -17827,6 +18349,7 @@
               </a:defRPr>
             </a:lvl6pPr>
             <a:lvl7pPr>
+              <a:buNone/>
               <a:defRPr sz="1125" b="0">
                 <a:solidFill>
                   <a:srgbClr val="52636D"/>
@@ -17837,6 +18360,7 @@
               </a:defRPr>
             </a:lvl7pPr>
             <a:lvl8pPr>
+              <a:buNone/>
               <a:defRPr sz="1125" b="0">
                 <a:solidFill>
                   <a:srgbClr val="52636D"/>
@@ -17847,6 +18371,7 @@
               </a:defRPr>
             </a:lvl8pPr>
             <a:lvl9pPr>
+              <a:buNone/>
               <a:defRPr sz="1125" b="0">
                 <a:solidFill>
                   <a:srgbClr val="52636D"/>
@@ -17859,6 +18384,7 @@
           </a:lstStyle>
           <a:p xmlns:a="http://schemas.openxmlformats.org/drawingml/2006/main">
             <a:pPr>
+              <a:buNone/>
               <a:defRPr sz="1125" b="0">
                 <a:solidFill>
                   <a:srgbClr val="52636D"/>
@@ -17887,7 +18413,7 @@
           <p:cNvPr id="4" name="">
             <a:extLst xmlns:a="http://schemas.openxmlformats.org/drawingml/2006/main">
               <a:ext uri="{FF2B5EF4-FFF2-40B4-BE49-F238E27FC236}">
-                <a16:creationId xmlns:a16="http://schemas.microsoft.com/office/drawing/2014/main" id="{41380CA4-608C-4B3E-8855-9D607A786D1E}"/>
+                <a16:creationId xmlns:a16="http://schemas.microsoft.com/office/drawing/2014/main" id="{8C08446A-F2F1-445E-9AFE-30ABAC24B216}"/>
               </a:ext>
             </a:extLst>
           </p:cNvPr>
@@ -18386,6 +18912,7 @@
               </a:defRPr>
             </a:defPPr>
             <a:lvl1pPr>
+              <a:buNone/>
               <a:defRPr sz="2025" b="0">
                 <a:solidFill>
                   <a:srgbClr val="007D87"/>
@@ -18396,6 +18923,7 @@
               </a:defRPr>
             </a:lvl1pPr>
             <a:lvl2pPr>
+              <a:buNone/>
               <a:defRPr sz="2025" b="0">
                 <a:solidFill>
                   <a:srgbClr val="007D87"/>
@@ -18406,6 +18934,7 @@
               </a:defRPr>
             </a:lvl2pPr>
             <a:lvl3pPr>
+              <a:buNone/>
               <a:defRPr sz="2025" b="0">
                 <a:solidFill>
                   <a:srgbClr val="007D87"/>
@@ -18416,6 +18945,7 @@
               </a:defRPr>
             </a:lvl3pPr>
             <a:lvl4pPr>
+              <a:buNone/>
               <a:defRPr sz="2025" b="0">
                 <a:solidFill>
                   <a:srgbClr val="007D87"/>
@@ -18426,6 +18956,7 @@
               </a:defRPr>
             </a:lvl4pPr>
             <a:lvl5pPr>
+              <a:buNone/>
               <a:defRPr sz="2025" b="0">
                 <a:solidFill>
                   <a:srgbClr val="007D87"/>
@@ -18436,6 +18967,7 @@
               </a:defRPr>
             </a:lvl5pPr>
             <a:lvl6pPr>
+              <a:buNone/>
               <a:defRPr sz="2025" b="0">
                 <a:solidFill>
                   <a:srgbClr val="007D87"/>
@@ -18446,6 +18978,7 @@
               </a:defRPr>
             </a:lvl6pPr>
             <a:lvl7pPr>
+              <a:buNone/>
               <a:defRPr sz="2025" b="0">
                 <a:solidFill>
                   <a:srgbClr val="007D87"/>
@@ -18456,6 +18989,7 @@
               </a:defRPr>
             </a:lvl7pPr>
             <a:lvl8pPr>
+              <a:buNone/>
               <a:defRPr sz="2025" b="0">
                 <a:solidFill>
                   <a:srgbClr val="007D87"/>
@@ -18466,6 +19000,7 @@
               </a:defRPr>
             </a:lvl8pPr>
             <a:lvl9pPr>
+              <a:buNone/>
               <a:defRPr sz="2025" b="0">
                 <a:solidFill>
                   <a:srgbClr val="007D87"/>
@@ -18478,6 +19013,7 @@
           </a:lstStyle>
           <a:p xmlns:a="http://schemas.openxmlformats.org/drawingml/2006/main">
             <a:pPr>
+              <a:buNone/>
               <a:defRPr sz="2025" b="0">
                 <a:solidFill>
                   <a:srgbClr val="007D87"/>
@@ -18574,6 +19110,7 @@
               </a:defRPr>
             </a:defPPr>
             <a:lvl1pPr>
+              <a:buNone/>
               <a:defRPr sz="3300" b="1">
                 <a:solidFill>
                   <a:srgbClr val="163447"/>
@@ -18584,6 +19121,7 @@
               </a:defRPr>
             </a:lvl1pPr>
             <a:lvl2pPr>
+              <a:buNone/>
               <a:defRPr sz="3300" b="1">
                 <a:solidFill>
                   <a:srgbClr val="163447"/>
@@ -18594,6 +19132,7 @@
               </a:defRPr>
             </a:lvl2pPr>
             <a:lvl3pPr>
+              <a:buNone/>
               <a:defRPr sz="3300" b="1">
                 <a:solidFill>
                   <a:srgbClr val="163447"/>
@@ -18604,6 +19143,7 @@
               </a:defRPr>
             </a:lvl3pPr>
             <a:lvl4pPr>
+              <a:buNone/>
               <a:defRPr sz="3300" b="1">
                 <a:solidFill>
                   <a:srgbClr val="163447"/>
@@ -18614,6 +19154,7 @@
               </a:defRPr>
             </a:lvl4pPr>
             <a:lvl5pPr>
+              <a:buNone/>
               <a:defRPr sz="3300" b="1">
                 <a:solidFill>
                   <a:srgbClr val="163447"/>
@@ -18624,6 +19165,7 @@
               </a:defRPr>
             </a:lvl5pPr>
             <a:lvl6pPr>
+              <a:buNone/>
               <a:defRPr sz="3300" b="1">
                 <a:solidFill>
                   <a:srgbClr val="163447"/>
@@ -18634,6 +19176,7 @@
               </a:defRPr>
             </a:lvl6pPr>
             <a:lvl7pPr>
+              <a:buNone/>
               <a:defRPr sz="3300" b="1">
                 <a:solidFill>
                   <a:srgbClr val="163447"/>
@@ -18644,6 +19187,7 @@
               </a:defRPr>
             </a:lvl7pPr>
             <a:lvl8pPr>
+              <a:buNone/>
               <a:defRPr sz="3300" b="1">
                 <a:solidFill>
                   <a:srgbClr val="163447"/>
@@ -18654,6 +19198,7 @@
               </a:defRPr>
             </a:lvl8pPr>
             <a:lvl9pPr>
+              <a:buNone/>
               <a:defRPr sz="3300" b="1">
                 <a:solidFill>
                   <a:srgbClr val="163447"/>
@@ -18666,6 +19211,7 @@
           </a:lstStyle>
           <a:p xmlns:a="http://schemas.openxmlformats.org/drawingml/2006/main">
             <a:pPr>
+              <a:buNone/>
               <a:defRPr sz="3300" b="1">
                 <a:solidFill>
                   <a:srgbClr val="163447"/>
@@ -18733,6 +19279,7 @@
               </a:defRPr>
             </a:defPPr>
             <a:lvl1pPr>
+              <a:buNone/>
               <a:defRPr sz="1125" b="0">
                 <a:solidFill>
                   <a:srgbClr val="52636D"/>
@@ -18743,6 +19290,7 @@
               </a:defRPr>
             </a:lvl1pPr>
             <a:lvl2pPr>
+              <a:buNone/>
               <a:defRPr sz="1125" b="0">
                 <a:solidFill>
                   <a:srgbClr val="52636D"/>
@@ -18753,6 +19301,7 @@
               </a:defRPr>
             </a:lvl2pPr>
             <a:lvl3pPr>
+              <a:buNone/>
               <a:defRPr sz="1125" b="0">
                 <a:solidFill>
                   <a:srgbClr val="52636D"/>
@@ -18763,6 +19312,7 @@
               </a:defRPr>
             </a:lvl3pPr>
             <a:lvl4pPr>
+              <a:buNone/>
               <a:defRPr sz="1125" b="0">
                 <a:solidFill>
                   <a:srgbClr val="52636D"/>
@@ -18773,6 +19323,7 @@
               </a:defRPr>
             </a:lvl4pPr>
             <a:lvl5pPr>
+              <a:buNone/>
               <a:defRPr sz="1125" b="0">
                 <a:solidFill>
                   <a:srgbClr val="52636D"/>
@@ -18783,6 +19334,7 @@
               </a:defRPr>
             </a:lvl5pPr>
             <a:lvl6pPr>
+              <a:buNone/>
               <a:defRPr sz="1125" b="0">
                 <a:solidFill>
                   <a:srgbClr val="52636D"/>
@@ -18793,6 +19345,7 @@
               </a:defRPr>
             </a:lvl6pPr>
             <a:lvl7pPr>
+              <a:buNone/>
               <a:defRPr sz="1125" b="0">
                 <a:solidFill>
                   <a:srgbClr val="52636D"/>
@@ -18803,6 +19356,7 @@
               </a:defRPr>
             </a:lvl7pPr>
             <a:lvl8pPr>
+              <a:buNone/>
               <a:defRPr sz="1125" b="0">
                 <a:solidFill>
                   <a:srgbClr val="52636D"/>
@@ -18813,6 +19367,7 @@
               </a:defRPr>
             </a:lvl8pPr>
             <a:lvl9pPr>
+              <a:buNone/>
               <a:defRPr sz="1125" b="0">
                 <a:solidFill>
                   <a:srgbClr val="52636D"/>
@@ -18825,6 +19380,7 @@
           </a:lstStyle>
           <a:p xmlns:a="http://schemas.openxmlformats.org/drawingml/2006/main">
             <a:pPr>
+              <a:buNone/>
               <a:defRPr sz="1125" b="0">
                 <a:solidFill>
                   <a:srgbClr val="52636D"/>
@@ -18892,6 +19448,7 @@
               </a:defRPr>
             </a:defPPr>
             <a:lvl1pPr>
+              <a:buNone/>
               <a:defRPr sz="1125" b="0">
                 <a:solidFill>
                   <a:srgbClr val="52636D"/>
@@ -18902,6 +19459,7 @@
               </a:defRPr>
             </a:lvl1pPr>
             <a:lvl2pPr>
+              <a:buNone/>
               <a:defRPr sz="1125" b="0">
                 <a:solidFill>
                   <a:srgbClr val="52636D"/>
@@ -18912,6 +19470,7 @@
               </a:defRPr>
             </a:lvl2pPr>
             <a:lvl3pPr>
+              <a:buNone/>
               <a:defRPr sz="1125" b="0">
                 <a:solidFill>
                   <a:srgbClr val="52636D"/>
@@ -18922,6 +19481,7 @@
               </a:defRPr>
             </a:lvl3pPr>
             <a:lvl4pPr>
+              <a:buNone/>
               <a:defRPr sz="1125" b="0">
                 <a:solidFill>
                   <a:srgbClr val="52636D"/>
@@ -18932,6 +19492,7 @@
               </a:defRPr>
             </a:lvl4pPr>
             <a:lvl5pPr>
+              <a:buNone/>
               <a:defRPr sz="1125" b="0">
                 <a:solidFill>
                   <a:srgbClr val="52636D"/>
@@ -18942,6 +19503,7 @@
               </a:defRPr>
             </a:lvl5pPr>
             <a:lvl6pPr>
+              <a:buNone/>
               <a:defRPr sz="1125" b="0">
                 <a:solidFill>
                   <a:srgbClr val="52636D"/>
@@ -18952,6 +19514,7 @@
               </a:defRPr>
             </a:lvl6pPr>
             <a:lvl7pPr>
+              <a:buNone/>
               <a:defRPr sz="1125" b="0">
                 <a:solidFill>
                   <a:srgbClr val="52636D"/>
@@ -18962,6 +19525,7 @@
               </a:defRPr>
             </a:lvl7pPr>
             <a:lvl8pPr>
+              <a:buNone/>
               <a:defRPr sz="1125" b="0">
                 <a:solidFill>
                   <a:srgbClr val="52636D"/>
@@ -18972,6 +19536,7 @@
               </a:defRPr>
             </a:lvl8pPr>
             <a:lvl9pPr>
+              <a:buNone/>
               <a:defRPr sz="1125" b="0">
                 <a:solidFill>
                   <a:srgbClr val="52636D"/>
@@ -18984,6 +19549,7 @@
           </a:lstStyle>
           <a:p xmlns:a="http://schemas.openxmlformats.org/drawingml/2006/main">
             <a:pPr>
+              <a:buNone/>
               <a:defRPr sz="1125" b="0">
                 <a:solidFill>
                   <a:srgbClr val="52636D"/>
@@ -19051,6 +19617,7 @@
               </a:defRPr>
             </a:defPPr>
             <a:lvl1pPr>
+              <a:buNone/>
               <a:defRPr sz="2175" b="0">
                 <a:solidFill>
                   <a:srgbClr val="163447"/>
@@ -19061,6 +19628,7 @@
               </a:defRPr>
             </a:lvl1pPr>
             <a:lvl2pPr>
+              <a:buNone/>
               <a:defRPr sz="2175" b="0">
                 <a:solidFill>
                   <a:srgbClr val="163447"/>
@@ -19071,6 +19639,7 @@
               </a:defRPr>
             </a:lvl2pPr>
             <a:lvl3pPr>
+              <a:buNone/>
               <a:defRPr sz="2175" b="0">
                 <a:solidFill>
                   <a:srgbClr val="163447"/>
@@ -19081,6 +19650,7 @@
               </a:defRPr>
             </a:lvl3pPr>
             <a:lvl4pPr>
+              <a:buNone/>
               <a:defRPr sz="2175" b="0">
                 <a:solidFill>
                   <a:srgbClr val="163447"/>
@@ -19091,6 +19661,7 @@
               </a:defRPr>
             </a:lvl4pPr>
             <a:lvl5pPr>
+              <a:buNone/>
               <a:defRPr sz="2175" b="0">
                 <a:solidFill>
                   <a:srgbClr val="163447"/>
@@ -19101,6 +19672,7 @@
               </a:defRPr>
             </a:lvl5pPr>
             <a:lvl6pPr>
+              <a:buNone/>
               <a:defRPr sz="2175" b="0">
                 <a:solidFill>
                   <a:srgbClr val="163447"/>
@@ -19111,6 +19683,7 @@
               </a:defRPr>
             </a:lvl6pPr>
             <a:lvl7pPr>
+              <a:buNone/>
               <a:defRPr sz="2175" b="0">
                 <a:solidFill>
                   <a:srgbClr val="163447"/>
@@ -19121,6 +19694,7 @@
               </a:defRPr>
             </a:lvl7pPr>
             <a:lvl8pPr>
+              <a:buNone/>
               <a:defRPr sz="2175" b="0">
                 <a:solidFill>
                   <a:srgbClr val="163447"/>
@@ -19131,6 +19705,7 @@
               </a:defRPr>
             </a:lvl8pPr>
             <a:lvl9pPr>
+              <a:buNone/>
               <a:defRPr sz="2175" b="0">
                 <a:solidFill>
                   <a:srgbClr val="163447"/>
@@ -19143,6 +19718,7 @@
           </a:lstStyle>
           <a:p xmlns:a="http://schemas.openxmlformats.org/drawingml/2006/main">
             <a:pPr>
+              <a:buNone/>
               <a:defRPr sz="2175" b="0">
                 <a:solidFill>
                   <a:srgbClr val="163447"/>
@@ -19171,7 +19747,7 @@
           <p:cNvPr id="5" name="">
             <a:extLst xmlns:a="http://schemas.openxmlformats.org/drawingml/2006/main">
               <a:ext uri="{FF2B5EF4-FFF2-40B4-BE49-F238E27FC236}">
-                <a16:creationId xmlns:a16="http://schemas.microsoft.com/office/drawing/2014/main" id="{508E1FC0-9638-4C94-8580-E3CB5AC04856}"/>
+                <a16:creationId xmlns:a16="http://schemas.microsoft.com/office/drawing/2014/main" id="{C036030C-48DB-4BEA-A876-1A00E4812F7B}"/>
               </a:ext>
             </a:extLst>
           </p:cNvPr>
@@ -19867,6 +20443,7 @@
               </a:defRPr>
             </a:defPPr>
             <a:lvl1pPr>
+              <a:buNone/>
               <a:defRPr sz="1650" b="0">
                 <a:solidFill>
                   <a:srgbClr val="52636D"/>
@@ -19877,6 +20454,7 @@
               </a:defRPr>
             </a:lvl1pPr>
             <a:lvl2pPr>
+              <a:buNone/>
               <a:defRPr sz="1650" b="0">
                 <a:solidFill>
                   <a:srgbClr val="52636D"/>
@@ -19887,6 +20465,7 @@
               </a:defRPr>
             </a:lvl2pPr>
             <a:lvl3pPr>
+              <a:buNone/>
               <a:defRPr sz="1650" b="0">
                 <a:solidFill>
                   <a:srgbClr val="52636D"/>
@@ -19897,6 +20476,7 @@
               </a:defRPr>
             </a:lvl3pPr>
             <a:lvl4pPr>
+              <a:buNone/>
               <a:defRPr sz="1650" b="0">
                 <a:solidFill>
                   <a:srgbClr val="52636D"/>
@@ -19907,6 +20487,7 @@
               </a:defRPr>
             </a:lvl4pPr>
             <a:lvl5pPr>
+              <a:buNone/>
               <a:defRPr sz="1650" b="0">
                 <a:solidFill>
                   <a:srgbClr val="52636D"/>
@@ -19917,6 +20498,7 @@
               </a:defRPr>
             </a:lvl5pPr>
             <a:lvl6pPr>
+              <a:buNone/>
               <a:defRPr sz="1650" b="0">
                 <a:solidFill>
                   <a:srgbClr val="52636D"/>
@@ -19927,6 +20509,7 @@
               </a:defRPr>
             </a:lvl6pPr>
             <a:lvl7pPr>
+              <a:buNone/>
               <a:defRPr sz="1650" b="0">
                 <a:solidFill>
                   <a:srgbClr val="52636D"/>
@@ -19937,6 +20520,7 @@
               </a:defRPr>
             </a:lvl7pPr>
             <a:lvl8pPr>
+              <a:buNone/>
               <a:defRPr sz="1650" b="0">
                 <a:solidFill>
                   <a:srgbClr val="52636D"/>
@@ -19947,6 +20531,7 @@
               </a:defRPr>
             </a:lvl8pPr>
             <a:lvl9pPr>
+              <a:buNone/>
               <a:defRPr sz="1650" b="0">
                 <a:solidFill>
                   <a:srgbClr val="52636D"/>
@@ -19959,6 +20544,7 @@
           </a:lstStyle>
           <a:p xmlns:a="http://schemas.openxmlformats.org/drawingml/2006/main">
             <a:pPr>
+              <a:buNone/>
               <a:defRPr sz="1650" b="0">
                 <a:solidFill>
                   <a:srgbClr val="52636D"/>

--- a/docs/presentacion/Presentacion_Dizeo_Progreso1_Final.pptx
+++ b/docs/presentacion/Presentacion_Dizeo_Progreso1_Final.pptx
@@ -2,21 +2,22 @@
 <file path=ppt/presentation.xml><?xml version="1.0" encoding="utf-8"?>
 <p:presentation xmlns:p="http://schemas.openxmlformats.org/presentationml/2006/main">
   <p:sldMasterIdLst>
-    <p:sldMasterId xmlns:r="http://schemas.openxmlformats.org/officeDocument/2006/relationships" id="2147483648" r:id="Ra1f97873872248a5"/>
+    <p:sldMasterId xmlns:r="http://schemas.openxmlformats.org/officeDocument/2006/relationships" id="2147483648" r:id="R445c424bf6594143"/>
   </p:sldMasterIdLst>
   <p:notesMasterIdLst>
-    <p:notesMasterId xmlns:r="http://schemas.openxmlformats.org/officeDocument/2006/relationships" r:id="Rc906890459cd4c1b"/>
+    <p:notesMasterId xmlns:r="http://schemas.openxmlformats.org/officeDocument/2006/relationships" r:id="R828899608fb44b57"/>
   </p:notesMasterIdLst>
   <p:sldIdLst>
-    <p:sldId xmlns:r="http://schemas.openxmlformats.org/officeDocument/2006/relationships" id="256" r:id="R38e29fbc0cbf4866"/>
-    <p:sldId xmlns:r="http://schemas.openxmlformats.org/officeDocument/2006/relationships" id="257" r:id="R737f38eb24f844d5"/>
-    <p:sldId xmlns:r="http://schemas.openxmlformats.org/officeDocument/2006/relationships" id="258" r:id="Rdf1b1be7091a4ab0"/>
-    <p:sldId xmlns:r="http://schemas.openxmlformats.org/officeDocument/2006/relationships" id="259" r:id="Ra9813e979bd84f23"/>
-    <p:sldId xmlns:r="http://schemas.openxmlformats.org/officeDocument/2006/relationships" id="260" r:id="R13be76aa63e84134"/>
-    <p:sldId xmlns:r="http://schemas.openxmlformats.org/officeDocument/2006/relationships" id="261" r:id="R7a50fddc341440d9"/>
-    <p:sldId xmlns:r="http://schemas.openxmlformats.org/officeDocument/2006/relationships" id="262" r:id="R29873640be094b15"/>
-    <p:sldId xmlns:r="http://schemas.openxmlformats.org/officeDocument/2006/relationships" id="263" r:id="Refe0e633653e4762"/>
-    <p:sldId xmlns:r="http://schemas.openxmlformats.org/officeDocument/2006/relationships" id="264" r:id="R706fbefed9144b61"/>
+    <p:sldId xmlns:r="http://schemas.openxmlformats.org/officeDocument/2006/relationships" id="256" r:id="R4285ebf0e5b24f06"/>
+    <p:sldId xmlns:r="http://schemas.openxmlformats.org/officeDocument/2006/relationships" id="257" r:id="R2dfd61af009c46a6"/>
+    <p:sldId xmlns:r="http://schemas.openxmlformats.org/officeDocument/2006/relationships" id="258" r:id="R93e821adfd0446b3"/>
+    <p:sldId xmlns:r="http://schemas.openxmlformats.org/officeDocument/2006/relationships" id="259" r:id="R1d6e7e918f5849ef"/>
+    <p:sldId xmlns:r="http://schemas.openxmlformats.org/officeDocument/2006/relationships" id="260" r:id="R0a69cb61971c4025"/>
+    <p:sldId xmlns:r="http://schemas.openxmlformats.org/officeDocument/2006/relationships" id="261" r:id="R90971be44fdb4f2d"/>
+    <p:sldId xmlns:r="http://schemas.openxmlformats.org/officeDocument/2006/relationships" id="262" r:id="R24a6093e65224957"/>
+    <p:sldId xmlns:r="http://schemas.openxmlformats.org/officeDocument/2006/relationships" id="263" r:id="Rc313b81223164680"/>
+    <p:sldId xmlns:r="http://schemas.openxmlformats.org/officeDocument/2006/relationships" id="264" r:id="R37c4cfa65e994dda"/>
+    <p:sldId xmlns:r="http://schemas.openxmlformats.org/officeDocument/2006/relationships" id="265" r:id="Rd0fe48a3aba249d6"/>
   </p:sldIdLst>
   <p:sldSz cx="12192000" cy="6858000"/>
   <p:notesSz cx="6858000" cy="9144000"/>
@@ -505,6 +506,101 @@
 </p:notes>
 </file>
 
+<file path=ppt/notesSlides/notesSlide10.xml><?xml version="1.0" encoding="utf-8"?>
+<p:notes xmlns:p="http://schemas.openxmlformats.org/presentationml/2006/main">
+  <p:cSld>
+    <p:spTree>
+      <p:nvGrpSpPr>
+        <p:cNvPr id="1" name=""/>
+        <p:cNvGrpSpPr/>
+        <p:nvPr/>
+      </p:nvGrpSpPr>
+      <p:grpSpPr>
+        <a:xfrm xmlns:a="http://schemas.openxmlformats.org/drawingml/2006/main"/>
+      </p:grpSpPr>
+      <p:sp>
+        <p:nvSpPr>
+          <p:cNvPr id="2" name="Slide Image Placeholder 1"/>
+          <p:cNvSpPr>
+            <a:spLocks xmlns:a="http://schemas.openxmlformats.org/drawingml/2006/main" noGrp="1"/>
+          </p:cNvSpPr>
+          <p:nvPr>
+            <p:ph type="sldImg" idx="0"/>
+          </p:nvPr>
+        </p:nvSpPr>
+        <p:spPr/>
+      </p:sp>
+      <p:sp>
+        <p:nvSpPr>
+          <p:cNvPr id="3" name="Notes Placeholder 2"/>
+          <p:cNvSpPr>
+            <a:spLocks xmlns:a="http://schemas.openxmlformats.org/drawingml/2006/main" noGrp="1"/>
+          </p:cNvSpPr>
+          <p:nvPr>
+            <p:ph type="body" idx="1"/>
+          </p:nvPr>
+        </p:nvSpPr>
+        <p:spPr/>
+        <p:txBody>
+          <a:bodyPr xmlns:a="http://schemas.openxmlformats.org/drawingml/2006/main"/>
+          <a:lstStyle xmlns:a="http://schemas.openxmlformats.org/drawingml/2006/main"/>
+          <a:p xmlns:a="http://schemas.openxmlformats.org/drawingml/2006/main">
+            <a:r>
+              <a:t>Expositor: Esteban. Tiempo: 70 segundos.</a:t>
+            </a:r>
+          </a:p>
+          <a:p xmlns:a="http://schemas.openxmlformats.org/drawingml/2006/main">
+            <a:r>
+              <a:t/>
+            </a:r>
+          </a:p>
+          <a:p xmlns:a="http://schemas.openxmlformats.org/drawingml/2006/main">
+            <a:r>
+              <a:t>Daniel implementará Obras y Seguimiento. Esteban asumirá Trabajadores y Asignación. Julián trabajará Actividades, el comparador y la cola de prioridad, además del UML y la comparación técnica. La integración y la revisión serán compartidas. El repositorio inicial contiene el README y las carpetas del informe, presentación, UML editable y observaciones del docente. Para Progreso 2 se mitigarán los cruces revisando intervalos y jornada, los empates con un comparador único, la cola desactualizada retirando y reinsertando y los datos incorrectos con validaciones. Se conservarán las observaciones del aula virtual. ChatGPT apoyó el análisis, la redacción y el diseño preliminar; el uso está declarado en el informe y Julián confirmó la revisión grupal del informe y del UML. El equipo mantiene la responsabilidad sobre el contenido.</a:t>
+            </a:r>
+          </a:p>
+          <a:p xmlns:a="http://schemas.openxmlformats.org/drawingml/2006/main">
+            <a:r>
+              <a:t/>
+            </a:r>
+          </a:p>
+          <a:p xmlns:a="http://schemas.openxmlformats.org/drawingml/2006/main">
+            <a:r>
+              <a:t>Fuentes APA 7</a:t>
+            </a:r>
+          </a:p>
+          <a:p xmlns:a="http://schemas.openxmlformats.org/drawingml/2006/main">
+            <a:r>
+              <a:t/>
+            </a:r>
+          </a:p>
+        </p:txBody>
+      </p:sp>
+      <p:sp>
+        <p:nvSpPr>
+          <p:cNvPr id="4" name="Slide Number Placeholder 3"/>
+          <p:cNvSpPr>
+            <a:spLocks xmlns:a="http://schemas.openxmlformats.org/drawingml/2006/main" noGrp="1"/>
+          </p:cNvSpPr>
+          <p:nvPr>
+            <p:ph type="sldNum" idx="5"/>
+          </p:nvPr>
+        </p:nvSpPr>
+        <p:spPr/>
+        <p:txBody>
+          <a:bodyPr xmlns:a="http://schemas.openxmlformats.org/drawingml/2006/main"/>
+          <a:lstStyle xmlns:a="http://schemas.openxmlformats.org/drawingml/2006/main"/>
+          <a:p xmlns:a="http://schemas.openxmlformats.org/drawingml/2006/main"/>
+        </p:txBody>
+      </p:sp>
+    </p:spTree>
+  </p:cSld>
+  <p:clrMapOvr>
+    <a:masterClrMapping xmlns:a="http://schemas.openxmlformats.org/drawingml/2006/main"/>
+  </p:clrMapOvr>
+</p:notes>
+</file>
+
 <file path=ppt/notesSlides/notesSlide2.xml><?xml version="1.0" encoding="utf-8"?>
 <p:notes xmlns:p="http://schemas.openxmlformats.org/presentationml/2006/main">
   <p:cSld>
@@ -545,7 +641,7 @@
           <a:lstStyle xmlns:a="http://schemas.openxmlformats.org/drawingml/2006/main"/>
           <a:p xmlns:a="http://schemas.openxmlformats.org/drawingml/2006/main">
             <a:r>
-              <a:t>Expositor: Daniel. Tiempo: 90 segundos.</a:t>
+              <a:t>Expositor: Daniel. Tiempo: 70 segundos.</a:t>
             </a:r>
           </a:p>
           <a:p xmlns:a="http://schemas.openxmlformats.org/drawingml/2006/main">
@@ -555,7 +651,7 @@
           </a:p>
           <a:p xmlns:a="http://schemas.openxmlformats.org/drawingml/2006/main">
             <a:r>
-              <a:t>El caso reúne varias obras que comparten trabajadores. El problema consiste en distribuir actividades considerando al mismo tiempo la especialidad, la jornada, las asignaciones previas y la urgencia. La información dispersa puede producir dobles asignaciones o dejar actividades sin responsable. Durdyev y Hosseini relacionan retrasos en construcción con problemas de coordinación, comunicación y planificación. Gómez Sánchez y colaboradores explican que varios proyectos deben distribuir recursos limitados. Hendrickson destaca que el calendario necesita actualizarse al cambiar las actividades. Ballard estudia la fiabilidad de la planificación y la coordinación entre especialistas. Estas fuentes sustentan el problema. El administrador consulta compromisos, el supervisor organiza el trabajo y los trabajadores ejecutan las actividades. Los clientes se ven afectados por las fechas de entrega. El informe desarrolla este contexto antes de proponer estructuras de datos.</a:t>
+              <a:t>Según la información aportada por el equipo, Dizeo registra sus asignaciones en Excel. Las cantidades corresponden al alcance académico del proyecto. No se dispone de un incidente concreto confirmado. El caso reúne varias obras que comparten trabajadores. El problema consiste en distribuir actividades considerando al mismo tiempo la especialidad, la jornada, las asignaciones previas y la urgencia. La información dispersa puede producir dobles asignaciones o dejar actividades sin responsable. Durdyev y Hosseini relacionan retrasos en construcción con problemas de coordinación, comunicación y planificación. Gómez Sánchez y colaboradores explican que varios proyectos deben distribuir recursos limitados. Hendrickson destaca que el calendario necesita actualizarse al cambiar las actividades. Ballard estudia la fiabilidad de la planificación y la coordinación entre especialistas. Estas fuentes sustentan el problema. El administrador consulta compromisos, el supervisor organiza el trabajo y los trabajadores ejecutan las actividades. Los clientes se ven afectados por las fechas de entrega. El informe desarrolla este contexto antes de proponer estructuras de datos.</a:t>
             </a:r>
           </a:p>
           <a:p xmlns:a="http://schemas.openxmlformats.org/drawingml/2006/main">
@@ -680,7 +776,7 @@
           </a:p>
           <a:p xmlns:a="http://schemas.openxmlformats.org/drawingml/2006/main">
             <a:r>
-              <a:t>El alcance es de cinco obras, veinte trabajadores, cien actividades y cinco usuarios. Los usuarios organizan o consultan la información; no representan a todos los trabajadores. Medimos actividades pendientes y terminadas, horas asignadas, cruces y avance. La especialidad, el estado y la prioridad son variables cualitativas. El horario final debe ser posterior al inicial y ambos deben estar dentro de la jornada. Un trabajador no puede tener asignaciones activas que se superpongan. Primero se atiende prioridad alta, después media y luego baja. Los empates se resuelven por fecha límite más próxima y código. La prioridad no permite ignorar las restricciones del trabajador.</a:t>
+              <a:t>El equipo fija para este avance un alcance académico de cinco obras, veinte trabajadores, cien actividades y cinco usuarios. Los usuarios organizan o consultan la información; no representan a todos los trabajadores. Medimos actividades pendientes y terminadas, horas asignadas, cruces y avance. La especialidad, el estado y la prioridad son variables cualitativas. El horario final debe ser posterior al inicial y ambos deben estar dentro de la jornada. Un trabajador no puede tener asignaciones activas que se superpongan. Primero se atiende prioridad alta, después media y luego baja. Los empates se resuelven por fecha límite más próxima y código. La prioridad no permite ignorar las restricciones del trabajador. El avance de una obra es un promedio simple: todas las actividades tienen el mismo peso, aunque sean de distinto tamaño.</a:t>
             </a:r>
           </a:p>
           <a:p xmlns:a="http://schemas.openxmlformats.org/drawingml/2006/main">
@@ -860,7 +956,7 @@
           <a:lstStyle xmlns:a="http://schemas.openxmlformats.org/drawingml/2006/main"/>
           <a:p xmlns:a="http://schemas.openxmlformats.org/drawingml/2006/main">
             <a:r>
-              <a:t>Expositor: Julián. Tiempo: 80 segundos.</a:t>
+              <a:t>Expositor: Julián. Tiempo: 70 segundos.</a:t>
             </a:r>
           </a:p>
           <a:p xmlns:a="http://schemas.openxmlformats.org/drawingml/2006/main">
@@ -870,7 +966,7 @@
           </a:p>
           <a:p xmlns:a="http://schemas.openxmlformats.org/drawingml/2006/main">
             <a:r>
-              <a:t>El modelo utiliza cinco clases de dominio. Obra contiene sus actividades mediante composición: cada actividad pertenece a una sola obra. Actividad conserva especialidad, prioridad, fecha límite, estado y avance. Trabajador permite comprobar compatibilidad y disponibilidad. Asignacion relaciona una actividad con un trabajador en una fecha y horario, y registra al usuario responsable. Usuario representa a quien opera la información. Una actividad puede conservar varias asignaciones, pero como máximo una activa. Los trabajadores y usuarios pueden relacionarse con varias asignaciones. No se agrega herencia porque no existe una relación de especialización que la justifique. Las clases corresponden a los cinco módulos y el seguimiento usa el avance de Actividad y su promedio en Obra. El repositorio incluye el diagrama editable para revisar atributos, métodos y multiplicidades.</a:t>
+              <a:t>El UML tiene cinco clases de dominio y un servicio. Las multiplicidades están junto a sus extremos: una obra contiene varias actividades; cada asignación corresponde a una actividad, un trabajador y un usuario. Una actividad conserva como máximo una asignación activa. GestorPrioridades administra la cola y el comparador. Su operación cambiarPrioridad retira la actividad antes de modificarla y después la reinserta. El método de Actividad tiene visibilidad de paquete, indicada por el símbolo ~, y se invoca desde ese servicio. Así el cambio no deja una clave alterada dentro del heap. Las consultas ordenadas trabajan con copias. El informe y las dos vistas editables muestran los atributos y métodos tipados completos.</a:t>
             </a:r>
           </a:p>
           <a:p xmlns:a="http://schemas.openxmlformats.org/drawingml/2006/main">
@@ -955,7 +1051,7 @@
           <a:lstStyle xmlns:a="http://schemas.openxmlformats.org/drawingml/2006/main"/>
           <a:p xmlns:a="http://schemas.openxmlformats.org/drawingml/2006/main">
             <a:r>
-              <a:t>Expositor: Julián. Tiempo: 70 segundos.</a:t>
+              <a:t>Expositor: Julián. Tiempo: 60 segundos.</a:t>
             </a:r>
           </a:p>
           <a:p xmlns:a="http://schemas.openxmlformats.org/drawingml/2006/main">
@@ -965,7 +1061,7 @@
           </a:p>
           <a:p xmlns:a="http://schemas.openxmlformats.org/drawingml/2006/main">
             <a:r>
-              <a:t>La alternativa A conserva listas y recorre sus elementos para buscar por código o elegir la próxima actividad. El listado completo se obtiene ordenando una copia. La alternativa B utiliza HashMap para consultar entidades por código y PriorityQueue para las actividades pendientes y sin asignación activa. El comparador aplica prioridad, fecha límite y código. peek consulta la cabecera sin retirarla y poll extrae la próxima actividad. En las dos alternativas las asignaciones se recorren para comprobar cruces. La cola de prioridad no aplica únicamente el orden de llegada: usa el comparador. Sus iteradores no garantizan el orden, por lo que el listado completo necesita una copia y extracciones. Si cambia una prioridad, se retira el objeto antes de modificarlo y se vuelve a insertar.</a:t>
+              <a:t>La alternativa A conserva listas y recorre sus elementos para buscar por código o elegir la próxima actividad. El listado completo se obtiene ordenando una copia. La alternativa B utiliza HashMap para consultar entidades por código y PriorityQueue para las actividades pendientes y sin asignación activa. El comparador aplica prioridad, fecha límite y código. peek consulta la cabecera sin retirarla y poll extrae la próxima actividad. En las dos alternativas las asignaciones se recorren para comprobar cruces. GestorPrioridades concentra las operaciones de la cola. La cola de prioridad no aplica únicamente el orden de llegada: usa el comparador. Sus iteradores no garantizan el orden, por lo que el listado completo necesita una copia y extracciones. Si cambia una prioridad, se retira el objeto antes de modificarlo y se vuelve a insertar.</a:t>
             </a:r>
           </a:p>
           <a:p xmlns:a="http://schemas.openxmlformats.org/drawingml/2006/main">
@@ -1060,7 +1156,7 @@
           <a:lstStyle xmlns:a="http://schemas.openxmlformats.org/drawingml/2006/main"/>
           <a:p xmlns:a="http://schemas.openxmlformats.org/drawingml/2006/main">
             <a:r>
-              <a:t>Expositor: Julián. Tiempo: 30 segundos.</a:t>
+              <a:t>Expositor: Julián. Tiempo: 60 segundos.</a:t>
             </a:r>
           </a:p>
           <a:p xmlns:a="http://schemas.openxmlformats.org/drawingml/2006/main">
@@ -1070,7 +1166,7 @@
           </a:p>
           <a:p xmlns:a="http://schemas.openxmlformats.org/drawingml/2006/main">
             <a:r>
-              <a:t>La mejora de B se concentra en la búsqueda por código y en consultar o extraer la próxima pendiente. Listar todo el orden y validar horarios mantienen sus costos. HashMap tiene costo constante esperado con dispersión adecuada; se conserva O(w) como cota conservadora en peor caso. Cambiar una prioridad arbitraria cuesta O(q) porque retirar un objeto de PriorityQueue es lineal. La memoria total es lineal para ambas propuestas.</a:t>
+              <a:t>La mejora de B se concentra en la búsqueda por código y en consultar o extraer la cabecera. Consultar alternativas ordenadas trabaja sobre una copia y cuesta O(q log q) y O(q) de espacio en ambas opciones. Retirar una seleccionada distinta de la cabecera cuesta O(q) con remove(objeto), no O(log q). Listar todo el orden y validar horarios mantienen sus costos. HashMap tiene costo constante esperado con dispersión adecuada; se conserva O(w) como cota conservadora en peor caso. Cambiar una prioridad arbitraria cuesta O(q) porque retirar un objeto de PriorityQueue es lineal. La memoria total es lineal para ambas propuestas.</a:t>
             </a:r>
           </a:p>
           <a:p xmlns:a="http://schemas.openxmlformats.org/drawingml/2006/main">
@@ -1165,7 +1261,7 @@
           <a:lstStyle xmlns:a="http://schemas.openxmlformats.org/drawingml/2006/main"/>
           <a:p xmlns:a="http://schemas.openxmlformats.org/drawingml/2006/main">
             <a:r>
-              <a:t>Expositor: Daniel. Tiempo: 60 segundos.</a:t>
+              <a:t>Expositor: Daniel. Tiempo: 40 segundos.</a:t>
             </a:r>
           </a:p>
           <a:p xmlns:a="http://schemas.openxmlformats.org/drawingml/2006/main">
@@ -1175,7 +1271,7 @@
           </a:p>
           <a:p xmlns:a="http://schemas.openxmlformats.org/drawingml/2006/main">
             <a:r>
-              <a:t>Seleccionamos B porque las estructuras corresponden a las operaciones que más nos interesan: identificar entidades por código y atender la próxima actividad pendiente. Esto permite trabajar con HashMap y colas de prioridad estándar de Java. Con cien actividades ambas opciones son viables; no necesitamos aumentar el tamaño del caso para justificar la decisión. B usa memoria lineal, aunque los mapas y la cola tienen costos internos adicionales. La mantenibilidad depende de usar un solo comparador y controlar las actualizaciones de prioridad. La especialidad y el horario se validan antes de confirmar. Solo después se retira la actividad de la cola de atención. No se afirma que la prioridad calcule un calendario óptimo.</a:t>
+              <a:t>Seleccionamos B porque las estructuras corresponden a las operaciones que más nos interesan: identificar entidades por código y atender la próxima actividad pendiente. Esto permite trabajar con HashMap y colas de prioridad estándar de Java. Con cien actividades ambas opciones son viables; no necesitamos aumentar el tamaño del caso para justificar la decisión. B usa memoria lineal, aunque los mapas y la cola tienen costos internos adicionales. La mantenibilidad depende de usar un solo comparador y controlar las actualizaciones de prioridad. La especialidad y el horario se validan antes de confirmar. Solo después se retira la actividad de la cola de atención; si es otra pendiente se usa remove(objeto), de costo lineal. No se afirma que la prioridad calcule un calendario óptimo.</a:t>
             </a:r>
           </a:p>
           <a:p xmlns:a="http://schemas.openxmlformats.org/drawingml/2006/main">
@@ -1270,7 +1366,7 @@
           <a:lstStyle xmlns:a="http://schemas.openxmlformats.org/drawingml/2006/main"/>
           <a:p xmlns:a="http://schemas.openxmlformats.org/drawingml/2006/main">
             <a:r>
-              <a:t>Expositor: Esteban. Tiempo: 60 segundos.</a:t>
+              <a:t>Expositor: Daniel. Tiempo: 50 segundos.</a:t>
             </a:r>
           </a:p>
           <a:p xmlns:a="http://schemas.openxmlformats.org/drawingml/2006/main">
@@ -1280,7 +1376,7 @@
           </a:p>
           <a:p xmlns:a="http://schemas.openxmlformats.org/drawingml/2006/main">
             <a:r>
-              <a:t>Daniel implementará Obras y Seguimiento. Esteban asumirá Trabajadores y Asignación. Julián trabajará Actividades, el comparador y la cola de prioridad, además del UML y la comparación técnica. La integración y la revisión serán compartidas. El repositorio inicial contiene el README y las carpetas del informe, presentación, UML editable y observaciones del docente. Para Progreso 2 se mitigarán los cruces revisando intervalos y jornada, los empates con un comparador único, la cola desactualizada retirando y reinsertando y los datos incorrectos con validaciones. Se conservarán las observaciones del aula virtual. ChatGPT apoyó el análisis, la redacción y el diseño preliminar; el uso está declarado en el informe y corresponde al equipo revisar, adaptar y comprender el contenido.</a:t>
+              <a:t>Este ejemplo es ilustrativo y no un incidente empresarial confirmado. A01 es alta y requiere gypsum, pero no hay especialista libre. El sistema informa la causa y conserva A01. El supervisor puede esperar o consultar alternativas, que se generan sobre una copia. Si elige A02 de pintura, se repiten las validaciones antes de confirmar. La cola original no cambia por consultar. Confirmar A02 registra su asignación y retira únicamente A02, con remove(objeto) y costo O(q). A01 sigue en la cabecera y no pierde prioridad. Si no hay alternativa viable o falla la validación, no se retira ninguna actividad.</a:t>
             </a:r>
           </a:p>
           <a:p xmlns:a="http://schemas.openxmlformats.org/drawingml/2006/main">
@@ -1342,7 +1438,7 @@
           <p:cNvPr id="3" name="Title">
             <a:extLst xmlns:a="http://schemas.openxmlformats.org/drawingml/2006/main">
               <a:ext uri="{FF2B5EF4-FFF2-40B4-BE49-F238E27FC236}">
-                <a16:creationId xmlns:a16="http://schemas.microsoft.com/office/drawing/2014/main" id="{DFDB539B-31E4-47FA-B986-EA3F69D3C6E7}"/>
+                <a16:creationId xmlns:a16="http://schemas.microsoft.com/office/drawing/2014/main" id="{D77DA442-DFAE-4997-A480-0D533B6C3876}"/>
               </a:ext>
             </a:extLst>
           </p:cNvPr>
@@ -1571,7 +1667,7 @@
           <p:cNvPr id="2" name="Subtitle">
             <a:extLst xmlns:a="http://schemas.openxmlformats.org/drawingml/2006/main">
               <a:ext uri="{FF2B5EF4-FFF2-40B4-BE49-F238E27FC236}">
-                <a16:creationId xmlns:a16="http://schemas.microsoft.com/office/drawing/2014/main" id="{59181629-21F7-4285-A8C3-621F2237087D}"/>
+                <a16:creationId xmlns:a16="http://schemas.microsoft.com/office/drawing/2014/main" id="{E663BD42-8C06-496E-95B3-9068A3539508}"/>
               </a:ext>
             </a:extLst>
           </p:cNvPr>
@@ -1817,7 +1913,7 @@
           <p:cNvPr id="2" name="Section title">
             <a:extLst xmlns:a="http://schemas.openxmlformats.org/drawingml/2006/main">
               <a:ext uri="{FF2B5EF4-FFF2-40B4-BE49-F238E27FC236}">
-                <a16:creationId xmlns:a16="http://schemas.microsoft.com/office/drawing/2014/main" id="{9558E8F1-E8A4-4CA1-B64A-B00D1F6E3730}"/>
+                <a16:creationId xmlns:a16="http://schemas.microsoft.com/office/drawing/2014/main" id="{232A7F79-392D-456C-9BF0-E47CE838DCA2}"/>
               </a:ext>
             </a:extLst>
           </p:cNvPr>
@@ -2063,7 +2159,7 @@
           <p:cNvPr id="3" name="Title">
             <a:extLst xmlns:a="http://schemas.openxmlformats.org/drawingml/2006/main">
               <a:ext uri="{FF2B5EF4-FFF2-40B4-BE49-F238E27FC236}">
-                <a16:creationId xmlns:a16="http://schemas.microsoft.com/office/drawing/2014/main" id="{89C82C05-DA3F-4361-9AA8-132774CE2E6E}"/>
+                <a16:creationId xmlns:a16="http://schemas.microsoft.com/office/drawing/2014/main" id="{2BEA5A5B-0A14-4C9E-BDE5-7443B0F1C77D}"/>
               </a:ext>
             </a:extLst>
           </p:cNvPr>
@@ -2292,7 +2388,7 @@
           <p:cNvPr id="2" name="Body">
             <a:extLst xmlns:a="http://schemas.openxmlformats.org/drawingml/2006/main">
               <a:ext uri="{FF2B5EF4-FFF2-40B4-BE49-F238E27FC236}">
-                <a16:creationId xmlns:a16="http://schemas.microsoft.com/office/drawing/2014/main" id="{2636CAC7-839D-49BD-AD1D-40DF9D56DA1E}"/>
+                <a16:creationId xmlns:a16="http://schemas.microsoft.com/office/drawing/2014/main" id="{02539BDF-CE19-4511-A64D-951EE3AA6466}"/>
               </a:ext>
             </a:extLst>
           </p:cNvPr>
@@ -2538,7 +2634,7 @@
           <p:cNvPr id="4" name="Title">
             <a:extLst xmlns:a="http://schemas.openxmlformats.org/drawingml/2006/main">
               <a:ext uri="{FF2B5EF4-FFF2-40B4-BE49-F238E27FC236}">
-                <a16:creationId xmlns:a16="http://schemas.microsoft.com/office/drawing/2014/main" id="{B259680E-9D3E-4CA1-A3CC-C78C9D7D7AEC}"/>
+                <a16:creationId xmlns:a16="http://schemas.microsoft.com/office/drawing/2014/main" id="{E76ECEAA-E2D9-4B27-B12F-BBD2303D9BAA}"/>
               </a:ext>
             </a:extLst>
           </p:cNvPr>
@@ -2767,7 +2863,7 @@
           <p:cNvPr id="2" name="Left column">
             <a:extLst xmlns:a="http://schemas.openxmlformats.org/drawingml/2006/main">
               <a:ext uri="{FF2B5EF4-FFF2-40B4-BE49-F238E27FC236}">
-                <a16:creationId xmlns:a16="http://schemas.microsoft.com/office/drawing/2014/main" id="{4DA163DB-7DA2-4535-BBA5-A8C8D6904FBA}"/>
+                <a16:creationId xmlns:a16="http://schemas.microsoft.com/office/drawing/2014/main" id="{13E3E3EC-ED07-4A3D-8548-BF7B96C70EA5}"/>
               </a:ext>
             </a:extLst>
           </p:cNvPr>
@@ -2996,7 +3092,7 @@
           <p:cNvPr id="3" name="Right column">
             <a:extLst xmlns:a="http://schemas.openxmlformats.org/drawingml/2006/main">
               <a:ext uri="{FF2B5EF4-FFF2-40B4-BE49-F238E27FC236}">
-                <a16:creationId xmlns:a16="http://schemas.microsoft.com/office/drawing/2014/main" id="{7D185E31-0829-430C-95E1-D1FAB0E6A864}"/>
+                <a16:creationId xmlns:a16="http://schemas.microsoft.com/office/drawing/2014/main" id="{8E11D449-70EC-4D6C-B65A-27334CC37212}"/>
               </a:ext>
             </a:extLst>
           </p:cNvPr>
@@ -3242,7 +3338,7 @@
           <p:cNvPr id="3" name="Title">
             <a:extLst xmlns:a="http://schemas.openxmlformats.org/drawingml/2006/main">
               <a:ext uri="{FF2B5EF4-FFF2-40B4-BE49-F238E27FC236}">
-                <a16:creationId xmlns:a16="http://schemas.microsoft.com/office/drawing/2014/main" id="{F955D815-EE0D-4C16-A16B-C3A72E636EB0}"/>
+                <a16:creationId xmlns:a16="http://schemas.microsoft.com/office/drawing/2014/main" id="{F6FD4162-C441-4B37-8C44-8485323AF1F5}"/>
               </a:ext>
             </a:extLst>
           </p:cNvPr>
@@ -3471,7 +3567,7 @@
           <p:cNvPr id="2" name="Left column">
             <a:extLst xmlns:a="http://schemas.openxmlformats.org/drawingml/2006/main">
               <a:ext uri="{FF2B5EF4-FFF2-40B4-BE49-F238E27FC236}">
-                <a16:creationId xmlns:a16="http://schemas.microsoft.com/office/drawing/2014/main" id="{890F5780-28AA-499E-8A6B-41ABB18349C9}"/>
+                <a16:creationId xmlns:a16="http://schemas.microsoft.com/office/drawing/2014/main" id="{F076F627-75FF-4849-80CD-DA780C8F063B}"/>
               </a:ext>
             </a:extLst>
           </p:cNvPr>
@@ -3738,12 +3834,12 @@
   </p:cSld>
   <p:clrMap bg1="lt1" tx1="dk1" bg2="lt2" tx2="dk2" accent1="accent1" accent2="accent2" accent3="accent3" accent4="accent4" accent5="accent5" accent6="accent6" hlink="hlink" folHlink="folHlink"/>
   <p:sldLayoutIdLst>
-    <p:sldLayoutId xmlns:r="http://schemas.openxmlformats.org/officeDocument/2006/relationships" id="2147483649" r:id="R19eadbf57edf4d05"/>
-    <p:sldLayoutId xmlns:r="http://schemas.openxmlformats.org/officeDocument/2006/relationships" id="2147483650" r:id="R1391450c03d44043"/>
-    <p:sldLayoutId xmlns:r="http://schemas.openxmlformats.org/officeDocument/2006/relationships" id="2147483651" r:id="Rff1b307eb20b4f77"/>
-    <p:sldLayoutId xmlns:r="http://schemas.openxmlformats.org/officeDocument/2006/relationships" id="2147483652" r:id="R12b0010cdd1e4ad9"/>
-    <p:sldLayoutId xmlns:r="http://schemas.openxmlformats.org/officeDocument/2006/relationships" id="2147483653" r:id="Rc03f405cd1964557"/>
-    <p:sldLayoutId xmlns:r="http://schemas.openxmlformats.org/officeDocument/2006/relationships" id="2147483654" r:id="R764fc7be9a974647"/>
+    <p:sldLayoutId xmlns:r="http://schemas.openxmlformats.org/officeDocument/2006/relationships" id="2147483649" r:id="R8cb12d6a727a4579"/>
+    <p:sldLayoutId xmlns:r="http://schemas.openxmlformats.org/officeDocument/2006/relationships" id="2147483650" r:id="R9886352cc0ed4413"/>
+    <p:sldLayoutId xmlns:r="http://schemas.openxmlformats.org/officeDocument/2006/relationships" id="2147483651" r:id="Rac1c57e74a0344a6"/>
+    <p:sldLayoutId xmlns:r="http://schemas.openxmlformats.org/officeDocument/2006/relationships" id="2147483652" r:id="R422de86d291a49d9"/>
+    <p:sldLayoutId xmlns:r="http://schemas.openxmlformats.org/officeDocument/2006/relationships" id="2147483653" r:id="R07d9d3d95c8343ca"/>
+    <p:sldLayoutId xmlns:r="http://schemas.openxmlformats.org/officeDocument/2006/relationships" id="2147483654" r:id="R3a4667e2b6a545ae"/>
   </p:sldLayoutIdLst>
   <p:txStyles>
     <p:titleStyle>
@@ -4294,7 +4390,7 @@
           <p:cNvPr id="6" name="texto-0">
             <a:extLst xmlns:a="http://schemas.openxmlformats.org/drawingml/2006/main">
               <a:ext uri="{FF2B5EF4-FFF2-40B4-BE49-F238E27FC236}">
-                <a16:creationId xmlns:a16="http://schemas.microsoft.com/office/drawing/2014/main" id="{55F202E6-ACCA-4BFA-80AF-932C8AB1257F}"/>
+                <a16:creationId xmlns:a16="http://schemas.microsoft.com/office/drawing/2014/main" id="{D18999AC-E65C-4D08-9B23-78C3B7FEA0C6}"/>
               </a:ext>
             </a:extLst>
           </p:cNvPr>
@@ -4453,7 +4549,7 @@
           <p:cNvPr id="2" name="texto-1">
             <a:extLst xmlns:a="http://schemas.openxmlformats.org/drawingml/2006/main">
               <a:ext uri="{FF2B5EF4-FFF2-40B4-BE49-F238E27FC236}">
-                <a16:creationId xmlns:a16="http://schemas.microsoft.com/office/drawing/2014/main" id="{4022CF5F-0A5D-4F96-B668-504DFE9A3180}"/>
+                <a16:creationId xmlns:a16="http://schemas.microsoft.com/office/drawing/2014/main" id="{6C8C1DB4-91B4-4F35-8D15-DCC9CB6BB046}"/>
               </a:ext>
             </a:extLst>
           </p:cNvPr>
@@ -4635,7 +4731,7 @@
           <p:cNvPr id="3" name="texto-2">
             <a:extLst xmlns:a="http://schemas.openxmlformats.org/drawingml/2006/main">
               <a:ext uri="{FF2B5EF4-FFF2-40B4-BE49-F238E27FC236}">
-                <a16:creationId xmlns:a16="http://schemas.microsoft.com/office/drawing/2014/main" id="{8EFD3096-4A5A-45DF-8EB1-EA285CF404EE}"/>
+                <a16:creationId xmlns:a16="http://schemas.microsoft.com/office/drawing/2014/main" id="{CF7E0CF7-29FF-46F7-8F18-0FB24E917888}"/>
               </a:ext>
             </a:extLst>
           </p:cNvPr>
@@ -4817,7 +4913,7 @@
           <p:cNvPr id="4" name="texto-3">
             <a:extLst xmlns:a="http://schemas.openxmlformats.org/drawingml/2006/main">
               <a:ext uri="{FF2B5EF4-FFF2-40B4-BE49-F238E27FC236}">
-                <a16:creationId xmlns:a16="http://schemas.microsoft.com/office/drawing/2014/main" id="{7AD20117-E95E-4DC9-B92B-80055D746D3C}"/>
+                <a16:creationId xmlns:a16="http://schemas.microsoft.com/office/drawing/2014/main" id="{C16C1252-7971-43FD-AD51-86DAEADDD48A}"/>
               </a:ext>
             </a:extLst>
           </p:cNvPr>
@@ -4976,7 +5072,7 @@
           <p:cNvPr id="5" name="texto-4">
             <a:extLst xmlns:a="http://schemas.openxmlformats.org/drawingml/2006/main">
               <a:ext uri="{FF2B5EF4-FFF2-40B4-BE49-F238E27FC236}">
-                <a16:creationId xmlns:a16="http://schemas.microsoft.com/office/drawing/2014/main" id="{2BD55316-7565-48A7-9D7E-437EF64739B2}"/>
+                <a16:creationId xmlns:a16="http://schemas.microsoft.com/office/drawing/2014/main" id="{48741D36-13F2-4903-AB4F-5926BC79BFD6}"/>
               </a:ext>
             </a:extLst>
           </p:cNvPr>
@@ -5133,7 +5229,1571 @@
     </p:spTree>
     <p:extLst>
       <p:ext uri="{BB962C8B-B14F-4D97-AF65-F5344CB8AC3E}">
-        <p14:creationId xmlns:p14="http://schemas.microsoft.com/office/powerpoint/2010/main" val="677497704"/>
+        <p14:creationId xmlns:p14="http://schemas.microsoft.com/office/powerpoint/2010/main" val="1384929640"/>
+      </p:ext>
+    </p:extLst>
+  </p:cSld>
+</p:sld>
+</file>
+
+<file path=ppt/slides/slide10.xml><?xml version="1.0" encoding="utf-8"?>
+<p:sld xmlns:p="http://schemas.openxmlformats.org/presentationml/2006/main">
+  <p:cSld>
+    <p:bg>
+      <p:bgPr>
+        <a:solidFill xmlns:a="http://schemas.openxmlformats.org/drawingml/2006/main">
+          <a:srgbClr val="FFFFFF"/>
+        </a:solidFill>
+      </p:bgPr>
+    </p:bg>
+    <p:spTree>
+      <p:nvGrpSpPr>
+        <p:cNvPr id="1" name=""/>
+        <p:cNvGrpSpPr/>
+        <p:nvPr/>
+      </p:nvGrpSpPr>
+      <p:grpSpPr>
+        <a:xfrm xmlns:a="http://schemas.openxmlformats.org/drawingml/2006/main"/>
+      </p:grpSpPr>
+      <p:sp>
+        <p:nvSpPr>
+          <p:cNvPr id="9" name="texto-0">
+            <a:extLst xmlns:a="http://schemas.openxmlformats.org/drawingml/2006/main">
+              <a:ext uri="{FF2B5EF4-FFF2-40B4-BE49-F238E27FC236}">
+                <a16:creationId xmlns:a16="http://schemas.microsoft.com/office/drawing/2014/main" id="{B38C129D-9481-462E-8368-9E964D3D67A2}"/>
+              </a:ext>
+            </a:extLst>
+          </p:cNvPr>
+          <p:cNvSpPr>
+            <a:spLocks xmlns:a="http://schemas.openxmlformats.org/drawingml/2006/main" noGrp="1"/>
+          </p:cNvSpPr>
+          <p:nvPr/>
+        </p:nvSpPr>
+        <p:spPr>
+          <a:xfrm xmlns:a="http://schemas.openxmlformats.org/drawingml/2006/main">
+            <a:off x="609600" y="400050"/>
+            <a:ext cx="10972800" cy="723900"/>
+          </a:xfrm>
+          <a:prstGeom xmlns:a="http://schemas.openxmlformats.org/drawingml/2006/main" prst="rect">
+            <a:avLst/>
+          </a:prstGeom>
+          <a:noFill xmlns:a="http://schemas.openxmlformats.org/drawingml/2006/main"/>
+          <a:ln xmlns:a="http://schemas.openxmlformats.org/drawingml/2006/main" w="0">
+            <a:noFill/>
+            <a:prstDash val="solid"/>
+          </a:ln>
+        </p:spPr>
+        <p:txBody>
+          <a:bodyPr xmlns:a="http://schemas.openxmlformats.org/drawingml/2006/main" wrap="square" lIns="0" tIns="0" rIns="0" bIns="0" anchor="t">
+            <a:noAutofit/>
+          </a:bodyPr>
+          <a:lstStyle xmlns:a="http://schemas.openxmlformats.org/drawingml/2006/main">
+            <a:defPPr>
+              <a:defRPr sz="3300" b="1">
+                <a:solidFill>
+                  <a:srgbClr val="163447"/>
+                </a:solidFill>
+                <a:latin typeface="DejaVu Sans"/>
+                <a:ea typeface="DejaVu Sans"/>
+                <a:cs typeface="DejaVu Sans"/>
+              </a:defRPr>
+            </a:defPPr>
+            <a:lvl1pPr>
+              <a:defRPr sz="3300" b="1">
+                <a:solidFill>
+                  <a:srgbClr val="163447"/>
+                </a:solidFill>
+                <a:latin typeface="DejaVu Sans"/>
+                <a:ea typeface="DejaVu Sans"/>
+                <a:cs typeface="DejaVu Sans"/>
+              </a:defRPr>
+            </a:lvl1pPr>
+            <a:lvl2pPr>
+              <a:defRPr sz="3300" b="1">
+                <a:solidFill>
+                  <a:srgbClr val="163447"/>
+                </a:solidFill>
+                <a:latin typeface="DejaVu Sans"/>
+                <a:ea typeface="DejaVu Sans"/>
+                <a:cs typeface="DejaVu Sans"/>
+              </a:defRPr>
+            </a:lvl2pPr>
+            <a:lvl3pPr>
+              <a:defRPr sz="3300" b="1">
+                <a:solidFill>
+                  <a:srgbClr val="163447"/>
+                </a:solidFill>
+                <a:latin typeface="DejaVu Sans"/>
+                <a:ea typeface="DejaVu Sans"/>
+                <a:cs typeface="DejaVu Sans"/>
+              </a:defRPr>
+            </a:lvl3pPr>
+            <a:lvl4pPr>
+              <a:defRPr sz="3300" b="1">
+                <a:solidFill>
+                  <a:srgbClr val="163447"/>
+                </a:solidFill>
+                <a:latin typeface="DejaVu Sans"/>
+                <a:ea typeface="DejaVu Sans"/>
+                <a:cs typeface="DejaVu Sans"/>
+              </a:defRPr>
+            </a:lvl4pPr>
+            <a:lvl5pPr>
+              <a:defRPr sz="3300" b="1">
+                <a:solidFill>
+                  <a:srgbClr val="163447"/>
+                </a:solidFill>
+                <a:latin typeface="DejaVu Sans"/>
+                <a:ea typeface="DejaVu Sans"/>
+                <a:cs typeface="DejaVu Sans"/>
+              </a:defRPr>
+            </a:lvl5pPr>
+            <a:lvl6pPr>
+              <a:defRPr sz="3300" b="1">
+                <a:solidFill>
+                  <a:srgbClr val="163447"/>
+                </a:solidFill>
+                <a:latin typeface="DejaVu Sans"/>
+                <a:ea typeface="DejaVu Sans"/>
+                <a:cs typeface="DejaVu Sans"/>
+              </a:defRPr>
+            </a:lvl6pPr>
+            <a:lvl7pPr>
+              <a:defRPr sz="3300" b="1">
+                <a:solidFill>
+                  <a:srgbClr val="163447"/>
+                </a:solidFill>
+                <a:latin typeface="DejaVu Sans"/>
+                <a:ea typeface="DejaVu Sans"/>
+                <a:cs typeface="DejaVu Sans"/>
+              </a:defRPr>
+            </a:lvl7pPr>
+            <a:lvl8pPr>
+              <a:defRPr sz="3300" b="1">
+                <a:solidFill>
+                  <a:srgbClr val="163447"/>
+                </a:solidFill>
+                <a:latin typeface="DejaVu Sans"/>
+                <a:ea typeface="DejaVu Sans"/>
+                <a:cs typeface="DejaVu Sans"/>
+              </a:defRPr>
+            </a:lvl8pPr>
+            <a:lvl9pPr>
+              <a:defRPr sz="3300" b="1">
+                <a:solidFill>
+                  <a:srgbClr val="163447"/>
+                </a:solidFill>
+                <a:latin typeface="DejaVu Sans"/>
+                <a:ea typeface="DejaVu Sans"/>
+                <a:cs typeface="DejaVu Sans"/>
+              </a:defRPr>
+            </a:lvl9pPr>
+          </a:lstStyle>
+          <a:p xmlns:a="http://schemas.openxmlformats.org/drawingml/2006/main">
+            <a:pPr>
+              <a:defRPr sz="3300" b="1">
+                <a:solidFill>
+                  <a:srgbClr val="163447"/>
+                </a:solidFill>
+                <a:latin typeface="DejaVu Sans"/>
+                <a:ea typeface="DejaVu Sans"/>
+                <a:cs typeface="DejaVu Sans"/>
+              </a:defRPr>
+            </a:pPr>
+            <a:r>
+              <a:rPr sz="3300" b="1">
+                <a:solidFill>
+                  <a:srgbClr val="163447"/>
+                </a:solidFill>
+                <a:latin typeface="DejaVu Sans"/>
+                <a:ea typeface="DejaVu Sans"/>
+                <a:cs typeface="DejaVu Sans"/>
+              </a:rPr>
+              <a:t>Plan preliminar de implementación</a:t>
+            </a:r>
+          </a:p>
+        </p:txBody>
+      </p:sp>
+      <p:sp>
+        <p:nvSpPr>
+          <p:cNvPr id="2" name="texto-1">
+            <a:extLst xmlns:a="http://schemas.openxmlformats.org/drawingml/2006/main">
+              <a:ext uri="{FF2B5EF4-FFF2-40B4-BE49-F238E27FC236}">
+                <a16:creationId xmlns:a16="http://schemas.microsoft.com/office/drawing/2014/main" id="{C7E1CBAE-4841-449F-B505-CEF8EE0DBFE2}"/>
+              </a:ext>
+            </a:extLst>
+          </p:cNvPr>
+          <p:cNvSpPr>
+            <a:spLocks xmlns:a="http://schemas.openxmlformats.org/drawingml/2006/main" noGrp="1"/>
+          </p:cNvSpPr>
+          <p:nvPr/>
+        </p:nvSpPr>
+        <p:spPr>
+          <a:xfrm xmlns:a="http://schemas.openxmlformats.org/drawingml/2006/main">
+            <a:off x="609600" y="6496050"/>
+            <a:ext cx="10287000" cy="209550"/>
+          </a:xfrm>
+          <a:prstGeom xmlns:a="http://schemas.openxmlformats.org/drawingml/2006/main" prst="rect">
+            <a:avLst/>
+          </a:prstGeom>
+          <a:noFill xmlns:a="http://schemas.openxmlformats.org/drawingml/2006/main"/>
+          <a:ln xmlns:a="http://schemas.openxmlformats.org/drawingml/2006/main" w="0">
+            <a:noFill/>
+            <a:prstDash val="solid"/>
+          </a:ln>
+        </p:spPr>
+        <p:txBody>
+          <a:bodyPr xmlns:a="http://schemas.openxmlformats.org/drawingml/2006/main" wrap="square" lIns="0" tIns="0" rIns="0" bIns="0" anchor="t">
+            <a:noAutofit/>
+          </a:bodyPr>
+          <a:lstStyle xmlns:a="http://schemas.openxmlformats.org/drawingml/2006/main">
+            <a:defPPr>
+              <a:defRPr sz="1125" b="0">
+                <a:solidFill>
+                  <a:srgbClr val="52636D"/>
+                </a:solidFill>
+                <a:latin typeface="DejaVu Sans"/>
+                <a:ea typeface="DejaVu Sans"/>
+                <a:cs typeface="DejaVu Sans"/>
+              </a:defRPr>
+            </a:defPPr>
+            <a:lvl1pPr>
+              <a:defRPr sz="1125" b="0">
+                <a:solidFill>
+                  <a:srgbClr val="52636D"/>
+                </a:solidFill>
+                <a:latin typeface="DejaVu Sans"/>
+                <a:ea typeface="DejaVu Sans"/>
+                <a:cs typeface="DejaVu Sans"/>
+              </a:defRPr>
+            </a:lvl1pPr>
+            <a:lvl2pPr>
+              <a:defRPr sz="1125" b="0">
+                <a:solidFill>
+                  <a:srgbClr val="52636D"/>
+                </a:solidFill>
+                <a:latin typeface="DejaVu Sans"/>
+                <a:ea typeface="DejaVu Sans"/>
+                <a:cs typeface="DejaVu Sans"/>
+              </a:defRPr>
+            </a:lvl2pPr>
+            <a:lvl3pPr>
+              <a:defRPr sz="1125" b="0">
+                <a:solidFill>
+                  <a:srgbClr val="52636D"/>
+                </a:solidFill>
+                <a:latin typeface="DejaVu Sans"/>
+                <a:ea typeface="DejaVu Sans"/>
+                <a:cs typeface="DejaVu Sans"/>
+              </a:defRPr>
+            </a:lvl3pPr>
+            <a:lvl4pPr>
+              <a:defRPr sz="1125" b="0">
+                <a:solidFill>
+                  <a:srgbClr val="52636D"/>
+                </a:solidFill>
+                <a:latin typeface="DejaVu Sans"/>
+                <a:ea typeface="DejaVu Sans"/>
+                <a:cs typeface="DejaVu Sans"/>
+              </a:defRPr>
+            </a:lvl4pPr>
+            <a:lvl5pPr>
+              <a:defRPr sz="1125" b="0">
+                <a:solidFill>
+                  <a:srgbClr val="52636D"/>
+                </a:solidFill>
+                <a:latin typeface="DejaVu Sans"/>
+                <a:ea typeface="DejaVu Sans"/>
+                <a:cs typeface="DejaVu Sans"/>
+              </a:defRPr>
+            </a:lvl5pPr>
+            <a:lvl6pPr>
+              <a:defRPr sz="1125" b="0">
+                <a:solidFill>
+                  <a:srgbClr val="52636D"/>
+                </a:solidFill>
+                <a:latin typeface="DejaVu Sans"/>
+                <a:ea typeface="DejaVu Sans"/>
+                <a:cs typeface="DejaVu Sans"/>
+              </a:defRPr>
+            </a:lvl6pPr>
+            <a:lvl7pPr>
+              <a:defRPr sz="1125" b="0">
+                <a:solidFill>
+                  <a:srgbClr val="52636D"/>
+                </a:solidFill>
+                <a:latin typeface="DejaVu Sans"/>
+                <a:ea typeface="DejaVu Sans"/>
+                <a:cs typeface="DejaVu Sans"/>
+              </a:defRPr>
+            </a:lvl7pPr>
+            <a:lvl8pPr>
+              <a:defRPr sz="1125" b="0">
+                <a:solidFill>
+                  <a:srgbClr val="52636D"/>
+                </a:solidFill>
+                <a:latin typeface="DejaVu Sans"/>
+                <a:ea typeface="DejaVu Sans"/>
+                <a:cs typeface="DejaVu Sans"/>
+              </a:defRPr>
+            </a:lvl8pPr>
+            <a:lvl9pPr>
+              <a:defRPr sz="1125" b="0">
+                <a:solidFill>
+                  <a:srgbClr val="52636D"/>
+                </a:solidFill>
+                <a:latin typeface="DejaVu Sans"/>
+                <a:ea typeface="DejaVu Sans"/>
+                <a:cs typeface="DejaVu Sans"/>
+              </a:defRPr>
+            </a:lvl9pPr>
+          </a:lstStyle>
+          <a:p xmlns:a="http://schemas.openxmlformats.org/drawingml/2006/main">
+            <a:pPr>
+              <a:defRPr sz="1125" b="0">
+                <a:solidFill>
+                  <a:srgbClr val="52636D"/>
+                </a:solidFill>
+                <a:latin typeface="DejaVu Sans"/>
+                <a:ea typeface="DejaVu Sans"/>
+                <a:cs typeface="DejaVu Sans"/>
+              </a:defRPr>
+            </a:pPr>
+            <a:r>
+              <a:rPr sz="1125" b="0">
+                <a:solidFill>
+                  <a:srgbClr val="52636D"/>
+                </a:solidFill>
+                <a:latin typeface="DejaVu Sans"/>
+                <a:ea typeface="DejaVu Sans"/>
+                <a:cs typeface="DejaVu Sans"/>
+              </a:rPr>
+              <a:t>Dizeo   Programación III   Progreso 1</a:t>
+            </a:r>
+          </a:p>
+        </p:txBody>
+      </p:sp>
+      <p:sp>
+        <p:nvSpPr>
+          <p:cNvPr id="3" name="texto-2">
+            <a:extLst xmlns:a="http://schemas.openxmlformats.org/drawingml/2006/main">
+              <a:ext uri="{FF2B5EF4-FFF2-40B4-BE49-F238E27FC236}">
+                <a16:creationId xmlns:a16="http://schemas.microsoft.com/office/drawing/2014/main" id="{34B4C0F5-A4C0-4622-9B4B-1E129CC87FC3}"/>
+              </a:ext>
+            </a:extLst>
+          </p:cNvPr>
+          <p:cNvSpPr>
+            <a:spLocks xmlns:a="http://schemas.openxmlformats.org/drawingml/2006/main" noGrp="1"/>
+          </p:cNvSpPr>
+          <p:nvPr/>
+        </p:nvSpPr>
+        <p:spPr>
+          <a:xfrm xmlns:a="http://schemas.openxmlformats.org/drawingml/2006/main">
+            <a:off x="11239500" y="6496050"/>
+            <a:ext cx="342900" cy="209550"/>
+          </a:xfrm>
+          <a:prstGeom xmlns:a="http://schemas.openxmlformats.org/drawingml/2006/main" prst="rect">
+            <a:avLst/>
+          </a:prstGeom>
+          <a:noFill xmlns:a="http://schemas.openxmlformats.org/drawingml/2006/main"/>
+          <a:ln xmlns:a="http://schemas.openxmlformats.org/drawingml/2006/main" w="0">
+            <a:noFill/>
+            <a:prstDash val="solid"/>
+          </a:ln>
+        </p:spPr>
+        <p:txBody>
+          <a:bodyPr xmlns:a="http://schemas.openxmlformats.org/drawingml/2006/main" wrap="square" lIns="0" tIns="0" rIns="0" bIns="0" anchor="t">
+            <a:noAutofit/>
+          </a:bodyPr>
+          <a:lstStyle xmlns:a="http://schemas.openxmlformats.org/drawingml/2006/main">
+            <a:defPPr>
+              <a:defRPr sz="1125" b="0">
+                <a:solidFill>
+                  <a:srgbClr val="52636D"/>
+                </a:solidFill>
+                <a:latin typeface="DejaVu Sans"/>
+                <a:ea typeface="DejaVu Sans"/>
+                <a:cs typeface="DejaVu Sans"/>
+              </a:defRPr>
+            </a:defPPr>
+            <a:lvl1pPr>
+              <a:defRPr sz="1125" b="0">
+                <a:solidFill>
+                  <a:srgbClr val="52636D"/>
+                </a:solidFill>
+                <a:latin typeface="DejaVu Sans"/>
+                <a:ea typeface="DejaVu Sans"/>
+                <a:cs typeface="DejaVu Sans"/>
+              </a:defRPr>
+            </a:lvl1pPr>
+            <a:lvl2pPr>
+              <a:defRPr sz="1125" b="0">
+                <a:solidFill>
+                  <a:srgbClr val="52636D"/>
+                </a:solidFill>
+                <a:latin typeface="DejaVu Sans"/>
+                <a:ea typeface="DejaVu Sans"/>
+                <a:cs typeface="DejaVu Sans"/>
+              </a:defRPr>
+            </a:lvl2pPr>
+            <a:lvl3pPr>
+              <a:defRPr sz="1125" b="0">
+                <a:solidFill>
+                  <a:srgbClr val="52636D"/>
+                </a:solidFill>
+                <a:latin typeface="DejaVu Sans"/>
+                <a:ea typeface="DejaVu Sans"/>
+                <a:cs typeface="DejaVu Sans"/>
+              </a:defRPr>
+            </a:lvl3pPr>
+            <a:lvl4pPr>
+              <a:defRPr sz="1125" b="0">
+                <a:solidFill>
+                  <a:srgbClr val="52636D"/>
+                </a:solidFill>
+                <a:latin typeface="DejaVu Sans"/>
+                <a:ea typeface="DejaVu Sans"/>
+                <a:cs typeface="DejaVu Sans"/>
+              </a:defRPr>
+            </a:lvl4pPr>
+            <a:lvl5pPr>
+              <a:defRPr sz="1125" b="0">
+                <a:solidFill>
+                  <a:srgbClr val="52636D"/>
+                </a:solidFill>
+                <a:latin typeface="DejaVu Sans"/>
+                <a:ea typeface="DejaVu Sans"/>
+                <a:cs typeface="DejaVu Sans"/>
+              </a:defRPr>
+            </a:lvl5pPr>
+            <a:lvl6pPr>
+              <a:defRPr sz="1125" b="0">
+                <a:solidFill>
+                  <a:srgbClr val="52636D"/>
+                </a:solidFill>
+                <a:latin typeface="DejaVu Sans"/>
+                <a:ea typeface="DejaVu Sans"/>
+                <a:cs typeface="DejaVu Sans"/>
+              </a:defRPr>
+            </a:lvl6pPr>
+            <a:lvl7pPr>
+              <a:defRPr sz="1125" b="0">
+                <a:solidFill>
+                  <a:srgbClr val="52636D"/>
+                </a:solidFill>
+                <a:latin typeface="DejaVu Sans"/>
+                <a:ea typeface="DejaVu Sans"/>
+                <a:cs typeface="DejaVu Sans"/>
+              </a:defRPr>
+            </a:lvl7pPr>
+            <a:lvl8pPr>
+              <a:defRPr sz="1125" b="0">
+                <a:solidFill>
+                  <a:srgbClr val="52636D"/>
+                </a:solidFill>
+                <a:latin typeface="DejaVu Sans"/>
+                <a:ea typeface="DejaVu Sans"/>
+                <a:cs typeface="DejaVu Sans"/>
+              </a:defRPr>
+            </a:lvl8pPr>
+            <a:lvl9pPr>
+              <a:defRPr sz="1125" b="0">
+                <a:solidFill>
+                  <a:srgbClr val="52636D"/>
+                </a:solidFill>
+                <a:latin typeface="DejaVu Sans"/>
+                <a:ea typeface="DejaVu Sans"/>
+                <a:cs typeface="DejaVu Sans"/>
+              </a:defRPr>
+            </a:lvl9pPr>
+          </a:lstStyle>
+          <a:p xmlns:a="http://schemas.openxmlformats.org/drawingml/2006/main">
+            <a:pPr>
+              <a:defRPr sz="1125" b="0">
+                <a:solidFill>
+                  <a:srgbClr val="52636D"/>
+                </a:solidFill>
+                <a:latin typeface="DejaVu Sans"/>
+                <a:ea typeface="DejaVu Sans"/>
+                <a:cs typeface="DejaVu Sans"/>
+              </a:defRPr>
+            </a:pPr>
+            <a:r>
+              <a:rPr sz="1125" b="0">
+                <a:solidFill>
+                  <a:srgbClr val="52636D"/>
+                </a:solidFill>
+                <a:latin typeface="DejaVu Sans"/>
+                <a:ea typeface="DejaVu Sans"/>
+                <a:cs typeface="DejaVu Sans"/>
+              </a:rPr>
+              <a:t>10</a:t>
+            </a:r>
+          </a:p>
+        </p:txBody>
+      </p:sp>
+      <p:graphicFrame>
+        <p:nvGraphicFramePr>
+          <p:cNvPr id="4" name="">
+            <a:extLst xmlns:a="http://schemas.openxmlformats.org/drawingml/2006/main">
+              <a:ext uri="{FF2B5EF4-FFF2-40B4-BE49-F238E27FC236}">
+                <a16:creationId xmlns:a16="http://schemas.microsoft.com/office/drawing/2014/main" id="{38A85044-B094-42F9-84A7-C21C73FBBBC6}"/>
+              </a:ext>
+            </a:extLst>
+          </p:cNvPr>
+          <p:cNvGraphicFramePr/>
+          <p:nvPr/>
+        </p:nvGraphicFramePr>
+        <p:xfrm>
+          <a:off xmlns:a="http://schemas.openxmlformats.org/drawingml/2006/main" x="609600" y="1381125"/>
+          <a:ext xmlns:a="http://schemas.openxmlformats.org/drawingml/2006/main" cx="10972800" cy="2571750"/>
+        </p:xfrm>
+        <a:graphic xmlns:a="http://schemas.openxmlformats.org/drawingml/2006/main">
+          <a:graphicData uri="http://schemas.openxmlformats.org/drawingml/2006/table">
+            <a:tbl>
+              <a:tblPr/>
+              <a:tblGrid>
+                <a:gridCol w="3524250"/>
+                <a:gridCol w="7448550"/>
+              </a:tblGrid>
+              <a:tr h="642938">
+                <a:tc>
+                  <a:txBody>
+                    <a:bodyPr wrap="square" lIns="123825" tIns="85725" rIns="123825" bIns="85725">
+                      <a:noAutofit/>
+                    </a:bodyPr>
+                    <a:lstStyle/>
+                    <a:p>
+                      <a:r>
+                        <a:rPr sz="1875" b="1">
+                          <a:solidFill>
+                            <a:srgbClr val="FFFFFF"/>
+                          </a:solidFill>
+                          <a:latin typeface="DejaVu Sans"/>
+                          <a:ea typeface="DejaVu Sans"/>
+                          <a:cs typeface="DejaVu Sans"/>
+                        </a:rPr>
+                        <a:t>Integrante</a:t>
+                      </a:r>
+                    </a:p>
+                  </a:txBody>
+                  <a:tcPr marL="91440" marR="91440" marT="45720" marB="45720" anchor="ctr">
+                    <a:lnL w="9525">
+                      <a:solidFill>
+                        <a:srgbClr val="B9CCD1"/>
+                      </a:solidFill>
+                      <a:prstDash val="solid"/>
+                    </a:lnL>
+                    <a:lnR w="9525">
+                      <a:solidFill>
+                        <a:srgbClr val="B9CCD1"/>
+                      </a:solidFill>
+                      <a:prstDash val="solid"/>
+                    </a:lnR>
+                    <a:lnT w="9525">
+                      <a:solidFill>
+                        <a:srgbClr val="B9CCD1"/>
+                      </a:solidFill>
+                      <a:prstDash val="solid"/>
+                    </a:lnT>
+                    <a:lnB w="9525">
+                      <a:solidFill>
+                        <a:srgbClr val="B9CCD1"/>
+                      </a:solidFill>
+                      <a:prstDash val="solid"/>
+                    </a:lnB>
+                    <a:solidFill>
+                      <a:srgbClr val="163447"/>
+                    </a:solidFill>
+                  </a:tcPr>
+                </a:tc>
+                <a:tc>
+                  <a:txBody>
+                    <a:bodyPr wrap="square" lIns="123825" tIns="85725" rIns="123825" bIns="85725">
+                      <a:noAutofit/>
+                    </a:bodyPr>
+                    <a:lstStyle/>
+                    <a:p>
+                      <a:r>
+                        <a:rPr sz="1875" b="1">
+                          <a:solidFill>
+                            <a:srgbClr val="FFFFFF"/>
+                          </a:solidFill>
+                          <a:latin typeface="DejaVu Sans"/>
+                          <a:ea typeface="DejaVu Sans"/>
+                          <a:cs typeface="DejaVu Sans"/>
+                        </a:rPr>
+                        <a:t>Módulos y componentes</a:t>
+                      </a:r>
+                    </a:p>
+                  </a:txBody>
+                  <a:tcPr marL="91440" marR="91440" marT="45720" marB="45720" anchor="ctr">
+                    <a:lnR w="9525">
+                      <a:solidFill>
+                        <a:srgbClr val="B9CCD1"/>
+                      </a:solidFill>
+                      <a:prstDash val="solid"/>
+                    </a:lnR>
+                    <a:lnT w="9525">
+                      <a:solidFill>
+                        <a:srgbClr val="B9CCD1"/>
+                      </a:solidFill>
+                      <a:prstDash val="solid"/>
+                    </a:lnT>
+                    <a:lnB w="9525">
+                      <a:solidFill>
+                        <a:srgbClr val="B9CCD1"/>
+                      </a:solidFill>
+                      <a:prstDash val="solid"/>
+                    </a:lnB>
+                    <a:solidFill>
+                      <a:srgbClr val="163447"/>
+                    </a:solidFill>
+                  </a:tcPr>
+                </a:tc>
+              </a:tr>
+              <a:tr h="642938">
+                <a:tc>
+                  <a:txBody>
+                    <a:bodyPr wrap="square" lIns="123825" tIns="85725" rIns="123825" bIns="85725">
+                      <a:noAutofit/>
+                    </a:bodyPr>
+                    <a:lstStyle/>
+                    <a:p>
+                      <a:r>
+                        <a:rPr sz="1875" b="0">
+                          <a:solidFill>
+                            <a:srgbClr val="163447"/>
+                          </a:solidFill>
+                          <a:latin typeface="DejaVu Sans"/>
+                          <a:ea typeface="DejaVu Sans"/>
+                          <a:cs typeface="DejaVu Sans"/>
+                        </a:rPr>
+                        <a:t>Daniel Valarezo</a:t>
+                      </a:r>
+                    </a:p>
+                  </a:txBody>
+                  <a:tcPr marL="91440" marR="91440" marT="45720" marB="45720" anchor="ctr">
+                    <a:lnL w="9525">
+                      <a:solidFill>
+                        <a:srgbClr val="B9CCD1"/>
+                      </a:solidFill>
+                      <a:prstDash val="solid"/>
+                    </a:lnL>
+                    <a:lnR w="9525">
+                      <a:solidFill>
+                        <a:srgbClr val="B9CCD1"/>
+                      </a:solidFill>
+                      <a:prstDash val="solid"/>
+                    </a:lnR>
+                    <a:lnB w="9525">
+                      <a:solidFill>
+                        <a:srgbClr val="B9CCD1"/>
+                      </a:solidFill>
+                      <a:prstDash val="solid"/>
+                    </a:lnB>
+                    <a:solidFill>
+                      <a:srgbClr val="FFFFFF"/>
+                    </a:solidFill>
+                  </a:tcPr>
+                </a:tc>
+                <a:tc>
+                  <a:txBody>
+                    <a:bodyPr wrap="square" lIns="123825" tIns="85725" rIns="123825" bIns="85725">
+                      <a:noAutofit/>
+                    </a:bodyPr>
+                    <a:lstStyle/>
+                    <a:p>
+                      <a:r>
+                        <a:rPr sz="1875" b="0">
+                          <a:solidFill>
+                            <a:srgbClr val="163447"/>
+                          </a:solidFill>
+                          <a:latin typeface="DejaVu Sans"/>
+                          <a:ea typeface="DejaVu Sans"/>
+                          <a:cs typeface="DejaVu Sans"/>
+                        </a:rPr>
+                        <a:t>Obras y Seguimiento. Problema y documentación.</a:t>
+                      </a:r>
+                    </a:p>
+                  </a:txBody>
+                  <a:tcPr marL="91440" marR="91440" marT="45720" marB="45720" anchor="ctr">
+                    <a:lnR w="9525">
+                      <a:solidFill>
+                        <a:srgbClr val="B9CCD1"/>
+                      </a:solidFill>
+                      <a:prstDash val="solid"/>
+                    </a:lnR>
+                    <a:lnB w="9525">
+                      <a:solidFill>
+                        <a:srgbClr val="B9CCD1"/>
+                      </a:solidFill>
+                      <a:prstDash val="solid"/>
+                    </a:lnB>
+                    <a:solidFill>
+                      <a:srgbClr val="FFFFFF"/>
+                    </a:solidFill>
+                  </a:tcPr>
+                </a:tc>
+              </a:tr>
+              <a:tr h="642938">
+                <a:tc>
+                  <a:txBody>
+                    <a:bodyPr wrap="square" lIns="123825" tIns="85725" rIns="123825" bIns="85725">
+                      <a:noAutofit/>
+                    </a:bodyPr>
+                    <a:lstStyle/>
+                    <a:p>
+                      <a:r>
+                        <a:rPr sz="1875" b="0">
+                          <a:solidFill>
+                            <a:srgbClr val="163447"/>
+                          </a:solidFill>
+                          <a:latin typeface="DejaVu Sans"/>
+                          <a:ea typeface="DejaVu Sans"/>
+                          <a:cs typeface="DejaVu Sans"/>
+                        </a:rPr>
+                        <a:t>Esteban Figueroa</a:t>
+                      </a:r>
+                    </a:p>
+                  </a:txBody>
+                  <a:tcPr marL="91440" marR="91440" marT="45720" marB="45720" anchor="ctr">
+                    <a:lnL w="9525">
+                      <a:solidFill>
+                        <a:srgbClr val="B9CCD1"/>
+                      </a:solidFill>
+                      <a:prstDash val="solid"/>
+                    </a:lnL>
+                    <a:lnR w="9525">
+                      <a:solidFill>
+                        <a:srgbClr val="B9CCD1"/>
+                      </a:solidFill>
+                      <a:prstDash val="solid"/>
+                    </a:lnR>
+                    <a:lnB w="9525">
+                      <a:solidFill>
+                        <a:srgbClr val="B9CCD1"/>
+                      </a:solidFill>
+                      <a:prstDash val="solid"/>
+                    </a:lnB>
+                    <a:solidFill>
+                      <a:srgbClr val="EDF4F5"/>
+                    </a:solidFill>
+                  </a:tcPr>
+                </a:tc>
+                <a:tc>
+                  <a:txBody>
+                    <a:bodyPr wrap="square" lIns="123825" tIns="85725" rIns="123825" bIns="85725">
+                      <a:noAutofit/>
+                    </a:bodyPr>
+                    <a:lstStyle/>
+                    <a:p>
+                      <a:r>
+                        <a:rPr sz="1875" b="0">
+                          <a:solidFill>
+                            <a:srgbClr val="163447"/>
+                          </a:solidFill>
+                          <a:latin typeface="DejaVu Sans"/>
+                          <a:ea typeface="DejaVu Sans"/>
+                          <a:cs typeface="DejaVu Sans"/>
+                        </a:rPr>
+                        <a:t>Trabajadores y Asignación. Disponibilidad y horarios.</a:t>
+                      </a:r>
+                    </a:p>
+                  </a:txBody>
+                  <a:tcPr marL="91440" marR="91440" marT="45720" marB="45720" anchor="ctr">
+                    <a:lnR w="9525">
+                      <a:solidFill>
+                        <a:srgbClr val="B9CCD1"/>
+                      </a:solidFill>
+                      <a:prstDash val="solid"/>
+                    </a:lnR>
+                    <a:lnB w="9525">
+                      <a:solidFill>
+                        <a:srgbClr val="B9CCD1"/>
+                      </a:solidFill>
+                      <a:prstDash val="solid"/>
+                    </a:lnB>
+                    <a:solidFill>
+                      <a:srgbClr val="EDF4F5"/>
+                    </a:solidFill>
+                  </a:tcPr>
+                </a:tc>
+              </a:tr>
+              <a:tr h="642938">
+                <a:tc>
+                  <a:txBody>
+                    <a:bodyPr wrap="square" lIns="123825" tIns="85725" rIns="123825" bIns="85725">
+                      <a:noAutofit/>
+                    </a:bodyPr>
+                    <a:lstStyle/>
+                    <a:p>
+                      <a:r>
+                        <a:rPr sz="1875" b="0">
+                          <a:solidFill>
+                            <a:srgbClr val="163447"/>
+                          </a:solidFill>
+                          <a:latin typeface="DejaVu Sans"/>
+                          <a:ea typeface="DejaVu Sans"/>
+                          <a:cs typeface="DejaVu Sans"/>
+                        </a:rPr>
+                        <a:t>Julián Jiménez</a:t>
+                      </a:r>
+                    </a:p>
+                  </a:txBody>
+                  <a:tcPr marL="91440" marR="91440" marT="45720" marB="45720" anchor="ctr">
+                    <a:lnL w="9525">
+                      <a:solidFill>
+                        <a:srgbClr val="B9CCD1"/>
+                      </a:solidFill>
+                      <a:prstDash val="solid"/>
+                    </a:lnL>
+                    <a:lnR w="9525">
+                      <a:solidFill>
+                        <a:srgbClr val="B9CCD1"/>
+                      </a:solidFill>
+                      <a:prstDash val="solid"/>
+                    </a:lnR>
+                    <a:lnB w="9525">
+                      <a:solidFill>
+                        <a:srgbClr val="B9CCD1"/>
+                      </a:solidFill>
+                      <a:prstDash val="solid"/>
+                    </a:lnB>
+                    <a:solidFill>
+                      <a:srgbClr val="FFFFFF"/>
+                    </a:solidFill>
+                  </a:tcPr>
+                </a:tc>
+                <a:tc>
+                  <a:txBody>
+                    <a:bodyPr wrap="square" lIns="123825" tIns="85725" rIns="123825" bIns="85725">
+                      <a:noAutofit/>
+                    </a:bodyPr>
+                    <a:lstStyle/>
+                    <a:p>
+                      <a:r>
+                        <a:rPr sz="1875" b="0">
+                          <a:solidFill>
+                            <a:srgbClr val="163447"/>
+                          </a:solidFill>
+                          <a:latin typeface="DejaVu Sans"/>
+                          <a:ea typeface="DejaVu Sans"/>
+                          <a:cs typeface="DejaVu Sans"/>
+                        </a:rPr>
+                        <a:t>Actividades y GestorPrioridades. Comparador, cola y UML.</a:t>
+                      </a:r>
+                    </a:p>
+                  </a:txBody>
+                  <a:tcPr marL="91440" marR="91440" marT="45720" marB="45720" anchor="ctr">
+                    <a:lnR w="9525">
+                      <a:solidFill>
+                        <a:srgbClr val="B9CCD1"/>
+                      </a:solidFill>
+                      <a:prstDash val="solid"/>
+                    </a:lnR>
+                    <a:lnB w="9525">
+                      <a:solidFill>
+                        <a:srgbClr val="B9CCD1"/>
+                      </a:solidFill>
+                      <a:prstDash val="solid"/>
+                    </a:lnB>
+                    <a:solidFill>
+                      <a:srgbClr val="FFFFFF"/>
+                    </a:solidFill>
+                  </a:tcPr>
+                </a:tc>
+              </a:tr>
+            </a:tbl>
+          </a:graphicData>
+        </a:graphic>
+      </p:graphicFrame>
+      <p:sp>
+        <p:nvSpPr>
+          <p:cNvPr id="5" name="texto-3">
+            <a:extLst xmlns:a="http://schemas.openxmlformats.org/drawingml/2006/main">
+              <a:ext uri="{FF2B5EF4-FFF2-40B4-BE49-F238E27FC236}">
+                <a16:creationId xmlns:a16="http://schemas.microsoft.com/office/drawing/2014/main" id="{0DDFEF08-730D-4CAD-98A0-ADAC17003820}"/>
+              </a:ext>
+            </a:extLst>
+          </p:cNvPr>
+          <p:cNvSpPr>
+            <a:spLocks xmlns:a="http://schemas.openxmlformats.org/drawingml/2006/main" noGrp="1"/>
+          </p:cNvSpPr>
+          <p:nvPr/>
+        </p:nvSpPr>
+        <p:spPr>
+          <a:xfrm xmlns:a="http://schemas.openxmlformats.org/drawingml/2006/main">
+            <a:off x="609600" y="4333875"/>
+            <a:ext cx="2571750" cy="400050"/>
+          </a:xfrm>
+          <a:prstGeom xmlns:a="http://schemas.openxmlformats.org/drawingml/2006/main" prst="rect">
+            <a:avLst/>
+          </a:prstGeom>
+          <a:noFill xmlns:a="http://schemas.openxmlformats.org/drawingml/2006/main"/>
+          <a:ln xmlns:a="http://schemas.openxmlformats.org/drawingml/2006/main" w="0">
+            <a:noFill/>
+            <a:prstDash val="solid"/>
+          </a:ln>
+        </p:spPr>
+        <p:txBody>
+          <a:bodyPr xmlns:a="http://schemas.openxmlformats.org/drawingml/2006/main" wrap="square" lIns="0" tIns="0" rIns="0" bIns="0" anchor="t">
+            <a:noAutofit/>
+          </a:bodyPr>
+          <a:lstStyle xmlns:a="http://schemas.openxmlformats.org/drawingml/2006/main">
+            <a:defPPr>
+              <a:defRPr sz="2100" b="1">
+                <a:solidFill>
+                  <a:srgbClr val="007D87"/>
+                </a:solidFill>
+                <a:latin typeface="DejaVu Sans"/>
+                <a:ea typeface="DejaVu Sans"/>
+                <a:cs typeface="DejaVu Sans"/>
+              </a:defRPr>
+            </a:defPPr>
+            <a:lvl1pPr>
+              <a:defRPr sz="2100" b="1">
+                <a:solidFill>
+                  <a:srgbClr val="007D87"/>
+                </a:solidFill>
+                <a:latin typeface="DejaVu Sans"/>
+                <a:ea typeface="DejaVu Sans"/>
+                <a:cs typeface="DejaVu Sans"/>
+              </a:defRPr>
+            </a:lvl1pPr>
+            <a:lvl2pPr>
+              <a:defRPr sz="2100" b="1">
+                <a:solidFill>
+                  <a:srgbClr val="007D87"/>
+                </a:solidFill>
+                <a:latin typeface="DejaVu Sans"/>
+                <a:ea typeface="DejaVu Sans"/>
+                <a:cs typeface="DejaVu Sans"/>
+              </a:defRPr>
+            </a:lvl2pPr>
+            <a:lvl3pPr>
+              <a:defRPr sz="2100" b="1">
+                <a:solidFill>
+                  <a:srgbClr val="007D87"/>
+                </a:solidFill>
+                <a:latin typeface="DejaVu Sans"/>
+                <a:ea typeface="DejaVu Sans"/>
+                <a:cs typeface="DejaVu Sans"/>
+              </a:defRPr>
+            </a:lvl3pPr>
+            <a:lvl4pPr>
+              <a:defRPr sz="2100" b="1">
+                <a:solidFill>
+                  <a:srgbClr val="007D87"/>
+                </a:solidFill>
+                <a:latin typeface="DejaVu Sans"/>
+                <a:ea typeface="DejaVu Sans"/>
+                <a:cs typeface="DejaVu Sans"/>
+              </a:defRPr>
+            </a:lvl4pPr>
+            <a:lvl5pPr>
+              <a:defRPr sz="2100" b="1">
+                <a:solidFill>
+                  <a:srgbClr val="007D87"/>
+                </a:solidFill>
+                <a:latin typeface="DejaVu Sans"/>
+                <a:ea typeface="DejaVu Sans"/>
+                <a:cs typeface="DejaVu Sans"/>
+              </a:defRPr>
+            </a:lvl5pPr>
+            <a:lvl6pPr>
+              <a:defRPr sz="2100" b="1">
+                <a:solidFill>
+                  <a:srgbClr val="007D87"/>
+                </a:solidFill>
+                <a:latin typeface="DejaVu Sans"/>
+                <a:ea typeface="DejaVu Sans"/>
+                <a:cs typeface="DejaVu Sans"/>
+              </a:defRPr>
+            </a:lvl6pPr>
+            <a:lvl7pPr>
+              <a:defRPr sz="2100" b="1">
+                <a:solidFill>
+                  <a:srgbClr val="007D87"/>
+                </a:solidFill>
+                <a:latin typeface="DejaVu Sans"/>
+                <a:ea typeface="DejaVu Sans"/>
+                <a:cs typeface="DejaVu Sans"/>
+              </a:defRPr>
+            </a:lvl7pPr>
+            <a:lvl8pPr>
+              <a:defRPr sz="2100" b="1">
+                <a:solidFill>
+                  <a:srgbClr val="007D87"/>
+                </a:solidFill>
+                <a:latin typeface="DejaVu Sans"/>
+                <a:ea typeface="DejaVu Sans"/>
+                <a:cs typeface="DejaVu Sans"/>
+              </a:defRPr>
+            </a:lvl8pPr>
+            <a:lvl9pPr>
+              <a:defRPr sz="2100" b="1">
+                <a:solidFill>
+                  <a:srgbClr val="007D87"/>
+                </a:solidFill>
+                <a:latin typeface="DejaVu Sans"/>
+                <a:ea typeface="DejaVu Sans"/>
+                <a:cs typeface="DejaVu Sans"/>
+              </a:defRPr>
+            </a:lvl9pPr>
+          </a:lstStyle>
+          <a:p xmlns:a="http://schemas.openxmlformats.org/drawingml/2006/main">
+            <a:pPr>
+              <a:defRPr sz="2100" b="1">
+                <a:solidFill>
+                  <a:srgbClr val="007D87"/>
+                </a:solidFill>
+                <a:latin typeface="DejaVu Sans"/>
+                <a:ea typeface="DejaVu Sans"/>
+                <a:cs typeface="DejaVu Sans"/>
+              </a:defRPr>
+            </a:pPr>
+            <a:r>
+              <a:rPr sz="2100" b="1">
+                <a:solidFill>
+                  <a:srgbClr val="007D87"/>
+                </a:solidFill>
+                <a:latin typeface="DejaVu Sans"/>
+                <a:ea typeface="DejaVu Sans"/>
+                <a:cs typeface="DejaVu Sans"/>
+              </a:rPr>
+              <a:t>Repositorio</a:t>
+            </a:r>
+          </a:p>
+        </p:txBody>
+      </p:sp>
+      <p:sp>
+        <p:nvSpPr>
+          <p:cNvPr id="6" name="texto-4">
+            <a:extLst xmlns:a="http://schemas.openxmlformats.org/drawingml/2006/main">
+              <a:ext uri="{FF2B5EF4-FFF2-40B4-BE49-F238E27FC236}">
+                <a16:creationId xmlns:a16="http://schemas.microsoft.com/office/drawing/2014/main" id="{EC54C732-BE89-4C5D-885A-EC43870B3D03}"/>
+              </a:ext>
+            </a:extLst>
+          </p:cNvPr>
+          <p:cNvSpPr>
+            <a:spLocks xmlns:a="http://schemas.openxmlformats.org/drawingml/2006/main" noGrp="1"/>
+          </p:cNvSpPr>
+          <p:nvPr/>
+        </p:nvSpPr>
+        <p:spPr>
+          <a:xfrm xmlns:a="http://schemas.openxmlformats.org/drawingml/2006/main">
+            <a:off x="3476625" y="4333875"/>
+            <a:ext cx="8048625" cy="723900"/>
+          </a:xfrm>
+          <a:prstGeom xmlns:a="http://schemas.openxmlformats.org/drawingml/2006/main" prst="rect">
+            <a:avLst/>
+          </a:prstGeom>
+          <a:noFill xmlns:a="http://schemas.openxmlformats.org/drawingml/2006/main"/>
+          <a:ln xmlns:a="http://schemas.openxmlformats.org/drawingml/2006/main" w="0">
+            <a:noFill/>
+            <a:prstDash val="solid"/>
+          </a:ln>
+        </p:spPr>
+        <p:txBody>
+          <a:bodyPr xmlns:a="http://schemas.openxmlformats.org/drawingml/2006/main" wrap="square" lIns="0" tIns="0" rIns="0" bIns="0" anchor="t">
+            <a:noAutofit/>
+          </a:bodyPr>
+          <a:lstStyle xmlns:a="http://schemas.openxmlformats.org/drawingml/2006/main">
+            <a:defPPr>
+              <a:defRPr sz="1950" b="0">
+                <a:solidFill>
+                  <a:srgbClr val="163447"/>
+                </a:solidFill>
+                <a:latin typeface="DejaVu Sans"/>
+                <a:ea typeface="DejaVu Sans"/>
+                <a:cs typeface="DejaVu Sans"/>
+              </a:defRPr>
+            </a:defPPr>
+            <a:lvl1pPr>
+              <a:defRPr sz="1950" b="0">
+                <a:solidFill>
+                  <a:srgbClr val="163447"/>
+                </a:solidFill>
+                <a:latin typeface="DejaVu Sans"/>
+                <a:ea typeface="DejaVu Sans"/>
+                <a:cs typeface="DejaVu Sans"/>
+              </a:defRPr>
+            </a:lvl1pPr>
+            <a:lvl2pPr>
+              <a:defRPr sz="1950" b="0">
+                <a:solidFill>
+                  <a:srgbClr val="163447"/>
+                </a:solidFill>
+                <a:latin typeface="DejaVu Sans"/>
+                <a:ea typeface="DejaVu Sans"/>
+                <a:cs typeface="DejaVu Sans"/>
+              </a:defRPr>
+            </a:lvl2pPr>
+            <a:lvl3pPr>
+              <a:defRPr sz="1950" b="0">
+                <a:solidFill>
+                  <a:srgbClr val="163447"/>
+                </a:solidFill>
+                <a:latin typeface="DejaVu Sans"/>
+                <a:ea typeface="DejaVu Sans"/>
+                <a:cs typeface="DejaVu Sans"/>
+              </a:defRPr>
+            </a:lvl3pPr>
+            <a:lvl4pPr>
+              <a:defRPr sz="1950" b="0">
+                <a:solidFill>
+                  <a:srgbClr val="163447"/>
+                </a:solidFill>
+                <a:latin typeface="DejaVu Sans"/>
+                <a:ea typeface="DejaVu Sans"/>
+                <a:cs typeface="DejaVu Sans"/>
+              </a:defRPr>
+            </a:lvl4pPr>
+            <a:lvl5pPr>
+              <a:defRPr sz="1950" b="0">
+                <a:solidFill>
+                  <a:srgbClr val="163447"/>
+                </a:solidFill>
+                <a:latin typeface="DejaVu Sans"/>
+                <a:ea typeface="DejaVu Sans"/>
+                <a:cs typeface="DejaVu Sans"/>
+              </a:defRPr>
+            </a:lvl5pPr>
+            <a:lvl6pPr>
+              <a:defRPr sz="1950" b="0">
+                <a:solidFill>
+                  <a:srgbClr val="163447"/>
+                </a:solidFill>
+                <a:latin typeface="DejaVu Sans"/>
+                <a:ea typeface="DejaVu Sans"/>
+                <a:cs typeface="DejaVu Sans"/>
+              </a:defRPr>
+            </a:lvl6pPr>
+            <a:lvl7pPr>
+              <a:defRPr sz="1950" b="0">
+                <a:solidFill>
+                  <a:srgbClr val="163447"/>
+                </a:solidFill>
+                <a:latin typeface="DejaVu Sans"/>
+                <a:ea typeface="DejaVu Sans"/>
+                <a:cs typeface="DejaVu Sans"/>
+              </a:defRPr>
+            </a:lvl7pPr>
+            <a:lvl8pPr>
+              <a:defRPr sz="1950" b="0">
+                <a:solidFill>
+                  <a:srgbClr val="163447"/>
+                </a:solidFill>
+                <a:latin typeface="DejaVu Sans"/>
+                <a:ea typeface="DejaVu Sans"/>
+                <a:cs typeface="DejaVu Sans"/>
+              </a:defRPr>
+            </a:lvl8pPr>
+            <a:lvl9pPr>
+              <a:defRPr sz="1950" b="0">
+                <a:solidFill>
+                  <a:srgbClr val="163447"/>
+                </a:solidFill>
+                <a:latin typeface="DejaVu Sans"/>
+                <a:ea typeface="DejaVu Sans"/>
+                <a:cs typeface="DejaVu Sans"/>
+              </a:defRPr>
+            </a:lvl9pPr>
+          </a:lstStyle>
+          <a:p xmlns:a="http://schemas.openxmlformats.org/drawingml/2006/main">
+            <a:pPr>
+              <a:defRPr sz="1950" b="0">
+                <a:solidFill>
+                  <a:srgbClr val="163447"/>
+                </a:solidFill>
+                <a:latin typeface="DejaVu Sans"/>
+                <a:ea typeface="DejaVu Sans"/>
+                <a:cs typeface="DejaVu Sans"/>
+              </a:defRPr>
+            </a:pPr>
+            <a:r>
+              <a:rPr sz="1950" b="0">
+                <a:solidFill>
+                  <a:srgbClr val="163447"/>
+                </a:solidFill>
+                <a:latin typeface="DejaVu Sans"/>
+                <a:ea typeface="DejaVu Sans"/>
+                <a:cs typeface="DejaVu Sans"/>
+              </a:rPr>
+              <a:t>README.md y docs: informe, presentación, UML y observaciones docentes.</a:t>
+            </a:r>
+          </a:p>
+        </p:txBody>
+      </p:sp>
+      <p:sp>
+        <p:nvSpPr>
+          <p:cNvPr id="7" name="texto-5">
+            <a:extLst xmlns:a="http://schemas.openxmlformats.org/drawingml/2006/main">
+              <a:ext uri="{FF2B5EF4-FFF2-40B4-BE49-F238E27FC236}">
+                <a16:creationId xmlns:a16="http://schemas.microsoft.com/office/drawing/2014/main" id="{C0DF8A6D-8133-4D51-A647-25267EBA64E9}"/>
+              </a:ext>
+            </a:extLst>
+          </p:cNvPr>
+          <p:cNvSpPr>
+            <a:spLocks xmlns:a="http://schemas.openxmlformats.org/drawingml/2006/main" noGrp="1"/>
+          </p:cNvSpPr>
+          <p:nvPr/>
+        </p:nvSpPr>
+        <p:spPr>
+          <a:xfrm xmlns:a="http://schemas.openxmlformats.org/drawingml/2006/main">
+            <a:off x="609600" y="5238750"/>
+            <a:ext cx="2571750" cy="666750"/>
+          </a:xfrm>
+          <a:prstGeom xmlns:a="http://schemas.openxmlformats.org/drawingml/2006/main" prst="rect">
+            <a:avLst/>
+          </a:prstGeom>
+          <a:noFill xmlns:a="http://schemas.openxmlformats.org/drawingml/2006/main"/>
+          <a:ln xmlns:a="http://schemas.openxmlformats.org/drawingml/2006/main" w="0">
+            <a:noFill/>
+            <a:prstDash val="solid"/>
+          </a:ln>
+        </p:spPr>
+        <p:txBody>
+          <a:bodyPr xmlns:a="http://schemas.openxmlformats.org/drawingml/2006/main" wrap="square" lIns="0" tIns="0" rIns="0" bIns="0" anchor="t">
+            <a:noAutofit/>
+          </a:bodyPr>
+          <a:lstStyle xmlns:a="http://schemas.openxmlformats.org/drawingml/2006/main">
+            <a:defPPr>
+              <a:defRPr sz="2100" b="1">
+                <a:solidFill>
+                  <a:srgbClr val="007D87"/>
+                </a:solidFill>
+                <a:latin typeface="DejaVu Sans"/>
+                <a:ea typeface="DejaVu Sans"/>
+                <a:cs typeface="DejaVu Sans"/>
+              </a:defRPr>
+            </a:defPPr>
+            <a:lvl1pPr>
+              <a:defRPr sz="2100" b="1">
+                <a:solidFill>
+                  <a:srgbClr val="007D87"/>
+                </a:solidFill>
+                <a:latin typeface="DejaVu Sans"/>
+                <a:ea typeface="DejaVu Sans"/>
+                <a:cs typeface="DejaVu Sans"/>
+              </a:defRPr>
+            </a:lvl1pPr>
+            <a:lvl2pPr>
+              <a:defRPr sz="2100" b="1">
+                <a:solidFill>
+                  <a:srgbClr val="007D87"/>
+                </a:solidFill>
+                <a:latin typeface="DejaVu Sans"/>
+                <a:ea typeface="DejaVu Sans"/>
+                <a:cs typeface="DejaVu Sans"/>
+              </a:defRPr>
+            </a:lvl2pPr>
+            <a:lvl3pPr>
+              <a:defRPr sz="2100" b="1">
+                <a:solidFill>
+                  <a:srgbClr val="007D87"/>
+                </a:solidFill>
+                <a:latin typeface="DejaVu Sans"/>
+                <a:ea typeface="DejaVu Sans"/>
+                <a:cs typeface="DejaVu Sans"/>
+              </a:defRPr>
+            </a:lvl3pPr>
+            <a:lvl4pPr>
+              <a:defRPr sz="2100" b="1">
+                <a:solidFill>
+                  <a:srgbClr val="007D87"/>
+                </a:solidFill>
+                <a:latin typeface="DejaVu Sans"/>
+                <a:ea typeface="DejaVu Sans"/>
+                <a:cs typeface="DejaVu Sans"/>
+              </a:defRPr>
+            </a:lvl4pPr>
+            <a:lvl5pPr>
+              <a:defRPr sz="2100" b="1">
+                <a:solidFill>
+                  <a:srgbClr val="007D87"/>
+                </a:solidFill>
+                <a:latin typeface="DejaVu Sans"/>
+                <a:ea typeface="DejaVu Sans"/>
+                <a:cs typeface="DejaVu Sans"/>
+              </a:defRPr>
+            </a:lvl5pPr>
+            <a:lvl6pPr>
+              <a:defRPr sz="2100" b="1">
+                <a:solidFill>
+                  <a:srgbClr val="007D87"/>
+                </a:solidFill>
+                <a:latin typeface="DejaVu Sans"/>
+                <a:ea typeface="DejaVu Sans"/>
+                <a:cs typeface="DejaVu Sans"/>
+              </a:defRPr>
+            </a:lvl6pPr>
+            <a:lvl7pPr>
+              <a:defRPr sz="2100" b="1">
+                <a:solidFill>
+                  <a:srgbClr val="007D87"/>
+                </a:solidFill>
+                <a:latin typeface="DejaVu Sans"/>
+                <a:ea typeface="DejaVu Sans"/>
+                <a:cs typeface="DejaVu Sans"/>
+              </a:defRPr>
+            </a:lvl7pPr>
+            <a:lvl8pPr>
+              <a:defRPr sz="2100" b="1">
+                <a:solidFill>
+                  <a:srgbClr val="007D87"/>
+                </a:solidFill>
+                <a:latin typeface="DejaVu Sans"/>
+                <a:ea typeface="DejaVu Sans"/>
+                <a:cs typeface="DejaVu Sans"/>
+              </a:defRPr>
+            </a:lvl8pPr>
+            <a:lvl9pPr>
+              <a:defRPr sz="2100" b="1">
+                <a:solidFill>
+                  <a:srgbClr val="007D87"/>
+                </a:solidFill>
+                <a:latin typeface="DejaVu Sans"/>
+                <a:ea typeface="DejaVu Sans"/>
+                <a:cs typeface="DejaVu Sans"/>
+              </a:defRPr>
+            </a:lvl9pPr>
+          </a:lstStyle>
+          <a:p xmlns:a="http://schemas.openxmlformats.org/drawingml/2006/main">
+            <a:pPr>
+              <a:defRPr sz="2100" b="1">
+                <a:solidFill>
+                  <a:srgbClr val="007D87"/>
+                </a:solidFill>
+                <a:latin typeface="DejaVu Sans"/>
+                <a:ea typeface="DejaVu Sans"/>
+                <a:cs typeface="DejaVu Sans"/>
+              </a:defRPr>
+            </a:pPr>
+            <a:r>
+              <a:rPr sz="2100" b="1">
+                <a:solidFill>
+                  <a:srgbClr val="007D87"/>
+                </a:solidFill>
+                <a:latin typeface="DejaVu Sans"/>
+                <a:ea typeface="DejaVu Sans"/>
+                <a:cs typeface="DejaVu Sans"/>
+              </a:rPr>
+              <a:t>Riesgos y mitigación</a:t>
+            </a:r>
+          </a:p>
+        </p:txBody>
+      </p:sp>
+      <p:sp>
+        <p:nvSpPr>
+          <p:cNvPr id="8" name="texto-6">
+            <a:extLst xmlns:a="http://schemas.openxmlformats.org/drawingml/2006/main">
+              <a:ext uri="{FF2B5EF4-FFF2-40B4-BE49-F238E27FC236}">
+                <a16:creationId xmlns:a16="http://schemas.microsoft.com/office/drawing/2014/main" id="{0EC2F150-C827-4234-911D-672D59FA87BF}"/>
+              </a:ext>
+            </a:extLst>
+          </p:cNvPr>
+          <p:cNvSpPr>
+            <a:spLocks xmlns:a="http://schemas.openxmlformats.org/drawingml/2006/main" noGrp="1"/>
+          </p:cNvSpPr>
+          <p:nvPr/>
+        </p:nvSpPr>
+        <p:spPr>
+          <a:xfrm xmlns:a="http://schemas.openxmlformats.org/drawingml/2006/main">
+            <a:off x="3476625" y="5238750"/>
+            <a:ext cx="8048625" cy="952500"/>
+          </a:xfrm>
+          <a:prstGeom xmlns:a="http://schemas.openxmlformats.org/drawingml/2006/main" prst="rect">
+            <a:avLst/>
+          </a:prstGeom>
+          <a:noFill xmlns:a="http://schemas.openxmlformats.org/drawingml/2006/main"/>
+          <a:ln xmlns:a="http://schemas.openxmlformats.org/drawingml/2006/main" w="0">
+            <a:noFill/>
+            <a:prstDash val="solid"/>
+          </a:ln>
+        </p:spPr>
+        <p:txBody>
+          <a:bodyPr xmlns:a="http://schemas.openxmlformats.org/drawingml/2006/main" wrap="square" lIns="0" tIns="0" rIns="0" bIns="0" anchor="t">
+            <a:noAutofit/>
+          </a:bodyPr>
+          <a:lstStyle xmlns:a="http://schemas.openxmlformats.org/drawingml/2006/main">
+            <a:defPPr>
+              <a:defRPr sz="1875" b="0">
+                <a:solidFill>
+                  <a:srgbClr val="163447"/>
+                </a:solidFill>
+                <a:latin typeface="DejaVu Sans"/>
+                <a:ea typeface="DejaVu Sans"/>
+                <a:cs typeface="DejaVu Sans"/>
+              </a:defRPr>
+            </a:defPPr>
+            <a:lvl1pPr>
+              <a:defRPr sz="1875" b="0">
+                <a:solidFill>
+                  <a:srgbClr val="163447"/>
+                </a:solidFill>
+                <a:latin typeface="DejaVu Sans"/>
+                <a:ea typeface="DejaVu Sans"/>
+                <a:cs typeface="DejaVu Sans"/>
+              </a:defRPr>
+            </a:lvl1pPr>
+            <a:lvl2pPr>
+              <a:defRPr sz="1875" b="0">
+                <a:solidFill>
+                  <a:srgbClr val="163447"/>
+                </a:solidFill>
+                <a:latin typeface="DejaVu Sans"/>
+                <a:ea typeface="DejaVu Sans"/>
+                <a:cs typeface="DejaVu Sans"/>
+              </a:defRPr>
+            </a:lvl2pPr>
+            <a:lvl3pPr>
+              <a:defRPr sz="1875" b="0">
+                <a:solidFill>
+                  <a:srgbClr val="163447"/>
+                </a:solidFill>
+                <a:latin typeface="DejaVu Sans"/>
+                <a:ea typeface="DejaVu Sans"/>
+                <a:cs typeface="DejaVu Sans"/>
+              </a:defRPr>
+            </a:lvl3pPr>
+            <a:lvl4pPr>
+              <a:defRPr sz="1875" b="0">
+                <a:solidFill>
+                  <a:srgbClr val="163447"/>
+                </a:solidFill>
+                <a:latin typeface="DejaVu Sans"/>
+                <a:ea typeface="DejaVu Sans"/>
+                <a:cs typeface="DejaVu Sans"/>
+              </a:defRPr>
+            </a:lvl4pPr>
+            <a:lvl5pPr>
+              <a:defRPr sz="1875" b="0">
+                <a:solidFill>
+                  <a:srgbClr val="163447"/>
+                </a:solidFill>
+                <a:latin typeface="DejaVu Sans"/>
+                <a:ea typeface="DejaVu Sans"/>
+                <a:cs typeface="DejaVu Sans"/>
+              </a:defRPr>
+            </a:lvl5pPr>
+            <a:lvl6pPr>
+              <a:defRPr sz="1875" b="0">
+                <a:solidFill>
+                  <a:srgbClr val="163447"/>
+                </a:solidFill>
+                <a:latin typeface="DejaVu Sans"/>
+                <a:ea typeface="DejaVu Sans"/>
+                <a:cs typeface="DejaVu Sans"/>
+              </a:defRPr>
+            </a:lvl6pPr>
+            <a:lvl7pPr>
+              <a:defRPr sz="1875" b="0">
+                <a:solidFill>
+                  <a:srgbClr val="163447"/>
+                </a:solidFill>
+                <a:latin typeface="DejaVu Sans"/>
+                <a:ea typeface="DejaVu Sans"/>
+                <a:cs typeface="DejaVu Sans"/>
+              </a:defRPr>
+            </a:lvl7pPr>
+            <a:lvl8pPr>
+              <a:defRPr sz="1875" b="0">
+                <a:solidFill>
+                  <a:srgbClr val="163447"/>
+                </a:solidFill>
+                <a:latin typeface="DejaVu Sans"/>
+                <a:ea typeface="DejaVu Sans"/>
+                <a:cs typeface="DejaVu Sans"/>
+              </a:defRPr>
+            </a:lvl8pPr>
+            <a:lvl9pPr>
+              <a:defRPr sz="1875" b="0">
+                <a:solidFill>
+                  <a:srgbClr val="163447"/>
+                </a:solidFill>
+                <a:latin typeface="DejaVu Sans"/>
+                <a:ea typeface="DejaVu Sans"/>
+                <a:cs typeface="DejaVu Sans"/>
+              </a:defRPr>
+            </a:lvl9pPr>
+          </a:lstStyle>
+          <a:p xmlns:a="http://schemas.openxmlformats.org/drawingml/2006/main">
+            <a:pPr>
+              <a:defRPr sz="1875" b="0">
+                <a:solidFill>
+                  <a:srgbClr val="163447"/>
+                </a:solidFill>
+                <a:latin typeface="DejaVu Sans"/>
+                <a:ea typeface="DejaVu Sans"/>
+                <a:cs typeface="DejaVu Sans"/>
+              </a:defRPr>
+            </a:pPr>
+            <a:r>
+              <a:rPr sz="1875" b="0">
+                <a:solidFill>
+                  <a:srgbClr val="163447"/>
+                </a:solidFill>
+                <a:latin typeface="DejaVu Sans"/>
+                <a:ea typeface="DejaVu Sans"/>
+                <a:cs typeface="DejaVu Sans"/>
+              </a:rPr>
+              <a:t>Cruces: validar horarios. Empates: comparador único.</a:t>
+            </a:r>
+          </a:p>
+          <a:p xmlns:a="http://schemas.openxmlformats.org/drawingml/2006/main">
+            <a:pPr>
+              <a:defRPr sz="1875" b="0">
+                <a:solidFill>
+                  <a:srgbClr val="163447"/>
+                </a:solidFill>
+                <a:latin typeface="DejaVu Sans"/>
+                <a:ea typeface="DejaVu Sans"/>
+                <a:cs typeface="DejaVu Sans"/>
+              </a:defRPr>
+            </a:pPr>
+            <a:r>
+              <a:rPr sz="1875" b="0">
+                <a:solidFill>
+                  <a:srgbClr val="163447"/>
+                </a:solidFill>
+                <a:latin typeface="DejaVu Sans"/>
+                <a:ea typeface="DejaVu Sans"/>
+                <a:cs typeface="DejaVu Sans"/>
+              </a:rPr>
+              <a:t>Cola desactualizada: usar GestorPrioridades.</a:t>
+            </a:r>
+          </a:p>
+          <a:p xmlns:a="http://schemas.openxmlformats.org/drawingml/2006/main">
+            <a:pPr>
+              <a:defRPr sz="1875" b="0">
+                <a:solidFill>
+                  <a:srgbClr val="163447"/>
+                </a:solidFill>
+                <a:latin typeface="DejaVu Sans"/>
+                <a:ea typeface="DejaVu Sans"/>
+                <a:cs typeface="DejaVu Sans"/>
+              </a:defRPr>
+            </a:pPr>
+            <a:r>
+              <a:rPr sz="1875" b="0">
+                <a:solidFill>
+                  <a:srgbClr val="163447"/>
+                </a:solidFill>
+                <a:latin typeface="DejaVu Sans"/>
+                <a:ea typeface="DejaVu Sans"/>
+                <a:cs typeface="DejaVu Sans"/>
+              </a:rPr>
+              <a:t>Datos incorrectos: validar códigos y rangos.</a:t>
+            </a:r>
+          </a:p>
+        </p:txBody>
+      </p:sp>
+    </p:spTree>
+    <p:extLst>
+      <p:ext uri="{BB962C8B-B14F-4D97-AF65-F5344CB8AC3E}">
+        <p14:creationId xmlns:p14="http://schemas.microsoft.com/office/powerpoint/2010/main" val="831952553"/>
       </p:ext>
     </p:extLst>
   </p:cSld>
@@ -5164,7 +6824,7 @@
           <p:cNvPr id="10" name="texto-0">
             <a:extLst xmlns:a="http://schemas.openxmlformats.org/drawingml/2006/main">
               <a:ext uri="{FF2B5EF4-FFF2-40B4-BE49-F238E27FC236}">
-                <a16:creationId xmlns:a16="http://schemas.microsoft.com/office/drawing/2014/main" id="{0A07EBFF-720F-4B77-B45B-69EB1DF43417}"/>
+                <a16:creationId xmlns:a16="http://schemas.microsoft.com/office/drawing/2014/main" id="{2E8BDDD9-D890-477C-ADAC-1649BD4FD347}"/>
               </a:ext>
             </a:extLst>
           </p:cNvPr>
@@ -5323,7 +6983,7 @@
           <p:cNvPr id="2" name="texto-1">
             <a:extLst xmlns:a="http://schemas.openxmlformats.org/drawingml/2006/main">
               <a:ext uri="{FF2B5EF4-FFF2-40B4-BE49-F238E27FC236}">
-                <a16:creationId xmlns:a16="http://schemas.microsoft.com/office/drawing/2014/main" id="{74E125B6-C57E-43C6-A67C-E81B92FB436B}"/>
+                <a16:creationId xmlns:a16="http://schemas.microsoft.com/office/drawing/2014/main" id="{7C87576C-A814-4273-8DC1-A7096BF5489E}"/>
               </a:ext>
             </a:extLst>
           </p:cNvPr>
@@ -5482,7 +7142,7 @@
           <p:cNvPr id="3" name="texto-2">
             <a:extLst xmlns:a="http://schemas.openxmlformats.org/drawingml/2006/main">
               <a:ext uri="{FF2B5EF4-FFF2-40B4-BE49-F238E27FC236}">
-                <a16:creationId xmlns:a16="http://schemas.microsoft.com/office/drawing/2014/main" id="{5818C21A-FC47-446F-80A5-CEA15F210028}"/>
+                <a16:creationId xmlns:a16="http://schemas.microsoft.com/office/drawing/2014/main" id="{0F08A71E-3AFC-466D-ADFB-9E141816DB9C}"/>
               </a:ext>
             </a:extLst>
           </p:cNvPr>
@@ -5641,7 +7301,7 @@
           <p:cNvPr id="4" name="texto-3">
             <a:extLst xmlns:a="http://schemas.openxmlformats.org/drawingml/2006/main">
               <a:ext uri="{FF2B5EF4-FFF2-40B4-BE49-F238E27FC236}">
-                <a16:creationId xmlns:a16="http://schemas.microsoft.com/office/drawing/2014/main" id="{0203E4F2-46EB-4BC3-A8EF-F1A963685259}"/>
+                <a16:creationId xmlns:a16="http://schemas.microsoft.com/office/drawing/2014/main" id="{99B4B6FF-9B79-4FFF-9287-1CF85E48966E}"/>
               </a:ext>
             </a:extLst>
           </p:cNvPr>
@@ -5790,7 +7450,7 @@
                 <a:ea typeface="DejaVu Sans"/>
                 <a:cs typeface="DejaVu Sans"/>
               </a:rPr>
-              <a:t>Necesidad</a:t>
+              <a:t>Registro actual</a:t>
             </a:r>
           </a:p>
         </p:txBody>
@@ -5800,7 +7460,7 @@
           <p:cNvPr id="5" name="texto-4">
             <a:extLst xmlns:a="http://schemas.openxmlformats.org/drawingml/2006/main">
               <a:ext uri="{FF2B5EF4-FFF2-40B4-BE49-F238E27FC236}">
-                <a16:creationId xmlns:a16="http://schemas.microsoft.com/office/drawing/2014/main" id="{FEF44F2D-1B4E-4B37-B640-4EAE1E226563}"/>
+                <a16:creationId xmlns:a16="http://schemas.microsoft.com/office/drawing/2014/main" id="{4AA0D90F-E100-4134-B8B2-114D234B665B}"/>
               </a:ext>
             </a:extLst>
           </p:cNvPr>
@@ -5949,7 +7609,7 @@
                 <a:ea typeface="DejaVu Sans"/>
                 <a:cs typeface="DejaVu Sans"/>
               </a:rPr>
-              <a:t>Decidir qué actividad atender primero y qué trabajador puede realizarla en un horario disponible.</a:t>
+              <a:t>Las asignaciones se registran en Excel. Es necesario relacionar prioridad, especialidad y horarios al distribuir actividades.</a:t>
             </a:r>
           </a:p>
         </p:txBody>
@@ -5959,7 +7619,7 @@
           <p:cNvPr id="6" name="texto-5">
             <a:extLst xmlns:a="http://schemas.openxmlformats.org/drawingml/2006/main">
               <a:ext uri="{FF2B5EF4-FFF2-40B4-BE49-F238E27FC236}">
-                <a16:creationId xmlns:a16="http://schemas.microsoft.com/office/drawing/2014/main" id="{DB8AFF2C-737C-4055-83F8-A0A933110637}"/>
+                <a16:creationId xmlns:a16="http://schemas.microsoft.com/office/drawing/2014/main" id="{F355AD5B-6F81-40B2-9F59-ED286D57E640}"/>
               </a:ext>
             </a:extLst>
           </p:cNvPr>
@@ -6118,7 +7778,7 @@
           <p:cNvPr id="7" name="texto-6">
             <a:extLst xmlns:a="http://schemas.openxmlformats.org/drawingml/2006/main">
               <a:ext uri="{FF2B5EF4-FFF2-40B4-BE49-F238E27FC236}">
-                <a16:creationId xmlns:a16="http://schemas.microsoft.com/office/drawing/2014/main" id="{B0E4CEB4-AEC9-4B9F-8996-6730F5852744}"/>
+                <a16:creationId xmlns:a16="http://schemas.microsoft.com/office/drawing/2014/main" id="{83D1803D-4371-4059-818A-ED84CBFE5A18}"/>
               </a:ext>
             </a:extLst>
           </p:cNvPr>
@@ -6323,7 +7983,7 @@
           <p:cNvPr id="8" name="texto-7">
             <a:extLst xmlns:a="http://schemas.openxmlformats.org/drawingml/2006/main">
               <a:ext uri="{FF2B5EF4-FFF2-40B4-BE49-F238E27FC236}">
-                <a16:creationId xmlns:a16="http://schemas.microsoft.com/office/drawing/2014/main" id="{323E4B62-2B9C-4E18-9F53-A7BA3DB3ADB5}"/>
+                <a16:creationId xmlns:a16="http://schemas.microsoft.com/office/drawing/2014/main" id="{EAB9CAB8-1E48-4DB5-9813-3041672734A0}"/>
               </a:ext>
             </a:extLst>
           </p:cNvPr>
@@ -6482,7 +8142,7 @@
           <p:cNvPr id="9" name="texto-8">
             <a:extLst xmlns:a="http://schemas.openxmlformats.org/drawingml/2006/main">
               <a:ext uri="{FF2B5EF4-FFF2-40B4-BE49-F238E27FC236}">
-                <a16:creationId xmlns:a16="http://schemas.microsoft.com/office/drawing/2014/main" id="{09C2CA37-A378-45BC-956C-2E1A5D28B0CF}"/>
+                <a16:creationId xmlns:a16="http://schemas.microsoft.com/office/drawing/2014/main" id="{F73E6F08-97ED-4F7B-AA19-895AA9BE9FB6}"/>
               </a:ext>
             </a:extLst>
           </p:cNvPr>
@@ -6639,7 +8299,7 @@
     </p:spTree>
     <p:extLst>
       <p:ext uri="{BB962C8B-B14F-4D97-AF65-F5344CB8AC3E}">
-        <p14:creationId xmlns:p14="http://schemas.microsoft.com/office/powerpoint/2010/main" val="1043089040"/>
+        <p14:creationId xmlns:p14="http://schemas.microsoft.com/office/powerpoint/2010/main" val="83367068"/>
       </p:ext>
     </p:extLst>
   </p:cSld>
@@ -6670,7 +8330,7 @@
           <p:cNvPr id="8" name="texto-0">
             <a:extLst xmlns:a="http://schemas.openxmlformats.org/drawingml/2006/main">
               <a:ext uri="{FF2B5EF4-FFF2-40B4-BE49-F238E27FC236}">
-                <a16:creationId xmlns:a16="http://schemas.microsoft.com/office/drawing/2014/main" id="{BFC43297-8252-45CA-96CC-C381F86A90A4}"/>
+                <a16:creationId xmlns:a16="http://schemas.microsoft.com/office/drawing/2014/main" id="{2F7D20F7-7074-48CC-8587-493289686463}"/>
               </a:ext>
             </a:extLst>
           </p:cNvPr>
@@ -6829,7 +8489,7 @@
           <p:cNvPr id="2" name="texto-1">
             <a:extLst xmlns:a="http://schemas.openxmlformats.org/drawingml/2006/main">
               <a:ext uri="{FF2B5EF4-FFF2-40B4-BE49-F238E27FC236}">
-                <a16:creationId xmlns:a16="http://schemas.microsoft.com/office/drawing/2014/main" id="{C5492313-CF74-4787-B631-E66B6573211F}"/>
+                <a16:creationId xmlns:a16="http://schemas.microsoft.com/office/drawing/2014/main" id="{93D7EE23-61FB-4E42-B543-59651FD4FAC3}"/>
               </a:ext>
             </a:extLst>
           </p:cNvPr>
@@ -6988,7 +8648,7 @@
           <p:cNvPr id="3" name="texto-2">
             <a:extLst xmlns:a="http://schemas.openxmlformats.org/drawingml/2006/main">
               <a:ext uri="{FF2B5EF4-FFF2-40B4-BE49-F238E27FC236}">
-                <a16:creationId xmlns:a16="http://schemas.microsoft.com/office/drawing/2014/main" id="{90A6FCF6-AECF-4CB7-A285-498E3537F1D6}"/>
+                <a16:creationId xmlns:a16="http://schemas.microsoft.com/office/drawing/2014/main" id="{78F1A34E-D00A-42E9-859A-7FA6498F2586}"/>
               </a:ext>
             </a:extLst>
           </p:cNvPr>
@@ -7147,7 +8807,7 @@
           <p:cNvPr id="4" name="texto-3">
             <a:extLst xmlns:a="http://schemas.openxmlformats.org/drawingml/2006/main">
               <a:ext uri="{FF2B5EF4-FFF2-40B4-BE49-F238E27FC236}">
-                <a16:creationId xmlns:a16="http://schemas.microsoft.com/office/drawing/2014/main" id="{2ED1FC48-3777-4CDD-A5AA-D0F4AAAACF5D}"/>
+                <a16:creationId xmlns:a16="http://schemas.microsoft.com/office/drawing/2014/main" id="{A1F52A87-0340-4E8F-841E-2B35F9591AB6}"/>
               </a:ext>
             </a:extLst>
           </p:cNvPr>
@@ -7306,7 +8966,7 @@
           <p:cNvPr id="5" name="">
             <a:extLst xmlns:a="http://schemas.openxmlformats.org/drawingml/2006/main">
               <a:ext uri="{FF2B5EF4-FFF2-40B4-BE49-F238E27FC236}">
-                <a16:creationId xmlns:a16="http://schemas.microsoft.com/office/drawing/2014/main" id="{DA680460-F5DE-41BE-B3FD-240C3671525E}"/>
+                <a16:creationId xmlns:a16="http://schemas.microsoft.com/office/drawing/2014/main" id="{9D1364B8-AE0C-45DD-BF75-D34D8A39FC2C}"/>
               </a:ext>
             </a:extLst>
           </p:cNvPr>
@@ -7598,7 +9258,7 @@
           <p:cNvPr id="6" name="texto-4">
             <a:extLst xmlns:a="http://schemas.openxmlformats.org/drawingml/2006/main">
               <a:ext uri="{FF2B5EF4-FFF2-40B4-BE49-F238E27FC236}">
-                <a16:creationId xmlns:a16="http://schemas.microsoft.com/office/drawing/2014/main" id="{8067547D-93D3-4DED-B3E0-C929E4A1830C}"/>
+                <a16:creationId xmlns:a16="http://schemas.microsoft.com/office/drawing/2014/main" id="{49FDE5AB-7300-4B60-BA88-ABD5146B9868}"/>
               </a:ext>
             </a:extLst>
           </p:cNvPr>
@@ -7757,7 +9417,7 @@
           <p:cNvPr id="7" name="texto-5">
             <a:extLst xmlns:a="http://schemas.openxmlformats.org/drawingml/2006/main">
               <a:ext uri="{FF2B5EF4-FFF2-40B4-BE49-F238E27FC236}">
-                <a16:creationId xmlns:a16="http://schemas.microsoft.com/office/drawing/2014/main" id="{D251EDAC-D427-4CAA-9316-A256991E6CCE}"/>
+                <a16:creationId xmlns:a16="http://schemas.microsoft.com/office/drawing/2014/main" id="{04D8B395-6C27-457D-BF67-516EAF1F0EDD}"/>
               </a:ext>
             </a:extLst>
           </p:cNvPr>
@@ -7914,7 +9574,7 @@
     </p:spTree>
     <p:extLst>
       <p:ext uri="{BB962C8B-B14F-4D97-AF65-F5344CB8AC3E}">
-        <p14:creationId xmlns:p14="http://schemas.microsoft.com/office/powerpoint/2010/main" val="522421778"/>
+        <p14:creationId xmlns:p14="http://schemas.microsoft.com/office/powerpoint/2010/main" val="1694789222"/>
       </p:ext>
     </p:extLst>
   </p:cSld>
@@ -7945,7 +9605,7 @@
           <p:cNvPr id="6" name="texto-0">
             <a:extLst xmlns:a="http://schemas.openxmlformats.org/drawingml/2006/main">
               <a:ext uri="{FF2B5EF4-FFF2-40B4-BE49-F238E27FC236}">
-                <a16:creationId xmlns:a16="http://schemas.microsoft.com/office/drawing/2014/main" id="{426A1F0E-BB45-48CD-ADEA-9788DCE564F0}"/>
+                <a16:creationId xmlns:a16="http://schemas.microsoft.com/office/drawing/2014/main" id="{AB831B8E-9BCA-4827-994B-9386D3DE5C8B}"/>
               </a:ext>
             </a:extLst>
           </p:cNvPr>
@@ -8104,7 +9764,7 @@
           <p:cNvPr id="2" name="texto-1">
             <a:extLst xmlns:a="http://schemas.openxmlformats.org/drawingml/2006/main">
               <a:ext uri="{FF2B5EF4-FFF2-40B4-BE49-F238E27FC236}">
-                <a16:creationId xmlns:a16="http://schemas.microsoft.com/office/drawing/2014/main" id="{14448B60-CB5C-4049-A5B8-A460EAD4560D}"/>
+                <a16:creationId xmlns:a16="http://schemas.microsoft.com/office/drawing/2014/main" id="{A9E86B36-A28D-40FC-9E53-AF2F1F7438D5}"/>
               </a:ext>
             </a:extLst>
           </p:cNvPr>
@@ -8263,7 +9923,7 @@
           <p:cNvPr id="3" name="texto-2">
             <a:extLst xmlns:a="http://schemas.openxmlformats.org/drawingml/2006/main">
               <a:ext uri="{FF2B5EF4-FFF2-40B4-BE49-F238E27FC236}">
-                <a16:creationId xmlns:a16="http://schemas.microsoft.com/office/drawing/2014/main" id="{5983716D-D68C-4A37-A82A-92DD40B4E081}"/>
+                <a16:creationId xmlns:a16="http://schemas.microsoft.com/office/drawing/2014/main" id="{5B41F95F-D44A-4143-876D-0EE5B0E69F4C}"/>
               </a:ext>
             </a:extLst>
           </p:cNvPr>
@@ -8422,7 +10082,7 @@
           <p:cNvPr id="4" name="">
             <a:extLst xmlns:a="http://schemas.openxmlformats.org/drawingml/2006/main">
               <a:ext uri="{FF2B5EF4-FFF2-40B4-BE49-F238E27FC236}">
-                <a16:creationId xmlns:a16="http://schemas.microsoft.com/office/drawing/2014/main" id="{4F78721A-5777-4A36-8098-F3EDD972E9C8}"/>
+                <a16:creationId xmlns:a16="http://schemas.microsoft.com/office/drawing/2014/main" id="{E3895BEC-3141-4A21-9CED-220086D56362}"/>
               </a:ext>
             </a:extLst>
           </p:cNvPr>
@@ -9201,7 +10861,7 @@
           <p:cNvPr id="5" name="texto-3">
             <a:extLst xmlns:a="http://schemas.openxmlformats.org/drawingml/2006/main">
               <a:ext uri="{FF2B5EF4-FFF2-40B4-BE49-F238E27FC236}">
-                <a16:creationId xmlns:a16="http://schemas.microsoft.com/office/drawing/2014/main" id="{382B5FF9-F412-4710-B58F-2289C379D19C}"/>
+                <a16:creationId xmlns:a16="http://schemas.microsoft.com/office/drawing/2014/main" id="{AE8366DB-B78F-45F3-A136-FED9594DD616}"/>
               </a:ext>
             </a:extLst>
           </p:cNvPr>
@@ -9358,7 +11018,7 @@
     </p:spTree>
     <p:extLst>
       <p:ext uri="{BB962C8B-B14F-4D97-AF65-F5344CB8AC3E}">
-        <p14:creationId xmlns:p14="http://schemas.microsoft.com/office/powerpoint/2010/main" val="1724349070"/>
+        <p14:creationId xmlns:p14="http://schemas.microsoft.com/office/powerpoint/2010/main" val="436133359"/>
       </p:ext>
     </p:extLst>
   </p:cSld>
@@ -9386,23 +11046,23 @@
       </p:grpSpPr>
       <p:cxnSp>
         <p:nvCxnSpPr>
-          <p:cNvPr id="26" name="">
+          <p:cNvPr id="32" name="">
             <a:extLst xmlns:a="http://schemas.openxmlformats.org/drawingml/2006/main">
               <a:ext uri="{FF2B5EF4-FFF2-40B4-BE49-F238E27FC236}">
-                <a16:creationId xmlns:a16="http://schemas.microsoft.com/office/drawing/2014/main" id="{129E95A9-6A24-4B27-893C-3878EAD7F12F}"/>
+                <a16:creationId xmlns:a16="http://schemas.microsoft.com/office/drawing/2014/main" id="{43E7E144-7A22-4439-AA87-0B53BCFFC365}"/>
               </a:ext>
             </a:extLst>
           </p:cNvPr>
           <p:cNvCxnSpPr>
-            <a:stCxn xmlns:a="http://schemas.openxmlformats.org/drawingml/2006/main" id="16" idx="0"/>
+            <a:stCxn xmlns:a="http://schemas.openxmlformats.org/drawingml/2006/main" id="19" idx="0"/>
             <a:endCxn xmlns:a="http://schemas.openxmlformats.org/drawingml/2006/main" id="13" idx="2"/>
           </p:cNvCxnSpPr>
           <p:nvPr/>
         </p:nvCxnSpPr>
         <p:spPr>
           <a:xfrm xmlns:a="http://schemas.openxmlformats.org/drawingml/2006/main" flipV="1">
-            <a:off x="9486900" y="4524375"/>
-            <a:ext cx="0" cy="333375"/>
+            <a:off x="9486900" y="4476750"/>
+            <a:ext cx="0" cy="381000"/>
           </a:xfrm>
           <a:prstGeom xmlns:a="http://schemas.openxmlformats.org/drawingml/2006/main" prst="straightConnector1">
             <a:avLst/>
@@ -9417,10 +11077,10 @@
       </p:cxnSp>
       <p:cxnSp>
         <p:nvCxnSpPr>
-          <p:cNvPr id="24" name="">
+          <p:cNvPr id="29" name="">
             <a:extLst xmlns:a="http://schemas.openxmlformats.org/drawingml/2006/main">
               <a:ext uri="{FF2B5EF4-FFF2-40B4-BE49-F238E27FC236}">
-                <a16:creationId xmlns:a16="http://schemas.microsoft.com/office/drawing/2014/main" id="{B6AE945C-2916-4585-93CD-6123A08F1008}"/>
+                <a16:creationId xmlns:a16="http://schemas.microsoft.com/office/drawing/2014/main" id="{9919C122-84F5-46F9-B660-2734551D2191}"/>
               </a:ext>
             </a:extLst>
           </p:cNvPr>
@@ -9432,8 +11092,39 @@
         </p:nvCxnSpPr>
         <p:spPr>
           <a:xfrm xmlns:a="http://schemas.openxmlformats.org/drawingml/2006/main">
-            <a:off x="4800600" y="3810000"/>
+            <a:off x="4800600" y="3786188"/>
             <a:ext cx="2590800" cy="0"/>
+          </a:xfrm>
+          <a:prstGeom xmlns:a="http://schemas.openxmlformats.org/drawingml/2006/main" prst="straightConnector1">
+            <a:avLst/>
+          </a:prstGeom>
+          <a:ln xmlns:a="http://schemas.openxmlformats.org/drawingml/2006/main" w="14288">
+            <a:solidFill>
+              <a:srgbClr val="52636D"/>
+            </a:solidFill>
+            <a:prstDash val="solid"/>
+          </a:ln>
+        </p:spPr>
+      </p:cxnSp>
+      <p:cxnSp>
+        <p:nvCxnSpPr>
+          <p:cNvPr id="26" name="">
+            <a:extLst xmlns:a="http://schemas.openxmlformats.org/drawingml/2006/main">
+              <a:ext uri="{FF2B5EF4-FFF2-40B4-BE49-F238E27FC236}">
+                <a16:creationId xmlns:a16="http://schemas.microsoft.com/office/drawing/2014/main" id="{C1AD1182-5FE1-4089-B52E-EECA3A481785}"/>
+              </a:ext>
+            </a:extLst>
+          </p:cNvPr>
+          <p:cNvCxnSpPr>
+            <a:stCxn xmlns:a="http://schemas.openxmlformats.org/drawingml/2006/main" id="7" idx="2"/>
+            <a:endCxn xmlns:a="http://schemas.openxmlformats.org/drawingml/2006/main" id="13" idx="0"/>
+          </p:cNvCxnSpPr>
+          <p:nvPr/>
+        </p:nvCxnSpPr>
+        <p:spPr>
+          <a:xfrm xmlns:a="http://schemas.openxmlformats.org/drawingml/2006/main">
+            <a:off x="9486900" y="2714625"/>
+            <a:ext cx="0" cy="381000"/>
           </a:xfrm>
           <a:prstGeom xmlns:a="http://schemas.openxmlformats.org/drawingml/2006/main" prst="straightConnector1">
             <a:avLst/>
@@ -9451,38 +11142,7 @@
           <p:cNvPr id="22" name="">
             <a:extLst xmlns:a="http://schemas.openxmlformats.org/drawingml/2006/main">
               <a:ext uri="{FF2B5EF4-FFF2-40B4-BE49-F238E27FC236}">
-                <a16:creationId xmlns:a16="http://schemas.microsoft.com/office/drawing/2014/main" id="{7D6222E0-5281-4067-A9AA-D3C6F704ACD1}"/>
-              </a:ext>
-            </a:extLst>
-          </p:cNvPr>
-          <p:cNvCxnSpPr>
-            <a:stCxn xmlns:a="http://schemas.openxmlformats.org/drawingml/2006/main" id="7" idx="2"/>
-            <a:endCxn xmlns:a="http://schemas.openxmlformats.org/drawingml/2006/main" id="13" idx="0"/>
-          </p:cNvCxnSpPr>
-          <p:nvPr/>
-        </p:nvCxnSpPr>
-        <p:spPr>
-          <a:xfrm xmlns:a="http://schemas.openxmlformats.org/drawingml/2006/main">
-            <a:off x="9486900" y="2762250"/>
-            <a:ext cx="0" cy="333375"/>
-          </a:xfrm>
-          <a:prstGeom xmlns:a="http://schemas.openxmlformats.org/drawingml/2006/main" prst="straightConnector1">
-            <a:avLst/>
-          </a:prstGeom>
-          <a:ln xmlns:a="http://schemas.openxmlformats.org/drawingml/2006/main" w="14288">
-            <a:solidFill>
-              <a:srgbClr val="52636D"/>
-            </a:solidFill>
-            <a:prstDash val="solid"/>
-          </a:ln>
-        </p:spPr>
-      </p:cxnSp>
-      <p:cxnSp>
-        <p:nvCxnSpPr>
-          <p:cNvPr id="19" name="">
-            <a:extLst xmlns:a="http://schemas.openxmlformats.org/drawingml/2006/main">
-              <a:ext uri="{FF2B5EF4-FFF2-40B4-BE49-F238E27FC236}">
-                <a16:creationId xmlns:a16="http://schemas.microsoft.com/office/drawing/2014/main" id="{54B737BE-44B3-434F-9396-28E89FD1D379}"/>
+                <a16:creationId xmlns:a16="http://schemas.microsoft.com/office/drawing/2014/main" id="{BC5BEFC6-8A88-436E-AB9F-D97D1BE9C70B}"/>
               </a:ext>
             </a:extLst>
           </p:cNvPr>
@@ -9494,7 +11154,7 @@
         </p:nvCxnSpPr>
         <p:spPr>
           <a:xfrm xmlns:a="http://schemas.openxmlformats.org/drawingml/2006/main">
-            <a:off x="4800600" y="2047875"/>
+            <a:off x="4800600" y="2024063"/>
             <a:ext cx="2590800" cy="0"/>
           </a:xfrm>
           <a:prstGeom xmlns:a="http://schemas.openxmlformats.org/drawingml/2006/main" prst="straightConnector1">
@@ -9510,10 +11170,10 @@
       </p:cxnSp>
       <p:sp>
         <p:nvSpPr>
-          <p:cNvPr id="29" name="texto-0">
+          <p:cNvPr id="35" name="texto-0">
             <a:extLst xmlns:a="http://schemas.openxmlformats.org/drawingml/2006/main">
               <a:ext uri="{FF2B5EF4-FFF2-40B4-BE49-F238E27FC236}">
-                <a16:creationId xmlns:a16="http://schemas.microsoft.com/office/drawing/2014/main" id="{AC86B2A0-3591-432F-A31F-D297051305DB}"/>
+                <a16:creationId xmlns:a16="http://schemas.microsoft.com/office/drawing/2014/main" id="{F4039CBF-FB44-4810-855C-99E20B525F16}"/>
               </a:ext>
             </a:extLst>
           </p:cNvPr>
@@ -9662,7 +11322,7 @@
                 <a:ea typeface="DejaVu Sans"/>
                 <a:cs typeface="DejaVu Sans"/>
               </a:rPr>
-              <a:t>UML preliminar de cinco clases</a:t>
+              <a:t>UML del dominio y servicio de prioridades</a:t>
             </a:r>
           </a:p>
         </p:txBody>
@@ -9672,7 +11332,7 @@
           <p:cNvPr id="2" name="texto-1">
             <a:extLst xmlns:a="http://schemas.openxmlformats.org/drawingml/2006/main">
               <a:ext uri="{FF2B5EF4-FFF2-40B4-BE49-F238E27FC236}">
-                <a16:creationId xmlns:a16="http://schemas.microsoft.com/office/drawing/2014/main" id="{E1F8D564-FCF1-4422-9AD4-CFD6DACB02C9}"/>
+                <a16:creationId xmlns:a16="http://schemas.microsoft.com/office/drawing/2014/main" id="{A4F0B9F8-1130-4AEB-ADFB-F4EDDEBD2227}"/>
               </a:ext>
             </a:extLst>
           </p:cNvPr>
@@ -9831,7 +11491,7 @@
           <p:cNvPr id="3" name="texto-2">
             <a:extLst xmlns:a="http://schemas.openxmlformats.org/drawingml/2006/main">
               <a:ext uri="{FF2B5EF4-FFF2-40B4-BE49-F238E27FC236}">
-                <a16:creationId xmlns:a16="http://schemas.microsoft.com/office/drawing/2014/main" id="{7B19D0FF-BE83-4887-8D97-806E907EC460}"/>
+                <a16:creationId xmlns:a16="http://schemas.microsoft.com/office/drawing/2014/main" id="{9D4AEFBA-9268-46AF-8A00-5BD203D3BDBE}"/>
               </a:ext>
             </a:extLst>
           </p:cNvPr>
@@ -9990,7 +11650,7 @@
           <p:cNvPr id="4" name="clase-Obra">
             <a:extLst xmlns:a="http://schemas.openxmlformats.org/drawingml/2006/main">
               <a:ext uri="{FF2B5EF4-FFF2-40B4-BE49-F238E27FC236}">
-                <a16:creationId xmlns:a16="http://schemas.microsoft.com/office/drawing/2014/main" id="{C8FC7D24-7EB4-4D6A-A43D-B3FEEBDB3BD6}"/>
+                <a16:creationId xmlns:a16="http://schemas.microsoft.com/office/drawing/2014/main" id="{BF5B9BD4-25E5-4AF5-A124-DF4D719FF2E7}"/>
               </a:ext>
             </a:extLst>
           </p:cNvPr>
@@ -10002,7 +11662,7 @@
         <p:spPr>
           <a:xfrm xmlns:a="http://schemas.openxmlformats.org/drawingml/2006/main">
             <a:off x="609600" y="1333500"/>
-            <a:ext cx="4191000" cy="1428750"/>
+            <a:ext cx="4191000" cy="1381125"/>
           </a:xfrm>
           <a:prstGeom xmlns:a="http://schemas.openxmlformats.org/drawingml/2006/main" prst="rect">
             <a:avLst/>
@@ -10023,7 +11683,7 @@
           <p:cNvPr id="5" name="texto-4">
             <a:extLst xmlns:a="http://schemas.openxmlformats.org/drawingml/2006/main">
               <a:ext uri="{FF2B5EF4-FFF2-40B4-BE49-F238E27FC236}">
-                <a16:creationId xmlns:a16="http://schemas.microsoft.com/office/drawing/2014/main" id="{CCCD5E93-3030-4E2F-B65D-5B299981C2DF}"/>
+                <a16:creationId xmlns:a16="http://schemas.microsoft.com/office/drawing/2014/main" id="{9B55F298-57E8-41D7-9A69-1C4B13E28840}"/>
               </a:ext>
             </a:extLst>
           </p:cNvPr>
@@ -10182,7 +11842,7 @@
           <p:cNvPr id="6" name="texto-5">
             <a:extLst xmlns:a="http://schemas.openxmlformats.org/drawingml/2006/main">
               <a:ext uri="{FF2B5EF4-FFF2-40B4-BE49-F238E27FC236}">
-                <a16:creationId xmlns:a16="http://schemas.microsoft.com/office/drawing/2014/main" id="{52D1096C-3BE2-4537-BF55-C0A94DC7EFE3}"/>
+                <a16:creationId xmlns:a16="http://schemas.microsoft.com/office/drawing/2014/main" id="{6863EA84-7F45-4FC4-BD47-3DF8823867D8}"/>
               </a:ext>
             </a:extLst>
           </p:cNvPr>
@@ -10193,8 +11853,8 @@
         </p:nvSpPr>
         <p:spPr>
           <a:xfrm xmlns:a="http://schemas.openxmlformats.org/drawingml/2006/main">
-            <a:off x="742950" y="1790700"/>
-            <a:ext cx="3924300" cy="904875"/>
+            <a:off x="742950" y="1800225"/>
+            <a:ext cx="3924300" cy="866775"/>
           </a:xfrm>
           <a:prstGeom xmlns:a="http://schemas.openxmlformats.org/drawingml/2006/main" prst="rect">
             <a:avLst/>
@@ -10211,7 +11871,7 @@
           </a:bodyPr>
           <a:lstStyle xmlns:a="http://schemas.openxmlformats.org/drawingml/2006/main">
             <a:defPPr>
-              <a:defRPr sz="1575" b="0">
+              <a:defRPr sz="1500" b="0">
                 <a:solidFill>
                   <a:srgbClr val="163447"/>
                 </a:solidFill>
@@ -10221,7 +11881,7 @@
               </a:defRPr>
             </a:defPPr>
             <a:lvl1pPr>
-              <a:defRPr sz="1575" b="0">
+              <a:defRPr sz="1500" b="0">
                 <a:solidFill>
                   <a:srgbClr val="163447"/>
                 </a:solidFill>
@@ -10231,7 +11891,7 @@
               </a:defRPr>
             </a:lvl1pPr>
             <a:lvl2pPr>
-              <a:defRPr sz="1575" b="0">
+              <a:defRPr sz="1500" b="0">
                 <a:solidFill>
                   <a:srgbClr val="163447"/>
                 </a:solidFill>
@@ -10241,7 +11901,7 @@
               </a:defRPr>
             </a:lvl2pPr>
             <a:lvl3pPr>
-              <a:defRPr sz="1575" b="0">
+              <a:defRPr sz="1500" b="0">
                 <a:solidFill>
                   <a:srgbClr val="163447"/>
                 </a:solidFill>
@@ -10251,7 +11911,7 @@
               </a:defRPr>
             </a:lvl3pPr>
             <a:lvl4pPr>
-              <a:defRPr sz="1575" b="0">
+              <a:defRPr sz="1500" b="0">
                 <a:solidFill>
                   <a:srgbClr val="163447"/>
                 </a:solidFill>
@@ -10261,7 +11921,7 @@
               </a:defRPr>
             </a:lvl4pPr>
             <a:lvl5pPr>
-              <a:defRPr sz="1575" b="0">
+              <a:defRPr sz="1500" b="0">
                 <a:solidFill>
                   <a:srgbClr val="163447"/>
                 </a:solidFill>
@@ -10271,7 +11931,7 @@
               </a:defRPr>
             </a:lvl5pPr>
             <a:lvl6pPr>
-              <a:defRPr sz="1575" b="0">
+              <a:defRPr sz="1500" b="0">
                 <a:solidFill>
                   <a:srgbClr val="163447"/>
                 </a:solidFill>
@@ -10281,7 +11941,7 @@
               </a:defRPr>
             </a:lvl6pPr>
             <a:lvl7pPr>
-              <a:defRPr sz="1575" b="0">
+              <a:defRPr sz="1500" b="0">
                 <a:solidFill>
                   <a:srgbClr val="163447"/>
                 </a:solidFill>
@@ -10291,7 +11951,7 @@
               </a:defRPr>
             </a:lvl7pPr>
             <a:lvl8pPr>
-              <a:defRPr sz="1575" b="0">
+              <a:defRPr sz="1500" b="0">
                 <a:solidFill>
                   <a:srgbClr val="163447"/>
                 </a:solidFill>
@@ -10301,7 +11961,7 @@
               </a:defRPr>
             </a:lvl8pPr>
             <a:lvl9pPr>
-              <a:defRPr sz="1575" b="0">
+              <a:defRPr sz="1500" b="0">
                 <a:solidFill>
                   <a:srgbClr val="163447"/>
                 </a:solidFill>
@@ -10313,7 +11973,7 @@
           </a:lstStyle>
           <a:p xmlns:a="http://schemas.openxmlformats.org/drawingml/2006/main">
             <a:pPr>
-              <a:defRPr sz="1575" b="0">
+              <a:defRPr sz="1500" b="0">
                 <a:solidFill>
                   <a:srgbClr val="163447"/>
                 </a:solidFill>
@@ -10323,7 +11983,7 @@
               </a:defRPr>
             </a:pPr>
             <a:r>
-              <a:rPr sz="1575" b="0">
+              <a:rPr sz="1500" b="0">
                 <a:solidFill>
                   <a:srgbClr val="163447"/>
                 </a:solidFill>
@@ -10331,12 +11991,12 @@
                 <a:ea typeface="DejaVu Sans"/>
                 <a:cs typeface="DejaVu Sans"/>
               </a:rPr>
-              <a:t>codigo, fechaEntrega, estado</a:t>
+              <a:t>- codigo: String</a:t>
             </a:r>
           </a:p>
           <a:p xmlns:a="http://schemas.openxmlformats.org/drawingml/2006/main">
             <a:pPr>
-              <a:defRPr sz="1575" b="0">
+              <a:defRPr sz="1500" b="0">
                 <a:solidFill>
                   <a:srgbClr val="163447"/>
                 </a:solidFill>
@@ -10346,7 +12006,7 @@
               </a:defRPr>
             </a:pPr>
             <a:r>
-              <a:rPr sz="1575" b="0">
+              <a:rPr sz="1500" b="0">
                 <a:solidFill>
                   <a:srgbClr val="163447"/>
                 </a:solidFill>
@@ -10354,12 +12014,12 @@
                 <a:ea typeface="DejaVu Sans"/>
                 <a:cs typeface="DejaVu Sans"/>
               </a:rPr>
-              <a:t>buscarActividad(codigo)</a:t>
+              <a:t>- fechaEntrega: LocalDate</a:t>
             </a:r>
           </a:p>
           <a:p xmlns:a="http://schemas.openxmlformats.org/drawingml/2006/main">
             <a:pPr>
-              <a:defRPr sz="1575" b="0">
+              <a:defRPr sz="1500" b="0">
                 <a:solidFill>
                   <a:srgbClr val="163447"/>
                 </a:solidFill>
@@ -10369,7 +12029,7 @@
               </a:defRPr>
             </a:pPr>
             <a:r>
-              <a:rPr sz="1575" b="0">
+              <a:rPr sz="1500" b="0">
                 <a:solidFill>
                   <a:srgbClr val="163447"/>
                 </a:solidFill>
@@ -10377,7 +12037,7 @@
                 <a:ea typeface="DejaVu Sans"/>
                 <a:cs typeface="DejaVu Sans"/>
               </a:rPr>
-              <a:t>calcularAvance()</a:t>
+              <a:t>+ calcularAvance(): double</a:t>
             </a:r>
           </a:p>
         </p:txBody>
@@ -10387,7 +12047,7 @@
           <p:cNvPr id="7" name="clase-Actividad">
             <a:extLst xmlns:a="http://schemas.openxmlformats.org/drawingml/2006/main">
               <a:ext uri="{FF2B5EF4-FFF2-40B4-BE49-F238E27FC236}">
-                <a16:creationId xmlns:a16="http://schemas.microsoft.com/office/drawing/2014/main" id="{48F759B7-C358-48B9-85D7-03B894C0F9CB}"/>
+                <a16:creationId xmlns:a16="http://schemas.microsoft.com/office/drawing/2014/main" id="{85F493C0-1826-4550-B571-FD1F6FC500EA}"/>
               </a:ext>
             </a:extLst>
           </p:cNvPr>
@@ -10399,7 +12059,7 @@
         <p:spPr>
           <a:xfrm xmlns:a="http://schemas.openxmlformats.org/drawingml/2006/main">
             <a:off x="7391400" y="1333500"/>
-            <a:ext cx="4191000" cy="1428750"/>
+            <a:ext cx="4191000" cy="1381125"/>
           </a:xfrm>
           <a:prstGeom xmlns:a="http://schemas.openxmlformats.org/drawingml/2006/main" prst="rect">
             <a:avLst/>
@@ -10420,7 +12080,7 @@
           <p:cNvPr id="8" name="texto-7">
             <a:extLst xmlns:a="http://schemas.openxmlformats.org/drawingml/2006/main">
               <a:ext uri="{FF2B5EF4-FFF2-40B4-BE49-F238E27FC236}">
-                <a16:creationId xmlns:a16="http://schemas.microsoft.com/office/drawing/2014/main" id="{E0444B3F-C349-43B3-8DA1-46CD1878368A}"/>
+                <a16:creationId xmlns:a16="http://schemas.microsoft.com/office/drawing/2014/main" id="{4DD797A2-6CF4-4A3E-BE3E-38C74E831447}"/>
               </a:ext>
             </a:extLst>
           </p:cNvPr>
@@ -10579,7 +12239,7 @@
           <p:cNvPr id="9" name="texto-8">
             <a:extLst xmlns:a="http://schemas.openxmlformats.org/drawingml/2006/main">
               <a:ext uri="{FF2B5EF4-FFF2-40B4-BE49-F238E27FC236}">
-                <a16:creationId xmlns:a16="http://schemas.microsoft.com/office/drawing/2014/main" id="{459CA74C-C256-4ABA-90F2-F980B34CF807}"/>
+                <a16:creationId xmlns:a16="http://schemas.microsoft.com/office/drawing/2014/main" id="{28F891DD-BA1B-4132-9BCB-B0B5B2EE77B3}"/>
               </a:ext>
             </a:extLst>
           </p:cNvPr>
@@ -10590,8 +12250,8 @@
         </p:nvSpPr>
         <p:spPr>
           <a:xfrm xmlns:a="http://schemas.openxmlformats.org/drawingml/2006/main">
-            <a:off x="7524750" y="1790700"/>
-            <a:ext cx="3924300" cy="904875"/>
+            <a:off x="7524750" y="1800225"/>
+            <a:ext cx="3924300" cy="866775"/>
           </a:xfrm>
           <a:prstGeom xmlns:a="http://schemas.openxmlformats.org/drawingml/2006/main" prst="rect">
             <a:avLst/>
@@ -10608,7 +12268,7 @@
           </a:bodyPr>
           <a:lstStyle xmlns:a="http://schemas.openxmlformats.org/drawingml/2006/main">
             <a:defPPr>
-              <a:defRPr sz="1575" b="0">
+              <a:defRPr sz="1500" b="0">
                 <a:solidFill>
                   <a:srgbClr val="163447"/>
                 </a:solidFill>
@@ -10618,7 +12278,7 @@
               </a:defRPr>
             </a:defPPr>
             <a:lvl1pPr>
-              <a:defRPr sz="1575" b="0">
+              <a:defRPr sz="1500" b="0">
                 <a:solidFill>
                   <a:srgbClr val="163447"/>
                 </a:solidFill>
@@ -10628,7 +12288,7 @@
               </a:defRPr>
             </a:lvl1pPr>
             <a:lvl2pPr>
-              <a:defRPr sz="1575" b="0">
+              <a:defRPr sz="1500" b="0">
                 <a:solidFill>
                   <a:srgbClr val="163447"/>
                 </a:solidFill>
@@ -10638,7 +12298,7 @@
               </a:defRPr>
             </a:lvl2pPr>
             <a:lvl3pPr>
-              <a:defRPr sz="1575" b="0">
+              <a:defRPr sz="1500" b="0">
                 <a:solidFill>
                   <a:srgbClr val="163447"/>
                 </a:solidFill>
@@ -10648,7 +12308,7 @@
               </a:defRPr>
             </a:lvl3pPr>
             <a:lvl4pPr>
-              <a:defRPr sz="1575" b="0">
+              <a:defRPr sz="1500" b="0">
                 <a:solidFill>
                   <a:srgbClr val="163447"/>
                 </a:solidFill>
@@ -10658,7 +12318,7 @@
               </a:defRPr>
             </a:lvl4pPr>
             <a:lvl5pPr>
-              <a:defRPr sz="1575" b="0">
+              <a:defRPr sz="1500" b="0">
                 <a:solidFill>
                   <a:srgbClr val="163447"/>
                 </a:solidFill>
@@ -10668,7 +12328,7 @@
               </a:defRPr>
             </a:lvl5pPr>
             <a:lvl6pPr>
-              <a:defRPr sz="1575" b="0">
+              <a:defRPr sz="1500" b="0">
                 <a:solidFill>
                   <a:srgbClr val="163447"/>
                 </a:solidFill>
@@ -10678,7 +12338,7 @@
               </a:defRPr>
             </a:lvl6pPr>
             <a:lvl7pPr>
-              <a:defRPr sz="1575" b="0">
+              <a:defRPr sz="1500" b="0">
                 <a:solidFill>
                   <a:srgbClr val="163447"/>
                 </a:solidFill>
@@ -10688,7 +12348,7 @@
               </a:defRPr>
             </a:lvl7pPr>
             <a:lvl8pPr>
-              <a:defRPr sz="1575" b="0">
+              <a:defRPr sz="1500" b="0">
                 <a:solidFill>
                   <a:srgbClr val="163447"/>
                 </a:solidFill>
@@ -10698,7 +12358,7 @@
               </a:defRPr>
             </a:lvl8pPr>
             <a:lvl9pPr>
-              <a:defRPr sz="1575" b="0">
+              <a:defRPr sz="1500" b="0">
                 <a:solidFill>
                   <a:srgbClr val="163447"/>
                 </a:solidFill>
@@ -10710,7 +12370,7 @@
           </a:lstStyle>
           <a:p xmlns:a="http://schemas.openxmlformats.org/drawingml/2006/main">
             <a:pPr>
-              <a:defRPr sz="1575" b="0">
+              <a:defRPr sz="1500" b="0">
                 <a:solidFill>
                   <a:srgbClr val="163447"/>
                 </a:solidFill>
@@ -10720,7 +12380,7 @@
               </a:defRPr>
             </a:pPr>
             <a:r>
-              <a:rPr sz="1575" b="0">
+              <a:rPr sz="1500" b="0">
                 <a:solidFill>
                   <a:srgbClr val="163447"/>
                 </a:solidFill>
@@ -10728,12 +12388,12 @@
                 <a:ea typeface="DejaVu Sans"/>
                 <a:cs typeface="DejaVu Sans"/>
               </a:rPr>
-              <a:t>prioridad, fechaLimite, estado, avance</a:t>
+              <a:t>- prioridad: int</a:t>
             </a:r>
           </a:p>
           <a:p xmlns:a="http://schemas.openxmlformats.org/drawingml/2006/main">
             <a:pPr>
-              <a:defRPr sz="1575" b="0">
+              <a:defRPr sz="1500" b="0">
                 <a:solidFill>
                   <a:srgbClr val="163447"/>
                 </a:solidFill>
@@ -10743,7 +12403,7 @@
               </a:defRPr>
             </a:pPr>
             <a:r>
-              <a:rPr sz="1575" b="0">
+              <a:rPr sz="1500" b="0">
                 <a:solidFill>
                   <a:srgbClr val="163447"/>
                 </a:solidFill>
@@ -10751,12 +12411,12 @@
                 <a:ea typeface="DejaVu Sans"/>
                 <a:cs typeface="DejaVu Sans"/>
               </a:rPr>
-              <a:t>cambiarPrioridad(valor)</a:t>
+              <a:t>- avance: double</a:t>
             </a:r>
           </a:p>
           <a:p xmlns:a="http://schemas.openxmlformats.org/drawingml/2006/main">
             <a:pPr>
-              <a:defRPr sz="1575" b="0">
+              <a:defRPr sz="1500" b="0">
                 <a:solidFill>
                   <a:srgbClr val="163447"/>
                 </a:solidFill>
@@ -10766,7 +12426,7 @@
               </a:defRPr>
             </a:pPr>
             <a:r>
-              <a:rPr sz="1575" b="0">
+              <a:rPr sz="1500" b="0">
                 <a:solidFill>
                   <a:srgbClr val="163447"/>
                 </a:solidFill>
@@ -10774,7 +12434,7 @@
                 <a:ea typeface="DejaVu Sans"/>
                 <a:cs typeface="DejaVu Sans"/>
               </a:rPr>
-              <a:t>actualizarAvance(valor)</a:t>
+              <a:t>~ cambiarPrioridad(valor: int): void</a:t>
             </a:r>
           </a:p>
         </p:txBody>
@@ -10784,7 +12444,7 @@
           <p:cNvPr id="10" name="clase-Trabajador">
             <a:extLst xmlns:a="http://schemas.openxmlformats.org/drawingml/2006/main">
               <a:ext uri="{FF2B5EF4-FFF2-40B4-BE49-F238E27FC236}">
-                <a16:creationId xmlns:a16="http://schemas.microsoft.com/office/drawing/2014/main" id="{37D50329-439C-416A-9399-5604AA4CB8CA}"/>
+                <a16:creationId xmlns:a16="http://schemas.microsoft.com/office/drawing/2014/main" id="{1B36921F-0A30-49FD-82CE-6A5275D5F0CB}"/>
               </a:ext>
             </a:extLst>
           </p:cNvPr>
@@ -10796,7 +12456,7 @@
         <p:spPr>
           <a:xfrm xmlns:a="http://schemas.openxmlformats.org/drawingml/2006/main">
             <a:off x="609600" y="3095625"/>
-            <a:ext cx="4191000" cy="1428750"/>
+            <a:ext cx="4191000" cy="1381125"/>
           </a:xfrm>
           <a:prstGeom xmlns:a="http://schemas.openxmlformats.org/drawingml/2006/main" prst="rect">
             <a:avLst/>
@@ -10817,7 +12477,7 @@
           <p:cNvPr id="11" name="texto-10">
             <a:extLst xmlns:a="http://schemas.openxmlformats.org/drawingml/2006/main">
               <a:ext uri="{FF2B5EF4-FFF2-40B4-BE49-F238E27FC236}">
-                <a16:creationId xmlns:a16="http://schemas.microsoft.com/office/drawing/2014/main" id="{7BC3F3C0-95CE-47D3-A72D-729F564B0B18}"/>
+                <a16:creationId xmlns:a16="http://schemas.microsoft.com/office/drawing/2014/main" id="{8D2BB3E3-4D8C-479C-959A-8319F65A7078}"/>
               </a:ext>
             </a:extLst>
           </p:cNvPr>
@@ -10976,7 +12636,7 @@
           <p:cNvPr id="12" name="texto-11">
             <a:extLst xmlns:a="http://schemas.openxmlformats.org/drawingml/2006/main">
               <a:ext uri="{FF2B5EF4-FFF2-40B4-BE49-F238E27FC236}">
-                <a16:creationId xmlns:a16="http://schemas.microsoft.com/office/drawing/2014/main" id="{0E1335C1-6FA5-487E-B936-36C1C16A4C35}"/>
+                <a16:creationId xmlns:a16="http://schemas.microsoft.com/office/drawing/2014/main" id="{E98FFFCF-CDBA-47A9-9824-2CBAB41A9F4A}"/>
               </a:ext>
             </a:extLst>
           </p:cNvPr>
@@ -10987,8 +12647,8 @@
         </p:nvSpPr>
         <p:spPr>
           <a:xfrm xmlns:a="http://schemas.openxmlformats.org/drawingml/2006/main">
-            <a:off x="742950" y="3552825"/>
-            <a:ext cx="3924300" cy="904875"/>
+            <a:off x="742950" y="3562350"/>
+            <a:ext cx="3924300" cy="866775"/>
           </a:xfrm>
           <a:prstGeom xmlns:a="http://schemas.openxmlformats.org/drawingml/2006/main" prst="rect">
             <a:avLst/>
@@ -11005,7 +12665,7 @@
           </a:bodyPr>
           <a:lstStyle xmlns:a="http://schemas.openxmlformats.org/drawingml/2006/main">
             <a:defPPr>
-              <a:defRPr sz="1575" b="0">
+              <a:defRPr sz="1500" b="0">
                 <a:solidFill>
                   <a:srgbClr val="163447"/>
                 </a:solidFill>
@@ -11015,7 +12675,7 @@
               </a:defRPr>
             </a:defPPr>
             <a:lvl1pPr>
-              <a:defRPr sz="1575" b="0">
+              <a:defRPr sz="1500" b="0">
                 <a:solidFill>
                   <a:srgbClr val="163447"/>
                 </a:solidFill>
@@ -11025,7 +12685,7 @@
               </a:defRPr>
             </a:lvl1pPr>
             <a:lvl2pPr>
-              <a:defRPr sz="1575" b="0">
+              <a:defRPr sz="1500" b="0">
                 <a:solidFill>
                   <a:srgbClr val="163447"/>
                 </a:solidFill>
@@ -11035,7 +12695,7 @@
               </a:defRPr>
             </a:lvl2pPr>
             <a:lvl3pPr>
-              <a:defRPr sz="1575" b="0">
+              <a:defRPr sz="1500" b="0">
                 <a:solidFill>
                   <a:srgbClr val="163447"/>
                 </a:solidFill>
@@ -11045,7 +12705,7 @@
               </a:defRPr>
             </a:lvl3pPr>
             <a:lvl4pPr>
-              <a:defRPr sz="1575" b="0">
+              <a:defRPr sz="1500" b="0">
                 <a:solidFill>
                   <a:srgbClr val="163447"/>
                 </a:solidFill>
@@ -11055,7 +12715,7 @@
               </a:defRPr>
             </a:lvl4pPr>
             <a:lvl5pPr>
-              <a:defRPr sz="1575" b="0">
+              <a:defRPr sz="1500" b="0">
                 <a:solidFill>
                   <a:srgbClr val="163447"/>
                 </a:solidFill>
@@ -11065,7 +12725,7 @@
               </a:defRPr>
             </a:lvl5pPr>
             <a:lvl6pPr>
-              <a:defRPr sz="1575" b="0">
+              <a:defRPr sz="1500" b="0">
                 <a:solidFill>
                   <a:srgbClr val="163447"/>
                 </a:solidFill>
@@ -11075,7 +12735,7 @@
               </a:defRPr>
             </a:lvl6pPr>
             <a:lvl7pPr>
-              <a:defRPr sz="1575" b="0">
+              <a:defRPr sz="1500" b="0">
                 <a:solidFill>
                   <a:srgbClr val="163447"/>
                 </a:solidFill>
@@ -11085,7 +12745,7 @@
               </a:defRPr>
             </a:lvl7pPr>
             <a:lvl8pPr>
-              <a:defRPr sz="1575" b="0">
+              <a:defRPr sz="1500" b="0">
                 <a:solidFill>
                   <a:srgbClr val="163447"/>
                 </a:solidFill>
@@ -11095,7 +12755,7 @@
               </a:defRPr>
             </a:lvl8pPr>
             <a:lvl9pPr>
-              <a:defRPr sz="1575" b="0">
+              <a:defRPr sz="1500" b="0">
                 <a:solidFill>
                   <a:srgbClr val="163447"/>
                 </a:solidFill>
@@ -11107,7 +12767,7 @@
           </a:lstStyle>
           <a:p xmlns:a="http://schemas.openxmlformats.org/drawingml/2006/main">
             <a:pPr>
-              <a:defRPr sz="1575" b="0">
+              <a:defRPr sz="1500" b="0">
                 <a:solidFill>
                   <a:srgbClr val="163447"/>
                 </a:solidFill>
@@ -11117,7 +12777,7 @@
               </a:defRPr>
             </a:pPr>
             <a:r>
-              <a:rPr sz="1575" b="0">
+              <a:rPr sz="1500" b="0">
                 <a:solidFill>
                   <a:srgbClr val="163447"/>
                 </a:solidFill>
@@ -11125,12 +12785,12 @@
                 <a:ea typeface="DejaVu Sans"/>
                 <a:cs typeface="DejaVu Sans"/>
               </a:rPr>
-              <a:t>codigo, especialidad, jornada</a:t>
+              <a:t>- especialidad: String</a:t>
             </a:r>
           </a:p>
           <a:p xmlns:a="http://schemas.openxmlformats.org/drawingml/2006/main">
             <a:pPr>
-              <a:defRPr sz="1575" b="0">
+              <a:defRPr sz="1500" b="0">
                 <a:solidFill>
                   <a:srgbClr val="163447"/>
                 </a:solidFill>
@@ -11140,7 +12800,7 @@
               </a:defRPr>
             </a:pPr>
             <a:r>
-              <a:rPr sz="1575" b="0">
+              <a:rPr sz="1500" b="0">
                 <a:solidFill>
                   <a:srgbClr val="163447"/>
                 </a:solidFill>
@@ -11148,12 +12808,12 @@
                 <a:ea typeface="DejaVu Sans"/>
                 <a:cs typeface="DejaVu Sans"/>
               </a:rPr>
-              <a:t>esCompatible(actividad)</a:t>
+              <a:t>+ esCompatible(actividad: Actividad):</a:t>
             </a:r>
           </a:p>
           <a:p xmlns:a="http://schemas.openxmlformats.org/drawingml/2006/main">
             <a:pPr>
-              <a:defRPr sz="1575" b="0">
+              <a:defRPr sz="1500" b="0">
                 <a:solidFill>
                   <a:srgbClr val="163447"/>
                 </a:solidFill>
@@ -11163,7 +12823,7 @@
               </a:defRPr>
             </a:pPr>
             <a:r>
-              <a:rPr sz="1575" b="0">
+              <a:rPr sz="1500" b="0">
                 <a:solidFill>
                   <a:srgbClr val="163447"/>
                 </a:solidFill>
@@ -11171,7 +12831,7 @@
                 <a:ea typeface="DejaVu Sans"/>
                 <a:cs typeface="DejaVu Sans"/>
               </a:rPr>
-              <a:t>estaDisponible(fecha, inicio, fin)</a:t>
+              <a:t>  boolean</a:t>
             </a:r>
           </a:p>
         </p:txBody>
@@ -11181,7 +12841,7 @@
           <p:cNvPr id="13" name="clase-Asignacion">
             <a:extLst xmlns:a="http://schemas.openxmlformats.org/drawingml/2006/main">
               <a:ext uri="{FF2B5EF4-FFF2-40B4-BE49-F238E27FC236}">
-                <a16:creationId xmlns:a16="http://schemas.microsoft.com/office/drawing/2014/main" id="{743C099B-C82A-4DFA-A3F4-68854B63519E}"/>
+                <a16:creationId xmlns:a16="http://schemas.microsoft.com/office/drawing/2014/main" id="{E0D723A1-DA99-44C4-92CC-2668542A3A70}"/>
               </a:ext>
             </a:extLst>
           </p:cNvPr>
@@ -11193,7 +12853,7 @@
         <p:spPr>
           <a:xfrm xmlns:a="http://schemas.openxmlformats.org/drawingml/2006/main">
             <a:off x="7391400" y="3095625"/>
-            <a:ext cx="4191000" cy="1428750"/>
+            <a:ext cx="4191000" cy="1381125"/>
           </a:xfrm>
           <a:prstGeom xmlns:a="http://schemas.openxmlformats.org/drawingml/2006/main" prst="rect">
             <a:avLst/>
@@ -11214,7 +12874,7 @@
           <p:cNvPr id="14" name="texto-13">
             <a:extLst xmlns:a="http://schemas.openxmlformats.org/drawingml/2006/main">
               <a:ext uri="{FF2B5EF4-FFF2-40B4-BE49-F238E27FC236}">
-                <a16:creationId xmlns:a16="http://schemas.microsoft.com/office/drawing/2014/main" id="{D83DDE1A-5180-48A7-9D33-8F9A6FB0708B}"/>
+                <a16:creationId xmlns:a16="http://schemas.microsoft.com/office/drawing/2014/main" id="{D0D6144F-FF02-461D-AF7F-4775F957EDDB}"/>
               </a:ext>
             </a:extLst>
           </p:cNvPr>
@@ -11373,7 +13033,7 @@
           <p:cNvPr id="15" name="texto-14">
             <a:extLst xmlns:a="http://schemas.openxmlformats.org/drawingml/2006/main">
               <a:ext uri="{FF2B5EF4-FFF2-40B4-BE49-F238E27FC236}">
-                <a16:creationId xmlns:a16="http://schemas.microsoft.com/office/drawing/2014/main" id="{6F1FAF13-8395-4373-8349-7070E542636E}"/>
+                <a16:creationId xmlns:a16="http://schemas.microsoft.com/office/drawing/2014/main" id="{867EE3F8-7D43-4ADB-98C6-2675FF9B23D7}"/>
               </a:ext>
             </a:extLst>
           </p:cNvPr>
@@ -11384,8 +13044,8 @@
         </p:nvSpPr>
         <p:spPr>
           <a:xfrm xmlns:a="http://schemas.openxmlformats.org/drawingml/2006/main">
-            <a:off x="7524750" y="3552825"/>
-            <a:ext cx="3924300" cy="904875"/>
+            <a:off x="7524750" y="3562350"/>
+            <a:ext cx="3924300" cy="866775"/>
           </a:xfrm>
           <a:prstGeom xmlns:a="http://schemas.openxmlformats.org/drawingml/2006/main" prst="rect">
             <a:avLst/>
@@ -11402,7 +13062,7 @@
           </a:bodyPr>
           <a:lstStyle xmlns:a="http://schemas.openxmlformats.org/drawingml/2006/main">
             <a:defPPr>
-              <a:defRPr sz="1575" b="0">
+              <a:defRPr sz="1500" b="0">
                 <a:solidFill>
                   <a:srgbClr val="163447"/>
                 </a:solidFill>
@@ -11412,7 +13072,7 @@
               </a:defRPr>
             </a:defPPr>
             <a:lvl1pPr>
-              <a:defRPr sz="1575" b="0">
+              <a:defRPr sz="1500" b="0">
                 <a:solidFill>
                   <a:srgbClr val="163447"/>
                 </a:solidFill>
@@ -11422,7 +13082,7 @@
               </a:defRPr>
             </a:lvl1pPr>
             <a:lvl2pPr>
-              <a:defRPr sz="1575" b="0">
+              <a:defRPr sz="1500" b="0">
                 <a:solidFill>
                   <a:srgbClr val="163447"/>
                 </a:solidFill>
@@ -11432,7 +13092,7 @@
               </a:defRPr>
             </a:lvl2pPr>
             <a:lvl3pPr>
-              <a:defRPr sz="1575" b="0">
+              <a:defRPr sz="1500" b="0">
                 <a:solidFill>
                   <a:srgbClr val="163447"/>
                 </a:solidFill>
@@ -11442,7 +13102,7 @@
               </a:defRPr>
             </a:lvl3pPr>
             <a:lvl4pPr>
-              <a:defRPr sz="1575" b="0">
+              <a:defRPr sz="1500" b="0">
                 <a:solidFill>
                   <a:srgbClr val="163447"/>
                 </a:solidFill>
@@ -11452,7 +13112,7 @@
               </a:defRPr>
             </a:lvl4pPr>
             <a:lvl5pPr>
-              <a:defRPr sz="1575" b="0">
+              <a:defRPr sz="1500" b="0">
                 <a:solidFill>
                   <a:srgbClr val="163447"/>
                 </a:solidFill>
@@ -11462,7 +13122,7 @@
               </a:defRPr>
             </a:lvl5pPr>
             <a:lvl6pPr>
-              <a:defRPr sz="1575" b="0">
+              <a:defRPr sz="1500" b="0">
                 <a:solidFill>
                   <a:srgbClr val="163447"/>
                 </a:solidFill>
@@ -11472,7 +13132,7 @@
               </a:defRPr>
             </a:lvl6pPr>
             <a:lvl7pPr>
-              <a:defRPr sz="1575" b="0">
+              <a:defRPr sz="1500" b="0">
                 <a:solidFill>
                   <a:srgbClr val="163447"/>
                 </a:solidFill>
@@ -11482,7 +13142,7 @@
               </a:defRPr>
             </a:lvl7pPr>
             <a:lvl8pPr>
-              <a:defRPr sz="1575" b="0">
+              <a:defRPr sz="1500" b="0">
                 <a:solidFill>
                   <a:srgbClr val="163447"/>
                 </a:solidFill>
@@ -11492,7 +13152,7 @@
               </a:defRPr>
             </a:lvl8pPr>
             <a:lvl9pPr>
-              <a:defRPr sz="1575" b="0">
+              <a:defRPr sz="1500" b="0">
                 <a:solidFill>
                   <a:srgbClr val="163447"/>
                 </a:solidFill>
@@ -11504,7 +13164,7 @@
           </a:lstStyle>
           <a:p xmlns:a="http://schemas.openxmlformats.org/drawingml/2006/main">
             <a:pPr>
-              <a:defRPr sz="1575" b="0">
+              <a:defRPr sz="1500" b="0">
                 <a:solidFill>
                   <a:srgbClr val="163447"/>
                 </a:solidFill>
@@ -11514,7 +13174,7 @@
               </a:defRPr>
             </a:pPr>
             <a:r>
-              <a:rPr sz="1575" b="0">
+              <a:rPr sz="1500" b="0">
                 <a:solidFill>
                   <a:srgbClr val="163447"/>
                 </a:solidFill>
@@ -11522,12 +13182,12 @@
                 <a:ea typeface="DejaVu Sans"/>
                 <a:cs typeface="DejaVu Sans"/>
               </a:rPr>
-              <a:t>fecha, inicio, fin, activa</a:t>
+              <a:t>- inicio, fin: LocalTime</a:t>
             </a:r>
           </a:p>
           <a:p xmlns:a="http://schemas.openxmlformats.org/drawingml/2006/main">
             <a:pPr>
-              <a:defRPr sz="1575" b="0">
+              <a:defRPr sz="1500" b="0">
                 <a:solidFill>
                   <a:srgbClr val="163447"/>
                 </a:solidFill>
@@ -11537,7 +13197,7 @@
               </a:defRPr>
             </a:pPr>
             <a:r>
-              <a:rPr sz="1575" b="0">
+              <a:rPr sz="1500" b="0">
                 <a:solidFill>
                   <a:srgbClr val="163447"/>
                 </a:solidFill>
@@ -11545,12 +13205,12 @@
                 <a:ea typeface="DejaVu Sans"/>
                 <a:cs typeface="DejaVu Sans"/>
               </a:rPr>
-              <a:t>validarHorario()</a:t>
+              <a:t>- activa: boolean</a:t>
             </a:r>
           </a:p>
           <a:p xmlns:a="http://schemas.openxmlformats.org/drawingml/2006/main">
             <a:pPr>
-              <a:defRPr sz="1575" b="0">
+              <a:defRPr sz="1500" b="0">
                 <a:solidFill>
                   <a:srgbClr val="163447"/>
                 </a:solidFill>
@@ -11560,7 +13220,7 @@
               </a:defRPr>
             </a:pPr>
             <a:r>
-              <a:rPr sz="1575" b="0">
+              <a:rPr sz="1500" b="0">
                 <a:solidFill>
                   <a:srgbClr val="163447"/>
                 </a:solidFill>
@@ -11568,17 +13228,17 @@
                 <a:ea typeface="DejaVu Sans"/>
                 <a:cs typeface="DejaVu Sans"/>
               </a:rPr>
-              <a:t>reprogramar(fecha, inicio, fin)</a:t>
+              <a:t>+ validarHorario(): boolean</a:t>
             </a:r>
           </a:p>
         </p:txBody>
       </p:sp>
       <p:sp>
         <p:nvSpPr>
-          <p:cNvPr id="16" name="clase-Usuario">
+          <p:cNvPr id="16" name="clase-GestorPrioridades">
             <a:extLst xmlns:a="http://schemas.openxmlformats.org/drawingml/2006/main">
               <a:ext uri="{FF2B5EF4-FFF2-40B4-BE49-F238E27FC236}">
-                <a16:creationId xmlns:a16="http://schemas.microsoft.com/office/drawing/2014/main" id="{378D8082-0123-48B2-AD88-7C879142B219}"/>
+                <a16:creationId xmlns:a16="http://schemas.microsoft.com/office/drawing/2014/main" id="{91555841-CA09-4F2A-AFB1-5744B258D5AE}"/>
               </a:ext>
             </a:extLst>
           </p:cNvPr>
@@ -11589,8 +13249,8 @@
         </p:nvSpPr>
         <p:spPr>
           <a:xfrm xmlns:a="http://schemas.openxmlformats.org/drawingml/2006/main">
-            <a:off x="7391400" y="4857750"/>
-            <a:ext cx="4191000" cy="1428750"/>
+            <a:off x="609600" y="4857750"/>
+            <a:ext cx="4191000" cy="1381125"/>
           </a:xfrm>
           <a:prstGeom xmlns:a="http://schemas.openxmlformats.org/drawingml/2006/main" prst="rect">
             <a:avLst/>
@@ -11611,7 +13271,404 @@
           <p:cNvPr id="17" name="texto-16">
             <a:extLst xmlns:a="http://schemas.openxmlformats.org/drawingml/2006/main">
               <a:ext uri="{FF2B5EF4-FFF2-40B4-BE49-F238E27FC236}">
-                <a16:creationId xmlns:a16="http://schemas.microsoft.com/office/drawing/2014/main" id="{9F04FE0F-F8C7-4B90-BF3A-0A0D60C3974E}"/>
+                <a16:creationId xmlns:a16="http://schemas.microsoft.com/office/drawing/2014/main" id="{47C4EA6D-9CD2-43E0-B457-2CDD62B4C52A}"/>
+              </a:ext>
+            </a:extLst>
+          </p:cNvPr>
+          <p:cNvSpPr>
+            <a:spLocks xmlns:a="http://schemas.openxmlformats.org/drawingml/2006/main" noGrp="1"/>
+          </p:cNvSpPr>
+          <p:nvPr/>
+        </p:nvSpPr>
+        <p:spPr>
+          <a:xfrm xmlns:a="http://schemas.openxmlformats.org/drawingml/2006/main">
+            <a:off x="742950" y="4933950"/>
+            <a:ext cx="3924300" cy="295275"/>
+          </a:xfrm>
+          <a:prstGeom xmlns:a="http://schemas.openxmlformats.org/drawingml/2006/main" prst="rect">
+            <a:avLst/>
+          </a:prstGeom>
+          <a:noFill xmlns:a="http://schemas.openxmlformats.org/drawingml/2006/main"/>
+          <a:ln xmlns:a="http://schemas.openxmlformats.org/drawingml/2006/main" w="0">
+            <a:noFill/>
+            <a:prstDash val="solid"/>
+          </a:ln>
+        </p:spPr>
+        <p:txBody>
+          <a:bodyPr xmlns:a="http://schemas.openxmlformats.org/drawingml/2006/main" wrap="square" lIns="0" tIns="0" rIns="0" bIns="0" anchor="t">
+            <a:noAutofit/>
+          </a:bodyPr>
+          <a:lstStyle xmlns:a="http://schemas.openxmlformats.org/drawingml/2006/main">
+            <a:defPPr>
+              <a:defRPr sz="1875" b="1">
+                <a:solidFill>
+                  <a:srgbClr val="163447"/>
+                </a:solidFill>
+                <a:latin typeface="DejaVu Sans"/>
+                <a:ea typeface="DejaVu Sans"/>
+                <a:cs typeface="DejaVu Sans"/>
+              </a:defRPr>
+            </a:defPPr>
+            <a:lvl1pPr>
+              <a:defRPr sz="1875" b="1">
+                <a:solidFill>
+                  <a:srgbClr val="163447"/>
+                </a:solidFill>
+                <a:latin typeface="DejaVu Sans"/>
+                <a:ea typeface="DejaVu Sans"/>
+                <a:cs typeface="DejaVu Sans"/>
+              </a:defRPr>
+            </a:lvl1pPr>
+            <a:lvl2pPr>
+              <a:defRPr sz="1875" b="1">
+                <a:solidFill>
+                  <a:srgbClr val="163447"/>
+                </a:solidFill>
+                <a:latin typeface="DejaVu Sans"/>
+                <a:ea typeface="DejaVu Sans"/>
+                <a:cs typeface="DejaVu Sans"/>
+              </a:defRPr>
+            </a:lvl2pPr>
+            <a:lvl3pPr>
+              <a:defRPr sz="1875" b="1">
+                <a:solidFill>
+                  <a:srgbClr val="163447"/>
+                </a:solidFill>
+                <a:latin typeface="DejaVu Sans"/>
+                <a:ea typeface="DejaVu Sans"/>
+                <a:cs typeface="DejaVu Sans"/>
+              </a:defRPr>
+            </a:lvl3pPr>
+            <a:lvl4pPr>
+              <a:defRPr sz="1875" b="1">
+                <a:solidFill>
+                  <a:srgbClr val="163447"/>
+                </a:solidFill>
+                <a:latin typeface="DejaVu Sans"/>
+                <a:ea typeface="DejaVu Sans"/>
+                <a:cs typeface="DejaVu Sans"/>
+              </a:defRPr>
+            </a:lvl4pPr>
+            <a:lvl5pPr>
+              <a:defRPr sz="1875" b="1">
+                <a:solidFill>
+                  <a:srgbClr val="163447"/>
+                </a:solidFill>
+                <a:latin typeface="DejaVu Sans"/>
+                <a:ea typeface="DejaVu Sans"/>
+                <a:cs typeface="DejaVu Sans"/>
+              </a:defRPr>
+            </a:lvl5pPr>
+            <a:lvl6pPr>
+              <a:defRPr sz="1875" b="1">
+                <a:solidFill>
+                  <a:srgbClr val="163447"/>
+                </a:solidFill>
+                <a:latin typeface="DejaVu Sans"/>
+                <a:ea typeface="DejaVu Sans"/>
+                <a:cs typeface="DejaVu Sans"/>
+              </a:defRPr>
+            </a:lvl6pPr>
+            <a:lvl7pPr>
+              <a:defRPr sz="1875" b="1">
+                <a:solidFill>
+                  <a:srgbClr val="163447"/>
+                </a:solidFill>
+                <a:latin typeface="DejaVu Sans"/>
+                <a:ea typeface="DejaVu Sans"/>
+                <a:cs typeface="DejaVu Sans"/>
+              </a:defRPr>
+            </a:lvl7pPr>
+            <a:lvl8pPr>
+              <a:defRPr sz="1875" b="1">
+                <a:solidFill>
+                  <a:srgbClr val="163447"/>
+                </a:solidFill>
+                <a:latin typeface="DejaVu Sans"/>
+                <a:ea typeface="DejaVu Sans"/>
+                <a:cs typeface="DejaVu Sans"/>
+              </a:defRPr>
+            </a:lvl8pPr>
+            <a:lvl9pPr>
+              <a:defRPr sz="1875" b="1">
+                <a:solidFill>
+                  <a:srgbClr val="163447"/>
+                </a:solidFill>
+                <a:latin typeface="DejaVu Sans"/>
+                <a:ea typeface="DejaVu Sans"/>
+                <a:cs typeface="DejaVu Sans"/>
+              </a:defRPr>
+            </a:lvl9pPr>
+          </a:lstStyle>
+          <a:p xmlns:a="http://schemas.openxmlformats.org/drawingml/2006/main">
+            <a:pPr>
+              <a:defRPr sz="1875" b="1">
+                <a:solidFill>
+                  <a:srgbClr val="163447"/>
+                </a:solidFill>
+                <a:latin typeface="DejaVu Sans"/>
+                <a:ea typeface="DejaVu Sans"/>
+                <a:cs typeface="DejaVu Sans"/>
+              </a:defRPr>
+            </a:pPr>
+            <a:r>
+              <a:rPr sz="1875" b="1">
+                <a:solidFill>
+                  <a:srgbClr val="163447"/>
+                </a:solidFill>
+                <a:latin typeface="DejaVu Sans"/>
+                <a:ea typeface="DejaVu Sans"/>
+                <a:cs typeface="DejaVu Sans"/>
+              </a:rPr>
+              <a:t>GestorPrioridades</a:t>
+            </a:r>
+          </a:p>
+        </p:txBody>
+      </p:sp>
+      <p:sp>
+        <p:nvSpPr>
+          <p:cNvPr id="18" name="texto-17">
+            <a:extLst xmlns:a="http://schemas.openxmlformats.org/drawingml/2006/main">
+              <a:ext uri="{FF2B5EF4-FFF2-40B4-BE49-F238E27FC236}">
+                <a16:creationId xmlns:a16="http://schemas.microsoft.com/office/drawing/2014/main" id="{6D5B1347-530D-4D83-86C0-4D9C33B2043E}"/>
+              </a:ext>
+            </a:extLst>
+          </p:cNvPr>
+          <p:cNvSpPr>
+            <a:spLocks xmlns:a="http://schemas.openxmlformats.org/drawingml/2006/main" noGrp="1"/>
+          </p:cNvSpPr>
+          <p:nvPr/>
+        </p:nvSpPr>
+        <p:spPr>
+          <a:xfrm xmlns:a="http://schemas.openxmlformats.org/drawingml/2006/main">
+            <a:off x="742950" y="5324475"/>
+            <a:ext cx="3924300" cy="866775"/>
+          </a:xfrm>
+          <a:prstGeom xmlns:a="http://schemas.openxmlformats.org/drawingml/2006/main" prst="rect">
+            <a:avLst/>
+          </a:prstGeom>
+          <a:noFill xmlns:a="http://schemas.openxmlformats.org/drawingml/2006/main"/>
+          <a:ln xmlns:a="http://schemas.openxmlformats.org/drawingml/2006/main" w="0">
+            <a:noFill/>
+            <a:prstDash val="solid"/>
+          </a:ln>
+        </p:spPr>
+        <p:txBody>
+          <a:bodyPr xmlns:a="http://schemas.openxmlformats.org/drawingml/2006/main" wrap="square" lIns="0" tIns="0" rIns="0" bIns="0" anchor="t">
+            <a:noAutofit/>
+          </a:bodyPr>
+          <a:lstStyle xmlns:a="http://schemas.openxmlformats.org/drawingml/2006/main">
+            <a:defPPr>
+              <a:defRPr sz="1500" b="0">
+                <a:solidFill>
+                  <a:srgbClr val="163447"/>
+                </a:solidFill>
+                <a:latin typeface="DejaVu Sans"/>
+                <a:ea typeface="DejaVu Sans"/>
+                <a:cs typeface="DejaVu Sans"/>
+              </a:defRPr>
+            </a:defPPr>
+            <a:lvl1pPr>
+              <a:defRPr sz="1500" b="0">
+                <a:solidFill>
+                  <a:srgbClr val="163447"/>
+                </a:solidFill>
+                <a:latin typeface="DejaVu Sans"/>
+                <a:ea typeface="DejaVu Sans"/>
+                <a:cs typeface="DejaVu Sans"/>
+              </a:defRPr>
+            </a:lvl1pPr>
+            <a:lvl2pPr>
+              <a:defRPr sz="1500" b="0">
+                <a:solidFill>
+                  <a:srgbClr val="163447"/>
+                </a:solidFill>
+                <a:latin typeface="DejaVu Sans"/>
+                <a:ea typeface="DejaVu Sans"/>
+                <a:cs typeface="DejaVu Sans"/>
+              </a:defRPr>
+            </a:lvl2pPr>
+            <a:lvl3pPr>
+              <a:defRPr sz="1500" b="0">
+                <a:solidFill>
+                  <a:srgbClr val="163447"/>
+                </a:solidFill>
+                <a:latin typeface="DejaVu Sans"/>
+                <a:ea typeface="DejaVu Sans"/>
+                <a:cs typeface="DejaVu Sans"/>
+              </a:defRPr>
+            </a:lvl3pPr>
+            <a:lvl4pPr>
+              <a:defRPr sz="1500" b="0">
+                <a:solidFill>
+                  <a:srgbClr val="163447"/>
+                </a:solidFill>
+                <a:latin typeface="DejaVu Sans"/>
+                <a:ea typeface="DejaVu Sans"/>
+                <a:cs typeface="DejaVu Sans"/>
+              </a:defRPr>
+            </a:lvl4pPr>
+            <a:lvl5pPr>
+              <a:defRPr sz="1500" b="0">
+                <a:solidFill>
+                  <a:srgbClr val="163447"/>
+                </a:solidFill>
+                <a:latin typeface="DejaVu Sans"/>
+                <a:ea typeface="DejaVu Sans"/>
+                <a:cs typeface="DejaVu Sans"/>
+              </a:defRPr>
+            </a:lvl5pPr>
+            <a:lvl6pPr>
+              <a:defRPr sz="1500" b="0">
+                <a:solidFill>
+                  <a:srgbClr val="163447"/>
+                </a:solidFill>
+                <a:latin typeface="DejaVu Sans"/>
+                <a:ea typeface="DejaVu Sans"/>
+                <a:cs typeface="DejaVu Sans"/>
+              </a:defRPr>
+            </a:lvl6pPr>
+            <a:lvl7pPr>
+              <a:defRPr sz="1500" b="0">
+                <a:solidFill>
+                  <a:srgbClr val="163447"/>
+                </a:solidFill>
+                <a:latin typeface="DejaVu Sans"/>
+                <a:ea typeface="DejaVu Sans"/>
+                <a:cs typeface="DejaVu Sans"/>
+              </a:defRPr>
+            </a:lvl7pPr>
+            <a:lvl8pPr>
+              <a:defRPr sz="1500" b="0">
+                <a:solidFill>
+                  <a:srgbClr val="163447"/>
+                </a:solidFill>
+                <a:latin typeface="DejaVu Sans"/>
+                <a:ea typeface="DejaVu Sans"/>
+                <a:cs typeface="DejaVu Sans"/>
+              </a:defRPr>
+            </a:lvl8pPr>
+            <a:lvl9pPr>
+              <a:defRPr sz="1500" b="0">
+                <a:solidFill>
+                  <a:srgbClr val="163447"/>
+                </a:solidFill>
+                <a:latin typeface="DejaVu Sans"/>
+                <a:ea typeface="DejaVu Sans"/>
+                <a:cs typeface="DejaVu Sans"/>
+              </a:defRPr>
+            </a:lvl9pPr>
+          </a:lstStyle>
+          <a:p xmlns:a="http://schemas.openxmlformats.org/drawingml/2006/main">
+            <a:pPr>
+              <a:defRPr sz="1500" b="0">
+                <a:solidFill>
+                  <a:srgbClr val="163447"/>
+                </a:solidFill>
+                <a:latin typeface="DejaVu Sans"/>
+                <a:ea typeface="DejaVu Sans"/>
+                <a:cs typeface="DejaVu Sans"/>
+              </a:defRPr>
+            </a:pPr>
+            <a:r>
+              <a:rPr sz="1500" b="0">
+                <a:solidFill>
+                  <a:srgbClr val="163447"/>
+                </a:solidFill>
+                <a:latin typeface="DejaVu Sans"/>
+                <a:ea typeface="DejaVu Sans"/>
+                <a:cs typeface="DejaVu Sans"/>
+              </a:rPr>
+              <a:t>+ cambiarPrioridad(codigo: String,</a:t>
+            </a:r>
+          </a:p>
+          <a:p xmlns:a="http://schemas.openxmlformats.org/drawingml/2006/main">
+            <a:pPr>
+              <a:defRPr sz="1500" b="0">
+                <a:solidFill>
+                  <a:srgbClr val="163447"/>
+                </a:solidFill>
+                <a:latin typeface="DejaVu Sans"/>
+                <a:ea typeface="DejaVu Sans"/>
+                <a:cs typeface="DejaVu Sans"/>
+              </a:defRPr>
+            </a:pPr>
+            <a:r>
+              <a:rPr sz="1500" b="0">
+                <a:solidFill>
+                  <a:srgbClr val="163447"/>
+                </a:solidFill>
+                <a:latin typeface="DejaVu Sans"/>
+                <a:ea typeface="DejaVu Sans"/>
+                <a:cs typeface="DejaVu Sans"/>
+              </a:rPr>
+              <a:t>  valor: int): boolean</a:t>
+            </a:r>
+          </a:p>
+          <a:p xmlns:a="http://schemas.openxmlformats.org/drawingml/2006/main">
+            <a:pPr>
+              <a:defRPr sz="1500" b="0">
+                <a:solidFill>
+                  <a:srgbClr val="163447"/>
+                </a:solidFill>
+                <a:latin typeface="DejaVu Sans"/>
+                <a:ea typeface="DejaVu Sans"/>
+                <a:cs typeface="DejaVu Sans"/>
+              </a:defRPr>
+            </a:pPr>
+            <a:r>
+              <a:rPr sz="1500" b="0">
+                <a:solidFill>
+                  <a:srgbClr val="163447"/>
+                </a:solidFill>
+                <a:latin typeface="DejaVu Sans"/>
+                <a:ea typeface="DejaVu Sans"/>
+                <a:cs typeface="DejaVu Sans"/>
+              </a:rPr>
+              <a:t>+ listarEnOrden(): List&lt;Actividad&gt;</a:t>
+            </a:r>
+          </a:p>
+        </p:txBody>
+      </p:sp>
+      <p:sp>
+        <p:nvSpPr>
+          <p:cNvPr id="19" name="clase-Usuario">
+            <a:extLst xmlns:a="http://schemas.openxmlformats.org/drawingml/2006/main">
+              <a:ext uri="{FF2B5EF4-FFF2-40B4-BE49-F238E27FC236}">
+                <a16:creationId xmlns:a16="http://schemas.microsoft.com/office/drawing/2014/main" id="{6E16EA20-9FB9-46B1-83AB-F6414E3A1943}"/>
+              </a:ext>
+            </a:extLst>
+          </p:cNvPr>
+          <p:cNvSpPr>
+            <a:spLocks xmlns:a="http://schemas.openxmlformats.org/drawingml/2006/main" noGrp="1"/>
+          </p:cNvSpPr>
+          <p:nvPr/>
+        </p:nvSpPr>
+        <p:spPr>
+          <a:xfrm xmlns:a="http://schemas.openxmlformats.org/drawingml/2006/main">
+            <a:off x="7391400" y="4857750"/>
+            <a:ext cx="4191000" cy="1381125"/>
+          </a:xfrm>
+          <a:prstGeom xmlns:a="http://schemas.openxmlformats.org/drawingml/2006/main" prst="rect">
+            <a:avLst/>
+          </a:prstGeom>
+          <a:solidFill xmlns:a="http://schemas.openxmlformats.org/drawingml/2006/main">
+            <a:srgbClr val="EDF4F5"/>
+          </a:solidFill>
+          <a:ln xmlns:a="http://schemas.openxmlformats.org/drawingml/2006/main" w="9525">
+            <a:solidFill>
+              <a:srgbClr val="52636D"/>
+            </a:solidFill>
+            <a:prstDash val="solid"/>
+          </a:ln>
+        </p:spPr>
+      </p:sp>
+      <p:sp>
+        <p:nvSpPr>
+          <p:cNvPr id="20" name="texto-19">
+            <a:extLst xmlns:a="http://schemas.openxmlformats.org/drawingml/2006/main">
+              <a:ext uri="{FF2B5EF4-FFF2-40B4-BE49-F238E27FC236}">
+                <a16:creationId xmlns:a16="http://schemas.microsoft.com/office/drawing/2014/main" id="{C560A40A-C1B0-4DCE-8209-7EA37BA6260D}"/>
               </a:ext>
             </a:extLst>
           </p:cNvPr>
@@ -11767,10 +13824,10 @@
       </p:sp>
       <p:sp>
         <p:nvSpPr>
-          <p:cNvPr id="18" name="texto-17">
+          <p:cNvPr id="21" name="texto-20">
             <a:extLst xmlns:a="http://schemas.openxmlformats.org/drawingml/2006/main">
               <a:ext uri="{FF2B5EF4-FFF2-40B4-BE49-F238E27FC236}">
-                <a16:creationId xmlns:a16="http://schemas.microsoft.com/office/drawing/2014/main" id="{27F7418E-A630-4D09-8748-0423012C8663}"/>
+                <a16:creationId xmlns:a16="http://schemas.microsoft.com/office/drawing/2014/main" id="{954AEF0D-79DF-490A-88D5-51057A2963AA}"/>
               </a:ext>
             </a:extLst>
           </p:cNvPr>
@@ -11781,372 +13838,8 @@
         </p:nvSpPr>
         <p:spPr>
           <a:xfrm xmlns:a="http://schemas.openxmlformats.org/drawingml/2006/main">
-            <a:off x="7524750" y="5314950"/>
-            <a:ext cx="3924300" cy="904875"/>
-          </a:xfrm>
-          <a:prstGeom xmlns:a="http://schemas.openxmlformats.org/drawingml/2006/main" prst="rect">
-            <a:avLst/>
-          </a:prstGeom>
-          <a:noFill xmlns:a="http://schemas.openxmlformats.org/drawingml/2006/main"/>
-          <a:ln xmlns:a="http://schemas.openxmlformats.org/drawingml/2006/main" w="0">
-            <a:noFill/>
-            <a:prstDash val="solid"/>
-          </a:ln>
-        </p:spPr>
-        <p:txBody>
-          <a:bodyPr xmlns:a="http://schemas.openxmlformats.org/drawingml/2006/main" wrap="square" lIns="0" tIns="0" rIns="0" bIns="0" anchor="t">
-            <a:noAutofit/>
-          </a:bodyPr>
-          <a:lstStyle xmlns:a="http://schemas.openxmlformats.org/drawingml/2006/main">
-            <a:defPPr>
-              <a:defRPr sz="1575" b="0">
-                <a:solidFill>
-                  <a:srgbClr val="163447"/>
-                </a:solidFill>
-                <a:latin typeface="DejaVu Sans"/>
-                <a:ea typeface="DejaVu Sans"/>
-                <a:cs typeface="DejaVu Sans"/>
-              </a:defRPr>
-            </a:defPPr>
-            <a:lvl1pPr>
-              <a:defRPr sz="1575" b="0">
-                <a:solidFill>
-                  <a:srgbClr val="163447"/>
-                </a:solidFill>
-                <a:latin typeface="DejaVu Sans"/>
-                <a:ea typeface="DejaVu Sans"/>
-                <a:cs typeface="DejaVu Sans"/>
-              </a:defRPr>
-            </a:lvl1pPr>
-            <a:lvl2pPr>
-              <a:defRPr sz="1575" b="0">
-                <a:solidFill>
-                  <a:srgbClr val="163447"/>
-                </a:solidFill>
-                <a:latin typeface="DejaVu Sans"/>
-                <a:ea typeface="DejaVu Sans"/>
-                <a:cs typeface="DejaVu Sans"/>
-              </a:defRPr>
-            </a:lvl2pPr>
-            <a:lvl3pPr>
-              <a:defRPr sz="1575" b="0">
-                <a:solidFill>
-                  <a:srgbClr val="163447"/>
-                </a:solidFill>
-                <a:latin typeface="DejaVu Sans"/>
-                <a:ea typeface="DejaVu Sans"/>
-                <a:cs typeface="DejaVu Sans"/>
-              </a:defRPr>
-            </a:lvl3pPr>
-            <a:lvl4pPr>
-              <a:defRPr sz="1575" b="0">
-                <a:solidFill>
-                  <a:srgbClr val="163447"/>
-                </a:solidFill>
-                <a:latin typeface="DejaVu Sans"/>
-                <a:ea typeface="DejaVu Sans"/>
-                <a:cs typeface="DejaVu Sans"/>
-              </a:defRPr>
-            </a:lvl4pPr>
-            <a:lvl5pPr>
-              <a:defRPr sz="1575" b="0">
-                <a:solidFill>
-                  <a:srgbClr val="163447"/>
-                </a:solidFill>
-                <a:latin typeface="DejaVu Sans"/>
-                <a:ea typeface="DejaVu Sans"/>
-                <a:cs typeface="DejaVu Sans"/>
-              </a:defRPr>
-            </a:lvl5pPr>
-            <a:lvl6pPr>
-              <a:defRPr sz="1575" b="0">
-                <a:solidFill>
-                  <a:srgbClr val="163447"/>
-                </a:solidFill>
-                <a:latin typeface="DejaVu Sans"/>
-                <a:ea typeface="DejaVu Sans"/>
-                <a:cs typeface="DejaVu Sans"/>
-              </a:defRPr>
-            </a:lvl6pPr>
-            <a:lvl7pPr>
-              <a:defRPr sz="1575" b="0">
-                <a:solidFill>
-                  <a:srgbClr val="163447"/>
-                </a:solidFill>
-                <a:latin typeface="DejaVu Sans"/>
-                <a:ea typeface="DejaVu Sans"/>
-                <a:cs typeface="DejaVu Sans"/>
-              </a:defRPr>
-            </a:lvl7pPr>
-            <a:lvl8pPr>
-              <a:defRPr sz="1575" b="0">
-                <a:solidFill>
-                  <a:srgbClr val="163447"/>
-                </a:solidFill>
-                <a:latin typeface="DejaVu Sans"/>
-                <a:ea typeface="DejaVu Sans"/>
-                <a:cs typeface="DejaVu Sans"/>
-              </a:defRPr>
-            </a:lvl8pPr>
-            <a:lvl9pPr>
-              <a:defRPr sz="1575" b="0">
-                <a:solidFill>
-                  <a:srgbClr val="163447"/>
-                </a:solidFill>
-                <a:latin typeface="DejaVu Sans"/>
-                <a:ea typeface="DejaVu Sans"/>
-                <a:cs typeface="DejaVu Sans"/>
-              </a:defRPr>
-            </a:lvl9pPr>
-          </a:lstStyle>
-          <a:p xmlns:a="http://schemas.openxmlformats.org/drawingml/2006/main">
-            <a:pPr>
-              <a:defRPr sz="1575" b="0">
-                <a:solidFill>
-                  <a:srgbClr val="163447"/>
-                </a:solidFill>
-                <a:latin typeface="DejaVu Sans"/>
-                <a:ea typeface="DejaVu Sans"/>
-                <a:cs typeface="DejaVu Sans"/>
-              </a:defRPr>
-            </a:pPr>
-            <a:r>
-              <a:rPr sz="1575" b="0">
-                <a:solidFill>
-                  <a:srgbClr val="163447"/>
-                </a:solidFill>
-                <a:latin typeface="DejaVu Sans"/>
-                <a:ea typeface="DejaVu Sans"/>
-                <a:cs typeface="DejaVu Sans"/>
-              </a:rPr>
-              <a:t>codigo, nombre, rol</a:t>
-            </a:r>
-          </a:p>
-          <a:p xmlns:a="http://schemas.openxmlformats.org/drawingml/2006/main">
-            <a:pPr>
-              <a:defRPr sz="1575" b="0">
-                <a:solidFill>
-                  <a:srgbClr val="163447"/>
-                </a:solidFill>
-                <a:latin typeface="DejaVu Sans"/>
-                <a:ea typeface="DejaVu Sans"/>
-                <a:cs typeface="DejaVu Sans"/>
-              </a:defRPr>
-            </a:pPr>
-            <a:r>
-              <a:rPr sz="1575" b="0">
-                <a:solidFill>
-                  <a:srgbClr val="163447"/>
-                </a:solidFill>
-                <a:latin typeface="DejaVu Sans"/>
-                <a:ea typeface="DejaVu Sans"/>
-                <a:cs typeface="DejaVu Sans"/>
-              </a:rPr>
-              <a:t>registrarAsignacion(datos)</a:t>
-            </a:r>
-          </a:p>
-          <a:p xmlns:a="http://schemas.openxmlformats.org/drawingml/2006/main">
-            <a:pPr>
-              <a:defRPr sz="1575" b="0">
-                <a:solidFill>
-                  <a:srgbClr val="163447"/>
-                </a:solidFill>
-                <a:latin typeface="DejaVu Sans"/>
-                <a:ea typeface="DejaVu Sans"/>
-                <a:cs typeface="DejaVu Sans"/>
-              </a:defRPr>
-            </a:pPr>
-            <a:r>
-              <a:rPr sz="1575" b="0">
-                <a:solidFill>
-                  <a:srgbClr val="163447"/>
-                </a:solidFill>
-                <a:latin typeface="DejaVu Sans"/>
-                <a:ea typeface="DejaVu Sans"/>
-                <a:cs typeface="DejaVu Sans"/>
-              </a:rPr>
-              <a:t>consultarAvance(obra)</a:t>
-            </a:r>
-          </a:p>
-        </p:txBody>
-      </p:sp>
-      <p:sp>
-        <p:nvSpPr>
-          <p:cNvPr id="20" name="texto-19">
-            <a:extLst xmlns:a="http://schemas.openxmlformats.org/drawingml/2006/main">
-              <a:ext uri="{FF2B5EF4-FFF2-40B4-BE49-F238E27FC236}">
-                <a16:creationId xmlns:a16="http://schemas.microsoft.com/office/drawing/2014/main" id="{16150F1C-45AB-4DDF-9013-BFAAC53FDA75}"/>
-              </a:ext>
-            </a:extLst>
-          </p:cNvPr>
-          <p:cNvSpPr>
-            <a:spLocks xmlns:a="http://schemas.openxmlformats.org/drawingml/2006/main" noGrp="1"/>
-          </p:cNvSpPr>
-          <p:nvPr/>
-        </p:nvSpPr>
-        <p:spPr>
-          <a:xfrm xmlns:a="http://schemas.openxmlformats.org/drawingml/2006/main">
-            <a:off x="5219700" y="1666875"/>
-            <a:ext cx="1619250" cy="266700"/>
-          </a:xfrm>
-          <a:prstGeom xmlns:a="http://schemas.openxmlformats.org/drawingml/2006/main" prst="rect">
-            <a:avLst/>
-          </a:prstGeom>
-          <a:noFill xmlns:a="http://schemas.openxmlformats.org/drawingml/2006/main"/>
-          <a:ln xmlns:a="http://schemas.openxmlformats.org/drawingml/2006/main" w="0">
-            <a:noFill/>
-            <a:prstDash val="solid"/>
-          </a:ln>
-        </p:spPr>
-        <p:txBody>
-          <a:bodyPr xmlns:a="http://schemas.openxmlformats.org/drawingml/2006/main" wrap="square" lIns="0" tIns="0" rIns="0" bIns="0" anchor="t">
-            <a:noAutofit/>
-          </a:bodyPr>
-          <a:lstStyle xmlns:a="http://schemas.openxmlformats.org/drawingml/2006/main">
-            <a:defPPr>
-              <a:defRPr sz="1575" b="0">
-                <a:solidFill>
-                  <a:srgbClr val="163447"/>
-                </a:solidFill>
-                <a:latin typeface="DejaVu Sans"/>
-                <a:ea typeface="DejaVu Sans"/>
-                <a:cs typeface="DejaVu Sans"/>
-              </a:defRPr>
-            </a:defPPr>
-            <a:lvl1pPr>
-              <a:defRPr sz="1575" b="0">
-                <a:solidFill>
-                  <a:srgbClr val="163447"/>
-                </a:solidFill>
-                <a:latin typeface="DejaVu Sans"/>
-                <a:ea typeface="DejaVu Sans"/>
-                <a:cs typeface="DejaVu Sans"/>
-              </a:defRPr>
-            </a:lvl1pPr>
-            <a:lvl2pPr>
-              <a:defRPr sz="1575" b="0">
-                <a:solidFill>
-                  <a:srgbClr val="163447"/>
-                </a:solidFill>
-                <a:latin typeface="DejaVu Sans"/>
-                <a:ea typeface="DejaVu Sans"/>
-                <a:cs typeface="DejaVu Sans"/>
-              </a:defRPr>
-            </a:lvl2pPr>
-            <a:lvl3pPr>
-              <a:defRPr sz="1575" b="0">
-                <a:solidFill>
-                  <a:srgbClr val="163447"/>
-                </a:solidFill>
-                <a:latin typeface="DejaVu Sans"/>
-                <a:ea typeface="DejaVu Sans"/>
-                <a:cs typeface="DejaVu Sans"/>
-              </a:defRPr>
-            </a:lvl3pPr>
-            <a:lvl4pPr>
-              <a:defRPr sz="1575" b="0">
-                <a:solidFill>
-                  <a:srgbClr val="163447"/>
-                </a:solidFill>
-                <a:latin typeface="DejaVu Sans"/>
-                <a:ea typeface="DejaVu Sans"/>
-                <a:cs typeface="DejaVu Sans"/>
-              </a:defRPr>
-            </a:lvl4pPr>
-            <a:lvl5pPr>
-              <a:defRPr sz="1575" b="0">
-                <a:solidFill>
-                  <a:srgbClr val="163447"/>
-                </a:solidFill>
-                <a:latin typeface="DejaVu Sans"/>
-                <a:ea typeface="DejaVu Sans"/>
-                <a:cs typeface="DejaVu Sans"/>
-              </a:defRPr>
-            </a:lvl5pPr>
-            <a:lvl6pPr>
-              <a:defRPr sz="1575" b="0">
-                <a:solidFill>
-                  <a:srgbClr val="163447"/>
-                </a:solidFill>
-                <a:latin typeface="DejaVu Sans"/>
-                <a:ea typeface="DejaVu Sans"/>
-                <a:cs typeface="DejaVu Sans"/>
-              </a:defRPr>
-            </a:lvl6pPr>
-            <a:lvl7pPr>
-              <a:defRPr sz="1575" b="0">
-                <a:solidFill>
-                  <a:srgbClr val="163447"/>
-                </a:solidFill>
-                <a:latin typeface="DejaVu Sans"/>
-                <a:ea typeface="DejaVu Sans"/>
-                <a:cs typeface="DejaVu Sans"/>
-              </a:defRPr>
-            </a:lvl7pPr>
-            <a:lvl8pPr>
-              <a:defRPr sz="1575" b="0">
-                <a:solidFill>
-                  <a:srgbClr val="163447"/>
-                </a:solidFill>
-                <a:latin typeface="DejaVu Sans"/>
-                <a:ea typeface="DejaVu Sans"/>
-                <a:cs typeface="DejaVu Sans"/>
-              </a:defRPr>
-            </a:lvl8pPr>
-            <a:lvl9pPr>
-              <a:defRPr sz="1575" b="0">
-                <a:solidFill>
-                  <a:srgbClr val="163447"/>
-                </a:solidFill>
-                <a:latin typeface="DejaVu Sans"/>
-                <a:ea typeface="DejaVu Sans"/>
-                <a:cs typeface="DejaVu Sans"/>
-              </a:defRPr>
-            </a:lvl9pPr>
-          </a:lstStyle>
-          <a:p xmlns:a="http://schemas.openxmlformats.org/drawingml/2006/main">
-            <a:pPr>
-              <a:defRPr sz="1575" b="0">
-                <a:solidFill>
-                  <a:srgbClr val="163447"/>
-                </a:solidFill>
-                <a:latin typeface="DejaVu Sans"/>
-                <a:ea typeface="DejaVu Sans"/>
-                <a:cs typeface="DejaVu Sans"/>
-              </a:defRPr>
-            </a:pPr>
-            <a:r>
-              <a:rPr sz="1575" b="0">
-                <a:solidFill>
-                  <a:srgbClr val="163447"/>
-                </a:solidFill>
-                <a:latin typeface="DejaVu Sans"/>
-                <a:ea typeface="DejaVu Sans"/>
-                <a:cs typeface="DejaVu Sans"/>
-              </a:rPr>
-              <a:t>1 / 0..*</a:t>
-            </a:r>
-          </a:p>
-        </p:txBody>
-      </p:sp>
-      <p:sp>
-        <p:nvSpPr>
-          <p:cNvPr id="21" name="texto-20">
-            <a:extLst xmlns:a="http://schemas.openxmlformats.org/drawingml/2006/main">
-              <a:ext uri="{FF2B5EF4-FFF2-40B4-BE49-F238E27FC236}">
-                <a16:creationId xmlns:a16="http://schemas.microsoft.com/office/drawing/2014/main" id="{C52F74BC-CD18-492C-A626-E7DE2C04B043}"/>
-              </a:ext>
-            </a:extLst>
-          </p:cNvPr>
-          <p:cNvSpPr>
-            <a:spLocks xmlns:a="http://schemas.openxmlformats.org/drawingml/2006/main" noGrp="1"/>
-          </p:cNvSpPr>
-          <p:nvPr/>
-        </p:nvSpPr>
-        <p:spPr>
-          <a:xfrm xmlns:a="http://schemas.openxmlformats.org/drawingml/2006/main">
-            <a:off x="5038725" y="2047875"/>
-            <a:ext cx="2000250" cy="266700"/>
+            <a:off x="7524750" y="5324475"/>
+            <a:ext cx="3924300" cy="866775"/>
           </a:xfrm>
           <a:prstGeom xmlns:a="http://schemas.openxmlformats.org/drawingml/2006/main" prst="rect">
             <a:avLst/>
@@ -12283,17 +13976,40 @@
                 <a:ea typeface="DejaVu Sans"/>
                 <a:cs typeface="DejaVu Sans"/>
               </a:rPr>
-              <a:t>composición</a:t>
+              <a:t>- rol: String</a:t>
+            </a:r>
+          </a:p>
+          <a:p xmlns:a="http://schemas.openxmlformats.org/drawingml/2006/main">
+            <a:pPr>
+              <a:defRPr sz="1500" b="0">
+                <a:solidFill>
+                  <a:srgbClr val="163447"/>
+                </a:solidFill>
+                <a:latin typeface="DejaVu Sans"/>
+                <a:ea typeface="DejaVu Sans"/>
+                <a:cs typeface="DejaVu Sans"/>
+              </a:defRPr>
+            </a:pPr>
+            <a:r>
+              <a:rPr sz="1500" b="0">
+                <a:solidFill>
+                  <a:srgbClr val="163447"/>
+                </a:solidFill>
+                <a:latin typeface="DejaVu Sans"/>
+                <a:ea typeface="DejaVu Sans"/>
+                <a:cs typeface="DejaVu Sans"/>
+              </a:rPr>
+              <a:t>+ consultarAvance(obra: Obra): double</a:t>
             </a:r>
           </a:p>
         </p:txBody>
       </p:sp>
       <p:sp>
         <p:nvSpPr>
-          <p:cNvPr id="23" name="texto-22">
+          <p:cNvPr id="23" name="composicion">
             <a:extLst xmlns:a="http://schemas.openxmlformats.org/drawingml/2006/main">
               <a:ext uri="{FF2B5EF4-FFF2-40B4-BE49-F238E27FC236}">
-                <a16:creationId xmlns:a16="http://schemas.microsoft.com/office/drawing/2014/main" id="{08194DC3-2D71-4A58-8B1E-96A233B5D484}"/>
+                <a16:creationId xmlns:a16="http://schemas.microsoft.com/office/drawing/2014/main" id="{B36873C6-4511-4D5F-8417-D0A9043C245E}"/>
               </a:ext>
             </a:extLst>
           </p:cNvPr>
@@ -12304,8 +14020,41 @@
         </p:nvSpPr>
         <p:spPr>
           <a:xfrm xmlns:a="http://schemas.openxmlformats.org/drawingml/2006/main">
-            <a:off x="9591675" y="2800350"/>
-            <a:ext cx="1428750" cy="257175"/>
+            <a:off x="4800600" y="1952625"/>
+            <a:ext cx="171450" cy="142875"/>
+          </a:xfrm>
+          <a:prstGeom xmlns:a="http://schemas.openxmlformats.org/drawingml/2006/main" prst="diamond">
+            <a:avLst/>
+          </a:prstGeom>
+          <a:solidFill xmlns:a="http://schemas.openxmlformats.org/drawingml/2006/main">
+            <a:srgbClr val="52636D"/>
+          </a:solidFill>
+          <a:ln xmlns:a="http://schemas.openxmlformats.org/drawingml/2006/main" w="9525">
+            <a:solidFill>
+              <a:srgbClr val="52636D"/>
+            </a:solidFill>
+            <a:prstDash val="solid"/>
+          </a:ln>
+        </p:spPr>
+      </p:sp>
+      <p:sp>
+        <p:nvSpPr>
+          <p:cNvPr id="24" name="texto-23">
+            <a:extLst xmlns:a="http://schemas.openxmlformats.org/drawingml/2006/main">
+              <a:ext uri="{FF2B5EF4-FFF2-40B4-BE49-F238E27FC236}">
+                <a16:creationId xmlns:a16="http://schemas.microsoft.com/office/drawing/2014/main" id="{4E5CA81B-9559-4EC2-B17B-D484A18DE11C}"/>
+              </a:ext>
+            </a:extLst>
+          </p:cNvPr>
+          <p:cNvSpPr>
+            <a:spLocks xmlns:a="http://schemas.openxmlformats.org/drawingml/2006/main" noGrp="1"/>
+          </p:cNvSpPr>
+          <p:nvPr/>
+        </p:nvSpPr>
+        <p:spPr>
+          <a:xfrm xmlns:a="http://schemas.openxmlformats.org/drawingml/2006/main">
+            <a:off x="5048250" y="1752600"/>
+            <a:ext cx="381000" cy="238125"/>
           </a:xfrm>
           <a:prstGeom xmlns:a="http://schemas.openxmlformats.org/drawingml/2006/main" prst="rect">
             <a:avLst/>
@@ -12322,7 +14071,7 @@
           </a:bodyPr>
           <a:lstStyle xmlns:a="http://schemas.openxmlformats.org/drawingml/2006/main">
             <a:defPPr>
-              <a:defRPr sz="1425" b="0">
+              <a:defRPr sz="1500" b="0">
                 <a:solidFill>
                   <a:srgbClr val="163447"/>
                 </a:solidFill>
@@ -12332,7 +14081,7 @@
               </a:defRPr>
             </a:defPPr>
             <a:lvl1pPr>
-              <a:defRPr sz="1425" b="0">
+              <a:defRPr sz="1500" b="0">
                 <a:solidFill>
                   <a:srgbClr val="163447"/>
                 </a:solidFill>
@@ -12342,7 +14091,7 @@
               </a:defRPr>
             </a:lvl1pPr>
             <a:lvl2pPr>
-              <a:defRPr sz="1425" b="0">
+              <a:defRPr sz="1500" b="0">
                 <a:solidFill>
                   <a:srgbClr val="163447"/>
                 </a:solidFill>
@@ -12352,7 +14101,7 @@
               </a:defRPr>
             </a:lvl2pPr>
             <a:lvl3pPr>
-              <a:defRPr sz="1425" b="0">
+              <a:defRPr sz="1500" b="0">
                 <a:solidFill>
                   <a:srgbClr val="163447"/>
                 </a:solidFill>
@@ -12362,7 +14111,7 @@
               </a:defRPr>
             </a:lvl3pPr>
             <a:lvl4pPr>
-              <a:defRPr sz="1425" b="0">
+              <a:defRPr sz="1500" b="0">
                 <a:solidFill>
                   <a:srgbClr val="163447"/>
                 </a:solidFill>
@@ -12372,7 +14121,7 @@
               </a:defRPr>
             </a:lvl4pPr>
             <a:lvl5pPr>
-              <a:defRPr sz="1425" b="0">
+              <a:defRPr sz="1500" b="0">
                 <a:solidFill>
                   <a:srgbClr val="163447"/>
                 </a:solidFill>
@@ -12382,7 +14131,7 @@
               </a:defRPr>
             </a:lvl5pPr>
             <a:lvl6pPr>
-              <a:defRPr sz="1425" b="0">
+              <a:defRPr sz="1500" b="0">
                 <a:solidFill>
                   <a:srgbClr val="163447"/>
                 </a:solidFill>
@@ -12392,7 +14141,7 @@
               </a:defRPr>
             </a:lvl6pPr>
             <a:lvl7pPr>
-              <a:defRPr sz="1425" b="0">
+              <a:defRPr sz="1500" b="0">
                 <a:solidFill>
                   <a:srgbClr val="163447"/>
                 </a:solidFill>
@@ -12402,7 +14151,7 @@
               </a:defRPr>
             </a:lvl7pPr>
             <a:lvl8pPr>
-              <a:defRPr sz="1425" b="0">
+              <a:defRPr sz="1500" b="0">
                 <a:solidFill>
                   <a:srgbClr val="163447"/>
                 </a:solidFill>
@@ -12412,7 +14161,7 @@
               </a:defRPr>
             </a:lvl8pPr>
             <a:lvl9pPr>
-              <a:defRPr sz="1425" b="0">
+              <a:defRPr sz="1500" b="0">
                 <a:solidFill>
                   <a:srgbClr val="163447"/>
                 </a:solidFill>
@@ -12424,7 +14173,7 @@
           </a:lstStyle>
           <a:p xmlns:a="http://schemas.openxmlformats.org/drawingml/2006/main">
             <a:pPr>
-              <a:defRPr sz="1425" b="0">
+              <a:defRPr sz="1500" b="0">
                 <a:solidFill>
                   <a:srgbClr val="163447"/>
                 </a:solidFill>
@@ -12434,7 +14183,7 @@
               </a:defRPr>
             </a:pPr>
             <a:r>
-              <a:rPr sz="1425" b="0">
+              <a:rPr sz="1500" b="0">
                 <a:solidFill>
                   <a:srgbClr val="163447"/>
                 </a:solidFill>
@@ -12442,7 +14191,7 @@
                 <a:ea typeface="DejaVu Sans"/>
                 <a:cs typeface="DejaVu Sans"/>
               </a:rPr>
-              <a:t>1 / 0..*</a:t>
+              <a:t>1</a:t>
             </a:r>
           </a:p>
         </p:txBody>
@@ -12452,7 +14201,7 @@
           <p:cNvPr id="25" name="texto-24">
             <a:extLst xmlns:a="http://schemas.openxmlformats.org/drawingml/2006/main">
               <a:ext uri="{FF2B5EF4-FFF2-40B4-BE49-F238E27FC236}">
-                <a16:creationId xmlns:a16="http://schemas.microsoft.com/office/drawing/2014/main" id="{61B4F325-8F7A-4366-A2E8-1586FB42210F}"/>
+                <a16:creationId xmlns:a16="http://schemas.microsoft.com/office/drawing/2014/main" id="{435D0157-7559-47B3-B5E6-A6F4DBB8CFAB}"/>
               </a:ext>
             </a:extLst>
           </p:cNvPr>
@@ -12463,8 +14212,8 @@
         </p:nvSpPr>
         <p:spPr>
           <a:xfrm xmlns:a="http://schemas.openxmlformats.org/drawingml/2006/main">
-            <a:off x="5219700" y="3476625"/>
-            <a:ext cx="1619250" cy="285750"/>
+            <a:off x="6781800" y="1752600"/>
+            <a:ext cx="571500" cy="238125"/>
           </a:xfrm>
           <a:prstGeom xmlns:a="http://schemas.openxmlformats.org/drawingml/2006/main" prst="rect">
             <a:avLst/>
@@ -12481,7 +14230,7 @@
           </a:bodyPr>
           <a:lstStyle xmlns:a="http://schemas.openxmlformats.org/drawingml/2006/main">
             <a:defPPr>
-              <a:defRPr sz="1575" b="0">
+              <a:defRPr sz="1500" b="0">
                 <a:solidFill>
                   <a:srgbClr val="163447"/>
                 </a:solidFill>
@@ -12491,7 +14240,7 @@
               </a:defRPr>
             </a:defPPr>
             <a:lvl1pPr>
-              <a:defRPr sz="1575" b="0">
+              <a:defRPr sz="1500" b="0">
                 <a:solidFill>
                   <a:srgbClr val="163447"/>
                 </a:solidFill>
@@ -12501,7 +14250,7 @@
               </a:defRPr>
             </a:lvl1pPr>
             <a:lvl2pPr>
-              <a:defRPr sz="1575" b="0">
+              <a:defRPr sz="1500" b="0">
                 <a:solidFill>
                   <a:srgbClr val="163447"/>
                 </a:solidFill>
@@ -12511,7 +14260,7 @@
               </a:defRPr>
             </a:lvl2pPr>
             <a:lvl3pPr>
-              <a:defRPr sz="1575" b="0">
+              <a:defRPr sz="1500" b="0">
                 <a:solidFill>
                   <a:srgbClr val="163447"/>
                 </a:solidFill>
@@ -12521,7 +14270,7 @@
               </a:defRPr>
             </a:lvl3pPr>
             <a:lvl4pPr>
-              <a:defRPr sz="1575" b="0">
+              <a:defRPr sz="1500" b="0">
                 <a:solidFill>
                   <a:srgbClr val="163447"/>
                 </a:solidFill>
@@ -12531,7 +14280,7 @@
               </a:defRPr>
             </a:lvl4pPr>
             <a:lvl5pPr>
-              <a:defRPr sz="1575" b="0">
+              <a:defRPr sz="1500" b="0">
                 <a:solidFill>
                   <a:srgbClr val="163447"/>
                 </a:solidFill>
@@ -12541,7 +14290,7 @@
               </a:defRPr>
             </a:lvl5pPr>
             <a:lvl6pPr>
-              <a:defRPr sz="1575" b="0">
+              <a:defRPr sz="1500" b="0">
                 <a:solidFill>
                   <a:srgbClr val="163447"/>
                 </a:solidFill>
@@ -12551,7 +14300,7 @@
               </a:defRPr>
             </a:lvl6pPr>
             <a:lvl7pPr>
-              <a:defRPr sz="1575" b="0">
+              <a:defRPr sz="1500" b="0">
                 <a:solidFill>
                   <a:srgbClr val="163447"/>
                 </a:solidFill>
@@ -12561,7 +14310,7 @@
               </a:defRPr>
             </a:lvl7pPr>
             <a:lvl8pPr>
-              <a:defRPr sz="1575" b="0">
+              <a:defRPr sz="1500" b="0">
                 <a:solidFill>
                   <a:srgbClr val="163447"/>
                 </a:solidFill>
@@ -12571,7 +14320,7 @@
               </a:defRPr>
             </a:lvl8pPr>
             <a:lvl9pPr>
-              <a:defRPr sz="1575" b="0">
+              <a:defRPr sz="1500" b="0">
                 <a:solidFill>
                   <a:srgbClr val="163447"/>
                 </a:solidFill>
@@ -12583,7 +14332,7 @@
           </a:lstStyle>
           <a:p xmlns:a="http://schemas.openxmlformats.org/drawingml/2006/main">
             <a:pPr>
-              <a:defRPr sz="1575" b="0">
+              <a:defRPr sz="1500" b="0">
                 <a:solidFill>
                   <a:srgbClr val="163447"/>
                 </a:solidFill>
@@ -12593,7 +14342,7 @@
               </a:defRPr>
             </a:pPr>
             <a:r>
-              <a:rPr sz="1575" b="0">
+              <a:rPr sz="1500" b="0">
                 <a:solidFill>
                   <a:srgbClr val="163447"/>
                 </a:solidFill>
@@ -12601,7 +14350,7 @@
                 <a:ea typeface="DejaVu Sans"/>
                 <a:cs typeface="DejaVu Sans"/>
               </a:rPr>
-              <a:t>1 / 0..*</a:t>
+              <a:t>0..*</a:t>
             </a:r>
           </a:p>
         </p:txBody>
@@ -12611,7 +14360,7 @@
           <p:cNvPr id="27" name="texto-26">
             <a:extLst xmlns:a="http://schemas.openxmlformats.org/drawingml/2006/main">
               <a:ext uri="{FF2B5EF4-FFF2-40B4-BE49-F238E27FC236}">
-                <a16:creationId xmlns:a16="http://schemas.microsoft.com/office/drawing/2014/main" id="{F4FC6406-CC5F-42C8-BA59-13CA22DA2B46}"/>
+                <a16:creationId xmlns:a16="http://schemas.microsoft.com/office/drawing/2014/main" id="{444E3E8D-9A69-4D58-9C43-D178DB90C5C4}"/>
               </a:ext>
             </a:extLst>
           </p:cNvPr>
@@ -12622,8 +14371,8 @@
         </p:nvSpPr>
         <p:spPr>
           <a:xfrm xmlns:a="http://schemas.openxmlformats.org/drawingml/2006/main">
-            <a:off x="9591675" y="4562475"/>
-            <a:ext cx="1428750" cy="257175"/>
+            <a:off x="9620250" y="2705100"/>
+            <a:ext cx="571500" cy="190500"/>
           </a:xfrm>
           <a:prstGeom xmlns:a="http://schemas.openxmlformats.org/drawingml/2006/main" prst="rect">
             <a:avLst/>
@@ -12640,7 +14389,7 @@
           </a:bodyPr>
           <a:lstStyle xmlns:a="http://schemas.openxmlformats.org/drawingml/2006/main">
             <a:defPPr>
-              <a:defRPr sz="1425" b="0">
+              <a:defRPr sz="1275" b="0">
                 <a:solidFill>
                   <a:srgbClr val="163447"/>
                 </a:solidFill>
@@ -12650,7 +14399,7 @@
               </a:defRPr>
             </a:defPPr>
             <a:lvl1pPr>
-              <a:defRPr sz="1425" b="0">
+              <a:defRPr sz="1275" b="0">
                 <a:solidFill>
                   <a:srgbClr val="163447"/>
                 </a:solidFill>
@@ -12660,7 +14409,7 @@
               </a:defRPr>
             </a:lvl1pPr>
             <a:lvl2pPr>
-              <a:defRPr sz="1425" b="0">
+              <a:defRPr sz="1275" b="0">
                 <a:solidFill>
                   <a:srgbClr val="163447"/>
                 </a:solidFill>
@@ -12670,7 +14419,7 @@
               </a:defRPr>
             </a:lvl2pPr>
             <a:lvl3pPr>
-              <a:defRPr sz="1425" b="0">
+              <a:defRPr sz="1275" b="0">
                 <a:solidFill>
                   <a:srgbClr val="163447"/>
                 </a:solidFill>
@@ -12680,7 +14429,7 @@
               </a:defRPr>
             </a:lvl3pPr>
             <a:lvl4pPr>
-              <a:defRPr sz="1425" b="0">
+              <a:defRPr sz="1275" b="0">
                 <a:solidFill>
                   <a:srgbClr val="163447"/>
                 </a:solidFill>
@@ -12690,7 +14439,7 @@
               </a:defRPr>
             </a:lvl4pPr>
             <a:lvl5pPr>
-              <a:defRPr sz="1425" b="0">
+              <a:defRPr sz="1275" b="0">
                 <a:solidFill>
                   <a:srgbClr val="163447"/>
                 </a:solidFill>
@@ -12700,7 +14449,7 @@
               </a:defRPr>
             </a:lvl5pPr>
             <a:lvl6pPr>
-              <a:defRPr sz="1425" b="0">
+              <a:defRPr sz="1275" b="0">
                 <a:solidFill>
                   <a:srgbClr val="163447"/>
                 </a:solidFill>
@@ -12710,7 +14459,7 @@
               </a:defRPr>
             </a:lvl6pPr>
             <a:lvl7pPr>
-              <a:defRPr sz="1425" b="0">
+              <a:defRPr sz="1275" b="0">
                 <a:solidFill>
                   <a:srgbClr val="163447"/>
                 </a:solidFill>
@@ -12720,7 +14469,7 @@
               </a:defRPr>
             </a:lvl7pPr>
             <a:lvl8pPr>
-              <a:defRPr sz="1425" b="0">
+              <a:defRPr sz="1275" b="0">
                 <a:solidFill>
                   <a:srgbClr val="163447"/>
                 </a:solidFill>
@@ -12730,7 +14479,7 @@
               </a:defRPr>
             </a:lvl8pPr>
             <a:lvl9pPr>
-              <a:defRPr sz="1425" b="0">
+              <a:defRPr sz="1275" b="0">
                 <a:solidFill>
                   <a:srgbClr val="163447"/>
                 </a:solidFill>
@@ -12742,7 +14491,7 @@
           </a:lstStyle>
           <a:p xmlns:a="http://schemas.openxmlformats.org/drawingml/2006/main">
             <a:pPr>
-              <a:defRPr sz="1425" b="0">
+              <a:defRPr sz="1275" b="0">
                 <a:solidFill>
                   <a:srgbClr val="163447"/>
                 </a:solidFill>
@@ -12752,7 +14501,7 @@
               </a:defRPr>
             </a:pPr>
             <a:r>
-              <a:rPr sz="1425" b="0">
+              <a:rPr sz="1275" b="0">
                 <a:solidFill>
                   <a:srgbClr val="163447"/>
                 </a:solidFill>
@@ -12760,7 +14509,7 @@
                 <a:ea typeface="DejaVu Sans"/>
                 <a:cs typeface="DejaVu Sans"/>
               </a:rPr>
-              <a:t>1 / 0..*</a:t>
+              <a:t>1</a:t>
             </a:r>
           </a:p>
         </p:txBody>
@@ -12770,7 +14519,7 @@
           <p:cNvPr id="28" name="texto-27">
             <a:extLst xmlns:a="http://schemas.openxmlformats.org/drawingml/2006/main">
               <a:ext uri="{FF2B5EF4-FFF2-40B4-BE49-F238E27FC236}">
-                <a16:creationId xmlns:a16="http://schemas.microsoft.com/office/drawing/2014/main" id="{F0F01834-A2EE-45F3-BB43-0D96845BD324}"/>
+                <a16:creationId xmlns:a16="http://schemas.microsoft.com/office/drawing/2014/main" id="{2DC729E5-7E06-42F8-8BA7-CFAEBBD0C6D0}"/>
               </a:ext>
             </a:extLst>
           </p:cNvPr>
@@ -12781,8 +14530,8 @@
         </p:nvSpPr>
         <p:spPr>
           <a:xfrm xmlns:a="http://schemas.openxmlformats.org/drawingml/2006/main">
-            <a:off x="609600" y="5048250"/>
-            <a:ext cx="5810250" cy="1095375"/>
+            <a:off x="9620250" y="2914650"/>
+            <a:ext cx="666750" cy="190500"/>
           </a:xfrm>
           <a:prstGeom xmlns:a="http://schemas.openxmlformats.org/drawingml/2006/main" prst="rect">
             <a:avLst/>
@@ -12799,9 +14548,9 @@
           </a:bodyPr>
           <a:lstStyle xmlns:a="http://schemas.openxmlformats.org/drawingml/2006/main">
             <a:defPPr>
-              <a:defRPr sz="1800" b="0">
-                <a:solidFill>
-                  <a:srgbClr val="52636D"/>
+              <a:defRPr sz="1275" b="0">
+                <a:solidFill>
+                  <a:srgbClr val="163447"/>
                 </a:solidFill>
                 <a:latin typeface="DejaVu Sans"/>
                 <a:ea typeface="DejaVu Sans"/>
@@ -12809,9 +14558,9 @@
               </a:defRPr>
             </a:defPPr>
             <a:lvl1pPr>
-              <a:defRPr sz="1800" b="0">
-                <a:solidFill>
-                  <a:srgbClr val="52636D"/>
+              <a:defRPr sz="1275" b="0">
+                <a:solidFill>
+                  <a:srgbClr val="163447"/>
                 </a:solidFill>
                 <a:latin typeface="DejaVu Sans"/>
                 <a:ea typeface="DejaVu Sans"/>
@@ -12819,9 +14568,9 @@
               </a:defRPr>
             </a:lvl1pPr>
             <a:lvl2pPr>
-              <a:defRPr sz="1800" b="0">
-                <a:solidFill>
-                  <a:srgbClr val="52636D"/>
+              <a:defRPr sz="1275" b="0">
+                <a:solidFill>
+                  <a:srgbClr val="163447"/>
                 </a:solidFill>
                 <a:latin typeface="DejaVu Sans"/>
                 <a:ea typeface="DejaVu Sans"/>
@@ -12829,9 +14578,9 @@
               </a:defRPr>
             </a:lvl2pPr>
             <a:lvl3pPr>
-              <a:defRPr sz="1800" b="0">
-                <a:solidFill>
-                  <a:srgbClr val="52636D"/>
+              <a:defRPr sz="1275" b="0">
+                <a:solidFill>
+                  <a:srgbClr val="163447"/>
                 </a:solidFill>
                 <a:latin typeface="DejaVu Sans"/>
                 <a:ea typeface="DejaVu Sans"/>
@@ -12839,9 +14588,9 @@
               </a:defRPr>
             </a:lvl3pPr>
             <a:lvl4pPr>
-              <a:defRPr sz="1800" b="0">
-                <a:solidFill>
-                  <a:srgbClr val="52636D"/>
+              <a:defRPr sz="1275" b="0">
+                <a:solidFill>
+                  <a:srgbClr val="163447"/>
                 </a:solidFill>
                 <a:latin typeface="DejaVu Sans"/>
                 <a:ea typeface="DejaVu Sans"/>
@@ -12849,9 +14598,9 @@
               </a:defRPr>
             </a:lvl4pPr>
             <a:lvl5pPr>
-              <a:defRPr sz="1800" b="0">
-                <a:solidFill>
-                  <a:srgbClr val="52636D"/>
+              <a:defRPr sz="1275" b="0">
+                <a:solidFill>
+                  <a:srgbClr val="163447"/>
                 </a:solidFill>
                 <a:latin typeface="DejaVu Sans"/>
                 <a:ea typeface="DejaVu Sans"/>
@@ -12859,9 +14608,9 @@
               </a:defRPr>
             </a:lvl5pPr>
             <a:lvl6pPr>
-              <a:defRPr sz="1800" b="0">
-                <a:solidFill>
-                  <a:srgbClr val="52636D"/>
+              <a:defRPr sz="1275" b="0">
+                <a:solidFill>
+                  <a:srgbClr val="163447"/>
                 </a:solidFill>
                 <a:latin typeface="DejaVu Sans"/>
                 <a:ea typeface="DejaVu Sans"/>
@@ -12869,9 +14618,9 @@
               </a:defRPr>
             </a:lvl6pPr>
             <a:lvl7pPr>
-              <a:defRPr sz="1800" b="0">
-                <a:solidFill>
-                  <a:srgbClr val="52636D"/>
+              <a:defRPr sz="1275" b="0">
+                <a:solidFill>
+                  <a:srgbClr val="163447"/>
                 </a:solidFill>
                 <a:latin typeface="DejaVu Sans"/>
                 <a:ea typeface="DejaVu Sans"/>
@@ -12879,9 +14628,9 @@
               </a:defRPr>
             </a:lvl7pPr>
             <a:lvl8pPr>
-              <a:defRPr sz="1800" b="0">
-                <a:solidFill>
-                  <a:srgbClr val="52636D"/>
+              <a:defRPr sz="1275" b="0">
+                <a:solidFill>
+                  <a:srgbClr val="163447"/>
                 </a:solidFill>
                 <a:latin typeface="DejaVu Sans"/>
                 <a:ea typeface="DejaVu Sans"/>
@@ -12889,9 +14638,9 @@
               </a:defRPr>
             </a:lvl8pPr>
             <a:lvl9pPr>
-              <a:defRPr sz="1800" b="0">
-                <a:solidFill>
-                  <a:srgbClr val="52636D"/>
+              <a:defRPr sz="1275" b="0">
+                <a:solidFill>
+                  <a:srgbClr val="163447"/>
                 </a:solidFill>
                 <a:latin typeface="DejaVu Sans"/>
                 <a:ea typeface="DejaVu Sans"/>
@@ -12901,9 +14650,9 @@
           </a:lstStyle>
           <a:p xmlns:a="http://schemas.openxmlformats.org/drawingml/2006/main">
             <a:pPr>
-              <a:defRPr sz="1800" b="0">
-                <a:solidFill>
-                  <a:srgbClr val="52636D"/>
+              <a:defRPr sz="1275" b="0">
+                <a:solidFill>
+                  <a:srgbClr val="163447"/>
                 </a:solidFill>
                 <a:latin typeface="DejaVu Sans"/>
                 <a:ea typeface="DejaVu Sans"/>
@@ -12911,22 +14660,158 @@
               </a:defRPr>
             </a:pPr>
             <a:r>
-              <a:rPr sz="1800" b="0">
-                <a:solidFill>
-                  <a:srgbClr val="52636D"/>
+              <a:rPr sz="1275" b="0">
+                <a:solidFill>
+                  <a:srgbClr val="163447"/>
                 </a:solidFill>
                 <a:latin typeface="DejaVu Sans"/>
                 <a:ea typeface="DejaVu Sans"/>
                 <a:cs typeface="DejaVu Sans"/>
               </a:rPr>
-              <a:t>Cada asignación relaciona una actividad,</a:t>
+              <a:t>0..*</a:t>
             </a:r>
           </a:p>
+        </p:txBody>
+      </p:sp>
+      <p:sp>
+        <p:nvSpPr>
+          <p:cNvPr id="30" name="texto-29">
+            <a:extLst xmlns:a="http://schemas.openxmlformats.org/drawingml/2006/main">
+              <a:ext uri="{FF2B5EF4-FFF2-40B4-BE49-F238E27FC236}">
+                <a16:creationId xmlns:a16="http://schemas.microsoft.com/office/drawing/2014/main" id="{CA5B40EF-9A45-4F75-AB78-6AD191810E5E}"/>
+              </a:ext>
+            </a:extLst>
+          </p:cNvPr>
+          <p:cNvSpPr>
+            <a:spLocks xmlns:a="http://schemas.openxmlformats.org/drawingml/2006/main" noGrp="1"/>
+          </p:cNvSpPr>
+          <p:nvPr/>
+        </p:nvSpPr>
+        <p:spPr>
+          <a:xfrm xmlns:a="http://schemas.openxmlformats.org/drawingml/2006/main">
+            <a:off x="5000625" y="3514725"/>
+            <a:ext cx="381000" cy="238125"/>
+          </a:xfrm>
+          <a:prstGeom xmlns:a="http://schemas.openxmlformats.org/drawingml/2006/main" prst="rect">
+            <a:avLst/>
+          </a:prstGeom>
+          <a:noFill xmlns:a="http://schemas.openxmlformats.org/drawingml/2006/main"/>
+          <a:ln xmlns:a="http://schemas.openxmlformats.org/drawingml/2006/main" w="0">
+            <a:noFill/>
+            <a:prstDash val="solid"/>
+          </a:ln>
+        </p:spPr>
+        <p:txBody>
+          <a:bodyPr xmlns:a="http://schemas.openxmlformats.org/drawingml/2006/main" wrap="square" lIns="0" tIns="0" rIns="0" bIns="0" anchor="t">
+            <a:noAutofit/>
+          </a:bodyPr>
+          <a:lstStyle xmlns:a="http://schemas.openxmlformats.org/drawingml/2006/main">
+            <a:defPPr>
+              <a:defRPr sz="1500" b="0">
+                <a:solidFill>
+                  <a:srgbClr val="163447"/>
+                </a:solidFill>
+                <a:latin typeface="DejaVu Sans"/>
+                <a:ea typeface="DejaVu Sans"/>
+                <a:cs typeface="DejaVu Sans"/>
+              </a:defRPr>
+            </a:defPPr>
+            <a:lvl1pPr>
+              <a:defRPr sz="1500" b="0">
+                <a:solidFill>
+                  <a:srgbClr val="163447"/>
+                </a:solidFill>
+                <a:latin typeface="DejaVu Sans"/>
+                <a:ea typeface="DejaVu Sans"/>
+                <a:cs typeface="DejaVu Sans"/>
+              </a:defRPr>
+            </a:lvl1pPr>
+            <a:lvl2pPr>
+              <a:defRPr sz="1500" b="0">
+                <a:solidFill>
+                  <a:srgbClr val="163447"/>
+                </a:solidFill>
+                <a:latin typeface="DejaVu Sans"/>
+                <a:ea typeface="DejaVu Sans"/>
+                <a:cs typeface="DejaVu Sans"/>
+              </a:defRPr>
+            </a:lvl2pPr>
+            <a:lvl3pPr>
+              <a:defRPr sz="1500" b="0">
+                <a:solidFill>
+                  <a:srgbClr val="163447"/>
+                </a:solidFill>
+                <a:latin typeface="DejaVu Sans"/>
+                <a:ea typeface="DejaVu Sans"/>
+                <a:cs typeface="DejaVu Sans"/>
+              </a:defRPr>
+            </a:lvl3pPr>
+            <a:lvl4pPr>
+              <a:defRPr sz="1500" b="0">
+                <a:solidFill>
+                  <a:srgbClr val="163447"/>
+                </a:solidFill>
+                <a:latin typeface="DejaVu Sans"/>
+                <a:ea typeface="DejaVu Sans"/>
+                <a:cs typeface="DejaVu Sans"/>
+              </a:defRPr>
+            </a:lvl4pPr>
+            <a:lvl5pPr>
+              <a:defRPr sz="1500" b="0">
+                <a:solidFill>
+                  <a:srgbClr val="163447"/>
+                </a:solidFill>
+                <a:latin typeface="DejaVu Sans"/>
+                <a:ea typeface="DejaVu Sans"/>
+                <a:cs typeface="DejaVu Sans"/>
+              </a:defRPr>
+            </a:lvl5pPr>
+            <a:lvl6pPr>
+              <a:defRPr sz="1500" b="0">
+                <a:solidFill>
+                  <a:srgbClr val="163447"/>
+                </a:solidFill>
+                <a:latin typeface="DejaVu Sans"/>
+                <a:ea typeface="DejaVu Sans"/>
+                <a:cs typeface="DejaVu Sans"/>
+              </a:defRPr>
+            </a:lvl6pPr>
+            <a:lvl7pPr>
+              <a:defRPr sz="1500" b="0">
+                <a:solidFill>
+                  <a:srgbClr val="163447"/>
+                </a:solidFill>
+                <a:latin typeface="DejaVu Sans"/>
+                <a:ea typeface="DejaVu Sans"/>
+                <a:cs typeface="DejaVu Sans"/>
+              </a:defRPr>
+            </a:lvl7pPr>
+            <a:lvl8pPr>
+              <a:defRPr sz="1500" b="0">
+                <a:solidFill>
+                  <a:srgbClr val="163447"/>
+                </a:solidFill>
+                <a:latin typeface="DejaVu Sans"/>
+                <a:ea typeface="DejaVu Sans"/>
+                <a:cs typeface="DejaVu Sans"/>
+              </a:defRPr>
+            </a:lvl8pPr>
+            <a:lvl9pPr>
+              <a:defRPr sz="1500" b="0">
+                <a:solidFill>
+                  <a:srgbClr val="163447"/>
+                </a:solidFill>
+                <a:latin typeface="DejaVu Sans"/>
+                <a:ea typeface="DejaVu Sans"/>
+                <a:cs typeface="DejaVu Sans"/>
+              </a:defRPr>
+            </a:lvl9pPr>
+          </a:lstStyle>
           <a:p xmlns:a="http://schemas.openxmlformats.org/drawingml/2006/main">
             <a:pPr>
-              <a:defRPr sz="1800" b="0">
-                <a:solidFill>
-                  <a:srgbClr val="52636D"/>
+              <a:defRPr sz="1500" b="0">
+                <a:solidFill>
+                  <a:srgbClr val="163447"/>
                 </a:solidFill>
                 <a:latin typeface="DejaVu Sans"/>
                 <a:ea typeface="DejaVu Sans"/>
@@ -12934,22 +14819,158 @@
               </a:defRPr>
             </a:pPr>
             <a:r>
-              <a:rPr sz="1800" b="0">
-                <a:solidFill>
-                  <a:srgbClr val="52636D"/>
+              <a:rPr sz="1500" b="0">
+                <a:solidFill>
+                  <a:srgbClr val="163447"/>
                 </a:solidFill>
                 <a:latin typeface="DejaVu Sans"/>
                 <a:ea typeface="DejaVu Sans"/>
                 <a:cs typeface="DejaVu Sans"/>
               </a:rPr>
-              <a:t>un trabajador y un usuario responsable.</a:t>
+              <a:t>1</a:t>
             </a:r>
           </a:p>
+        </p:txBody>
+      </p:sp>
+      <p:sp>
+        <p:nvSpPr>
+          <p:cNvPr id="31" name="texto-30">
+            <a:extLst xmlns:a="http://schemas.openxmlformats.org/drawingml/2006/main">
+              <a:ext uri="{FF2B5EF4-FFF2-40B4-BE49-F238E27FC236}">
+                <a16:creationId xmlns:a16="http://schemas.microsoft.com/office/drawing/2014/main" id="{48853715-D289-4A9E-8069-C5020F5F7CDC}"/>
+              </a:ext>
+            </a:extLst>
+          </p:cNvPr>
+          <p:cNvSpPr>
+            <a:spLocks xmlns:a="http://schemas.openxmlformats.org/drawingml/2006/main" noGrp="1"/>
+          </p:cNvSpPr>
+          <p:nvPr/>
+        </p:nvSpPr>
+        <p:spPr>
+          <a:xfrm xmlns:a="http://schemas.openxmlformats.org/drawingml/2006/main">
+            <a:off x="6781800" y="3514725"/>
+            <a:ext cx="571500" cy="238125"/>
+          </a:xfrm>
+          <a:prstGeom xmlns:a="http://schemas.openxmlformats.org/drawingml/2006/main" prst="rect">
+            <a:avLst/>
+          </a:prstGeom>
+          <a:noFill xmlns:a="http://schemas.openxmlformats.org/drawingml/2006/main"/>
+          <a:ln xmlns:a="http://schemas.openxmlformats.org/drawingml/2006/main" w="0">
+            <a:noFill/>
+            <a:prstDash val="solid"/>
+          </a:ln>
+        </p:spPr>
+        <p:txBody>
+          <a:bodyPr xmlns:a="http://schemas.openxmlformats.org/drawingml/2006/main" wrap="square" lIns="0" tIns="0" rIns="0" bIns="0" anchor="t">
+            <a:noAutofit/>
+          </a:bodyPr>
+          <a:lstStyle xmlns:a="http://schemas.openxmlformats.org/drawingml/2006/main">
+            <a:defPPr>
+              <a:defRPr sz="1500" b="0">
+                <a:solidFill>
+                  <a:srgbClr val="163447"/>
+                </a:solidFill>
+                <a:latin typeface="DejaVu Sans"/>
+                <a:ea typeface="DejaVu Sans"/>
+                <a:cs typeface="DejaVu Sans"/>
+              </a:defRPr>
+            </a:defPPr>
+            <a:lvl1pPr>
+              <a:defRPr sz="1500" b="0">
+                <a:solidFill>
+                  <a:srgbClr val="163447"/>
+                </a:solidFill>
+                <a:latin typeface="DejaVu Sans"/>
+                <a:ea typeface="DejaVu Sans"/>
+                <a:cs typeface="DejaVu Sans"/>
+              </a:defRPr>
+            </a:lvl1pPr>
+            <a:lvl2pPr>
+              <a:defRPr sz="1500" b="0">
+                <a:solidFill>
+                  <a:srgbClr val="163447"/>
+                </a:solidFill>
+                <a:latin typeface="DejaVu Sans"/>
+                <a:ea typeface="DejaVu Sans"/>
+                <a:cs typeface="DejaVu Sans"/>
+              </a:defRPr>
+            </a:lvl2pPr>
+            <a:lvl3pPr>
+              <a:defRPr sz="1500" b="0">
+                <a:solidFill>
+                  <a:srgbClr val="163447"/>
+                </a:solidFill>
+                <a:latin typeface="DejaVu Sans"/>
+                <a:ea typeface="DejaVu Sans"/>
+                <a:cs typeface="DejaVu Sans"/>
+              </a:defRPr>
+            </a:lvl3pPr>
+            <a:lvl4pPr>
+              <a:defRPr sz="1500" b="0">
+                <a:solidFill>
+                  <a:srgbClr val="163447"/>
+                </a:solidFill>
+                <a:latin typeface="DejaVu Sans"/>
+                <a:ea typeface="DejaVu Sans"/>
+                <a:cs typeface="DejaVu Sans"/>
+              </a:defRPr>
+            </a:lvl4pPr>
+            <a:lvl5pPr>
+              <a:defRPr sz="1500" b="0">
+                <a:solidFill>
+                  <a:srgbClr val="163447"/>
+                </a:solidFill>
+                <a:latin typeface="DejaVu Sans"/>
+                <a:ea typeface="DejaVu Sans"/>
+                <a:cs typeface="DejaVu Sans"/>
+              </a:defRPr>
+            </a:lvl5pPr>
+            <a:lvl6pPr>
+              <a:defRPr sz="1500" b="0">
+                <a:solidFill>
+                  <a:srgbClr val="163447"/>
+                </a:solidFill>
+                <a:latin typeface="DejaVu Sans"/>
+                <a:ea typeface="DejaVu Sans"/>
+                <a:cs typeface="DejaVu Sans"/>
+              </a:defRPr>
+            </a:lvl6pPr>
+            <a:lvl7pPr>
+              <a:defRPr sz="1500" b="0">
+                <a:solidFill>
+                  <a:srgbClr val="163447"/>
+                </a:solidFill>
+                <a:latin typeface="DejaVu Sans"/>
+                <a:ea typeface="DejaVu Sans"/>
+                <a:cs typeface="DejaVu Sans"/>
+              </a:defRPr>
+            </a:lvl7pPr>
+            <a:lvl8pPr>
+              <a:defRPr sz="1500" b="0">
+                <a:solidFill>
+                  <a:srgbClr val="163447"/>
+                </a:solidFill>
+                <a:latin typeface="DejaVu Sans"/>
+                <a:ea typeface="DejaVu Sans"/>
+                <a:cs typeface="DejaVu Sans"/>
+              </a:defRPr>
+            </a:lvl8pPr>
+            <a:lvl9pPr>
+              <a:defRPr sz="1500" b="0">
+                <a:solidFill>
+                  <a:srgbClr val="163447"/>
+                </a:solidFill>
+                <a:latin typeface="DejaVu Sans"/>
+                <a:ea typeface="DejaVu Sans"/>
+                <a:cs typeface="DejaVu Sans"/>
+              </a:defRPr>
+            </a:lvl9pPr>
+          </a:lstStyle>
           <a:p xmlns:a="http://schemas.openxmlformats.org/drawingml/2006/main">
             <a:pPr>
-              <a:defRPr sz="1800" b="0">
-                <a:solidFill>
-                  <a:srgbClr val="52636D"/>
+              <a:defRPr sz="1500" b="0">
+                <a:solidFill>
+                  <a:srgbClr val="163447"/>
                 </a:solidFill>
                 <a:latin typeface="DejaVu Sans"/>
                 <a:ea typeface="DejaVu Sans"/>
@@ -12957,22 +14978,158 @@
               </a:defRPr>
             </a:pPr>
             <a:r>
-              <a:rPr sz="1800" b="0">
-                <a:solidFill>
-                  <a:srgbClr val="52636D"/>
+              <a:rPr sz="1500" b="0">
+                <a:solidFill>
+                  <a:srgbClr val="163447"/>
                 </a:solidFill>
                 <a:latin typeface="DejaVu Sans"/>
                 <a:ea typeface="DejaVu Sans"/>
                 <a:cs typeface="DejaVu Sans"/>
               </a:rPr>
-              <a:t>Una actividad tiene como máximo</a:t>
+              <a:t>0..*</a:t>
             </a:r>
           </a:p>
+        </p:txBody>
+      </p:sp>
+      <p:sp>
+        <p:nvSpPr>
+          <p:cNvPr id="33" name="texto-32">
+            <a:extLst xmlns:a="http://schemas.openxmlformats.org/drawingml/2006/main">
+              <a:ext uri="{FF2B5EF4-FFF2-40B4-BE49-F238E27FC236}">
+                <a16:creationId xmlns:a16="http://schemas.microsoft.com/office/drawing/2014/main" id="{EBD60134-629E-472E-B423-F98234DB769F}"/>
+              </a:ext>
+            </a:extLst>
+          </p:cNvPr>
+          <p:cNvSpPr>
+            <a:spLocks xmlns:a="http://schemas.openxmlformats.org/drawingml/2006/main" noGrp="1"/>
+          </p:cNvSpPr>
+          <p:nvPr/>
+        </p:nvSpPr>
+        <p:spPr>
+          <a:xfrm xmlns:a="http://schemas.openxmlformats.org/drawingml/2006/main">
+            <a:off x="9620250" y="4476750"/>
+            <a:ext cx="666750" cy="190500"/>
+          </a:xfrm>
+          <a:prstGeom xmlns:a="http://schemas.openxmlformats.org/drawingml/2006/main" prst="rect">
+            <a:avLst/>
+          </a:prstGeom>
+          <a:noFill xmlns:a="http://schemas.openxmlformats.org/drawingml/2006/main"/>
+          <a:ln xmlns:a="http://schemas.openxmlformats.org/drawingml/2006/main" w="0">
+            <a:noFill/>
+            <a:prstDash val="solid"/>
+          </a:ln>
+        </p:spPr>
+        <p:txBody>
+          <a:bodyPr xmlns:a="http://schemas.openxmlformats.org/drawingml/2006/main" wrap="square" lIns="0" tIns="0" rIns="0" bIns="0" anchor="t">
+            <a:noAutofit/>
+          </a:bodyPr>
+          <a:lstStyle xmlns:a="http://schemas.openxmlformats.org/drawingml/2006/main">
+            <a:defPPr>
+              <a:defRPr sz="1275" b="0">
+                <a:solidFill>
+                  <a:srgbClr val="163447"/>
+                </a:solidFill>
+                <a:latin typeface="DejaVu Sans"/>
+                <a:ea typeface="DejaVu Sans"/>
+                <a:cs typeface="DejaVu Sans"/>
+              </a:defRPr>
+            </a:defPPr>
+            <a:lvl1pPr>
+              <a:defRPr sz="1275" b="0">
+                <a:solidFill>
+                  <a:srgbClr val="163447"/>
+                </a:solidFill>
+                <a:latin typeface="DejaVu Sans"/>
+                <a:ea typeface="DejaVu Sans"/>
+                <a:cs typeface="DejaVu Sans"/>
+              </a:defRPr>
+            </a:lvl1pPr>
+            <a:lvl2pPr>
+              <a:defRPr sz="1275" b="0">
+                <a:solidFill>
+                  <a:srgbClr val="163447"/>
+                </a:solidFill>
+                <a:latin typeface="DejaVu Sans"/>
+                <a:ea typeface="DejaVu Sans"/>
+                <a:cs typeface="DejaVu Sans"/>
+              </a:defRPr>
+            </a:lvl2pPr>
+            <a:lvl3pPr>
+              <a:defRPr sz="1275" b="0">
+                <a:solidFill>
+                  <a:srgbClr val="163447"/>
+                </a:solidFill>
+                <a:latin typeface="DejaVu Sans"/>
+                <a:ea typeface="DejaVu Sans"/>
+                <a:cs typeface="DejaVu Sans"/>
+              </a:defRPr>
+            </a:lvl3pPr>
+            <a:lvl4pPr>
+              <a:defRPr sz="1275" b="0">
+                <a:solidFill>
+                  <a:srgbClr val="163447"/>
+                </a:solidFill>
+                <a:latin typeface="DejaVu Sans"/>
+                <a:ea typeface="DejaVu Sans"/>
+                <a:cs typeface="DejaVu Sans"/>
+              </a:defRPr>
+            </a:lvl4pPr>
+            <a:lvl5pPr>
+              <a:defRPr sz="1275" b="0">
+                <a:solidFill>
+                  <a:srgbClr val="163447"/>
+                </a:solidFill>
+                <a:latin typeface="DejaVu Sans"/>
+                <a:ea typeface="DejaVu Sans"/>
+                <a:cs typeface="DejaVu Sans"/>
+              </a:defRPr>
+            </a:lvl5pPr>
+            <a:lvl6pPr>
+              <a:defRPr sz="1275" b="0">
+                <a:solidFill>
+                  <a:srgbClr val="163447"/>
+                </a:solidFill>
+                <a:latin typeface="DejaVu Sans"/>
+                <a:ea typeface="DejaVu Sans"/>
+                <a:cs typeface="DejaVu Sans"/>
+              </a:defRPr>
+            </a:lvl6pPr>
+            <a:lvl7pPr>
+              <a:defRPr sz="1275" b="0">
+                <a:solidFill>
+                  <a:srgbClr val="163447"/>
+                </a:solidFill>
+                <a:latin typeface="DejaVu Sans"/>
+                <a:ea typeface="DejaVu Sans"/>
+                <a:cs typeface="DejaVu Sans"/>
+              </a:defRPr>
+            </a:lvl7pPr>
+            <a:lvl8pPr>
+              <a:defRPr sz="1275" b="0">
+                <a:solidFill>
+                  <a:srgbClr val="163447"/>
+                </a:solidFill>
+                <a:latin typeface="DejaVu Sans"/>
+                <a:ea typeface="DejaVu Sans"/>
+                <a:cs typeface="DejaVu Sans"/>
+              </a:defRPr>
+            </a:lvl8pPr>
+            <a:lvl9pPr>
+              <a:defRPr sz="1275" b="0">
+                <a:solidFill>
+                  <a:srgbClr val="163447"/>
+                </a:solidFill>
+                <a:latin typeface="DejaVu Sans"/>
+                <a:ea typeface="DejaVu Sans"/>
+                <a:cs typeface="DejaVu Sans"/>
+              </a:defRPr>
+            </a:lvl9pPr>
+          </a:lstStyle>
           <a:p xmlns:a="http://schemas.openxmlformats.org/drawingml/2006/main">
             <a:pPr>
-              <a:defRPr sz="1800" b="0">
-                <a:solidFill>
-                  <a:srgbClr val="52636D"/>
+              <a:defRPr sz="1275" b="0">
+                <a:solidFill>
+                  <a:srgbClr val="163447"/>
                 </a:solidFill>
                 <a:latin typeface="DejaVu Sans"/>
                 <a:ea typeface="DejaVu Sans"/>
@@ -12980,15 +15137,174 @@
               </a:defRPr>
             </a:pPr>
             <a:r>
-              <a:rPr sz="1800" b="0">
-                <a:solidFill>
-                  <a:srgbClr val="52636D"/>
+              <a:rPr sz="1275" b="0">
+                <a:solidFill>
+                  <a:srgbClr val="163447"/>
                 </a:solidFill>
                 <a:latin typeface="DejaVu Sans"/>
                 <a:ea typeface="DejaVu Sans"/>
                 <a:cs typeface="DejaVu Sans"/>
               </a:rPr>
-              <a:t>una asignación activa.</a:t>
+              <a:t>0..*</a:t>
+            </a:r>
+          </a:p>
+        </p:txBody>
+      </p:sp>
+      <p:sp>
+        <p:nvSpPr>
+          <p:cNvPr id="34" name="texto-33">
+            <a:extLst xmlns:a="http://schemas.openxmlformats.org/drawingml/2006/main">
+              <a:ext uri="{FF2B5EF4-FFF2-40B4-BE49-F238E27FC236}">
+                <a16:creationId xmlns:a16="http://schemas.microsoft.com/office/drawing/2014/main" id="{8A35EC11-4C10-48D8-9052-C930E21C170A}"/>
+              </a:ext>
+            </a:extLst>
+          </p:cNvPr>
+          <p:cNvSpPr>
+            <a:spLocks xmlns:a="http://schemas.openxmlformats.org/drawingml/2006/main" noGrp="1"/>
+          </p:cNvSpPr>
+          <p:nvPr/>
+        </p:nvSpPr>
+        <p:spPr>
+          <a:xfrm xmlns:a="http://schemas.openxmlformats.org/drawingml/2006/main">
+            <a:off x="9620250" y="4686300"/>
+            <a:ext cx="381000" cy="190500"/>
+          </a:xfrm>
+          <a:prstGeom xmlns:a="http://schemas.openxmlformats.org/drawingml/2006/main" prst="rect">
+            <a:avLst/>
+          </a:prstGeom>
+          <a:noFill xmlns:a="http://schemas.openxmlformats.org/drawingml/2006/main"/>
+          <a:ln xmlns:a="http://schemas.openxmlformats.org/drawingml/2006/main" w="0">
+            <a:noFill/>
+            <a:prstDash val="solid"/>
+          </a:ln>
+        </p:spPr>
+        <p:txBody>
+          <a:bodyPr xmlns:a="http://schemas.openxmlformats.org/drawingml/2006/main" wrap="square" lIns="0" tIns="0" rIns="0" bIns="0" anchor="t">
+            <a:noAutofit/>
+          </a:bodyPr>
+          <a:lstStyle xmlns:a="http://schemas.openxmlformats.org/drawingml/2006/main">
+            <a:defPPr>
+              <a:defRPr sz="1275" b="0">
+                <a:solidFill>
+                  <a:srgbClr val="163447"/>
+                </a:solidFill>
+                <a:latin typeface="DejaVu Sans"/>
+                <a:ea typeface="DejaVu Sans"/>
+                <a:cs typeface="DejaVu Sans"/>
+              </a:defRPr>
+            </a:defPPr>
+            <a:lvl1pPr>
+              <a:defRPr sz="1275" b="0">
+                <a:solidFill>
+                  <a:srgbClr val="163447"/>
+                </a:solidFill>
+                <a:latin typeface="DejaVu Sans"/>
+                <a:ea typeface="DejaVu Sans"/>
+                <a:cs typeface="DejaVu Sans"/>
+              </a:defRPr>
+            </a:lvl1pPr>
+            <a:lvl2pPr>
+              <a:defRPr sz="1275" b="0">
+                <a:solidFill>
+                  <a:srgbClr val="163447"/>
+                </a:solidFill>
+                <a:latin typeface="DejaVu Sans"/>
+                <a:ea typeface="DejaVu Sans"/>
+                <a:cs typeface="DejaVu Sans"/>
+              </a:defRPr>
+            </a:lvl2pPr>
+            <a:lvl3pPr>
+              <a:defRPr sz="1275" b="0">
+                <a:solidFill>
+                  <a:srgbClr val="163447"/>
+                </a:solidFill>
+                <a:latin typeface="DejaVu Sans"/>
+                <a:ea typeface="DejaVu Sans"/>
+                <a:cs typeface="DejaVu Sans"/>
+              </a:defRPr>
+            </a:lvl3pPr>
+            <a:lvl4pPr>
+              <a:defRPr sz="1275" b="0">
+                <a:solidFill>
+                  <a:srgbClr val="163447"/>
+                </a:solidFill>
+                <a:latin typeface="DejaVu Sans"/>
+                <a:ea typeface="DejaVu Sans"/>
+                <a:cs typeface="DejaVu Sans"/>
+              </a:defRPr>
+            </a:lvl4pPr>
+            <a:lvl5pPr>
+              <a:defRPr sz="1275" b="0">
+                <a:solidFill>
+                  <a:srgbClr val="163447"/>
+                </a:solidFill>
+                <a:latin typeface="DejaVu Sans"/>
+                <a:ea typeface="DejaVu Sans"/>
+                <a:cs typeface="DejaVu Sans"/>
+              </a:defRPr>
+            </a:lvl5pPr>
+            <a:lvl6pPr>
+              <a:defRPr sz="1275" b="0">
+                <a:solidFill>
+                  <a:srgbClr val="163447"/>
+                </a:solidFill>
+                <a:latin typeface="DejaVu Sans"/>
+                <a:ea typeface="DejaVu Sans"/>
+                <a:cs typeface="DejaVu Sans"/>
+              </a:defRPr>
+            </a:lvl6pPr>
+            <a:lvl7pPr>
+              <a:defRPr sz="1275" b="0">
+                <a:solidFill>
+                  <a:srgbClr val="163447"/>
+                </a:solidFill>
+                <a:latin typeface="DejaVu Sans"/>
+                <a:ea typeface="DejaVu Sans"/>
+                <a:cs typeface="DejaVu Sans"/>
+              </a:defRPr>
+            </a:lvl7pPr>
+            <a:lvl8pPr>
+              <a:defRPr sz="1275" b="0">
+                <a:solidFill>
+                  <a:srgbClr val="163447"/>
+                </a:solidFill>
+                <a:latin typeface="DejaVu Sans"/>
+                <a:ea typeface="DejaVu Sans"/>
+                <a:cs typeface="DejaVu Sans"/>
+              </a:defRPr>
+            </a:lvl8pPr>
+            <a:lvl9pPr>
+              <a:defRPr sz="1275" b="0">
+                <a:solidFill>
+                  <a:srgbClr val="163447"/>
+                </a:solidFill>
+                <a:latin typeface="DejaVu Sans"/>
+                <a:ea typeface="DejaVu Sans"/>
+                <a:cs typeface="DejaVu Sans"/>
+              </a:defRPr>
+            </a:lvl9pPr>
+          </a:lstStyle>
+          <a:p xmlns:a="http://schemas.openxmlformats.org/drawingml/2006/main">
+            <a:pPr>
+              <a:defRPr sz="1275" b="0">
+                <a:solidFill>
+                  <a:srgbClr val="163447"/>
+                </a:solidFill>
+                <a:latin typeface="DejaVu Sans"/>
+                <a:ea typeface="DejaVu Sans"/>
+                <a:cs typeface="DejaVu Sans"/>
+              </a:defRPr>
+            </a:pPr>
+            <a:r>
+              <a:rPr sz="1275" b="0">
+                <a:solidFill>
+                  <a:srgbClr val="163447"/>
+                </a:solidFill>
+                <a:latin typeface="DejaVu Sans"/>
+                <a:ea typeface="DejaVu Sans"/>
+                <a:cs typeface="DejaVu Sans"/>
+              </a:rPr>
+              <a:t>1</a:t>
             </a:r>
           </a:p>
         </p:txBody>
@@ -12996,7 +15312,7 @@
     </p:spTree>
     <p:extLst>
       <p:ext uri="{BB962C8B-B14F-4D97-AF65-F5344CB8AC3E}">
-        <p14:creationId xmlns:p14="http://schemas.microsoft.com/office/powerpoint/2010/main" val="517535950"/>
+        <p14:creationId xmlns:p14="http://schemas.microsoft.com/office/powerpoint/2010/main" val="1275327073"/>
       </p:ext>
     </p:extLst>
   </p:cSld>
@@ -13027,7 +15343,7 @@
           <p:cNvPr id="6" name="texto-0">
             <a:extLst xmlns:a="http://schemas.openxmlformats.org/drawingml/2006/main">
               <a:ext uri="{FF2B5EF4-FFF2-40B4-BE49-F238E27FC236}">
-                <a16:creationId xmlns:a16="http://schemas.microsoft.com/office/drawing/2014/main" id="{1D64A0AC-269B-41FD-BD16-A02B357182A4}"/>
+                <a16:creationId xmlns:a16="http://schemas.microsoft.com/office/drawing/2014/main" id="{5571107F-8B7F-447E-9C46-B51A57263252}"/>
               </a:ext>
             </a:extLst>
           </p:cNvPr>
@@ -13186,7 +15502,7 @@
           <p:cNvPr id="2" name="texto-1">
             <a:extLst xmlns:a="http://schemas.openxmlformats.org/drawingml/2006/main">
               <a:ext uri="{FF2B5EF4-FFF2-40B4-BE49-F238E27FC236}">
-                <a16:creationId xmlns:a16="http://schemas.microsoft.com/office/drawing/2014/main" id="{FCCAD66B-250D-472A-95B7-51CBA0710FD2}"/>
+                <a16:creationId xmlns:a16="http://schemas.microsoft.com/office/drawing/2014/main" id="{6C13C6C9-2393-43B9-BD41-479FAE4C1686}"/>
               </a:ext>
             </a:extLst>
           </p:cNvPr>
@@ -13345,7 +15661,7 @@
           <p:cNvPr id="3" name="texto-2">
             <a:extLst xmlns:a="http://schemas.openxmlformats.org/drawingml/2006/main">
               <a:ext uri="{FF2B5EF4-FFF2-40B4-BE49-F238E27FC236}">
-                <a16:creationId xmlns:a16="http://schemas.microsoft.com/office/drawing/2014/main" id="{BE2FDE48-9C00-465F-93BC-049BBD9F3E33}"/>
+                <a16:creationId xmlns:a16="http://schemas.microsoft.com/office/drawing/2014/main" id="{C62D54B3-98A1-4747-82BE-5D84DA5D9217}"/>
               </a:ext>
             </a:extLst>
           </p:cNvPr>
@@ -13504,7 +15820,7 @@
           <p:cNvPr id="4" name="">
             <a:extLst xmlns:a="http://schemas.openxmlformats.org/drawingml/2006/main">
               <a:ext uri="{FF2B5EF4-FFF2-40B4-BE49-F238E27FC236}">
-                <a16:creationId xmlns:a16="http://schemas.microsoft.com/office/drawing/2014/main" id="{311051F1-AF75-407C-9F45-B6BA70CF4BC0}"/>
+                <a16:creationId xmlns:a16="http://schemas.microsoft.com/office/drawing/2014/main" id="{095AEDC4-85DF-42A2-85CF-30714CC87264}"/>
               </a:ext>
             </a:extLst>
           </p:cNvPr>
@@ -14161,7 +16477,7 @@
           <p:cNvPr id="5" name="texto-3">
             <a:extLst xmlns:a="http://schemas.openxmlformats.org/drawingml/2006/main">
               <a:ext uri="{FF2B5EF4-FFF2-40B4-BE49-F238E27FC236}">
-                <a16:creationId xmlns:a16="http://schemas.microsoft.com/office/drawing/2014/main" id="{335BDB73-B0F0-4E3F-92E1-E8BE22D1BDFE}"/>
+                <a16:creationId xmlns:a16="http://schemas.microsoft.com/office/drawing/2014/main" id="{7D36F87B-0700-4DC3-8BBA-E97442CF0AE4}"/>
               </a:ext>
             </a:extLst>
           </p:cNvPr>
@@ -14318,7 +16634,7 @@
     </p:spTree>
     <p:extLst>
       <p:ext uri="{BB962C8B-B14F-4D97-AF65-F5344CB8AC3E}">
-        <p14:creationId xmlns:p14="http://schemas.microsoft.com/office/powerpoint/2010/main" val="2057748740"/>
+        <p14:creationId xmlns:p14="http://schemas.microsoft.com/office/powerpoint/2010/main" val="1942342731"/>
       </p:ext>
     </p:extLst>
   </p:cSld>
@@ -14349,7 +16665,7 @@
           <p:cNvPr id="7" name="texto-0">
             <a:extLst xmlns:a="http://schemas.openxmlformats.org/drawingml/2006/main">
               <a:ext uri="{FF2B5EF4-FFF2-40B4-BE49-F238E27FC236}">
-                <a16:creationId xmlns:a16="http://schemas.microsoft.com/office/drawing/2014/main" id="{22B24216-E9EF-4B3C-B663-9892336A9A2C}"/>
+                <a16:creationId xmlns:a16="http://schemas.microsoft.com/office/drawing/2014/main" id="{453F14FC-AA02-4145-AE5D-F4702586A0B0}"/>
               </a:ext>
             </a:extLst>
           </p:cNvPr>
@@ -14508,7 +16824,7 @@
           <p:cNvPr id="2" name="texto-1">
             <a:extLst xmlns:a="http://schemas.openxmlformats.org/drawingml/2006/main">
               <a:ext uri="{FF2B5EF4-FFF2-40B4-BE49-F238E27FC236}">
-                <a16:creationId xmlns:a16="http://schemas.microsoft.com/office/drawing/2014/main" id="{B91ED66E-F703-4266-986F-4E32CF71281E}"/>
+                <a16:creationId xmlns:a16="http://schemas.microsoft.com/office/drawing/2014/main" id="{8D848E5C-8C7B-4394-B38B-2EC708377AC2}"/>
               </a:ext>
             </a:extLst>
           </p:cNvPr>
@@ -14667,7 +16983,7 @@
           <p:cNvPr id="3" name="texto-2">
             <a:extLst xmlns:a="http://schemas.openxmlformats.org/drawingml/2006/main">
               <a:ext uri="{FF2B5EF4-FFF2-40B4-BE49-F238E27FC236}">
-                <a16:creationId xmlns:a16="http://schemas.microsoft.com/office/drawing/2014/main" id="{6CDF0F2A-DB1B-4BE0-A762-A13A0370F786}"/>
+                <a16:creationId xmlns:a16="http://schemas.microsoft.com/office/drawing/2014/main" id="{F17BBA06-FF65-4B4D-9834-EF05A0E84418}"/>
               </a:ext>
             </a:extLst>
           </p:cNvPr>
@@ -14826,7 +17142,7 @@
           <p:cNvPr id="4" name="">
             <a:extLst xmlns:a="http://schemas.openxmlformats.org/drawingml/2006/main">
               <a:ext uri="{FF2B5EF4-FFF2-40B4-BE49-F238E27FC236}">
-                <a16:creationId xmlns:a16="http://schemas.microsoft.com/office/drawing/2014/main" id="{4B1C2F1A-A50E-4C26-B957-7FBACD5E3CA7}"/>
+                <a16:creationId xmlns:a16="http://schemas.microsoft.com/office/drawing/2014/main" id="{95825330-2F2D-4D6B-B39E-F98CDE91A0F5}"/>
               </a:ext>
             </a:extLst>
           </p:cNvPr>
@@ -15528,7 +17844,7 @@
                           <a:ea typeface="DejaVu Sans"/>
                           <a:cs typeface="DejaVu Sans"/>
                         </a:rPr>
-                        <a:t>Listar en orden</a:t>
+                        <a:t>Listar alternativas en orden</a:t>
                       </a:r>
                     </a:p>
                   </a:txBody>
@@ -15688,7 +18004,7 @@
                           <a:ea typeface="DejaVu Sans"/>
                           <a:cs typeface="DejaVu Sans"/>
                         </a:rPr>
-                        <a:t>Comprobar cruces</a:t>
+                        <a:t>Retirar otra pendiente</a:t>
                       </a:r>
                     </a:p>
                   </a:txBody>
@@ -15732,7 +18048,7 @@
                           <a:ea typeface="DejaVu Sans"/>
                           <a:cs typeface="DejaVu Sans"/>
                         </a:rPr>
-                        <a:t>O(a)</a:t>
+                        <a:t>O(q)</a:t>
                       </a:r>
                     </a:p>
                   </a:txBody>
@@ -15770,7 +18086,7 @@
                           <a:ea typeface="DejaVu Sans"/>
                           <a:cs typeface="DejaVu Sans"/>
                         </a:rPr>
-                        <a:t>O(a)</a:t>
+                        <a:t>O(q)</a:t>
                       </a:r>
                     </a:p>
                   </a:txBody>
@@ -15840,7 +18156,7 @@
           <p:cNvPr id="5" name="texto-3">
             <a:extLst xmlns:a="http://schemas.openxmlformats.org/drawingml/2006/main">
               <a:ext uri="{FF2B5EF4-FFF2-40B4-BE49-F238E27FC236}">
-                <a16:creationId xmlns:a16="http://schemas.microsoft.com/office/drawing/2014/main" id="{D6792215-5C9F-46AA-A703-F1452F5DEAE5}"/>
+                <a16:creationId xmlns:a16="http://schemas.microsoft.com/office/drawing/2014/main" id="{D386056F-D026-4E03-909E-3578044CB844}"/>
               </a:ext>
             </a:extLst>
           </p:cNvPr>
@@ -15999,7 +18315,7 @@
           <p:cNvPr id="6" name="texto-4">
             <a:extLst xmlns:a="http://schemas.openxmlformats.org/drawingml/2006/main">
               <a:ext uri="{FF2B5EF4-FFF2-40B4-BE49-F238E27FC236}">
-                <a16:creationId xmlns:a16="http://schemas.microsoft.com/office/drawing/2014/main" id="{6930AEB5-0A19-4A2F-9608-803335F76D1B}"/>
+                <a16:creationId xmlns:a16="http://schemas.microsoft.com/office/drawing/2014/main" id="{FAF0F243-55F7-49A8-B4E1-D8504AC6948B}"/>
               </a:ext>
             </a:extLst>
           </p:cNvPr>
@@ -16148,7 +18464,7 @@
                 <a:ea typeface="DejaVu Sans"/>
                 <a:cs typeface="DejaVu Sans"/>
               </a:rPr>
-              <a:t>Actualizar una prioridad arbitraria conserva O(q) en ambas alternativas.</a:t>
+              <a:t>Actualizar prioridad y retirar otra pendiente cuestan O(q); validar cruces cuesta O(a).</a:t>
             </a:r>
           </a:p>
         </p:txBody>
@@ -16156,7 +18472,7 @@
     </p:spTree>
     <p:extLst>
       <p:ext uri="{BB962C8B-B14F-4D97-AF65-F5344CB8AC3E}">
-        <p14:creationId xmlns:p14="http://schemas.microsoft.com/office/powerpoint/2010/main" val="799542935"/>
+        <p14:creationId xmlns:p14="http://schemas.microsoft.com/office/powerpoint/2010/main" val="8125055"/>
       </p:ext>
     </p:extLst>
   </p:cSld>
@@ -16187,7 +18503,7 @@
           <p:cNvPr id="6" name="texto-0">
             <a:extLst xmlns:a="http://schemas.openxmlformats.org/drawingml/2006/main">
               <a:ext uri="{FF2B5EF4-FFF2-40B4-BE49-F238E27FC236}">
-                <a16:creationId xmlns:a16="http://schemas.microsoft.com/office/drawing/2014/main" id="{2362EB67-0730-4B86-B0D5-044327BFA281}"/>
+                <a16:creationId xmlns:a16="http://schemas.microsoft.com/office/drawing/2014/main" id="{FEFB6E55-1D55-4E00-ABCE-1DAF0FC93448}"/>
               </a:ext>
             </a:extLst>
           </p:cNvPr>
@@ -16346,7 +18662,7 @@
           <p:cNvPr id="2" name="texto-1">
             <a:extLst xmlns:a="http://schemas.openxmlformats.org/drawingml/2006/main">
               <a:ext uri="{FF2B5EF4-FFF2-40B4-BE49-F238E27FC236}">
-                <a16:creationId xmlns:a16="http://schemas.microsoft.com/office/drawing/2014/main" id="{59933AEF-A1D8-44DA-ABA0-EAD8931C2939}"/>
+                <a16:creationId xmlns:a16="http://schemas.microsoft.com/office/drawing/2014/main" id="{C9BE4798-7E13-47EE-A71A-A49BAD77DCD1}"/>
               </a:ext>
             </a:extLst>
           </p:cNvPr>
@@ -16505,7 +18821,7 @@
           <p:cNvPr id="3" name="texto-2">
             <a:extLst xmlns:a="http://schemas.openxmlformats.org/drawingml/2006/main">
               <a:ext uri="{FF2B5EF4-FFF2-40B4-BE49-F238E27FC236}">
-                <a16:creationId xmlns:a16="http://schemas.microsoft.com/office/drawing/2014/main" id="{222DFE86-BB9D-4480-978D-421B0D1BA1DA}"/>
+                <a16:creationId xmlns:a16="http://schemas.microsoft.com/office/drawing/2014/main" id="{57D5A59F-5C70-40A8-91FE-31CA24223E35}"/>
               </a:ext>
             </a:extLst>
           </p:cNvPr>
@@ -16664,7 +18980,7 @@
           <p:cNvPr id="4" name="">
             <a:extLst xmlns:a="http://schemas.openxmlformats.org/drawingml/2006/main">
               <a:ext uri="{FF2B5EF4-FFF2-40B4-BE49-F238E27FC236}">
-                <a16:creationId xmlns:a16="http://schemas.microsoft.com/office/drawing/2014/main" id="{992AF21F-BD4C-43D6-AB3D-93EBD4E6A1CF}"/>
+                <a16:creationId xmlns:a16="http://schemas.microsoft.com/office/drawing/2014/main" id="{F7171DCF-9C11-4FCC-8E40-C8559165EF55}"/>
               </a:ext>
             </a:extLst>
           </p:cNvPr>
@@ -17092,7 +19408,7 @@
                           <a:ea typeface="DejaVu Sans"/>
                           <a:cs typeface="DejaVu Sans"/>
                         </a:rPr>
-                        <a:t>Comparador único y operaciones de prioridad concentradas.</a:t>
+                        <a:t>GestorPrioridades centraliza cambios y retiros de la cola.</a:t>
                       </a:r>
                     </a:p>
                   </a:txBody>
@@ -17208,7 +19524,7 @@
           <p:cNvPr id="5" name="texto-3">
             <a:extLst xmlns:a="http://schemas.openxmlformats.org/drawingml/2006/main">
               <a:ext uri="{FF2B5EF4-FFF2-40B4-BE49-F238E27FC236}">
-                <a16:creationId xmlns:a16="http://schemas.microsoft.com/office/drawing/2014/main" id="{6FC682DF-63FA-41D0-AEF2-8F90A451348B}"/>
+                <a16:creationId xmlns:a16="http://schemas.microsoft.com/office/drawing/2014/main" id="{A3FCC5FB-F275-432E-9B77-490E0D25C587}"/>
               </a:ext>
             </a:extLst>
           </p:cNvPr>
@@ -17365,7 +19681,7 @@
     </p:spTree>
     <p:extLst>
       <p:ext uri="{BB962C8B-B14F-4D97-AF65-F5344CB8AC3E}">
-        <p14:creationId xmlns:p14="http://schemas.microsoft.com/office/powerpoint/2010/main" val="1667504492"/>
+        <p14:creationId xmlns:p14="http://schemas.microsoft.com/office/powerpoint/2010/main" val="1856715065"/>
       </p:ext>
     </p:extLst>
   </p:cSld>
@@ -17393,10 +19709,10 @@
       </p:grpSpPr>
       <p:sp>
         <p:nvSpPr>
-          <p:cNvPr id="9" name="texto-0">
+          <p:cNvPr id="8" name="texto-0">
             <a:extLst xmlns:a="http://schemas.openxmlformats.org/drawingml/2006/main">
               <a:ext uri="{FF2B5EF4-FFF2-40B4-BE49-F238E27FC236}">
-                <a16:creationId xmlns:a16="http://schemas.microsoft.com/office/drawing/2014/main" id="{BC165832-2FC1-4848-A9DF-BD07E7F09E4F}"/>
+                <a16:creationId xmlns:a16="http://schemas.microsoft.com/office/drawing/2014/main" id="{599C93E0-4278-4AAE-BCCD-E89A2B44DD22}"/>
               </a:ext>
             </a:extLst>
           </p:cNvPr>
@@ -17545,7 +19861,7 @@
                 <a:ea typeface="DejaVu Sans"/>
                 <a:cs typeface="DejaVu Sans"/>
               </a:rPr>
-              <a:t>Plan preliminar de implementación</a:t>
+              <a:t>Actividad prioritaria sin personal disponible</a:t>
             </a:r>
           </a:p>
         </p:txBody>
@@ -17555,7 +19871,7 @@
           <p:cNvPr id="2" name="texto-1">
             <a:extLst xmlns:a="http://schemas.openxmlformats.org/drawingml/2006/main">
               <a:ext uri="{FF2B5EF4-FFF2-40B4-BE49-F238E27FC236}">
-                <a16:creationId xmlns:a16="http://schemas.microsoft.com/office/drawing/2014/main" id="{5C260595-7020-4C72-8E9F-F940E12ED4B0}"/>
+                <a16:creationId xmlns:a16="http://schemas.microsoft.com/office/drawing/2014/main" id="{9699C51F-5ADA-4F62-9256-315471ECB8F4}"/>
               </a:ext>
             </a:extLst>
           </p:cNvPr>
@@ -17714,7 +20030,7 @@
           <p:cNvPr id="3" name="texto-2">
             <a:extLst xmlns:a="http://schemas.openxmlformats.org/drawingml/2006/main">
               <a:ext uri="{FF2B5EF4-FFF2-40B4-BE49-F238E27FC236}">
-                <a16:creationId xmlns:a16="http://schemas.microsoft.com/office/drawing/2014/main" id="{E162CA75-0093-4E07-B755-5171CAA61E69}"/>
+                <a16:creationId xmlns:a16="http://schemas.microsoft.com/office/drawing/2014/main" id="{9150017B-70AC-4F66-8E53-93A5C1FB8AA6}"/>
               </a:ext>
             </a:extLst>
           </p:cNvPr>
@@ -17868,12 +20184,171 @@
           </a:p>
         </p:txBody>
       </p:sp>
+      <p:sp>
+        <p:nvSpPr>
+          <p:cNvPr id="4" name="texto-3">
+            <a:extLst xmlns:a="http://schemas.openxmlformats.org/drawingml/2006/main">
+              <a:ext uri="{FF2B5EF4-FFF2-40B4-BE49-F238E27FC236}">
+                <a16:creationId xmlns:a16="http://schemas.microsoft.com/office/drawing/2014/main" id="{409DC136-A893-427F-932A-A881CE2ED687}"/>
+              </a:ext>
+            </a:extLst>
+          </p:cNvPr>
+          <p:cNvSpPr>
+            <a:spLocks xmlns:a="http://schemas.openxmlformats.org/drawingml/2006/main" noGrp="1"/>
+          </p:cNvSpPr>
+          <p:nvPr/>
+        </p:nvSpPr>
+        <p:spPr>
+          <a:xfrm xmlns:a="http://schemas.openxmlformats.org/drawingml/2006/main">
+            <a:off x="609600" y="1323975"/>
+            <a:ext cx="10972800" cy="381000"/>
+          </a:xfrm>
+          <a:prstGeom xmlns:a="http://schemas.openxmlformats.org/drawingml/2006/main" prst="rect">
+            <a:avLst/>
+          </a:prstGeom>
+          <a:noFill xmlns:a="http://schemas.openxmlformats.org/drawingml/2006/main"/>
+          <a:ln xmlns:a="http://schemas.openxmlformats.org/drawingml/2006/main" w="0">
+            <a:noFill/>
+            <a:prstDash val="solid"/>
+          </a:ln>
+        </p:spPr>
+        <p:txBody>
+          <a:bodyPr xmlns:a="http://schemas.openxmlformats.org/drawingml/2006/main" wrap="square" lIns="0" tIns="0" rIns="0" bIns="0" anchor="t">
+            <a:noAutofit/>
+          </a:bodyPr>
+          <a:lstStyle xmlns:a="http://schemas.openxmlformats.org/drawingml/2006/main">
+            <a:defPPr>
+              <a:defRPr sz="1950" b="0">
+                <a:solidFill>
+                  <a:srgbClr val="007D87"/>
+                </a:solidFill>
+                <a:latin typeface="DejaVu Sans"/>
+                <a:ea typeface="DejaVu Sans"/>
+                <a:cs typeface="DejaVu Sans"/>
+              </a:defRPr>
+            </a:defPPr>
+            <a:lvl1pPr>
+              <a:defRPr sz="1950" b="0">
+                <a:solidFill>
+                  <a:srgbClr val="007D87"/>
+                </a:solidFill>
+                <a:latin typeface="DejaVu Sans"/>
+                <a:ea typeface="DejaVu Sans"/>
+                <a:cs typeface="DejaVu Sans"/>
+              </a:defRPr>
+            </a:lvl1pPr>
+            <a:lvl2pPr>
+              <a:defRPr sz="1950" b="0">
+                <a:solidFill>
+                  <a:srgbClr val="007D87"/>
+                </a:solidFill>
+                <a:latin typeface="DejaVu Sans"/>
+                <a:ea typeface="DejaVu Sans"/>
+                <a:cs typeface="DejaVu Sans"/>
+              </a:defRPr>
+            </a:lvl2pPr>
+            <a:lvl3pPr>
+              <a:defRPr sz="1950" b="0">
+                <a:solidFill>
+                  <a:srgbClr val="007D87"/>
+                </a:solidFill>
+                <a:latin typeface="DejaVu Sans"/>
+                <a:ea typeface="DejaVu Sans"/>
+                <a:cs typeface="DejaVu Sans"/>
+              </a:defRPr>
+            </a:lvl3pPr>
+            <a:lvl4pPr>
+              <a:defRPr sz="1950" b="0">
+                <a:solidFill>
+                  <a:srgbClr val="007D87"/>
+                </a:solidFill>
+                <a:latin typeface="DejaVu Sans"/>
+                <a:ea typeface="DejaVu Sans"/>
+                <a:cs typeface="DejaVu Sans"/>
+              </a:defRPr>
+            </a:lvl4pPr>
+            <a:lvl5pPr>
+              <a:defRPr sz="1950" b="0">
+                <a:solidFill>
+                  <a:srgbClr val="007D87"/>
+                </a:solidFill>
+                <a:latin typeface="DejaVu Sans"/>
+                <a:ea typeface="DejaVu Sans"/>
+                <a:cs typeface="DejaVu Sans"/>
+              </a:defRPr>
+            </a:lvl5pPr>
+            <a:lvl6pPr>
+              <a:defRPr sz="1950" b="0">
+                <a:solidFill>
+                  <a:srgbClr val="007D87"/>
+                </a:solidFill>
+                <a:latin typeface="DejaVu Sans"/>
+                <a:ea typeface="DejaVu Sans"/>
+                <a:cs typeface="DejaVu Sans"/>
+              </a:defRPr>
+            </a:lvl6pPr>
+            <a:lvl7pPr>
+              <a:defRPr sz="1950" b="0">
+                <a:solidFill>
+                  <a:srgbClr val="007D87"/>
+                </a:solidFill>
+                <a:latin typeface="DejaVu Sans"/>
+                <a:ea typeface="DejaVu Sans"/>
+                <a:cs typeface="DejaVu Sans"/>
+              </a:defRPr>
+            </a:lvl7pPr>
+            <a:lvl8pPr>
+              <a:defRPr sz="1950" b="0">
+                <a:solidFill>
+                  <a:srgbClr val="007D87"/>
+                </a:solidFill>
+                <a:latin typeface="DejaVu Sans"/>
+                <a:ea typeface="DejaVu Sans"/>
+                <a:cs typeface="DejaVu Sans"/>
+              </a:defRPr>
+            </a:lvl8pPr>
+            <a:lvl9pPr>
+              <a:defRPr sz="1950" b="0">
+                <a:solidFill>
+                  <a:srgbClr val="007D87"/>
+                </a:solidFill>
+                <a:latin typeface="DejaVu Sans"/>
+                <a:ea typeface="DejaVu Sans"/>
+                <a:cs typeface="DejaVu Sans"/>
+              </a:defRPr>
+            </a:lvl9pPr>
+          </a:lstStyle>
+          <a:p xmlns:a="http://schemas.openxmlformats.org/drawingml/2006/main">
+            <a:pPr>
+              <a:defRPr sz="1950" b="0">
+                <a:solidFill>
+                  <a:srgbClr val="007D87"/>
+                </a:solidFill>
+                <a:latin typeface="DejaVu Sans"/>
+                <a:ea typeface="DejaVu Sans"/>
+                <a:cs typeface="DejaVu Sans"/>
+              </a:defRPr>
+            </a:pPr>
+            <a:r>
+              <a:rPr sz="1950" b="0">
+                <a:solidFill>
+                  <a:srgbClr val="007D87"/>
+                </a:solidFill>
+                <a:latin typeface="DejaVu Sans"/>
+                <a:ea typeface="DejaVu Sans"/>
+                <a:cs typeface="DejaVu Sans"/>
+              </a:rPr>
+              <a:t>Ejemplo ilustrativo del comportamiento propuesto</a:t>
+            </a:r>
+          </a:p>
+        </p:txBody>
+      </p:sp>
       <p:graphicFrame>
         <p:nvGraphicFramePr>
-          <p:cNvPr id="4" name="">
+          <p:cNvPr id="5" name="">
             <a:extLst xmlns:a="http://schemas.openxmlformats.org/drawingml/2006/main">
               <a:ext uri="{FF2B5EF4-FFF2-40B4-BE49-F238E27FC236}">
-                <a16:creationId xmlns:a16="http://schemas.microsoft.com/office/drawing/2014/main" id="{7B5133ED-757F-4AE3-8C4D-3C9B788E7967}"/>
+                <a16:creationId xmlns:a16="http://schemas.microsoft.com/office/drawing/2014/main" id="{A4907108-A91D-4FA3-8051-4D8BE89A7A7E}"/>
               </a:ext>
             </a:extLst>
           </p:cNvPr>
@@ -17881,18 +20356,19 @@
           <p:nvPr/>
         </p:nvGraphicFramePr>
         <p:xfrm>
-          <a:off xmlns:a="http://schemas.openxmlformats.org/drawingml/2006/main" x="609600" y="1381125"/>
-          <a:ext xmlns:a="http://schemas.openxmlformats.org/drawingml/2006/main" cx="10972800" cy="2571750"/>
+          <a:off xmlns:a="http://schemas.openxmlformats.org/drawingml/2006/main" x="609600" y="2000250"/>
+          <a:ext xmlns:a="http://schemas.openxmlformats.org/drawingml/2006/main" cx="10972800" cy="2333625"/>
         </p:xfrm>
         <a:graphic xmlns:a="http://schemas.openxmlformats.org/drawingml/2006/main">
           <a:graphicData uri="http://schemas.openxmlformats.org/drawingml/2006/table">
             <a:tbl>
               <a:tblPr/>
               <a:tblGrid>
-                <a:gridCol w="3524250"/>
-                <a:gridCol w="7448550"/>
+                <a:gridCol w="3048000"/>
+                <a:gridCol w="3333750"/>
+                <a:gridCol w="4591050"/>
               </a:tblGrid>
-              <a:tr h="642938">
+              <a:tr h="777875">
                 <a:tc>
                   <a:txBody>
                     <a:bodyPr wrap="square" lIns="123825" tIns="85725" rIns="123825" bIns="85725">
@@ -17909,7 +20385,7 @@
                           <a:ea typeface="DejaVu Sans"/>
                           <a:cs typeface="DejaVu Sans"/>
                         </a:rPr>
-                        <a:t>Integrante</a:t>
+                        <a:t>Actividad</a:t>
                       </a:r>
                     </a:p>
                   </a:txBody>
@@ -17959,7 +20435,51 @@
                           <a:ea typeface="DejaVu Sans"/>
                           <a:cs typeface="DejaVu Sans"/>
                         </a:rPr>
-                        <a:t>Módulos y componentes</a:t>
+                        <a:t>Disponibilidad</a:t>
+                      </a:r>
+                    </a:p>
+                  </a:txBody>
+                  <a:tcPr marL="91440" marR="91440" marT="45720" marB="45720" anchor="ctr">
+                    <a:lnR w="9525">
+                      <a:solidFill>
+                        <a:srgbClr val="B9CCD1"/>
+                      </a:solidFill>
+                      <a:prstDash val="solid"/>
+                    </a:lnR>
+                    <a:lnT w="9525">
+                      <a:solidFill>
+                        <a:srgbClr val="B9CCD1"/>
+                      </a:solidFill>
+                      <a:prstDash val="solid"/>
+                    </a:lnT>
+                    <a:lnB w="9525">
+                      <a:solidFill>
+                        <a:srgbClr val="B9CCD1"/>
+                      </a:solidFill>
+                      <a:prstDash val="solid"/>
+                    </a:lnB>
+                    <a:solidFill>
+                      <a:srgbClr val="163447"/>
+                    </a:solidFill>
+                  </a:tcPr>
+                </a:tc>
+                <a:tc>
+                  <a:txBody>
+                    <a:bodyPr wrap="square" lIns="123825" tIns="85725" rIns="123825" bIns="85725">
+                      <a:noAutofit/>
+                    </a:bodyPr>
+                    <a:lstStyle/>
+                    <a:p>
+                      <a:r>
+                        <a:rPr sz="1875" b="1">
+                          <a:solidFill>
+                            <a:srgbClr val="FFFFFF"/>
+                          </a:solidFill>
+                          <a:latin typeface="DejaVu Sans"/>
+                          <a:ea typeface="DejaVu Sans"/>
+                          <a:cs typeface="DejaVu Sans"/>
+                        </a:rPr>
+                        <a:t>Decisión</a:t>
                       </a:r>
                     </a:p>
                   </a:txBody>
@@ -17988,7 +20508,7 @@
                   </a:tcPr>
                 </a:tc>
               </a:tr>
-              <a:tr h="642938">
+              <a:tr h="777875">
                 <a:tc>
                   <a:txBody>
                     <a:bodyPr wrap="square" lIns="123825" tIns="85725" rIns="123825" bIns="85725">
@@ -18005,7 +20525,7 @@
                           <a:ea typeface="DejaVu Sans"/>
                           <a:cs typeface="DejaVu Sans"/>
                         </a:rPr>
-                        <a:t>Daniel Valarezo</a:t>
+                        <a:t>A01 · Alta · Gypsum</a:t>
                       </a:r>
                     </a:p>
                   </a:txBody>
@@ -18049,7 +20569,7 @@
                           <a:ea typeface="DejaVu Sans"/>
                           <a:cs typeface="DejaVu Sans"/>
                         </a:rPr>
-                        <a:t>Obras y Seguimiento. Problema y documentación.</a:t>
+                        <a:t>Especialistas ocupados</a:t>
                       </a:r>
                     </a:p>
                   </a:txBody>
@@ -18071,8 +20591,6 @@
                     </a:solidFill>
                   </a:tcPr>
                 </a:tc>
-              </a:tr>
-              <a:tr h="642938">
                 <a:tc>
                   <a:txBody>
                     <a:bodyPr wrap="square" lIns="123825" tIns="85725" rIns="123825" bIns="85725">
@@ -18089,7 +20607,47 @@
                           <a:ea typeface="DejaVu Sans"/>
                           <a:cs typeface="DejaVu Sans"/>
                         </a:rPr>
-                        <a:t>Esteban Figueroa</a:t>
+                        <a:t>Permanece pendiente y conserva su prioridad.</a:t>
+                      </a:r>
+                    </a:p>
+                  </a:txBody>
+                  <a:tcPr marL="91440" marR="91440" marT="45720" marB="45720" anchor="ctr">
+                    <a:lnR w="9525">
+                      <a:solidFill>
+                        <a:srgbClr val="B9CCD1"/>
+                      </a:solidFill>
+                      <a:prstDash val="solid"/>
+                    </a:lnR>
+                    <a:lnB w="9525">
+                      <a:solidFill>
+                        <a:srgbClr val="B9CCD1"/>
+                      </a:solidFill>
+                      <a:prstDash val="solid"/>
+                    </a:lnB>
+                    <a:solidFill>
+                      <a:srgbClr val="FFFFFF"/>
+                    </a:solidFill>
+                  </a:tcPr>
+                </a:tc>
+              </a:tr>
+              <a:tr h="777875">
+                <a:tc>
+                  <a:txBody>
+                    <a:bodyPr wrap="square" lIns="123825" tIns="85725" rIns="123825" bIns="85725">
+                      <a:noAutofit/>
+                    </a:bodyPr>
+                    <a:lstStyle/>
+                    <a:p>
+                      <a:r>
+                        <a:rPr sz="1875" b="0">
+                          <a:solidFill>
+                            <a:srgbClr val="163447"/>
+                          </a:solidFill>
+                          <a:latin typeface="DejaVu Sans"/>
+                          <a:ea typeface="DejaVu Sans"/>
+                          <a:cs typeface="DejaVu Sans"/>
+                        </a:rPr>
+                        <a:t>A02 · Media · Pintura</a:t>
                       </a:r>
                     </a:p>
                   </a:txBody>
@@ -18133,7 +20691,7 @@
                           <a:ea typeface="DejaVu Sans"/>
                           <a:cs typeface="DejaVu Sans"/>
                         </a:rPr>
-                        <a:t>Trabajadores y Asignación. Disponibilidad y horarios.</a:t>
+                        <a:t>Pintor compatible y libre</a:t>
                       </a:r>
                     </a:p>
                   </a:txBody>
@@ -18152,52 +20710,6 @@
                     </a:lnB>
                     <a:solidFill>
                       <a:srgbClr val="EDF4F5"/>
-                    </a:solidFill>
-                  </a:tcPr>
-                </a:tc>
-              </a:tr>
-              <a:tr h="642938">
-                <a:tc>
-                  <a:txBody>
-                    <a:bodyPr wrap="square" lIns="123825" tIns="85725" rIns="123825" bIns="85725">
-                      <a:noAutofit/>
-                    </a:bodyPr>
-                    <a:lstStyle/>
-                    <a:p>
-                      <a:r>
-                        <a:rPr sz="1875" b="0">
-                          <a:solidFill>
-                            <a:srgbClr val="163447"/>
-                          </a:solidFill>
-                          <a:latin typeface="DejaVu Sans"/>
-                          <a:ea typeface="DejaVu Sans"/>
-                          <a:cs typeface="DejaVu Sans"/>
-                        </a:rPr>
-                        <a:t>Julián Jiménez</a:t>
-                      </a:r>
-                    </a:p>
-                  </a:txBody>
-                  <a:tcPr marL="91440" marR="91440" marT="45720" marB="45720" anchor="ctr">
-                    <a:lnL w="9525">
-                      <a:solidFill>
-                        <a:srgbClr val="B9CCD1"/>
-                      </a:solidFill>
-                      <a:prstDash val="solid"/>
-                    </a:lnL>
-                    <a:lnR w="9525">
-                      <a:solidFill>
-                        <a:srgbClr val="B9CCD1"/>
-                      </a:solidFill>
-                      <a:prstDash val="solid"/>
-                    </a:lnR>
-                    <a:lnB w="9525">
-                      <a:solidFill>
-                        <a:srgbClr val="B9CCD1"/>
-                      </a:solidFill>
-                      <a:prstDash val="solid"/>
-                    </a:lnB>
-                    <a:solidFill>
-                      <a:srgbClr val="FFFFFF"/>
                     </a:solidFill>
                   </a:tcPr>
                 </a:tc>
@@ -18217,7 +20729,7 @@
                           <a:ea typeface="DejaVu Sans"/>
                           <a:cs typeface="DejaVu Sans"/>
                         </a:rPr>
-                        <a:t>Actividades y prioridades. Comparador, cola y UML.</a:t>
+                        <a:t>El supervisor puede elegirla y confirmar después de validar.</a:t>
                       </a:r>
                     </a:p>
                   </a:txBody>
@@ -18235,7 +20747,7 @@
                       <a:prstDash val="solid"/>
                     </a:lnB>
                     <a:solidFill>
-                      <a:srgbClr val="FFFFFF"/>
+                      <a:srgbClr val="EDF4F5"/>
                     </a:solidFill>
                   </a:tcPr>
                 </a:tc>
@@ -18246,10 +20758,10 @@
       </p:graphicFrame>
       <p:sp>
         <p:nvSpPr>
-          <p:cNvPr id="5" name="texto-3">
+          <p:cNvPr id="6" name="texto-4">
             <a:extLst xmlns:a="http://schemas.openxmlformats.org/drawingml/2006/main">
               <a:ext uri="{FF2B5EF4-FFF2-40B4-BE49-F238E27FC236}">
-                <a16:creationId xmlns:a16="http://schemas.microsoft.com/office/drawing/2014/main" id="{A2BA0681-9E32-4AD3-A153-4B9AEFE8B92F}"/>
+                <a16:creationId xmlns:a16="http://schemas.microsoft.com/office/drawing/2014/main" id="{D6B7CFC5-BA8A-4DBB-9E62-2284CEFF3401}"/>
               </a:ext>
             </a:extLst>
           </p:cNvPr>
@@ -18260,8 +20772,8 @@
         </p:nvSpPr>
         <p:spPr>
           <a:xfrm xmlns:a="http://schemas.openxmlformats.org/drawingml/2006/main">
-            <a:off x="609600" y="4333875"/>
-            <a:ext cx="2571750" cy="400050"/>
+            <a:off x="609600" y="4714875"/>
+            <a:ext cx="10972800" cy="409575"/>
           </a:xfrm>
           <a:prstGeom xmlns:a="http://schemas.openxmlformats.org/drawingml/2006/main" prst="rect">
             <a:avLst/>
@@ -18278,7 +20790,7 @@
           </a:bodyPr>
           <a:lstStyle xmlns:a="http://schemas.openxmlformats.org/drawingml/2006/main">
             <a:defPPr>
-              <a:defRPr sz="2100" b="1">
+              <a:defRPr sz="2250" b="1">
                 <a:solidFill>
                   <a:srgbClr val="007D87"/>
                 </a:solidFill>
@@ -18288,7 +20800,7 @@
               </a:defRPr>
             </a:defPPr>
             <a:lvl1pPr>
-              <a:defRPr sz="2100" b="1">
+              <a:defRPr sz="2250" b="1">
                 <a:solidFill>
                   <a:srgbClr val="007D87"/>
                 </a:solidFill>
@@ -18298,7 +20810,7 @@
               </a:defRPr>
             </a:lvl1pPr>
             <a:lvl2pPr>
-              <a:defRPr sz="2100" b="1">
+              <a:defRPr sz="2250" b="1">
                 <a:solidFill>
                   <a:srgbClr val="007D87"/>
                 </a:solidFill>
@@ -18308,7 +20820,7 @@
               </a:defRPr>
             </a:lvl2pPr>
             <a:lvl3pPr>
-              <a:defRPr sz="2100" b="1">
+              <a:defRPr sz="2250" b="1">
                 <a:solidFill>
                   <a:srgbClr val="007D87"/>
                 </a:solidFill>
@@ -18318,7 +20830,7 @@
               </a:defRPr>
             </a:lvl3pPr>
             <a:lvl4pPr>
-              <a:defRPr sz="2100" b="1">
+              <a:defRPr sz="2250" b="1">
                 <a:solidFill>
                   <a:srgbClr val="007D87"/>
                 </a:solidFill>
@@ -18328,7 +20840,7 @@
               </a:defRPr>
             </a:lvl4pPr>
             <a:lvl5pPr>
-              <a:defRPr sz="2100" b="1">
+              <a:defRPr sz="2250" b="1">
                 <a:solidFill>
                   <a:srgbClr val="007D87"/>
                 </a:solidFill>
@@ -18338,7 +20850,7 @@
               </a:defRPr>
             </a:lvl5pPr>
             <a:lvl6pPr>
-              <a:defRPr sz="2100" b="1">
+              <a:defRPr sz="2250" b="1">
                 <a:solidFill>
                   <a:srgbClr val="007D87"/>
                 </a:solidFill>
@@ -18348,7 +20860,7 @@
               </a:defRPr>
             </a:lvl6pPr>
             <a:lvl7pPr>
-              <a:defRPr sz="2100" b="1">
+              <a:defRPr sz="2250" b="1">
                 <a:solidFill>
                   <a:srgbClr val="007D87"/>
                 </a:solidFill>
@@ -18358,7 +20870,7 @@
               </a:defRPr>
             </a:lvl7pPr>
             <a:lvl8pPr>
-              <a:defRPr sz="2100" b="1">
+              <a:defRPr sz="2250" b="1">
                 <a:solidFill>
                   <a:srgbClr val="007D87"/>
                 </a:solidFill>
@@ -18368,7 +20880,7 @@
               </a:defRPr>
             </a:lvl8pPr>
             <a:lvl9pPr>
-              <a:defRPr sz="2100" b="1">
+              <a:defRPr sz="2250" b="1">
                 <a:solidFill>
                   <a:srgbClr val="007D87"/>
                 </a:solidFill>
@@ -18380,7 +20892,7 @@
           </a:lstStyle>
           <a:p xmlns:a="http://schemas.openxmlformats.org/drawingml/2006/main">
             <a:pPr>
-              <a:defRPr sz="2100" b="1">
+              <a:defRPr sz="2250" b="1">
                 <a:solidFill>
                   <a:srgbClr val="007D87"/>
                 </a:solidFill>
@@ -18390,7 +20902,7 @@
               </a:defRPr>
             </a:pPr>
             <a:r>
-              <a:rPr sz="2100" b="1">
+              <a:rPr sz="2250" b="1">
                 <a:solidFill>
                   <a:srgbClr val="007D87"/>
                 </a:solidFill>
@@ -18398,17 +20910,17 @@
                 <a:ea typeface="DejaVu Sans"/>
                 <a:cs typeface="DejaVu Sans"/>
               </a:rPr>
-              <a:t>Repositorio</a:t>
+              <a:t>Consultar alternativas no elimina tareas</a:t>
             </a:r>
           </a:p>
         </p:txBody>
       </p:sp>
       <p:sp>
         <p:nvSpPr>
-          <p:cNvPr id="6" name="texto-4">
+          <p:cNvPr id="7" name="texto-5">
             <a:extLst xmlns:a="http://schemas.openxmlformats.org/drawingml/2006/main">
               <a:ext uri="{FF2B5EF4-FFF2-40B4-BE49-F238E27FC236}">
-                <a16:creationId xmlns:a16="http://schemas.microsoft.com/office/drawing/2014/main" id="{8F6C6CA0-BDC9-4988-9135-B11C3B1522D3}"/>
+                <a16:creationId xmlns:a16="http://schemas.microsoft.com/office/drawing/2014/main" id="{CA1BFABE-5A85-40C4-89CF-B0222AE7D66D}"/>
               </a:ext>
             </a:extLst>
           </p:cNvPr>
@@ -18419,8 +20931,8 @@
         </p:nvSpPr>
         <p:spPr>
           <a:xfrm xmlns:a="http://schemas.openxmlformats.org/drawingml/2006/main">
-            <a:off x="3476625" y="4333875"/>
-            <a:ext cx="8048625" cy="723900"/>
+            <a:off x="609600" y="5286375"/>
+            <a:ext cx="10972800" cy="828675"/>
           </a:xfrm>
           <a:prstGeom xmlns:a="http://schemas.openxmlformats.org/drawingml/2006/main" prst="rect">
             <a:avLst/>
@@ -18437,7 +20949,7 @@
           </a:bodyPr>
           <a:lstStyle xmlns:a="http://schemas.openxmlformats.org/drawingml/2006/main">
             <a:defPPr>
-              <a:defRPr sz="1950" b="0">
+              <a:defRPr sz="2025" b="0">
                 <a:solidFill>
                   <a:srgbClr val="163447"/>
                 </a:solidFill>
@@ -18447,7 +20959,7 @@
               </a:defRPr>
             </a:defPPr>
             <a:lvl1pPr>
-              <a:defRPr sz="1950" b="0">
+              <a:defRPr sz="2025" b="0">
                 <a:solidFill>
                   <a:srgbClr val="163447"/>
                 </a:solidFill>
@@ -18457,7 +20969,7 @@
               </a:defRPr>
             </a:lvl1pPr>
             <a:lvl2pPr>
-              <a:defRPr sz="1950" b="0">
+              <a:defRPr sz="2025" b="0">
                 <a:solidFill>
                   <a:srgbClr val="163447"/>
                 </a:solidFill>
@@ -18467,7 +20979,7 @@
               </a:defRPr>
             </a:lvl2pPr>
             <a:lvl3pPr>
-              <a:defRPr sz="1950" b="0">
+              <a:defRPr sz="2025" b="0">
                 <a:solidFill>
                   <a:srgbClr val="163447"/>
                 </a:solidFill>
@@ -18477,7 +20989,7 @@
               </a:defRPr>
             </a:lvl3pPr>
             <a:lvl4pPr>
-              <a:defRPr sz="1950" b="0">
+              <a:defRPr sz="2025" b="0">
                 <a:solidFill>
                   <a:srgbClr val="163447"/>
                 </a:solidFill>
@@ -18487,7 +20999,7 @@
               </a:defRPr>
             </a:lvl4pPr>
             <a:lvl5pPr>
-              <a:defRPr sz="1950" b="0">
+              <a:defRPr sz="2025" b="0">
                 <a:solidFill>
                   <a:srgbClr val="163447"/>
                 </a:solidFill>
@@ -18497,7 +21009,7 @@
               </a:defRPr>
             </a:lvl5pPr>
             <a:lvl6pPr>
-              <a:defRPr sz="1950" b="0">
+              <a:defRPr sz="2025" b="0">
                 <a:solidFill>
                   <a:srgbClr val="163447"/>
                 </a:solidFill>
@@ -18507,7 +21019,7 @@
               </a:defRPr>
             </a:lvl6pPr>
             <a:lvl7pPr>
-              <a:defRPr sz="1950" b="0">
+              <a:defRPr sz="2025" b="0">
                 <a:solidFill>
                   <a:srgbClr val="163447"/>
                 </a:solidFill>
@@ -18517,7 +21029,7 @@
               </a:defRPr>
             </a:lvl7pPr>
             <a:lvl8pPr>
-              <a:defRPr sz="1950" b="0">
+              <a:defRPr sz="2025" b="0">
                 <a:solidFill>
                   <a:srgbClr val="163447"/>
                 </a:solidFill>
@@ -18527,7 +21039,7 @@
               </a:defRPr>
             </a:lvl8pPr>
             <a:lvl9pPr>
-              <a:defRPr sz="1950" b="0">
+              <a:defRPr sz="2025" b="0">
                 <a:solidFill>
                   <a:srgbClr val="163447"/>
                 </a:solidFill>
@@ -18539,7 +21051,7 @@
           </a:lstStyle>
           <a:p xmlns:a="http://schemas.openxmlformats.org/drawingml/2006/main">
             <a:pPr>
-              <a:defRPr sz="1950" b="0">
+              <a:defRPr sz="2025" b="0">
                 <a:solidFill>
                   <a:srgbClr val="163447"/>
                 </a:solidFill>
@@ -18549,7 +21061,7 @@
               </a:defRPr>
             </a:pPr>
             <a:r>
-              <a:rPr sz="1950" b="0">
+              <a:rPr sz="2025" b="0">
                 <a:solidFill>
                   <a:srgbClr val="163447"/>
                 </a:solidFill>
@@ -18557,371 +21069,7 @@
                 <a:ea typeface="DejaVu Sans"/>
                 <a:cs typeface="DejaVu Sans"/>
               </a:rPr>
-              <a:t>README.md y docs: informe, presentación, UML y observaciones docentes.</a:t>
-            </a:r>
-          </a:p>
-        </p:txBody>
-      </p:sp>
-      <p:sp>
-        <p:nvSpPr>
-          <p:cNvPr id="7" name="texto-5">
-            <a:extLst xmlns:a="http://schemas.openxmlformats.org/drawingml/2006/main">
-              <a:ext uri="{FF2B5EF4-FFF2-40B4-BE49-F238E27FC236}">
-                <a16:creationId xmlns:a16="http://schemas.microsoft.com/office/drawing/2014/main" id="{8A78EBD3-4A6A-4413-9BFD-DE68C9A24004}"/>
-              </a:ext>
-            </a:extLst>
-          </p:cNvPr>
-          <p:cNvSpPr>
-            <a:spLocks xmlns:a="http://schemas.openxmlformats.org/drawingml/2006/main" noGrp="1"/>
-          </p:cNvSpPr>
-          <p:nvPr/>
-        </p:nvSpPr>
-        <p:spPr>
-          <a:xfrm xmlns:a="http://schemas.openxmlformats.org/drawingml/2006/main">
-            <a:off x="609600" y="5238750"/>
-            <a:ext cx="2571750" cy="666750"/>
-          </a:xfrm>
-          <a:prstGeom xmlns:a="http://schemas.openxmlformats.org/drawingml/2006/main" prst="rect">
-            <a:avLst/>
-          </a:prstGeom>
-          <a:noFill xmlns:a="http://schemas.openxmlformats.org/drawingml/2006/main"/>
-          <a:ln xmlns:a="http://schemas.openxmlformats.org/drawingml/2006/main" w="0">
-            <a:noFill/>
-            <a:prstDash val="solid"/>
-          </a:ln>
-        </p:spPr>
-        <p:txBody>
-          <a:bodyPr xmlns:a="http://schemas.openxmlformats.org/drawingml/2006/main" wrap="square" lIns="0" tIns="0" rIns="0" bIns="0" anchor="t">
-            <a:noAutofit/>
-          </a:bodyPr>
-          <a:lstStyle xmlns:a="http://schemas.openxmlformats.org/drawingml/2006/main">
-            <a:defPPr>
-              <a:defRPr sz="2100" b="1">
-                <a:solidFill>
-                  <a:srgbClr val="007D87"/>
-                </a:solidFill>
-                <a:latin typeface="DejaVu Sans"/>
-                <a:ea typeface="DejaVu Sans"/>
-                <a:cs typeface="DejaVu Sans"/>
-              </a:defRPr>
-            </a:defPPr>
-            <a:lvl1pPr>
-              <a:defRPr sz="2100" b="1">
-                <a:solidFill>
-                  <a:srgbClr val="007D87"/>
-                </a:solidFill>
-                <a:latin typeface="DejaVu Sans"/>
-                <a:ea typeface="DejaVu Sans"/>
-                <a:cs typeface="DejaVu Sans"/>
-              </a:defRPr>
-            </a:lvl1pPr>
-            <a:lvl2pPr>
-              <a:defRPr sz="2100" b="1">
-                <a:solidFill>
-                  <a:srgbClr val="007D87"/>
-                </a:solidFill>
-                <a:latin typeface="DejaVu Sans"/>
-                <a:ea typeface="DejaVu Sans"/>
-                <a:cs typeface="DejaVu Sans"/>
-              </a:defRPr>
-            </a:lvl2pPr>
-            <a:lvl3pPr>
-              <a:defRPr sz="2100" b="1">
-                <a:solidFill>
-                  <a:srgbClr val="007D87"/>
-                </a:solidFill>
-                <a:latin typeface="DejaVu Sans"/>
-                <a:ea typeface="DejaVu Sans"/>
-                <a:cs typeface="DejaVu Sans"/>
-              </a:defRPr>
-            </a:lvl3pPr>
-            <a:lvl4pPr>
-              <a:defRPr sz="2100" b="1">
-                <a:solidFill>
-                  <a:srgbClr val="007D87"/>
-                </a:solidFill>
-                <a:latin typeface="DejaVu Sans"/>
-                <a:ea typeface="DejaVu Sans"/>
-                <a:cs typeface="DejaVu Sans"/>
-              </a:defRPr>
-            </a:lvl4pPr>
-            <a:lvl5pPr>
-              <a:defRPr sz="2100" b="1">
-                <a:solidFill>
-                  <a:srgbClr val="007D87"/>
-                </a:solidFill>
-                <a:latin typeface="DejaVu Sans"/>
-                <a:ea typeface="DejaVu Sans"/>
-                <a:cs typeface="DejaVu Sans"/>
-              </a:defRPr>
-            </a:lvl5pPr>
-            <a:lvl6pPr>
-              <a:defRPr sz="2100" b="1">
-                <a:solidFill>
-                  <a:srgbClr val="007D87"/>
-                </a:solidFill>
-                <a:latin typeface="DejaVu Sans"/>
-                <a:ea typeface="DejaVu Sans"/>
-                <a:cs typeface="DejaVu Sans"/>
-              </a:defRPr>
-            </a:lvl6pPr>
-            <a:lvl7pPr>
-              <a:defRPr sz="2100" b="1">
-                <a:solidFill>
-                  <a:srgbClr val="007D87"/>
-                </a:solidFill>
-                <a:latin typeface="DejaVu Sans"/>
-                <a:ea typeface="DejaVu Sans"/>
-                <a:cs typeface="DejaVu Sans"/>
-              </a:defRPr>
-            </a:lvl7pPr>
-            <a:lvl8pPr>
-              <a:defRPr sz="2100" b="1">
-                <a:solidFill>
-                  <a:srgbClr val="007D87"/>
-                </a:solidFill>
-                <a:latin typeface="DejaVu Sans"/>
-                <a:ea typeface="DejaVu Sans"/>
-                <a:cs typeface="DejaVu Sans"/>
-              </a:defRPr>
-            </a:lvl8pPr>
-            <a:lvl9pPr>
-              <a:defRPr sz="2100" b="1">
-                <a:solidFill>
-                  <a:srgbClr val="007D87"/>
-                </a:solidFill>
-                <a:latin typeface="DejaVu Sans"/>
-                <a:ea typeface="DejaVu Sans"/>
-                <a:cs typeface="DejaVu Sans"/>
-              </a:defRPr>
-            </a:lvl9pPr>
-          </a:lstStyle>
-          <a:p xmlns:a="http://schemas.openxmlformats.org/drawingml/2006/main">
-            <a:pPr>
-              <a:defRPr sz="2100" b="1">
-                <a:solidFill>
-                  <a:srgbClr val="007D87"/>
-                </a:solidFill>
-                <a:latin typeface="DejaVu Sans"/>
-                <a:ea typeface="DejaVu Sans"/>
-                <a:cs typeface="DejaVu Sans"/>
-              </a:defRPr>
-            </a:pPr>
-            <a:r>
-              <a:rPr sz="2100" b="1">
-                <a:solidFill>
-                  <a:srgbClr val="007D87"/>
-                </a:solidFill>
-                <a:latin typeface="DejaVu Sans"/>
-                <a:ea typeface="DejaVu Sans"/>
-                <a:cs typeface="DejaVu Sans"/>
-              </a:rPr>
-              <a:t>Riesgos y mitigación</a:t>
-            </a:r>
-          </a:p>
-        </p:txBody>
-      </p:sp>
-      <p:sp>
-        <p:nvSpPr>
-          <p:cNvPr id="8" name="texto-6">
-            <a:extLst xmlns:a="http://schemas.openxmlformats.org/drawingml/2006/main">
-              <a:ext uri="{FF2B5EF4-FFF2-40B4-BE49-F238E27FC236}">
-                <a16:creationId xmlns:a16="http://schemas.microsoft.com/office/drawing/2014/main" id="{72D5BFFC-5D93-4F00-A79E-67FC010B2091}"/>
-              </a:ext>
-            </a:extLst>
-          </p:cNvPr>
-          <p:cNvSpPr>
-            <a:spLocks xmlns:a="http://schemas.openxmlformats.org/drawingml/2006/main" noGrp="1"/>
-          </p:cNvSpPr>
-          <p:nvPr/>
-        </p:nvSpPr>
-        <p:spPr>
-          <a:xfrm xmlns:a="http://schemas.openxmlformats.org/drawingml/2006/main">
-            <a:off x="3476625" y="5238750"/>
-            <a:ext cx="8048625" cy="952500"/>
-          </a:xfrm>
-          <a:prstGeom xmlns:a="http://schemas.openxmlformats.org/drawingml/2006/main" prst="rect">
-            <a:avLst/>
-          </a:prstGeom>
-          <a:noFill xmlns:a="http://schemas.openxmlformats.org/drawingml/2006/main"/>
-          <a:ln xmlns:a="http://schemas.openxmlformats.org/drawingml/2006/main" w="0">
-            <a:noFill/>
-            <a:prstDash val="solid"/>
-          </a:ln>
-        </p:spPr>
-        <p:txBody>
-          <a:bodyPr xmlns:a="http://schemas.openxmlformats.org/drawingml/2006/main" wrap="square" lIns="0" tIns="0" rIns="0" bIns="0" anchor="t">
-            <a:noAutofit/>
-          </a:bodyPr>
-          <a:lstStyle xmlns:a="http://schemas.openxmlformats.org/drawingml/2006/main">
-            <a:defPPr>
-              <a:defRPr sz="1875" b="0">
-                <a:solidFill>
-                  <a:srgbClr val="163447"/>
-                </a:solidFill>
-                <a:latin typeface="DejaVu Sans"/>
-                <a:ea typeface="DejaVu Sans"/>
-                <a:cs typeface="DejaVu Sans"/>
-              </a:defRPr>
-            </a:defPPr>
-            <a:lvl1pPr>
-              <a:defRPr sz="1875" b="0">
-                <a:solidFill>
-                  <a:srgbClr val="163447"/>
-                </a:solidFill>
-                <a:latin typeface="DejaVu Sans"/>
-                <a:ea typeface="DejaVu Sans"/>
-                <a:cs typeface="DejaVu Sans"/>
-              </a:defRPr>
-            </a:lvl1pPr>
-            <a:lvl2pPr>
-              <a:defRPr sz="1875" b="0">
-                <a:solidFill>
-                  <a:srgbClr val="163447"/>
-                </a:solidFill>
-                <a:latin typeface="DejaVu Sans"/>
-                <a:ea typeface="DejaVu Sans"/>
-                <a:cs typeface="DejaVu Sans"/>
-              </a:defRPr>
-            </a:lvl2pPr>
-            <a:lvl3pPr>
-              <a:defRPr sz="1875" b="0">
-                <a:solidFill>
-                  <a:srgbClr val="163447"/>
-                </a:solidFill>
-                <a:latin typeface="DejaVu Sans"/>
-                <a:ea typeface="DejaVu Sans"/>
-                <a:cs typeface="DejaVu Sans"/>
-              </a:defRPr>
-            </a:lvl3pPr>
-            <a:lvl4pPr>
-              <a:defRPr sz="1875" b="0">
-                <a:solidFill>
-                  <a:srgbClr val="163447"/>
-                </a:solidFill>
-                <a:latin typeface="DejaVu Sans"/>
-                <a:ea typeface="DejaVu Sans"/>
-                <a:cs typeface="DejaVu Sans"/>
-              </a:defRPr>
-            </a:lvl4pPr>
-            <a:lvl5pPr>
-              <a:defRPr sz="1875" b="0">
-                <a:solidFill>
-                  <a:srgbClr val="163447"/>
-                </a:solidFill>
-                <a:latin typeface="DejaVu Sans"/>
-                <a:ea typeface="DejaVu Sans"/>
-                <a:cs typeface="DejaVu Sans"/>
-              </a:defRPr>
-            </a:lvl5pPr>
-            <a:lvl6pPr>
-              <a:defRPr sz="1875" b="0">
-                <a:solidFill>
-                  <a:srgbClr val="163447"/>
-                </a:solidFill>
-                <a:latin typeface="DejaVu Sans"/>
-                <a:ea typeface="DejaVu Sans"/>
-                <a:cs typeface="DejaVu Sans"/>
-              </a:defRPr>
-            </a:lvl6pPr>
-            <a:lvl7pPr>
-              <a:defRPr sz="1875" b="0">
-                <a:solidFill>
-                  <a:srgbClr val="163447"/>
-                </a:solidFill>
-                <a:latin typeface="DejaVu Sans"/>
-                <a:ea typeface="DejaVu Sans"/>
-                <a:cs typeface="DejaVu Sans"/>
-              </a:defRPr>
-            </a:lvl7pPr>
-            <a:lvl8pPr>
-              <a:defRPr sz="1875" b="0">
-                <a:solidFill>
-                  <a:srgbClr val="163447"/>
-                </a:solidFill>
-                <a:latin typeface="DejaVu Sans"/>
-                <a:ea typeface="DejaVu Sans"/>
-                <a:cs typeface="DejaVu Sans"/>
-              </a:defRPr>
-            </a:lvl8pPr>
-            <a:lvl9pPr>
-              <a:defRPr sz="1875" b="0">
-                <a:solidFill>
-                  <a:srgbClr val="163447"/>
-                </a:solidFill>
-                <a:latin typeface="DejaVu Sans"/>
-                <a:ea typeface="DejaVu Sans"/>
-                <a:cs typeface="DejaVu Sans"/>
-              </a:defRPr>
-            </a:lvl9pPr>
-          </a:lstStyle>
-          <a:p xmlns:a="http://schemas.openxmlformats.org/drawingml/2006/main">
-            <a:pPr>
-              <a:defRPr sz="1875" b="0">
-                <a:solidFill>
-                  <a:srgbClr val="163447"/>
-                </a:solidFill>
-                <a:latin typeface="DejaVu Sans"/>
-                <a:ea typeface="DejaVu Sans"/>
-                <a:cs typeface="DejaVu Sans"/>
-              </a:defRPr>
-            </a:pPr>
-            <a:r>
-              <a:rPr sz="1875" b="0">
-                <a:solidFill>
-                  <a:srgbClr val="163447"/>
-                </a:solidFill>
-                <a:latin typeface="DejaVu Sans"/>
-                <a:ea typeface="DejaVu Sans"/>
-                <a:cs typeface="DejaVu Sans"/>
-              </a:rPr>
-              <a:t>Cruces: validar horarios. Empates: comparador único.</a:t>
-            </a:r>
-          </a:p>
-          <a:p xmlns:a="http://schemas.openxmlformats.org/drawingml/2006/main">
-            <a:pPr>
-              <a:defRPr sz="1875" b="0">
-                <a:solidFill>
-                  <a:srgbClr val="163447"/>
-                </a:solidFill>
-                <a:latin typeface="DejaVu Sans"/>
-                <a:ea typeface="DejaVu Sans"/>
-                <a:cs typeface="DejaVu Sans"/>
-              </a:defRPr>
-            </a:pPr>
-            <a:r>
-              <a:rPr sz="1875" b="0">
-                <a:solidFill>
-                  <a:srgbClr val="163447"/>
-                </a:solidFill>
-                <a:latin typeface="DejaVu Sans"/>
-                <a:ea typeface="DejaVu Sans"/>
-                <a:cs typeface="DejaVu Sans"/>
-              </a:rPr>
-              <a:t>Cola desactualizada: retirar y reinsertar.</a:t>
-            </a:r>
-          </a:p>
-          <a:p xmlns:a="http://schemas.openxmlformats.org/drawingml/2006/main">
-            <a:pPr>
-              <a:defRPr sz="1875" b="0">
-                <a:solidFill>
-                  <a:srgbClr val="163447"/>
-                </a:solidFill>
-                <a:latin typeface="DejaVu Sans"/>
-                <a:ea typeface="DejaVu Sans"/>
-                <a:cs typeface="DejaVu Sans"/>
-              </a:defRPr>
-            </a:pPr>
-            <a:r>
-              <a:rPr sz="1875" b="0">
-                <a:solidFill>
-                  <a:srgbClr val="163447"/>
-                </a:solidFill>
-                <a:latin typeface="DejaVu Sans"/>
-                <a:ea typeface="DejaVu Sans"/>
-                <a:cs typeface="DejaVu Sans"/>
-              </a:rPr>
-              <a:t>Datos incorrectos: validar códigos y rangos.</a:t>
+              <a:t>La lista se genera sobre una copia. Al confirmar A02, se retira solo A02 con remove(objeto), O(q). A01 sigue en la cabecera.</a:t>
             </a:r>
           </a:p>
         </p:txBody>
@@ -18929,7 +21077,7 @@
     </p:spTree>
     <p:extLst>
       <p:ext uri="{BB962C8B-B14F-4D97-AF65-F5344CB8AC3E}">
-        <p14:creationId xmlns:p14="http://schemas.microsoft.com/office/powerpoint/2010/main" val="672598729"/>
+        <p14:creationId xmlns:p14="http://schemas.microsoft.com/office/powerpoint/2010/main" val="193147850"/>
       </p:ext>
     </p:extLst>
   </p:cSld>
